--- a/docs/pptx/auc3/jx-auc3-linsubhr-ratio-hosp5.pptx
+++ b/docs/pptx/auc3/jx-auc3-linsubhr-ratio-hosp5.pptx
@@ -2271,7 +2271,7 @@
           </p:nvSpPr>
           <p:spPr>
             <a:xfrm>
-              <a:off x="817517" y="5114368"/>
+              <a:off x="817517" y="5142518"/>
               <a:ext cx="7799693" cy="0"/>
             </a:xfrm>
             <a:custGeom>
@@ -2314,7 +2314,7 @@
           </p:nvSpPr>
           <p:spPr>
             <a:xfrm>
-              <a:off x="817517" y="4244691"/>
+              <a:off x="817517" y="4313054"/>
               <a:ext cx="7799693" cy="0"/>
             </a:xfrm>
             <a:custGeom>
@@ -2357,7 +2357,7 @@
           </p:nvSpPr>
           <p:spPr>
             <a:xfrm>
-              <a:off x="817517" y="3375014"/>
+              <a:off x="817517" y="3483591"/>
               <a:ext cx="7799693" cy="0"/>
             </a:xfrm>
             <a:custGeom>
@@ -2400,7 +2400,7 @@
           </p:nvSpPr>
           <p:spPr>
             <a:xfrm>
-              <a:off x="817517" y="2505337"/>
+              <a:off x="817517" y="2654127"/>
               <a:ext cx="7799693" cy="0"/>
             </a:xfrm>
             <a:custGeom>
@@ -2443,15 +2443,15 @@
           </p:nvSpPr>
           <p:spPr>
             <a:xfrm>
-              <a:off x="1615213" y="1896563"/>
-              <a:ext cx="0" cy="3826579"/>
+              <a:off x="1615213" y="2073503"/>
+              <a:ext cx="0" cy="3649639"/>
             </a:xfrm>
             <a:custGeom>
               <a:avLst/>
               <a:pathLst>
-                <a:path w="0" h="3826579">
+                <a:path w="0" h="3649639">
                   <a:moveTo>
-                    <a:pt x="0" y="3826579"/>
+                    <a:pt x="0" y="3649639"/>
                   </a:moveTo>
                   <a:lnTo>
                     <a:pt x="0" y="0"/>
@@ -2486,15 +2486,15 @@
           </p:nvSpPr>
           <p:spPr>
             <a:xfrm>
-              <a:off x="3387871" y="1896563"/>
-              <a:ext cx="0" cy="3826579"/>
+              <a:off x="3387871" y="2073503"/>
+              <a:ext cx="0" cy="3649639"/>
             </a:xfrm>
             <a:custGeom>
               <a:avLst/>
               <a:pathLst>
-                <a:path w="0" h="3826579">
+                <a:path w="0" h="3649639">
                   <a:moveTo>
-                    <a:pt x="0" y="3826579"/>
+                    <a:pt x="0" y="3649639"/>
                   </a:moveTo>
                   <a:lnTo>
                     <a:pt x="0" y="0"/>
@@ -2529,15 +2529,15 @@
           </p:nvSpPr>
           <p:spPr>
             <a:xfrm>
-              <a:off x="5160528" y="1896563"/>
-              <a:ext cx="0" cy="3826579"/>
+              <a:off x="5160528" y="2073503"/>
+              <a:ext cx="0" cy="3649639"/>
             </a:xfrm>
             <a:custGeom>
               <a:avLst/>
               <a:pathLst>
-                <a:path w="0" h="3826579">
+                <a:path w="0" h="3649639">
                   <a:moveTo>
-                    <a:pt x="0" y="3826579"/>
+                    <a:pt x="0" y="3649639"/>
                   </a:moveTo>
                   <a:lnTo>
                     <a:pt x="0" y="0"/>
@@ -2572,15 +2572,15 @@
           </p:nvSpPr>
           <p:spPr>
             <a:xfrm>
-              <a:off x="6933186" y="1896563"/>
-              <a:ext cx="0" cy="3826579"/>
+              <a:off x="6933186" y="2073503"/>
+              <a:ext cx="0" cy="3649639"/>
             </a:xfrm>
             <a:custGeom>
               <a:avLst/>
               <a:pathLst>
-                <a:path w="0" h="3826579">
+                <a:path w="0" h="3649639">
                   <a:moveTo>
-                    <a:pt x="0" y="3826579"/>
+                    <a:pt x="0" y="3649639"/>
                   </a:moveTo>
                   <a:lnTo>
                     <a:pt x="0" y="0"/>
@@ -2615,7 +2615,7 @@
           </p:nvSpPr>
           <p:spPr>
             <a:xfrm>
-              <a:off x="817517" y="5549207"/>
+              <a:off x="817517" y="5557249"/>
               <a:ext cx="7799693" cy="0"/>
             </a:xfrm>
             <a:custGeom>
@@ -2658,7 +2658,7 @@
           </p:nvSpPr>
           <p:spPr>
             <a:xfrm>
-              <a:off x="817517" y="4679530"/>
+              <a:off x="817517" y="4727786"/>
               <a:ext cx="7799693" cy="0"/>
             </a:xfrm>
             <a:custGeom>
@@ -2701,7 +2701,7 @@
           </p:nvSpPr>
           <p:spPr>
             <a:xfrm>
-              <a:off x="817517" y="3809853"/>
+              <a:off x="817517" y="3898322"/>
               <a:ext cx="7799693" cy="0"/>
             </a:xfrm>
             <a:custGeom>
@@ -2744,7 +2744,7 @@
           </p:nvSpPr>
           <p:spPr>
             <a:xfrm>
-              <a:off x="817517" y="2940175"/>
+              <a:off x="817517" y="3068859"/>
               <a:ext cx="7799693" cy="0"/>
             </a:xfrm>
             <a:custGeom>
@@ -2787,7 +2787,7 @@
           </p:nvSpPr>
           <p:spPr>
             <a:xfrm>
-              <a:off x="817517" y="2070498"/>
+              <a:off x="817517" y="2239395"/>
               <a:ext cx="7799693" cy="0"/>
             </a:xfrm>
             <a:custGeom>
@@ -2830,15 +2830,15 @@
           </p:nvSpPr>
           <p:spPr>
             <a:xfrm>
-              <a:off x="2501542" y="1896563"/>
-              <a:ext cx="0" cy="3826579"/>
+              <a:off x="2501542" y="2073503"/>
+              <a:ext cx="0" cy="3649639"/>
             </a:xfrm>
             <a:custGeom>
               <a:avLst/>
               <a:pathLst>
-                <a:path w="0" h="3826579">
+                <a:path w="0" h="3649639">
                   <a:moveTo>
-                    <a:pt x="0" y="3826579"/>
+                    <a:pt x="0" y="3649639"/>
                   </a:moveTo>
                   <a:lnTo>
                     <a:pt x="0" y="0"/>
@@ -2873,15 +2873,15 @@
           </p:nvSpPr>
           <p:spPr>
             <a:xfrm>
-              <a:off x="4274200" y="1896563"/>
-              <a:ext cx="0" cy="3826579"/>
+              <a:off x="4274200" y="2073503"/>
+              <a:ext cx="0" cy="3649639"/>
             </a:xfrm>
             <a:custGeom>
               <a:avLst/>
               <a:pathLst>
-                <a:path w="0" h="3826579">
+                <a:path w="0" h="3649639">
                   <a:moveTo>
-                    <a:pt x="0" y="3826579"/>
+                    <a:pt x="0" y="3649639"/>
                   </a:moveTo>
                   <a:lnTo>
                     <a:pt x="0" y="0"/>
@@ -2916,15 +2916,15 @@
           </p:nvSpPr>
           <p:spPr>
             <a:xfrm>
-              <a:off x="6046857" y="1896563"/>
-              <a:ext cx="0" cy="3826579"/>
+              <a:off x="6046857" y="2073503"/>
+              <a:ext cx="0" cy="3649639"/>
             </a:xfrm>
             <a:custGeom>
               <a:avLst/>
               <a:pathLst>
-                <a:path w="0" h="3826579">
+                <a:path w="0" h="3649639">
                   <a:moveTo>
-                    <a:pt x="0" y="3826579"/>
+                    <a:pt x="0" y="3649639"/>
                   </a:moveTo>
                   <a:lnTo>
                     <a:pt x="0" y="0"/>
@@ -2959,15 +2959,15 @@
           </p:nvSpPr>
           <p:spPr>
             <a:xfrm>
-              <a:off x="7819515" y="1896563"/>
-              <a:ext cx="0" cy="3826579"/>
+              <a:off x="7819515" y="2073503"/>
+              <a:ext cx="0" cy="3649639"/>
             </a:xfrm>
             <a:custGeom>
               <a:avLst/>
               <a:pathLst>
-                <a:path w="0" h="3826579">
+                <a:path w="0" h="3649639">
                   <a:moveTo>
-                    <a:pt x="0" y="3826579"/>
+                    <a:pt x="0" y="3649639"/>
                   </a:moveTo>
                   <a:lnTo>
                     <a:pt x="0" y="0"/>
@@ -3002,510 +3002,510 @@
           </p:nvSpPr>
           <p:spPr>
             <a:xfrm>
-              <a:off x="817517" y="1896563"/>
-              <a:ext cx="7392041" cy="3647942"/>
+              <a:off x="817517" y="2073503"/>
+              <a:ext cx="7392041" cy="3479262"/>
             </a:xfrm>
             <a:custGeom>
               <a:avLst/>
               <a:pathLst>
-                <a:path w="7392041" h="3647942">
+                <a:path w="7392041" h="3479262">
                   <a:moveTo>
                     <a:pt x="2175976" y="0"/>
                   </a:moveTo>
                   <a:lnTo>
-                    <a:pt x="2216721" y="189193"/>
-                  </a:lnTo>
-                  <a:lnTo>
-                    <a:pt x="2293965" y="514205"/>
-                  </a:lnTo>
-                  <a:lnTo>
-                    <a:pt x="2371209" y="808717"/>
-                  </a:lnTo>
-                  <a:lnTo>
-                    <a:pt x="2448452" y="1075592"/>
-                  </a:lnTo>
-                  <a:lnTo>
-                    <a:pt x="2525696" y="1317424"/>
-                  </a:lnTo>
-                  <a:lnTo>
-                    <a:pt x="2602939" y="1536562"/>
-                  </a:lnTo>
-                  <a:lnTo>
-                    <a:pt x="2680183" y="1735136"/>
-                  </a:lnTo>
-                  <a:lnTo>
-                    <a:pt x="2757426" y="1915076"/>
-                  </a:lnTo>
-                  <a:lnTo>
-                    <a:pt x="2834670" y="2078130"/>
-                  </a:lnTo>
-                  <a:lnTo>
-                    <a:pt x="2911914" y="2225883"/>
-                  </a:lnTo>
-                  <a:lnTo>
-                    <a:pt x="2989157" y="2359771"/>
-                  </a:lnTo>
-                  <a:lnTo>
-                    <a:pt x="3066401" y="2481094"/>
-                  </a:lnTo>
-                  <a:lnTo>
-                    <a:pt x="3143644" y="2591033"/>
-                  </a:lnTo>
-                  <a:lnTo>
-                    <a:pt x="3220888" y="2690655"/>
-                  </a:lnTo>
-                  <a:lnTo>
-                    <a:pt x="3298131" y="2780928"/>
-                  </a:lnTo>
-                  <a:lnTo>
-                    <a:pt x="3375375" y="2791110"/>
-                  </a:lnTo>
-                  <a:lnTo>
-                    <a:pt x="3452619" y="2799373"/>
-                  </a:lnTo>
-                  <a:lnTo>
-                    <a:pt x="3529862" y="2807556"/>
-                  </a:lnTo>
-                  <a:lnTo>
-                    <a:pt x="3607106" y="2815661"/>
-                  </a:lnTo>
-                  <a:lnTo>
-                    <a:pt x="3684349" y="2823689"/>
-                  </a:lnTo>
-                  <a:lnTo>
-                    <a:pt x="3761593" y="2831639"/>
-                  </a:lnTo>
-                  <a:lnTo>
-                    <a:pt x="3838836" y="2839513"/>
-                  </a:lnTo>
-                  <a:lnTo>
-                    <a:pt x="3916080" y="2847312"/>
-                  </a:lnTo>
-                  <a:lnTo>
-                    <a:pt x="3993324" y="2855036"/>
-                  </a:lnTo>
-                  <a:lnTo>
-                    <a:pt x="4070567" y="2862685"/>
-                  </a:lnTo>
-                  <a:lnTo>
-                    <a:pt x="4147811" y="2870262"/>
-                  </a:lnTo>
-                  <a:lnTo>
-                    <a:pt x="4225054" y="2877765"/>
-                  </a:lnTo>
-                  <a:lnTo>
-                    <a:pt x="4302298" y="2885197"/>
-                  </a:lnTo>
-                  <a:lnTo>
-                    <a:pt x="4379541" y="2892557"/>
-                  </a:lnTo>
-                  <a:lnTo>
-                    <a:pt x="4456785" y="2899847"/>
-                  </a:lnTo>
-                  <a:lnTo>
-                    <a:pt x="4534029" y="2907067"/>
-                  </a:lnTo>
-                  <a:lnTo>
-                    <a:pt x="4611272" y="2914218"/>
-                  </a:lnTo>
-                  <a:lnTo>
-                    <a:pt x="4688516" y="2921300"/>
-                  </a:lnTo>
-                  <a:lnTo>
-                    <a:pt x="4765759" y="2928314"/>
-                  </a:lnTo>
-                  <a:lnTo>
-                    <a:pt x="4843003" y="2935261"/>
-                  </a:lnTo>
-                  <a:lnTo>
-                    <a:pt x="4920246" y="2942141"/>
-                  </a:lnTo>
-                  <a:lnTo>
-                    <a:pt x="4997490" y="2948956"/>
-                  </a:lnTo>
-                  <a:lnTo>
-                    <a:pt x="5074734" y="2955704"/>
-                  </a:lnTo>
-                  <a:lnTo>
-                    <a:pt x="5151977" y="2962389"/>
-                  </a:lnTo>
-                  <a:lnTo>
-                    <a:pt x="5229221" y="2969009"/>
-                  </a:lnTo>
-                  <a:lnTo>
-                    <a:pt x="5306464" y="2975565"/>
-                  </a:lnTo>
-                  <a:lnTo>
-                    <a:pt x="5383708" y="2982059"/>
-                  </a:lnTo>
-                  <a:lnTo>
-                    <a:pt x="5460951" y="2988491"/>
-                  </a:lnTo>
-                  <a:lnTo>
-                    <a:pt x="5538195" y="2994860"/>
-                  </a:lnTo>
-                  <a:lnTo>
-                    <a:pt x="5615439" y="3001169"/>
-                  </a:lnTo>
-                  <a:lnTo>
-                    <a:pt x="5692682" y="3007417"/>
-                  </a:lnTo>
-                  <a:lnTo>
-                    <a:pt x="5769926" y="3013605"/>
-                  </a:lnTo>
-                  <a:lnTo>
-                    <a:pt x="5847169" y="3019734"/>
-                  </a:lnTo>
-                  <a:lnTo>
-                    <a:pt x="5924413" y="3025804"/>
-                  </a:lnTo>
-                  <a:lnTo>
-                    <a:pt x="6001656" y="3031816"/>
-                  </a:lnTo>
-                  <a:lnTo>
-                    <a:pt x="6078900" y="3037771"/>
-                  </a:lnTo>
-                  <a:lnTo>
-                    <a:pt x="6156144" y="3043668"/>
-                  </a:lnTo>
-                  <a:lnTo>
-                    <a:pt x="6233387" y="3049508"/>
-                  </a:lnTo>
-                  <a:lnTo>
-                    <a:pt x="6310631" y="3055293"/>
-                  </a:lnTo>
-                  <a:lnTo>
-                    <a:pt x="6387874" y="3061022"/>
-                  </a:lnTo>
-                  <a:lnTo>
-                    <a:pt x="6465118" y="3066696"/>
-                  </a:lnTo>
-                  <a:lnTo>
-                    <a:pt x="6542361" y="3072316"/>
-                  </a:lnTo>
-                  <a:lnTo>
-                    <a:pt x="6619605" y="3077882"/>
-                  </a:lnTo>
-                  <a:lnTo>
-                    <a:pt x="6696849" y="3083394"/>
-                  </a:lnTo>
-                  <a:lnTo>
-                    <a:pt x="6774092" y="3088854"/>
-                  </a:lnTo>
-                  <a:lnTo>
-                    <a:pt x="6851336" y="3094261"/>
-                  </a:lnTo>
-                  <a:lnTo>
-                    <a:pt x="6928579" y="3099616"/>
-                  </a:lnTo>
-                  <a:lnTo>
-                    <a:pt x="7005823" y="3104920"/>
-                  </a:lnTo>
-                  <a:lnTo>
-                    <a:pt x="7083066" y="3110173"/>
-                  </a:lnTo>
-                  <a:lnTo>
-                    <a:pt x="7160310" y="3115376"/>
-                  </a:lnTo>
-                  <a:lnTo>
-                    <a:pt x="7237554" y="3120529"/>
-                  </a:lnTo>
-                  <a:lnTo>
-                    <a:pt x="7314797" y="3125632"/>
-                  </a:lnTo>
-                  <a:lnTo>
-                    <a:pt x="7392041" y="3130687"/>
-                  </a:lnTo>
-                  <a:lnTo>
-                    <a:pt x="7392041" y="3647942"/>
-                  </a:lnTo>
-                  <a:lnTo>
-                    <a:pt x="7314797" y="3647455"/>
-                  </a:lnTo>
-                  <a:lnTo>
-                    <a:pt x="7237554" y="3646918"/>
-                  </a:lnTo>
-                  <a:lnTo>
-                    <a:pt x="7160310" y="3646325"/>
-                  </a:lnTo>
-                  <a:lnTo>
-                    <a:pt x="7083066" y="3645671"/>
-                  </a:lnTo>
-                  <a:lnTo>
-                    <a:pt x="7005823" y="3644948"/>
-                  </a:lnTo>
-                  <a:lnTo>
-                    <a:pt x="6928579" y="3644152"/>
-                  </a:lnTo>
-                  <a:lnTo>
-                    <a:pt x="6851336" y="3643272"/>
-                  </a:lnTo>
-                  <a:lnTo>
-                    <a:pt x="6774092" y="3642302"/>
-                  </a:lnTo>
-                  <a:lnTo>
-                    <a:pt x="6696849" y="3641231"/>
-                  </a:lnTo>
-                  <a:lnTo>
-                    <a:pt x="6619605" y="3640049"/>
-                  </a:lnTo>
-                  <a:lnTo>
-                    <a:pt x="6542361" y="3638745"/>
-                  </a:lnTo>
-                  <a:lnTo>
-                    <a:pt x="6465118" y="3637305"/>
-                  </a:lnTo>
-                  <a:lnTo>
-                    <a:pt x="6387874" y="3635717"/>
-                  </a:lnTo>
-                  <a:lnTo>
-                    <a:pt x="6310631" y="3633964"/>
-                  </a:lnTo>
-                  <a:lnTo>
-                    <a:pt x="6233387" y="3632030"/>
-                  </a:lnTo>
-                  <a:lnTo>
-                    <a:pt x="6156144" y="3629895"/>
-                  </a:lnTo>
-                  <a:lnTo>
-                    <a:pt x="6078900" y="3627539"/>
-                  </a:lnTo>
-                  <a:lnTo>
-                    <a:pt x="6001656" y="3624940"/>
-                  </a:lnTo>
-                  <a:lnTo>
-                    <a:pt x="5924413" y="3622071"/>
-                  </a:lnTo>
-                  <a:lnTo>
-                    <a:pt x="5847169" y="3618905"/>
-                  </a:lnTo>
-                  <a:lnTo>
-                    <a:pt x="5769926" y="3615411"/>
-                  </a:lnTo>
-                  <a:lnTo>
-                    <a:pt x="5692682" y="3611555"/>
-                  </a:lnTo>
-                  <a:lnTo>
-                    <a:pt x="5615439" y="3607300"/>
-                  </a:lnTo>
-                  <a:lnTo>
-                    <a:pt x="5538195" y="3602604"/>
-                  </a:lnTo>
-                  <a:lnTo>
-                    <a:pt x="5460951" y="3597422"/>
-                  </a:lnTo>
-                  <a:lnTo>
-                    <a:pt x="5383708" y="3591704"/>
-                  </a:lnTo>
-                  <a:lnTo>
-                    <a:pt x="5306464" y="3585393"/>
-                  </a:lnTo>
-                  <a:lnTo>
-                    <a:pt x="5229221" y="3578428"/>
-                  </a:lnTo>
-                  <a:lnTo>
-                    <a:pt x="5151977" y="3570743"/>
-                  </a:lnTo>
-                  <a:lnTo>
-                    <a:pt x="5074734" y="3562261"/>
-                  </a:lnTo>
-                  <a:lnTo>
-                    <a:pt x="4997490" y="3552901"/>
-                  </a:lnTo>
-                  <a:lnTo>
-                    <a:pt x="4920246" y="3542572"/>
-                  </a:lnTo>
-                  <a:lnTo>
-                    <a:pt x="4843003" y="3531174"/>
-                  </a:lnTo>
-                  <a:lnTo>
-                    <a:pt x="4765759" y="3518594"/>
-                  </a:lnTo>
-                  <a:lnTo>
-                    <a:pt x="4688516" y="3504712"/>
-                  </a:lnTo>
-                  <a:lnTo>
-                    <a:pt x="4611272" y="3489393"/>
-                  </a:lnTo>
-                  <a:lnTo>
-                    <a:pt x="4534029" y="3472487"/>
-                  </a:lnTo>
-                  <a:lnTo>
-                    <a:pt x="4456785" y="3453830"/>
-                  </a:lnTo>
-                  <a:lnTo>
-                    <a:pt x="4379541" y="3433242"/>
-                  </a:lnTo>
-                  <a:lnTo>
-                    <a:pt x="4302298" y="3410521"/>
-                  </a:lnTo>
-                  <a:lnTo>
-                    <a:pt x="4225054" y="3385447"/>
-                  </a:lnTo>
-                  <a:lnTo>
-                    <a:pt x="4147811" y="3357776"/>
-                  </a:lnTo>
-                  <a:lnTo>
-                    <a:pt x="4070567" y="3327240"/>
-                  </a:lnTo>
-                  <a:lnTo>
-                    <a:pt x="3993324" y="3293542"/>
-                  </a:lnTo>
-                  <a:lnTo>
-                    <a:pt x="3916080" y="3256354"/>
-                  </a:lnTo>
-                  <a:lnTo>
-                    <a:pt x="3838836" y="3215315"/>
-                  </a:lnTo>
-                  <a:lnTo>
-                    <a:pt x="3761593" y="3170026"/>
-                  </a:lnTo>
-                  <a:lnTo>
-                    <a:pt x="3684349" y="3120047"/>
-                  </a:lnTo>
-                  <a:lnTo>
-                    <a:pt x="3607106" y="3064892"/>
-                  </a:lnTo>
-                  <a:lnTo>
-                    <a:pt x="3529862" y="3004026"/>
-                  </a:lnTo>
-                  <a:lnTo>
-                    <a:pt x="3452619" y="2936856"/>
-                  </a:lnTo>
-                  <a:lnTo>
-                    <a:pt x="3375375" y="2862730"/>
-                  </a:lnTo>
-                  <a:lnTo>
-                    <a:pt x="3298131" y="2782767"/>
-                  </a:lnTo>
-                  <a:lnTo>
-                    <a:pt x="3220888" y="2774344"/>
-                  </a:lnTo>
-                  <a:lnTo>
-                    <a:pt x="3143644" y="2765838"/>
-                  </a:lnTo>
-                  <a:lnTo>
-                    <a:pt x="3066401" y="2757251"/>
-                  </a:lnTo>
-                  <a:lnTo>
-                    <a:pt x="2989157" y="2748580"/>
-                  </a:lnTo>
-                  <a:lnTo>
-                    <a:pt x="2911914" y="2739825"/>
-                  </a:lnTo>
-                  <a:lnTo>
-                    <a:pt x="2834670" y="2730986"/>
-                  </a:lnTo>
-                  <a:lnTo>
-                    <a:pt x="2757426" y="2722061"/>
-                  </a:lnTo>
-                  <a:lnTo>
-                    <a:pt x="2680183" y="2713049"/>
-                  </a:lnTo>
-                  <a:lnTo>
-                    <a:pt x="2602939" y="2703951"/>
-                  </a:lnTo>
-                  <a:lnTo>
-                    <a:pt x="2525696" y="2694764"/>
-                  </a:lnTo>
-                  <a:lnTo>
-                    <a:pt x="2448452" y="2685488"/>
-                  </a:lnTo>
-                  <a:lnTo>
-                    <a:pt x="2371209" y="2676122"/>
-                  </a:lnTo>
-                  <a:lnTo>
-                    <a:pt x="2293965" y="2666666"/>
-                  </a:lnTo>
-                  <a:lnTo>
-                    <a:pt x="2216721" y="2657118"/>
-                  </a:lnTo>
-                  <a:lnTo>
-                    <a:pt x="2139478" y="2647478"/>
-                  </a:lnTo>
-                  <a:lnTo>
-                    <a:pt x="2062234" y="2637744"/>
-                  </a:lnTo>
-                  <a:lnTo>
-                    <a:pt x="1984991" y="2627916"/>
-                  </a:lnTo>
-                  <a:lnTo>
-                    <a:pt x="1907747" y="2617993"/>
-                  </a:lnTo>
-                  <a:lnTo>
-                    <a:pt x="1830504" y="2607974"/>
-                  </a:lnTo>
-                  <a:lnTo>
-                    <a:pt x="1753260" y="2597858"/>
-                  </a:lnTo>
-                  <a:lnTo>
-                    <a:pt x="1676016" y="2587643"/>
-                  </a:lnTo>
-                  <a:lnTo>
-                    <a:pt x="1598773" y="2577330"/>
-                  </a:lnTo>
-                  <a:lnTo>
-                    <a:pt x="1521529" y="2566917"/>
-                  </a:lnTo>
-                  <a:lnTo>
-                    <a:pt x="1444286" y="2556403"/>
-                  </a:lnTo>
-                  <a:lnTo>
-                    <a:pt x="1367042" y="2545788"/>
-                  </a:lnTo>
-                  <a:lnTo>
-                    <a:pt x="1289799" y="2535069"/>
-                  </a:lnTo>
-                  <a:lnTo>
-                    <a:pt x="1212555" y="2524247"/>
-                  </a:lnTo>
-                  <a:lnTo>
-                    <a:pt x="1135311" y="2513320"/>
-                  </a:lnTo>
-                  <a:lnTo>
-                    <a:pt x="1058068" y="2502287"/>
-                  </a:lnTo>
-                  <a:lnTo>
-                    <a:pt x="980824" y="2491148"/>
-                  </a:lnTo>
-                  <a:lnTo>
-                    <a:pt x="903581" y="2479900"/>
-                  </a:lnTo>
-                  <a:lnTo>
-                    <a:pt x="826337" y="2468544"/>
-                  </a:lnTo>
-                  <a:lnTo>
-                    <a:pt x="749094" y="2457077"/>
-                  </a:lnTo>
-                  <a:lnTo>
-                    <a:pt x="671850" y="2445500"/>
-                  </a:lnTo>
-                  <a:lnTo>
-                    <a:pt x="594606" y="2433810"/>
-                  </a:lnTo>
-                  <a:lnTo>
-                    <a:pt x="517363" y="2422007"/>
-                  </a:lnTo>
-                  <a:lnTo>
-                    <a:pt x="440119" y="2410090"/>
-                  </a:lnTo>
-                  <a:lnTo>
-                    <a:pt x="362876" y="2398058"/>
-                  </a:lnTo>
-                  <a:lnTo>
-                    <a:pt x="285632" y="2385909"/>
-                  </a:lnTo>
-                  <a:lnTo>
-                    <a:pt x="208389" y="2373642"/>
-                  </a:lnTo>
-                  <a:lnTo>
-                    <a:pt x="131145" y="2361257"/>
-                  </a:lnTo>
-                  <a:lnTo>
-                    <a:pt x="53901" y="2348751"/>
-                  </a:lnTo>
-                  <a:lnTo>
-                    <a:pt x="0" y="2339940"/>
+                    <a:pt x="2216721" y="180445"/>
+                  </a:lnTo>
+                  <a:lnTo>
+                    <a:pt x="2293965" y="490428"/>
+                  </a:lnTo>
+                  <a:lnTo>
+                    <a:pt x="2371209" y="771322"/>
+                  </a:lnTo>
+                  <a:lnTo>
+                    <a:pt x="2448452" y="1025857"/>
+                  </a:lnTo>
+                  <a:lnTo>
+                    <a:pt x="2525696" y="1256507"/>
+                  </a:lnTo>
+                  <a:lnTo>
+                    <a:pt x="2602939" y="1465512"/>
+                  </a:lnTo>
+                  <a:lnTo>
+                    <a:pt x="2680183" y="1654904"/>
+                  </a:lnTo>
+                  <a:lnTo>
+                    <a:pt x="2757426" y="1826523"/>
+                  </a:lnTo>
+                  <a:lnTo>
+                    <a:pt x="2834670" y="1982038"/>
+                  </a:lnTo>
+                  <a:lnTo>
+                    <a:pt x="2911914" y="2122959"/>
+                  </a:lnTo>
+                  <a:lnTo>
+                    <a:pt x="2989157" y="2250656"/>
+                  </a:lnTo>
+                  <a:lnTo>
+                    <a:pt x="3066401" y="2366369"/>
+                  </a:lnTo>
+                  <a:lnTo>
+                    <a:pt x="3143644" y="2471225"/>
+                  </a:lnTo>
+                  <a:lnTo>
+                    <a:pt x="3220888" y="2566240"/>
+                  </a:lnTo>
+                  <a:lnTo>
+                    <a:pt x="3298131" y="2652339"/>
+                  </a:lnTo>
+                  <a:lnTo>
+                    <a:pt x="3375375" y="2662050"/>
+                  </a:lnTo>
+                  <a:lnTo>
+                    <a:pt x="3452619" y="2669931"/>
+                  </a:lnTo>
+                  <a:lnTo>
+                    <a:pt x="3529862" y="2677736"/>
+                  </a:lnTo>
+                  <a:lnTo>
+                    <a:pt x="3607106" y="2685466"/>
+                  </a:lnTo>
+                  <a:lnTo>
+                    <a:pt x="3684349" y="2693122"/>
+                  </a:lnTo>
+                  <a:lnTo>
+                    <a:pt x="3761593" y="2700705"/>
+                  </a:lnTo>
+                  <a:lnTo>
+                    <a:pt x="3838836" y="2708215"/>
+                  </a:lnTo>
+                  <a:lnTo>
+                    <a:pt x="3916080" y="2715653"/>
+                  </a:lnTo>
+                  <a:lnTo>
+                    <a:pt x="3993324" y="2723020"/>
+                  </a:lnTo>
+                  <a:lnTo>
+                    <a:pt x="4070567" y="2730316"/>
+                  </a:lnTo>
+                  <a:lnTo>
+                    <a:pt x="4147811" y="2737542"/>
+                  </a:lnTo>
+                  <a:lnTo>
+                    <a:pt x="4225054" y="2744698"/>
+                  </a:lnTo>
+                  <a:lnTo>
+                    <a:pt x="4302298" y="2751786"/>
+                  </a:lnTo>
+                  <a:lnTo>
+                    <a:pt x="4379541" y="2758807"/>
+                  </a:lnTo>
+                  <a:lnTo>
+                    <a:pt x="4456785" y="2765759"/>
+                  </a:lnTo>
+                  <a:lnTo>
+                    <a:pt x="4534029" y="2772645"/>
+                  </a:lnTo>
+                  <a:lnTo>
+                    <a:pt x="4611272" y="2779465"/>
+                  </a:lnTo>
+                  <a:lnTo>
+                    <a:pt x="4688516" y="2786220"/>
+                  </a:lnTo>
+                  <a:lnTo>
+                    <a:pt x="4765759" y="2792910"/>
+                  </a:lnTo>
+                  <a:lnTo>
+                    <a:pt x="4843003" y="2799536"/>
+                  </a:lnTo>
+                  <a:lnTo>
+                    <a:pt x="4920246" y="2806098"/>
+                  </a:lnTo>
+                  <a:lnTo>
+                    <a:pt x="4997490" y="2812597"/>
+                  </a:lnTo>
+                  <a:lnTo>
+                    <a:pt x="5074734" y="2819034"/>
+                  </a:lnTo>
+                  <a:lnTo>
+                    <a:pt x="5151977" y="2825409"/>
+                  </a:lnTo>
+                  <a:lnTo>
+                    <a:pt x="5229221" y="2831723"/>
+                  </a:lnTo>
+                  <a:lnTo>
+                    <a:pt x="5306464" y="2837976"/>
+                  </a:lnTo>
+                  <a:lnTo>
+                    <a:pt x="5383708" y="2844170"/>
+                  </a:lnTo>
+                  <a:lnTo>
+                    <a:pt x="5460951" y="2850304"/>
+                  </a:lnTo>
+                  <a:lnTo>
+                    <a:pt x="5538195" y="2856379"/>
+                  </a:lnTo>
+                  <a:lnTo>
+                    <a:pt x="5615439" y="2862396"/>
+                  </a:lnTo>
+                  <a:lnTo>
+                    <a:pt x="5692682" y="2868355"/>
+                  </a:lnTo>
+                  <a:lnTo>
+                    <a:pt x="5769926" y="2874257"/>
+                  </a:lnTo>
+                  <a:lnTo>
+                    <a:pt x="5847169" y="2880103"/>
+                  </a:lnTo>
+                  <a:lnTo>
+                    <a:pt x="5924413" y="2885892"/>
+                  </a:lnTo>
+                  <a:lnTo>
+                    <a:pt x="6001656" y="2891626"/>
+                  </a:lnTo>
+                  <a:lnTo>
+                    <a:pt x="6078900" y="2897305"/>
+                  </a:lnTo>
+                  <a:lnTo>
+                    <a:pt x="6156144" y="2902930"/>
+                  </a:lnTo>
+                  <a:lnTo>
+                    <a:pt x="6233387" y="2908500"/>
+                  </a:lnTo>
+                  <a:lnTo>
+                    <a:pt x="6310631" y="2914017"/>
+                  </a:lnTo>
+                  <a:lnTo>
+                    <a:pt x="6387874" y="2919481"/>
+                  </a:lnTo>
+                  <a:lnTo>
+                    <a:pt x="6465118" y="2924893"/>
+                  </a:lnTo>
+                  <a:lnTo>
+                    <a:pt x="6542361" y="2930253"/>
+                  </a:lnTo>
+                  <a:lnTo>
+                    <a:pt x="6619605" y="2935561"/>
+                  </a:lnTo>
+                  <a:lnTo>
+                    <a:pt x="6696849" y="2940819"/>
+                  </a:lnTo>
+                  <a:lnTo>
+                    <a:pt x="6774092" y="2946026"/>
+                  </a:lnTo>
+                  <a:lnTo>
+                    <a:pt x="6851336" y="2951183"/>
+                  </a:lnTo>
+                  <a:lnTo>
+                    <a:pt x="6928579" y="2956291"/>
+                  </a:lnTo>
+                  <a:lnTo>
+                    <a:pt x="7005823" y="2961350"/>
+                  </a:lnTo>
+                  <a:lnTo>
+                    <a:pt x="7083066" y="2966360"/>
+                  </a:lnTo>
+                  <a:lnTo>
+                    <a:pt x="7160310" y="2971322"/>
+                  </a:lnTo>
+                  <a:lnTo>
+                    <a:pt x="7237554" y="2976237"/>
+                  </a:lnTo>
+                  <a:lnTo>
+                    <a:pt x="7314797" y="2981104"/>
+                  </a:lnTo>
+                  <a:lnTo>
+                    <a:pt x="7392041" y="2985925"/>
+                  </a:lnTo>
+                  <a:lnTo>
+                    <a:pt x="7392041" y="3479262"/>
+                  </a:lnTo>
+                  <a:lnTo>
+                    <a:pt x="7314797" y="3478798"/>
+                  </a:lnTo>
+                  <a:lnTo>
+                    <a:pt x="7237554" y="3478286"/>
+                  </a:lnTo>
+                  <a:lnTo>
+                    <a:pt x="7160310" y="3477720"/>
+                  </a:lnTo>
+                  <a:lnTo>
+                    <a:pt x="7083066" y="3477096"/>
+                  </a:lnTo>
+                  <a:lnTo>
+                    <a:pt x="7005823" y="3476407"/>
+                  </a:lnTo>
+                  <a:lnTo>
+                    <a:pt x="6928579" y="3475647"/>
+                  </a:lnTo>
+                  <a:lnTo>
+                    <a:pt x="6851336" y="3474809"/>
+                  </a:lnTo>
+                  <a:lnTo>
+                    <a:pt x="6774092" y="3473883"/>
+                  </a:lnTo>
+                  <a:lnTo>
+                    <a:pt x="6696849" y="3472862"/>
+                  </a:lnTo>
+                  <a:lnTo>
+                    <a:pt x="6619605" y="3471734"/>
+                  </a:lnTo>
+                  <a:lnTo>
+                    <a:pt x="6542361" y="3470490"/>
+                  </a:lnTo>
+                  <a:lnTo>
+                    <a:pt x="6465118" y="3469118"/>
+                  </a:lnTo>
+                  <a:lnTo>
+                    <a:pt x="6387874" y="3467603"/>
+                  </a:lnTo>
+                  <a:lnTo>
+                    <a:pt x="6310631" y="3465931"/>
+                  </a:lnTo>
+                  <a:lnTo>
+                    <a:pt x="6233387" y="3464086"/>
+                  </a:lnTo>
+                  <a:lnTo>
+                    <a:pt x="6156144" y="3462050"/>
+                  </a:lnTo>
+                  <a:lnTo>
+                    <a:pt x="6078900" y="3459803"/>
+                  </a:lnTo>
+                  <a:lnTo>
+                    <a:pt x="6001656" y="3457324"/>
+                  </a:lnTo>
+                  <a:lnTo>
+                    <a:pt x="5924413" y="3454587"/>
+                  </a:lnTo>
+                  <a:lnTo>
+                    <a:pt x="5847169" y="3451568"/>
+                  </a:lnTo>
+                  <a:lnTo>
+                    <a:pt x="5769926" y="3448235"/>
+                  </a:lnTo>
+                  <a:lnTo>
+                    <a:pt x="5692682" y="3444558"/>
+                  </a:lnTo>
+                  <a:lnTo>
+                    <a:pt x="5615439" y="3440500"/>
+                  </a:lnTo>
+                  <a:lnTo>
+                    <a:pt x="5538195" y="3436021"/>
+                  </a:lnTo>
+                  <a:lnTo>
+                    <a:pt x="5460951" y="3431079"/>
+                  </a:lnTo>
+                  <a:lnTo>
+                    <a:pt x="5383708" y="3425624"/>
+                  </a:lnTo>
+                  <a:lnTo>
+                    <a:pt x="5306464" y="3419605"/>
+                  </a:lnTo>
+                  <a:lnTo>
+                    <a:pt x="5229221" y="3412963"/>
+                  </a:lnTo>
+                  <a:lnTo>
+                    <a:pt x="5151977" y="3405633"/>
+                  </a:lnTo>
+                  <a:lnTo>
+                    <a:pt x="5074734" y="3397544"/>
+                  </a:lnTo>
+                  <a:lnTo>
+                    <a:pt x="4997490" y="3388617"/>
+                  </a:lnTo>
+                  <a:lnTo>
+                    <a:pt x="4920246" y="3378765"/>
+                  </a:lnTo>
+                  <a:lnTo>
+                    <a:pt x="4843003" y="3367893"/>
+                  </a:lnTo>
+                  <a:lnTo>
+                    <a:pt x="4765759" y="3355896"/>
+                  </a:lnTo>
+                  <a:lnTo>
+                    <a:pt x="4688516" y="3342656"/>
+                  </a:lnTo>
+                  <a:lnTo>
+                    <a:pt x="4611272" y="3328045"/>
+                  </a:lnTo>
+                  <a:lnTo>
+                    <a:pt x="4534029" y="3311920"/>
+                  </a:lnTo>
+                  <a:lnTo>
+                    <a:pt x="4456785" y="3294126"/>
+                  </a:lnTo>
+                  <a:lnTo>
+                    <a:pt x="4379541" y="3274490"/>
+                  </a:lnTo>
+                  <a:lnTo>
+                    <a:pt x="4302298" y="3252819"/>
+                  </a:lnTo>
+                  <a:lnTo>
+                    <a:pt x="4225054" y="3228905"/>
+                  </a:lnTo>
+                  <a:lnTo>
+                    <a:pt x="4147811" y="3202514"/>
+                  </a:lnTo>
+                  <a:lnTo>
+                    <a:pt x="4070567" y="3173390"/>
+                  </a:lnTo>
+                  <a:lnTo>
+                    <a:pt x="3993324" y="3141250"/>
+                  </a:lnTo>
+                  <a:lnTo>
+                    <a:pt x="3916080" y="3105782"/>
+                  </a:lnTo>
+                  <a:lnTo>
+                    <a:pt x="3838836" y="3066640"/>
+                  </a:lnTo>
+                  <a:lnTo>
+                    <a:pt x="3761593" y="3023445"/>
+                  </a:lnTo>
+                  <a:lnTo>
+                    <a:pt x="3684349" y="2975777"/>
+                  </a:lnTo>
+                  <a:lnTo>
+                    <a:pt x="3607106" y="2923173"/>
+                  </a:lnTo>
+                  <a:lnTo>
+                    <a:pt x="3529862" y="2865121"/>
+                  </a:lnTo>
+                  <a:lnTo>
+                    <a:pt x="3452619" y="2801057"/>
+                  </a:lnTo>
+                  <a:lnTo>
+                    <a:pt x="3375375" y="2730359"/>
+                  </a:lnTo>
+                  <a:lnTo>
+                    <a:pt x="3298131" y="2654093"/>
+                  </a:lnTo>
+                  <a:lnTo>
+                    <a:pt x="3220888" y="2646059"/>
+                  </a:lnTo>
+                  <a:lnTo>
+                    <a:pt x="3143644" y="2637947"/>
+                  </a:lnTo>
+                  <a:lnTo>
+                    <a:pt x="3066401" y="2629757"/>
+                  </a:lnTo>
+                  <a:lnTo>
+                    <a:pt x="2989157" y="2621487"/>
+                  </a:lnTo>
+                  <a:lnTo>
+                    <a:pt x="2911914" y="2613137"/>
+                  </a:lnTo>
+                  <a:lnTo>
+                    <a:pt x="2834670" y="2604706"/>
+                  </a:lnTo>
+                  <a:lnTo>
+                    <a:pt x="2757426" y="2596194"/>
+                  </a:lnTo>
+                  <a:lnTo>
+                    <a:pt x="2680183" y="2587599"/>
+                  </a:lnTo>
+                  <a:lnTo>
+                    <a:pt x="2602939" y="2578921"/>
+                  </a:lnTo>
+                  <a:lnTo>
+                    <a:pt x="2525696" y="2570159"/>
+                  </a:lnTo>
+                  <a:lnTo>
+                    <a:pt x="2448452" y="2561312"/>
+                  </a:lnTo>
+                  <a:lnTo>
+                    <a:pt x="2371209" y="2552380"/>
+                  </a:lnTo>
+                  <a:lnTo>
+                    <a:pt x="2293965" y="2543360"/>
+                  </a:lnTo>
+                  <a:lnTo>
+                    <a:pt x="2216721" y="2534254"/>
+                  </a:lnTo>
+                  <a:lnTo>
+                    <a:pt x="2139478" y="2525059"/>
+                  </a:lnTo>
+                  <a:lnTo>
+                    <a:pt x="2062234" y="2515776"/>
+                  </a:lnTo>
+                  <a:lnTo>
+                    <a:pt x="1984991" y="2506402"/>
+                  </a:lnTo>
+                  <a:lnTo>
+                    <a:pt x="1907747" y="2496938"/>
+                  </a:lnTo>
+                  <a:lnTo>
+                    <a:pt x="1830504" y="2487382"/>
+                  </a:lnTo>
+                  <a:lnTo>
+                    <a:pt x="1753260" y="2477734"/>
+                  </a:lnTo>
+                  <a:lnTo>
+                    <a:pt x="1676016" y="2467992"/>
+                  </a:lnTo>
+                  <a:lnTo>
+                    <a:pt x="1598773" y="2458155"/>
+                  </a:lnTo>
+                  <a:lnTo>
+                    <a:pt x="1521529" y="2448224"/>
+                  </a:lnTo>
+                  <a:lnTo>
+                    <a:pt x="1444286" y="2438196"/>
+                  </a:lnTo>
+                  <a:lnTo>
+                    <a:pt x="1367042" y="2428072"/>
+                  </a:lnTo>
+                  <a:lnTo>
+                    <a:pt x="1289799" y="2417849"/>
+                  </a:lnTo>
+                  <a:lnTo>
+                    <a:pt x="1212555" y="2407527"/>
+                  </a:lnTo>
+                  <a:lnTo>
+                    <a:pt x="1135311" y="2397105"/>
+                  </a:lnTo>
+                  <a:lnTo>
+                    <a:pt x="1058068" y="2386582"/>
+                  </a:lnTo>
+                  <a:lnTo>
+                    <a:pt x="980824" y="2375958"/>
+                  </a:lnTo>
+                  <a:lnTo>
+                    <a:pt x="903581" y="2365230"/>
+                  </a:lnTo>
+                  <a:lnTo>
+                    <a:pt x="826337" y="2354399"/>
+                  </a:lnTo>
+                  <a:lnTo>
+                    <a:pt x="749094" y="2343463"/>
+                  </a:lnTo>
+                  <a:lnTo>
+                    <a:pt x="671850" y="2332421"/>
+                  </a:lnTo>
+                  <a:lnTo>
+                    <a:pt x="594606" y="2321272"/>
+                  </a:lnTo>
+                  <a:lnTo>
+                    <a:pt x="517363" y="2310014"/>
+                  </a:lnTo>
+                  <a:lnTo>
+                    <a:pt x="440119" y="2298648"/>
+                  </a:lnTo>
+                  <a:lnTo>
+                    <a:pt x="362876" y="2287172"/>
+                  </a:lnTo>
+                  <a:lnTo>
+                    <a:pt x="285632" y="2275585"/>
+                  </a:lnTo>
+                  <a:lnTo>
+                    <a:pt x="208389" y="2263886"/>
+                  </a:lnTo>
+                  <a:lnTo>
+                    <a:pt x="131145" y="2252073"/>
+                  </a:lnTo>
+                  <a:lnTo>
+                    <a:pt x="53901" y="2240146"/>
+                  </a:lnTo>
+                  <a:lnTo>
+                    <a:pt x="0" y="2231742"/>
                   </a:lnTo>
                   <a:close/>
                 </a:path>
@@ -3531,219 +3531,219 @@
           </p:nvSpPr>
           <p:spPr>
             <a:xfrm>
-              <a:off x="2993494" y="1896563"/>
-              <a:ext cx="5216064" cy="3130687"/>
+              <a:off x="2993494" y="2073503"/>
+              <a:ext cx="5216064" cy="2985925"/>
             </a:xfrm>
             <a:custGeom>
               <a:avLst/>
               <a:pathLst>
-                <a:path w="5216064" h="3130687">
+                <a:path w="5216064" h="2985925">
                   <a:moveTo>
                     <a:pt x="0" y="0"/>
                   </a:moveTo>
                   <a:lnTo>
-                    <a:pt x="40744" y="189193"/>
-                  </a:lnTo>
-                  <a:lnTo>
-                    <a:pt x="117988" y="514205"/>
-                  </a:lnTo>
-                  <a:lnTo>
-                    <a:pt x="195232" y="808717"/>
-                  </a:lnTo>
-                  <a:lnTo>
-                    <a:pt x="272475" y="1075592"/>
-                  </a:lnTo>
-                  <a:lnTo>
-                    <a:pt x="349719" y="1317424"/>
-                  </a:lnTo>
-                  <a:lnTo>
-                    <a:pt x="426962" y="1536562"/>
-                  </a:lnTo>
-                  <a:lnTo>
-                    <a:pt x="504206" y="1735136"/>
-                  </a:lnTo>
-                  <a:lnTo>
-                    <a:pt x="581449" y="1915076"/>
-                  </a:lnTo>
-                  <a:lnTo>
-                    <a:pt x="658693" y="2078130"/>
-                  </a:lnTo>
-                  <a:lnTo>
-                    <a:pt x="735937" y="2225883"/>
-                  </a:lnTo>
-                  <a:lnTo>
-                    <a:pt x="813180" y="2359771"/>
-                  </a:lnTo>
-                  <a:lnTo>
-                    <a:pt x="890424" y="2481094"/>
-                  </a:lnTo>
-                  <a:lnTo>
-                    <a:pt x="967667" y="2591033"/>
-                  </a:lnTo>
-                  <a:lnTo>
-                    <a:pt x="1044911" y="2690655"/>
-                  </a:lnTo>
-                  <a:lnTo>
-                    <a:pt x="1122154" y="2780928"/>
-                  </a:lnTo>
-                  <a:lnTo>
-                    <a:pt x="1199398" y="2791110"/>
-                  </a:lnTo>
-                  <a:lnTo>
-                    <a:pt x="1276642" y="2799373"/>
-                  </a:lnTo>
-                  <a:lnTo>
-                    <a:pt x="1353885" y="2807556"/>
-                  </a:lnTo>
-                  <a:lnTo>
-                    <a:pt x="1431129" y="2815661"/>
-                  </a:lnTo>
-                  <a:lnTo>
-                    <a:pt x="1508372" y="2823689"/>
-                  </a:lnTo>
-                  <a:lnTo>
-                    <a:pt x="1585616" y="2831639"/>
-                  </a:lnTo>
-                  <a:lnTo>
-                    <a:pt x="1662859" y="2839513"/>
-                  </a:lnTo>
-                  <a:lnTo>
-                    <a:pt x="1740103" y="2847312"/>
-                  </a:lnTo>
-                  <a:lnTo>
-                    <a:pt x="1817347" y="2855036"/>
-                  </a:lnTo>
-                  <a:lnTo>
-                    <a:pt x="1894590" y="2862685"/>
-                  </a:lnTo>
-                  <a:lnTo>
-                    <a:pt x="1971834" y="2870262"/>
-                  </a:lnTo>
-                  <a:lnTo>
-                    <a:pt x="2049077" y="2877765"/>
-                  </a:lnTo>
-                  <a:lnTo>
-                    <a:pt x="2126321" y="2885197"/>
-                  </a:lnTo>
-                  <a:lnTo>
-                    <a:pt x="2203564" y="2892557"/>
-                  </a:lnTo>
-                  <a:lnTo>
-                    <a:pt x="2280808" y="2899847"/>
-                  </a:lnTo>
-                  <a:lnTo>
-                    <a:pt x="2358052" y="2907067"/>
-                  </a:lnTo>
-                  <a:lnTo>
-                    <a:pt x="2435295" y="2914218"/>
-                  </a:lnTo>
-                  <a:lnTo>
-                    <a:pt x="2512539" y="2921300"/>
-                  </a:lnTo>
-                  <a:lnTo>
-                    <a:pt x="2589782" y="2928314"/>
-                  </a:lnTo>
-                  <a:lnTo>
-                    <a:pt x="2667026" y="2935261"/>
-                  </a:lnTo>
-                  <a:lnTo>
-                    <a:pt x="2744269" y="2942141"/>
-                  </a:lnTo>
-                  <a:lnTo>
-                    <a:pt x="2821513" y="2948956"/>
-                  </a:lnTo>
-                  <a:lnTo>
-                    <a:pt x="2898757" y="2955704"/>
-                  </a:lnTo>
-                  <a:lnTo>
-                    <a:pt x="2976000" y="2962389"/>
-                  </a:lnTo>
-                  <a:lnTo>
-                    <a:pt x="3053244" y="2969009"/>
-                  </a:lnTo>
-                  <a:lnTo>
-                    <a:pt x="3130487" y="2975565"/>
-                  </a:lnTo>
-                  <a:lnTo>
-                    <a:pt x="3207731" y="2982059"/>
-                  </a:lnTo>
-                  <a:lnTo>
-                    <a:pt x="3284974" y="2988491"/>
-                  </a:lnTo>
-                  <a:lnTo>
-                    <a:pt x="3362218" y="2994860"/>
-                  </a:lnTo>
-                  <a:lnTo>
-                    <a:pt x="3439462" y="3001169"/>
-                  </a:lnTo>
-                  <a:lnTo>
-                    <a:pt x="3516705" y="3007417"/>
-                  </a:lnTo>
-                  <a:lnTo>
-                    <a:pt x="3593949" y="3013605"/>
-                  </a:lnTo>
-                  <a:lnTo>
-                    <a:pt x="3671192" y="3019734"/>
-                  </a:lnTo>
-                  <a:lnTo>
-                    <a:pt x="3748436" y="3025804"/>
-                  </a:lnTo>
-                  <a:lnTo>
-                    <a:pt x="3825679" y="3031816"/>
-                  </a:lnTo>
-                  <a:lnTo>
-                    <a:pt x="3902923" y="3037771"/>
-                  </a:lnTo>
-                  <a:lnTo>
-                    <a:pt x="3980167" y="3043668"/>
-                  </a:lnTo>
-                  <a:lnTo>
-                    <a:pt x="4057410" y="3049508"/>
-                  </a:lnTo>
-                  <a:lnTo>
-                    <a:pt x="4134654" y="3055293"/>
-                  </a:lnTo>
-                  <a:lnTo>
-                    <a:pt x="4211897" y="3061022"/>
-                  </a:lnTo>
-                  <a:lnTo>
-                    <a:pt x="4289141" y="3066696"/>
-                  </a:lnTo>
-                  <a:lnTo>
-                    <a:pt x="4366385" y="3072316"/>
-                  </a:lnTo>
-                  <a:lnTo>
-                    <a:pt x="4443628" y="3077882"/>
-                  </a:lnTo>
-                  <a:lnTo>
-                    <a:pt x="4520872" y="3083394"/>
-                  </a:lnTo>
-                  <a:lnTo>
-                    <a:pt x="4598115" y="3088854"/>
-                  </a:lnTo>
-                  <a:lnTo>
-                    <a:pt x="4675359" y="3094261"/>
-                  </a:lnTo>
-                  <a:lnTo>
-                    <a:pt x="4752602" y="3099616"/>
-                  </a:lnTo>
-                  <a:lnTo>
-                    <a:pt x="4829846" y="3104920"/>
-                  </a:lnTo>
-                  <a:lnTo>
-                    <a:pt x="4907090" y="3110173"/>
-                  </a:lnTo>
-                  <a:lnTo>
-                    <a:pt x="4984333" y="3115376"/>
-                  </a:lnTo>
-                  <a:lnTo>
-                    <a:pt x="5061577" y="3120529"/>
-                  </a:lnTo>
-                  <a:lnTo>
-                    <a:pt x="5138820" y="3125632"/>
-                  </a:lnTo>
-                  <a:lnTo>
-                    <a:pt x="5216064" y="3130687"/>
+                    <a:pt x="40744" y="180445"/>
+                  </a:lnTo>
+                  <a:lnTo>
+                    <a:pt x="117988" y="490428"/>
+                  </a:lnTo>
+                  <a:lnTo>
+                    <a:pt x="195232" y="771322"/>
+                  </a:lnTo>
+                  <a:lnTo>
+                    <a:pt x="272475" y="1025857"/>
+                  </a:lnTo>
+                  <a:lnTo>
+                    <a:pt x="349719" y="1256507"/>
+                  </a:lnTo>
+                  <a:lnTo>
+                    <a:pt x="426962" y="1465512"/>
+                  </a:lnTo>
+                  <a:lnTo>
+                    <a:pt x="504206" y="1654904"/>
+                  </a:lnTo>
+                  <a:lnTo>
+                    <a:pt x="581449" y="1826523"/>
+                  </a:lnTo>
+                  <a:lnTo>
+                    <a:pt x="658693" y="1982038"/>
+                  </a:lnTo>
+                  <a:lnTo>
+                    <a:pt x="735937" y="2122959"/>
+                  </a:lnTo>
+                  <a:lnTo>
+                    <a:pt x="813180" y="2250656"/>
+                  </a:lnTo>
+                  <a:lnTo>
+                    <a:pt x="890424" y="2366369"/>
+                  </a:lnTo>
+                  <a:lnTo>
+                    <a:pt x="967667" y="2471225"/>
+                  </a:lnTo>
+                  <a:lnTo>
+                    <a:pt x="1044911" y="2566240"/>
+                  </a:lnTo>
+                  <a:lnTo>
+                    <a:pt x="1122154" y="2652339"/>
+                  </a:lnTo>
+                  <a:lnTo>
+                    <a:pt x="1199398" y="2662050"/>
+                  </a:lnTo>
+                  <a:lnTo>
+                    <a:pt x="1276642" y="2669931"/>
+                  </a:lnTo>
+                  <a:lnTo>
+                    <a:pt x="1353885" y="2677736"/>
+                  </a:lnTo>
+                  <a:lnTo>
+                    <a:pt x="1431129" y="2685466"/>
+                  </a:lnTo>
+                  <a:lnTo>
+                    <a:pt x="1508372" y="2693122"/>
+                  </a:lnTo>
+                  <a:lnTo>
+                    <a:pt x="1585616" y="2700705"/>
+                  </a:lnTo>
+                  <a:lnTo>
+                    <a:pt x="1662859" y="2708215"/>
+                  </a:lnTo>
+                  <a:lnTo>
+                    <a:pt x="1740103" y="2715653"/>
+                  </a:lnTo>
+                  <a:lnTo>
+                    <a:pt x="1817347" y="2723020"/>
+                  </a:lnTo>
+                  <a:lnTo>
+                    <a:pt x="1894590" y="2730316"/>
+                  </a:lnTo>
+                  <a:lnTo>
+                    <a:pt x="1971834" y="2737542"/>
+                  </a:lnTo>
+                  <a:lnTo>
+                    <a:pt x="2049077" y="2744698"/>
+                  </a:lnTo>
+                  <a:lnTo>
+                    <a:pt x="2126321" y="2751786"/>
+                  </a:lnTo>
+                  <a:lnTo>
+                    <a:pt x="2203564" y="2758807"/>
+                  </a:lnTo>
+                  <a:lnTo>
+                    <a:pt x="2280808" y="2765759"/>
+                  </a:lnTo>
+                  <a:lnTo>
+                    <a:pt x="2358052" y="2772645"/>
+                  </a:lnTo>
+                  <a:lnTo>
+                    <a:pt x="2435295" y="2779465"/>
+                  </a:lnTo>
+                  <a:lnTo>
+                    <a:pt x="2512539" y="2786220"/>
+                  </a:lnTo>
+                  <a:lnTo>
+                    <a:pt x="2589782" y="2792910"/>
+                  </a:lnTo>
+                  <a:lnTo>
+                    <a:pt x="2667026" y="2799536"/>
+                  </a:lnTo>
+                  <a:lnTo>
+                    <a:pt x="2744269" y="2806098"/>
+                  </a:lnTo>
+                  <a:lnTo>
+                    <a:pt x="2821513" y="2812597"/>
+                  </a:lnTo>
+                  <a:lnTo>
+                    <a:pt x="2898757" y="2819034"/>
+                  </a:lnTo>
+                  <a:lnTo>
+                    <a:pt x="2976000" y="2825409"/>
+                  </a:lnTo>
+                  <a:lnTo>
+                    <a:pt x="3053244" y="2831723"/>
+                  </a:lnTo>
+                  <a:lnTo>
+                    <a:pt x="3130487" y="2837976"/>
+                  </a:lnTo>
+                  <a:lnTo>
+                    <a:pt x="3207731" y="2844170"/>
+                  </a:lnTo>
+                  <a:lnTo>
+                    <a:pt x="3284974" y="2850304"/>
+                  </a:lnTo>
+                  <a:lnTo>
+                    <a:pt x="3362218" y="2856379"/>
+                  </a:lnTo>
+                  <a:lnTo>
+                    <a:pt x="3439462" y="2862396"/>
+                  </a:lnTo>
+                  <a:lnTo>
+                    <a:pt x="3516705" y="2868355"/>
+                  </a:lnTo>
+                  <a:lnTo>
+                    <a:pt x="3593949" y="2874257"/>
+                  </a:lnTo>
+                  <a:lnTo>
+                    <a:pt x="3671192" y="2880103"/>
+                  </a:lnTo>
+                  <a:lnTo>
+                    <a:pt x="3748436" y="2885892"/>
+                  </a:lnTo>
+                  <a:lnTo>
+                    <a:pt x="3825679" y="2891626"/>
+                  </a:lnTo>
+                  <a:lnTo>
+                    <a:pt x="3902923" y="2897305"/>
+                  </a:lnTo>
+                  <a:lnTo>
+                    <a:pt x="3980167" y="2902930"/>
+                  </a:lnTo>
+                  <a:lnTo>
+                    <a:pt x="4057410" y="2908500"/>
+                  </a:lnTo>
+                  <a:lnTo>
+                    <a:pt x="4134654" y="2914017"/>
+                  </a:lnTo>
+                  <a:lnTo>
+                    <a:pt x="4211897" y="2919481"/>
+                  </a:lnTo>
+                  <a:lnTo>
+                    <a:pt x="4289141" y="2924893"/>
+                  </a:lnTo>
+                  <a:lnTo>
+                    <a:pt x="4366385" y="2930253"/>
+                  </a:lnTo>
+                  <a:lnTo>
+                    <a:pt x="4443628" y="2935561"/>
+                  </a:lnTo>
+                  <a:lnTo>
+                    <a:pt x="4520872" y="2940819"/>
+                  </a:lnTo>
+                  <a:lnTo>
+                    <a:pt x="4598115" y="2946026"/>
+                  </a:lnTo>
+                  <a:lnTo>
+                    <a:pt x="4675359" y="2951183"/>
+                  </a:lnTo>
+                  <a:lnTo>
+                    <a:pt x="4752602" y="2956291"/>
+                  </a:lnTo>
+                  <a:lnTo>
+                    <a:pt x="4829846" y="2961350"/>
+                  </a:lnTo>
+                  <a:lnTo>
+                    <a:pt x="4907090" y="2966360"/>
+                  </a:lnTo>
+                  <a:lnTo>
+                    <a:pt x="4984333" y="2971322"/>
+                  </a:lnTo>
+                  <a:lnTo>
+                    <a:pt x="5061577" y="2976237"/>
+                  </a:lnTo>
+                  <a:lnTo>
+                    <a:pt x="5138820" y="2981104"/>
+                  </a:lnTo>
+                  <a:lnTo>
+                    <a:pt x="5216064" y="2985925"/>
                   </a:lnTo>
                 </a:path>
               </a:pathLst>
@@ -3763,300 +3763,300 @@
           </p:nvSpPr>
           <p:spPr>
             <a:xfrm>
-              <a:off x="817517" y="4236504"/>
-              <a:ext cx="7392041" cy="1308001"/>
+              <a:off x="817517" y="4305245"/>
+              <a:ext cx="7392041" cy="1247520"/>
             </a:xfrm>
             <a:custGeom>
               <a:avLst/>
               <a:pathLst>
-                <a:path w="7392041" h="1308001">
+                <a:path w="7392041" h="1247520">
                   <a:moveTo>
-                    <a:pt x="7392041" y="1308001"/>
+                    <a:pt x="7392041" y="1247520"/>
                   </a:moveTo>
                   <a:lnTo>
-                    <a:pt x="7314797" y="1307514"/>
-                  </a:lnTo>
-                  <a:lnTo>
-                    <a:pt x="7237554" y="1306977"/>
-                  </a:lnTo>
-                  <a:lnTo>
-                    <a:pt x="7160310" y="1306384"/>
-                  </a:lnTo>
-                  <a:lnTo>
-                    <a:pt x="7083066" y="1305730"/>
-                  </a:lnTo>
-                  <a:lnTo>
-                    <a:pt x="7005823" y="1305008"/>
-                  </a:lnTo>
-                  <a:lnTo>
-                    <a:pt x="6928579" y="1304211"/>
-                  </a:lnTo>
-                  <a:lnTo>
-                    <a:pt x="6851336" y="1303332"/>
-                  </a:lnTo>
-                  <a:lnTo>
-                    <a:pt x="6774092" y="1302361"/>
-                  </a:lnTo>
-                  <a:lnTo>
-                    <a:pt x="6696849" y="1301290"/>
-                  </a:lnTo>
-                  <a:lnTo>
-                    <a:pt x="6619605" y="1300108"/>
-                  </a:lnTo>
-                  <a:lnTo>
-                    <a:pt x="6542361" y="1298804"/>
-                  </a:lnTo>
-                  <a:lnTo>
-                    <a:pt x="6465118" y="1297365"/>
-                  </a:lnTo>
-                  <a:lnTo>
-                    <a:pt x="6387874" y="1295776"/>
-                  </a:lnTo>
-                  <a:lnTo>
-                    <a:pt x="6310631" y="1294024"/>
-                  </a:lnTo>
-                  <a:lnTo>
-                    <a:pt x="6233387" y="1292089"/>
-                  </a:lnTo>
-                  <a:lnTo>
-                    <a:pt x="6156144" y="1289954"/>
-                  </a:lnTo>
-                  <a:lnTo>
-                    <a:pt x="6078900" y="1287599"/>
-                  </a:lnTo>
-                  <a:lnTo>
-                    <a:pt x="6001656" y="1284999"/>
-                  </a:lnTo>
-                  <a:lnTo>
-                    <a:pt x="5924413" y="1282130"/>
-                  </a:lnTo>
-                  <a:lnTo>
-                    <a:pt x="5847169" y="1278964"/>
-                  </a:lnTo>
-                  <a:lnTo>
-                    <a:pt x="5769926" y="1275470"/>
-                  </a:lnTo>
-                  <a:lnTo>
-                    <a:pt x="5692682" y="1271614"/>
-                  </a:lnTo>
-                  <a:lnTo>
-                    <a:pt x="5615439" y="1267359"/>
-                  </a:lnTo>
-                  <a:lnTo>
-                    <a:pt x="5538195" y="1262663"/>
-                  </a:lnTo>
-                  <a:lnTo>
-                    <a:pt x="5460951" y="1257481"/>
-                  </a:lnTo>
-                  <a:lnTo>
-                    <a:pt x="5383708" y="1251763"/>
-                  </a:lnTo>
-                  <a:lnTo>
-                    <a:pt x="5306464" y="1245452"/>
-                  </a:lnTo>
-                  <a:lnTo>
-                    <a:pt x="5229221" y="1238488"/>
-                  </a:lnTo>
-                  <a:lnTo>
-                    <a:pt x="5151977" y="1230802"/>
-                  </a:lnTo>
-                  <a:lnTo>
-                    <a:pt x="5074734" y="1222321"/>
-                  </a:lnTo>
-                  <a:lnTo>
-                    <a:pt x="4997490" y="1212961"/>
-                  </a:lnTo>
-                  <a:lnTo>
-                    <a:pt x="4920246" y="1202632"/>
-                  </a:lnTo>
-                  <a:lnTo>
-                    <a:pt x="4843003" y="1191233"/>
-                  </a:lnTo>
-                  <a:lnTo>
-                    <a:pt x="4765759" y="1178654"/>
-                  </a:lnTo>
-                  <a:lnTo>
-                    <a:pt x="4688516" y="1164772"/>
-                  </a:lnTo>
-                  <a:lnTo>
-                    <a:pt x="4611272" y="1149452"/>
-                  </a:lnTo>
-                  <a:lnTo>
-                    <a:pt x="4534029" y="1132546"/>
-                  </a:lnTo>
-                  <a:lnTo>
-                    <a:pt x="4456785" y="1113890"/>
-                  </a:lnTo>
-                  <a:lnTo>
-                    <a:pt x="4379541" y="1093301"/>
-                  </a:lnTo>
-                  <a:lnTo>
-                    <a:pt x="4302298" y="1070580"/>
-                  </a:lnTo>
-                  <a:lnTo>
-                    <a:pt x="4225054" y="1045506"/>
-                  </a:lnTo>
-                  <a:lnTo>
-                    <a:pt x="4147811" y="1017836"/>
-                  </a:lnTo>
-                  <a:lnTo>
-                    <a:pt x="4070567" y="987300"/>
-                  </a:lnTo>
-                  <a:lnTo>
-                    <a:pt x="3993324" y="953602"/>
-                  </a:lnTo>
-                  <a:lnTo>
-                    <a:pt x="3916080" y="916414"/>
-                  </a:lnTo>
-                  <a:lnTo>
-                    <a:pt x="3838836" y="875375"/>
-                  </a:lnTo>
-                  <a:lnTo>
-                    <a:pt x="3761593" y="830086"/>
-                  </a:lnTo>
-                  <a:lnTo>
-                    <a:pt x="3684349" y="780107"/>
-                  </a:lnTo>
-                  <a:lnTo>
-                    <a:pt x="3607106" y="724952"/>
-                  </a:lnTo>
-                  <a:lnTo>
-                    <a:pt x="3529862" y="664085"/>
-                  </a:lnTo>
-                  <a:lnTo>
-                    <a:pt x="3452619" y="596916"/>
-                  </a:lnTo>
-                  <a:lnTo>
-                    <a:pt x="3375375" y="522790"/>
-                  </a:lnTo>
-                  <a:lnTo>
-                    <a:pt x="3298131" y="442826"/>
-                  </a:lnTo>
-                  <a:lnTo>
-                    <a:pt x="3220888" y="434403"/>
-                  </a:lnTo>
-                  <a:lnTo>
-                    <a:pt x="3143644" y="425898"/>
-                  </a:lnTo>
-                  <a:lnTo>
-                    <a:pt x="3066401" y="417310"/>
-                  </a:lnTo>
-                  <a:lnTo>
-                    <a:pt x="2989157" y="408639"/>
-                  </a:lnTo>
-                  <a:lnTo>
-                    <a:pt x="2911914" y="399885"/>
-                  </a:lnTo>
-                  <a:lnTo>
-                    <a:pt x="2834670" y="391045"/>
-                  </a:lnTo>
-                  <a:lnTo>
-                    <a:pt x="2757426" y="382120"/>
-                  </a:lnTo>
-                  <a:lnTo>
-                    <a:pt x="2680183" y="373109"/>
-                  </a:lnTo>
-                  <a:lnTo>
-                    <a:pt x="2602939" y="364010"/>
-                  </a:lnTo>
-                  <a:lnTo>
-                    <a:pt x="2525696" y="354823"/>
-                  </a:lnTo>
-                  <a:lnTo>
-                    <a:pt x="2448452" y="345547"/>
-                  </a:lnTo>
-                  <a:lnTo>
-                    <a:pt x="2371209" y="336182"/>
-                  </a:lnTo>
-                  <a:lnTo>
-                    <a:pt x="2293965" y="326726"/>
-                  </a:lnTo>
-                  <a:lnTo>
-                    <a:pt x="2216721" y="317178"/>
-                  </a:lnTo>
-                  <a:lnTo>
-                    <a:pt x="2139478" y="307537"/>
-                  </a:lnTo>
-                  <a:lnTo>
-                    <a:pt x="2062234" y="297804"/>
-                  </a:lnTo>
-                  <a:lnTo>
-                    <a:pt x="1984991" y="287976"/>
-                  </a:lnTo>
-                  <a:lnTo>
-                    <a:pt x="1907747" y="278052"/>
-                  </a:lnTo>
-                  <a:lnTo>
-                    <a:pt x="1830504" y="268033"/>
-                  </a:lnTo>
-                  <a:lnTo>
-                    <a:pt x="1753260" y="257917"/>
-                  </a:lnTo>
-                  <a:lnTo>
-                    <a:pt x="1676016" y="247703"/>
-                  </a:lnTo>
-                  <a:lnTo>
-                    <a:pt x="1598773" y="237390"/>
-                  </a:lnTo>
-                  <a:lnTo>
-                    <a:pt x="1521529" y="226977"/>
-                  </a:lnTo>
-                  <a:lnTo>
-                    <a:pt x="1444286" y="216463"/>
-                  </a:lnTo>
-                  <a:lnTo>
-                    <a:pt x="1367042" y="205847"/>
-                  </a:lnTo>
-                  <a:lnTo>
-                    <a:pt x="1289799" y="195129"/>
-                  </a:lnTo>
-                  <a:lnTo>
-                    <a:pt x="1212555" y="184307"/>
-                  </a:lnTo>
-                  <a:lnTo>
-                    <a:pt x="1135311" y="173379"/>
-                  </a:lnTo>
-                  <a:lnTo>
-                    <a:pt x="1058068" y="162347"/>
-                  </a:lnTo>
-                  <a:lnTo>
-                    <a:pt x="980824" y="151207"/>
-                  </a:lnTo>
-                  <a:lnTo>
-                    <a:pt x="903581" y="139959"/>
-                  </a:lnTo>
-                  <a:lnTo>
-                    <a:pt x="826337" y="128603"/>
-                  </a:lnTo>
-                  <a:lnTo>
-                    <a:pt x="749094" y="117136"/>
-                  </a:lnTo>
-                  <a:lnTo>
-                    <a:pt x="671850" y="105559"/>
-                  </a:lnTo>
-                  <a:lnTo>
-                    <a:pt x="594606" y="93869"/>
-                  </a:lnTo>
-                  <a:lnTo>
-                    <a:pt x="517363" y="82067"/>
-                  </a:lnTo>
-                  <a:lnTo>
-                    <a:pt x="440119" y="70149"/>
-                  </a:lnTo>
-                  <a:lnTo>
-                    <a:pt x="362876" y="58117"/>
-                  </a:lnTo>
-                  <a:lnTo>
-                    <a:pt x="285632" y="45968"/>
-                  </a:lnTo>
-                  <a:lnTo>
-                    <a:pt x="208389" y="33701"/>
-                  </a:lnTo>
-                  <a:lnTo>
-                    <a:pt x="131145" y="21316"/>
-                  </a:lnTo>
-                  <a:lnTo>
-                    <a:pt x="53901" y="8810"/>
+                    <a:pt x="7314797" y="1247055"/>
+                  </a:lnTo>
+                  <a:lnTo>
+                    <a:pt x="7237554" y="1246543"/>
+                  </a:lnTo>
+                  <a:lnTo>
+                    <a:pt x="7160310" y="1245977"/>
+                  </a:lnTo>
+                  <a:lnTo>
+                    <a:pt x="7083066" y="1245353"/>
+                  </a:lnTo>
+                  <a:lnTo>
+                    <a:pt x="7005823" y="1244665"/>
+                  </a:lnTo>
+                  <a:lnTo>
+                    <a:pt x="6928579" y="1243905"/>
+                  </a:lnTo>
+                  <a:lnTo>
+                    <a:pt x="6851336" y="1243066"/>
+                  </a:lnTo>
+                  <a:lnTo>
+                    <a:pt x="6774092" y="1242140"/>
+                  </a:lnTo>
+                  <a:lnTo>
+                    <a:pt x="6696849" y="1241119"/>
+                  </a:lnTo>
+                  <a:lnTo>
+                    <a:pt x="6619605" y="1239992"/>
+                  </a:lnTo>
+                  <a:lnTo>
+                    <a:pt x="6542361" y="1238748"/>
+                  </a:lnTo>
+                  <a:lnTo>
+                    <a:pt x="6465118" y="1237375"/>
+                  </a:lnTo>
+                  <a:lnTo>
+                    <a:pt x="6387874" y="1235860"/>
+                  </a:lnTo>
+                  <a:lnTo>
+                    <a:pt x="6310631" y="1234188"/>
+                  </a:lnTo>
+                  <a:lnTo>
+                    <a:pt x="6233387" y="1232343"/>
+                  </a:lnTo>
+                  <a:lnTo>
+                    <a:pt x="6156144" y="1230307"/>
+                  </a:lnTo>
+                  <a:lnTo>
+                    <a:pt x="6078900" y="1228061"/>
+                  </a:lnTo>
+                  <a:lnTo>
+                    <a:pt x="6001656" y="1225581"/>
+                  </a:lnTo>
+                  <a:lnTo>
+                    <a:pt x="5924413" y="1222845"/>
+                  </a:lnTo>
+                  <a:lnTo>
+                    <a:pt x="5847169" y="1219825"/>
+                  </a:lnTo>
+                  <a:lnTo>
+                    <a:pt x="5769926" y="1216493"/>
+                  </a:lnTo>
+                  <a:lnTo>
+                    <a:pt x="5692682" y="1212815"/>
+                  </a:lnTo>
+                  <a:lnTo>
+                    <a:pt x="5615439" y="1208757"/>
+                  </a:lnTo>
+                  <a:lnTo>
+                    <a:pt x="5538195" y="1204278"/>
+                  </a:lnTo>
+                  <a:lnTo>
+                    <a:pt x="5460951" y="1199336"/>
+                  </a:lnTo>
+                  <a:lnTo>
+                    <a:pt x="5383708" y="1193882"/>
+                  </a:lnTo>
+                  <a:lnTo>
+                    <a:pt x="5306464" y="1187863"/>
+                  </a:lnTo>
+                  <a:lnTo>
+                    <a:pt x="5229221" y="1181220"/>
+                  </a:lnTo>
+                  <a:lnTo>
+                    <a:pt x="5151977" y="1173890"/>
+                  </a:lnTo>
+                  <a:lnTo>
+                    <a:pt x="5074734" y="1165801"/>
+                  </a:lnTo>
+                  <a:lnTo>
+                    <a:pt x="4997490" y="1156874"/>
+                  </a:lnTo>
+                  <a:lnTo>
+                    <a:pt x="4920246" y="1147022"/>
+                  </a:lnTo>
+                  <a:lnTo>
+                    <a:pt x="4843003" y="1136151"/>
+                  </a:lnTo>
+                  <a:lnTo>
+                    <a:pt x="4765759" y="1124153"/>
+                  </a:lnTo>
+                  <a:lnTo>
+                    <a:pt x="4688516" y="1110913"/>
+                  </a:lnTo>
+                  <a:lnTo>
+                    <a:pt x="4611272" y="1096302"/>
+                  </a:lnTo>
+                  <a:lnTo>
+                    <a:pt x="4534029" y="1080178"/>
+                  </a:lnTo>
+                  <a:lnTo>
+                    <a:pt x="4456785" y="1062384"/>
+                  </a:lnTo>
+                  <a:lnTo>
+                    <a:pt x="4379541" y="1042747"/>
+                  </a:lnTo>
+                  <a:lnTo>
+                    <a:pt x="4302298" y="1021077"/>
+                  </a:lnTo>
+                  <a:lnTo>
+                    <a:pt x="4225054" y="997162"/>
+                  </a:lnTo>
+                  <a:lnTo>
+                    <a:pt x="4147811" y="970771"/>
+                  </a:lnTo>
+                  <a:lnTo>
+                    <a:pt x="4070567" y="941647"/>
+                  </a:lnTo>
+                  <a:lnTo>
+                    <a:pt x="3993324" y="909507"/>
+                  </a:lnTo>
+                  <a:lnTo>
+                    <a:pt x="3916080" y="874039"/>
+                  </a:lnTo>
+                  <a:lnTo>
+                    <a:pt x="3838836" y="834898"/>
+                  </a:lnTo>
+                  <a:lnTo>
+                    <a:pt x="3761593" y="791703"/>
+                  </a:lnTo>
+                  <a:lnTo>
+                    <a:pt x="3684349" y="744035"/>
+                  </a:lnTo>
+                  <a:lnTo>
+                    <a:pt x="3607106" y="691430"/>
+                  </a:lnTo>
+                  <a:lnTo>
+                    <a:pt x="3529862" y="633378"/>
+                  </a:lnTo>
+                  <a:lnTo>
+                    <a:pt x="3452619" y="569314"/>
+                  </a:lnTo>
+                  <a:lnTo>
+                    <a:pt x="3375375" y="498616"/>
+                  </a:lnTo>
+                  <a:lnTo>
+                    <a:pt x="3298131" y="422350"/>
+                  </a:lnTo>
+                  <a:lnTo>
+                    <a:pt x="3220888" y="414316"/>
+                  </a:lnTo>
+                  <a:lnTo>
+                    <a:pt x="3143644" y="406204"/>
+                  </a:lnTo>
+                  <a:lnTo>
+                    <a:pt x="3066401" y="398014"/>
+                  </a:lnTo>
+                  <a:lnTo>
+                    <a:pt x="2989157" y="389744"/>
+                  </a:lnTo>
+                  <a:lnTo>
+                    <a:pt x="2911914" y="381394"/>
+                  </a:lnTo>
+                  <a:lnTo>
+                    <a:pt x="2834670" y="372964"/>
+                  </a:lnTo>
+                  <a:lnTo>
+                    <a:pt x="2757426" y="364451"/>
+                  </a:lnTo>
+                  <a:lnTo>
+                    <a:pt x="2680183" y="355856"/>
+                  </a:lnTo>
+                  <a:lnTo>
+                    <a:pt x="2602939" y="347178"/>
+                  </a:lnTo>
+                  <a:lnTo>
+                    <a:pt x="2525696" y="338416"/>
+                  </a:lnTo>
+                  <a:lnTo>
+                    <a:pt x="2448452" y="329569"/>
+                  </a:lnTo>
+                  <a:lnTo>
+                    <a:pt x="2371209" y="320637"/>
+                  </a:lnTo>
+                  <a:lnTo>
+                    <a:pt x="2293965" y="311618"/>
+                  </a:lnTo>
+                  <a:lnTo>
+                    <a:pt x="2216721" y="302511"/>
+                  </a:lnTo>
+                  <a:lnTo>
+                    <a:pt x="2139478" y="293317"/>
+                  </a:lnTo>
+                  <a:lnTo>
+                    <a:pt x="2062234" y="284033"/>
+                  </a:lnTo>
+                  <a:lnTo>
+                    <a:pt x="1984991" y="274660"/>
+                  </a:lnTo>
+                  <a:lnTo>
+                    <a:pt x="1907747" y="265195"/>
+                  </a:lnTo>
+                  <a:lnTo>
+                    <a:pt x="1830504" y="255639"/>
+                  </a:lnTo>
+                  <a:lnTo>
+                    <a:pt x="1753260" y="245991"/>
+                  </a:lnTo>
+                  <a:lnTo>
+                    <a:pt x="1676016" y="236249"/>
+                  </a:lnTo>
+                  <a:lnTo>
+                    <a:pt x="1598773" y="226413"/>
+                  </a:lnTo>
+                  <a:lnTo>
+                    <a:pt x="1521529" y="216481"/>
+                  </a:lnTo>
+                  <a:lnTo>
+                    <a:pt x="1444286" y="206454"/>
+                  </a:lnTo>
+                  <a:lnTo>
+                    <a:pt x="1367042" y="196329"/>
+                  </a:lnTo>
+                  <a:lnTo>
+                    <a:pt x="1289799" y="186106"/>
+                  </a:lnTo>
+                  <a:lnTo>
+                    <a:pt x="1212555" y="175784"/>
+                  </a:lnTo>
+                  <a:lnTo>
+                    <a:pt x="1135311" y="165362"/>
+                  </a:lnTo>
+                  <a:lnTo>
+                    <a:pt x="1058068" y="154840"/>
+                  </a:lnTo>
+                  <a:lnTo>
+                    <a:pt x="980824" y="144215"/>
+                  </a:lnTo>
+                  <a:lnTo>
+                    <a:pt x="903581" y="133488"/>
+                  </a:lnTo>
+                  <a:lnTo>
+                    <a:pt x="826337" y="122656"/>
+                  </a:lnTo>
+                  <a:lnTo>
+                    <a:pt x="749094" y="111720"/>
+                  </a:lnTo>
+                  <a:lnTo>
+                    <a:pt x="671850" y="100678"/>
+                  </a:lnTo>
+                  <a:lnTo>
+                    <a:pt x="594606" y="89529"/>
+                  </a:lnTo>
+                  <a:lnTo>
+                    <a:pt x="517363" y="78272"/>
+                  </a:lnTo>
+                  <a:lnTo>
+                    <a:pt x="440119" y="66906"/>
+                  </a:lnTo>
+                  <a:lnTo>
+                    <a:pt x="362876" y="55430"/>
+                  </a:lnTo>
+                  <a:lnTo>
+                    <a:pt x="285632" y="43842"/>
+                  </a:lnTo>
+                  <a:lnTo>
+                    <a:pt x="208389" y="32143"/>
+                  </a:lnTo>
+                  <a:lnTo>
+                    <a:pt x="131145" y="20330"/>
+                  </a:lnTo>
+                  <a:lnTo>
+                    <a:pt x="53901" y="8403"/>
                   </a:lnTo>
                   <a:lnTo>
                     <a:pt x="0" y="0"/>
@@ -4079,255 +4079,255 @@
           </p:nvSpPr>
           <p:spPr>
             <a:xfrm>
-              <a:off x="2068567" y="1896563"/>
-              <a:ext cx="6140991" cy="3603106"/>
+              <a:off x="2068567" y="2073503"/>
+              <a:ext cx="6140991" cy="3436500"/>
             </a:xfrm>
             <a:custGeom>
               <a:avLst/>
               <a:pathLst>
-                <a:path w="6140991" h="3603106">
+                <a:path w="6140991" h="3436500">
                   <a:moveTo>
                     <a:pt x="0" y="0"/>
                   </a:moveTo>
                   <a:lnTo>
-                    <a:pt x="38749" y="99076"/>
-                  </a:lnTo>
-                  <a:lnTo>
-                    <a:pt x="115993" y="286178"/>
-                  </a:lnTo>
-                  <a:lnTo>
-                    <a:pt x="193236" y="463428"/>
-                  </a:lnTo>
-                  <a:lnTo>
-                    <a:pt x="270480" y="631345"/>
-                  </a:lnTo>
-                  <a:lnTo>
-                    <a:pt x="347723" y="790422"/>
-                  </a:lnTo>
-                  <a:lnTo>
-                    <a:pt x="424967" y="941123"/>
-                  </a:lnTo>
-                  <a:lnTo>
-                    <a:pt x="502210" y="1083889"/>
-                  </a:lnTo>
-                  <a:lnTo>
-                    <a:pt x="579454" y="1219138"/>
-                  </a:lnTo>
-                  <a:lnTo>
-                    <a:pt x="656698" y="1347267"/>
-                  </a:lnTo>
-                  <a:lnTo>
-                    <a:pt x="733941" y="1468649"/>
-                  </a:lnTo>
-                  <a:lnTo>
-                    <a:pt x="811185" y="1583640"/>
-                  </a:lnTo>
-                  <a:lnTo>
-                    <a:pt x="888428" y="1692576"/>
-                  </a:lnTo>
-                  <a:lnTo>
-                    <a:pt x="965672" y="1795777"/>
-                  </a:lnTo>
-                  <a:lnTo>
-                    <a:pt x="1042915" y="1893544"/>
-                  </a:lnTo>
-                  <a:lnTo>
-                    <a:pt x="1120159" y="1986164"/>
-                  </a:lnTo>
-                  <a:lnTo>
-                    <a:pt x="1197403" y="2073907"/>
-                  </a:lnTo>
-                  <a:lnTo>
-                    <a:pt x="1274646" y="2157030"/>
-                  </a:lnTo>
-                  <a:lnTo>
-                    <a:pt x="1351890" y="2235777"/>
-                  </a:lnTo>
-                  <a:lnTo>
-                    <a:pt x="1429133" y="2310377"/>
-                  </a:lnTo>
-                  <a:lnTo>
-                    <a:pt x="1506377" y="2381050"/>
-                  </a:lnTo>
-                  <a:lnTo>
-                    <a:pt x="1583620" y="2448001"/>
-                  </a:lnTo>
-                  <a:lnTo>
-                    <a:pt x="1660864" y="2511428"/>
-                  </a:lnTo>
-                  <a:lnTo>
-                    <a:pt x="1738108" y="2571515"/>
-                  </a:lnTo>
-                  <a:lnTo>
-                    <a:pt x="1815351" y="2628438"/>
-                  </a:lnTo>
-                  <a:lnTo>
-                    <a:pt x="1892595" y="2682364"/>
-                  </a:lnTo>
-                  <a:lnTo>
-                    <a:pt x="1969838" y="2733451"/>
-                  </a:lnTo>
-                  <a:lnTo>
-                    <a:pt x="2047082" y="2781848"/>
-                  </a:lnTo>
-                  <a:lnTo>
-                    <a:pt x="2124325" y="2827697"/>
-                  </a:lnTo>
-                  <a:lnTo>
-                    <a:pt x="2201569" y="2871132"/>
-                  </a:lnTo>
-                  <a:lnTo>
-                    <a:pt x="2278813" y="2912280"/>
-                  </a:lnTo>
-                  <a:lnTo>
-                    <a:pt x="2356056" y="2951261"/>
-                  </a:lnTo>
-                  <a:lnTo>
-                    <a:pt x="2433300" y="2988190"/>
-                  </a:lnTo>
-                  <a:lnTo>
-                    <a:pt x="2510543" y="3023175"/>
-                  </a:lnTo>
-                  <a:lnTo>
-                    <a:pt x="2587787" y="3056317"/>
-                  </a:lnTo>
-                  <a:lnTo>
-                    <a:pt x="2665030" y="3087715"/>
-                  </a:lnTo>
-                  <a:lnTo>
-                    <a:pt x="2742274" y="3117459"/>
-                  </a:lnTo>
-                  <a:lnTo>
-                    <a:pt x="2819518" y="3145638"/>
-                  </a:lnTo>
-                  <a:lnTo>
-                    <a:pt x="2896761" y="3172332"/>
-                  </a:lnTo>
-                  <a:lnTo>
-                    <a:pt x="2974005" y="3197622"/>
-                  </a:lnTo>
-                  <a:lnTo>
-                    <a:pt x="3051248" y="3221579"/>
-                  </a:lnTo>
-                  <a:lnTo>
-                    <a:pt x="3128492" y="3244276"/>
-                  </a:lnTo>
-                  <a:lnTo>
-                    <a:pt x="3205735" y="3265777"/>
-                  </a:lnTo>
-                  <a:lnTo>
-                    <a:pt x="3282979" y="3286146"/>
-                  </a:lnTo>
-                  <a:lnTo>
-                    <a:pt x="3360223" y="3305443"/>
-                  </a:lnTo>
-                  <a:lnTo>
-                    <a:pt x="3437466" y="3323723"/>
-                  </a:lnTo>
-                  <a:lnTo>
-                    <a:pt x="3514710" y="3341042"/>
-                  </a:lnTo>
-                  <a:lnTo>
-                    <a:pt x="3591953" y="3357448"/>
-                  </a:lnTo>
-                  <a:lnTo>
-                    <a:pt x="3669197" y="3372991"/>
-                  </a:lnTo>
-                  <a:lnTo>
-                    <a:pt x="3746440" y="3387715"/>
-                  </a:lnTo>
-                  <a:lnTo>
-                    <a:pt x="3823684" y="3401664"/>
-                  </a:lnTo>
-                  <a:lnTo>
-                    <a:pt x="3900928" y="3414878"/>
-                  </a:lnTo>
-                  <a:lnTo>
-                    <a:pt x="3978171" y="3427397"/>
-                  </a:lnTo>
-                  <a:lnTo>
-                    <a:pt x="4055415" y="3439257"/>
-                  </a:lnTo>
-                  <a:lnTo>
-                    <a:pt x="4132658" y="3450492"/>
-                  </a:lnTo>
-                  <a:lnTo>
-                    <a:pt x="4209902" y="3461135"/>
-                  </a:lnTo>
-                  <a:lnTo>
-                    <a:pt x="4287145" y="3471219"/>
-                  </a:lnTo>
-                  <a:lnTo>
-                    <a:pt x="4364389" y="3480771"/>
-                  </a:lnTo>
-                  <a:lnTo>
-                    <a:pt x="4441633" y="3489820"/>
-                  </a:lnTo>
-                  <a:lnTo>
-                    <a:pt x="4518876" y="3498393"/>
-                  </a:lnTo>
-                  <a:lnTo>
-                    <a:pt x="4596120" y="3506515"/>
-                  </a:lnTo>
-                  <a:lnTo>
-                    <a:pt x="4673363" y="3514209"/>
-                  </a:lnTo>
-                  <a:lnTo>
-                    <a:pt x="4750607" y="3521497"/>
-                  </a:lnTo>
-                  <a:lnTo>
-                    <a:pt x="4827850" y="3528403"/>
-                  </a:lnTo>
-                  <a:lnTo>
-                    <a:pt x="4905094" y="3534944"/>
-                  </a:lnTo>
-                  <a:lnTo>
-                    <a:pt x="4982338" y="3541141"/>
-                  </a:lnTo>
-                  <a:lnTo>
-                    <a:pt x="5059581" y="3547012"/>
-                  </a:lnTo>
-                  <a:lnTo>
-                    <a:pt x="5136825" y="3552574"/>
-                  </a:lnTo>
-                  <a:lnTo>
-                    <a:pt x="5214068" y="3557842"/>
-                  </a:lnTo>
-                  <a:lnTo>
-                    <a:pt x="5291312" y="3562834"/>
-                  </a:lnTo>
-                  <a:lnTo>
-                    <a:pt x="5368555" y="3567562"/>
-                  </a:lnTo>
-                  <a:lnTo>
-                    <a:pt x="5445799" y="3572042"/>
-                  </a:lnTo>
-                  <a:lnTo>
-                    <a:pt x="5523043" y="3576286"/>
-                  </a:lnTo>
-                  <a:lnTo>
-                    <a:pt x="5600286" y="3580306"/>
-                  </a:lnTo>
-                  <a:lnTo>
-                    <a:pt x="5677530" y="3584115"/>
-                  </a:lnTo>
-                  <a:lnTo>
-                    <a:pt x="5754773" y="3587723"/>
-                  </a:lnTo>
-                  <a:lnTo>
-                    <a:pt x="5832017" y="3591141"/>
-                  </a:lnTo>
-                  <a:lnTo>
-                    <a:pt x="5909260" y="3594379"/>
-                  </a:lnTo>
-                  <a:lnTo>
-                    <a:pt x="5986504" y="3597447"/>
-                  </a:lnTo>
-                  <a:lnTo>
-                    <a:pt x="6063748" y="3600353"/>
-                  </a:lnTo>
-                  <a:lnTo>
-                    <a:pt x="6140991" y="3603106"/>
+                    <a:pt x="38749" y="94495"/>
+                  </a:lnTo>
+                  <a:lnTo>
+                    <a:pt x="115993" y="272945"/>
+                  </a:lnTo>
+                  <a:lnTo>
+                    <a:pt x="193236" y="441999"/>
+                  </a:lnTo>
+                  <a:lnTo>
+                    <a:pt x="270480" y="602152"/>
+                  </a:lnTo>
+                  <a:lnTo>
+                    <a:pt x="347723" y="753873"/>
+                  </a:lnTo>
+                  <a:lnTo>
+                    <a:pt x="424967" y="897606"/>
+                  </a:lnTo>
+                  <a:lnTo>
+                    <a:pt x="502210" y="1033770"/>
+                  </a:lnTo>
+                  <a:lnTo>
+                    <a:pt x="579454" y="1162766"/>
+                  </a:lnTo>
+                  <a:lnTo>
+                    <a:pt x="656698" y="1284969"/>
+                  </a:lnTo>
+                  <a:lnTo>
+                    <a:pt x="733941" y="1400739"/>
+                  </a:lnTo>
+                  <a:lnTo>
+                    <a:pt x="811185" y="1510413"/>
+                  </a:lnTo>
+                  <a:lnTo>
+                    <a:pt x="888428" y="1614312"/>
+                  </a:lnTo>
+                  <a:lnTo>
+                    <a:pt x="965672" y="1712741"/>
+                  </a:lnTo>
+                  <a:lnTo>
+                    <a:pt x="1042915" y="1805988"/>
+                  </a:lnTo>
+                  <a:lnTo>
+                    <a:pt x="1120159" y="1894324"/>
+                  </a:lnTo>
+                  <a:lnTo>
+                    <a:pt x="1197403" y="1978010"/>
+                  </a:lnTo>
+                  <a:lnTo>
+                    <a:pt x="1274646" y="2057290"/>
+                  </a:lnTo>
+                  <a:lnTo>
+                    <a:pt x="1351890" y="2132395"/>
+                  </a:lnTo>
+                  <a:lnTo>
+                    <a:pt x="1429133" y="2203546"/>
+                  </a:lnTo>
+                  <a:lnTo>
+                    <a:pt x="1506377" y="2270951"/>
+                  </a:lnTo>
+                  <a:lnTo>
+                    <a:pt x="1583620" y="2334807"/>
+                  </a:lnTo>
+                  <a:lnTo>
+                    <a:pt x="1660864" y="2395300"/>
+                  </a:lnTo>
+                  <a:lnTo>
+                    <a:pt x="1738108" y="2452609"/>
+                  </a:lnTo>
+                  <a:lnTo>
+                    <a:pt x="1815351" y="2506900"/>
+                  </a:lnTo>
+                  <a:lnTo>
+                    <a:pt x="1892595" y="2558333"/>
+                  </a:lnTo>
+                  <a:lnTo>
+                    <a:pt x="1969838" y="2607057"/>
+                  </a:lnTo>
+                  <a:lnTo>
+                    <a:pt x="2047082" y="2653217"/>
+                  </a:lnTo>
+                  <a:lnTo>
+                    <a:pt x="2124325" y="2696945"/>
+                  </a:lnTo>
+                  <a:lnTo>
+                    <a:pt x="2201569" y="2738372"/>
+                  </a:lnTo>
+                  <a:lnTo>
+                    <a:pt x="2278813" y="2777617"/>
+                  </a:lnTo>
+                  <a:lnTo>
+                    <a:pt x="2356056" y="2814796"/>
+                  </a:lnTo>
+                  <a:lnTo>
+                    <a:pt x="2433300" y="2850017"/>
+                  </a:lnTo>
+                  <a:lnTo>
+                    <a:pt x="2510543" y="2883384"/>
+                  </a:lnTo>
+                  <a:lnTo>
+                    <a:pt x="2587787" y="2914994"/>
+                  </a:lnTo>
+                  <a:lnTo>
+                    <a:pt x="2665030" y="2944940"/>
+                  </a:lnTo>
+                  <a:lnTo>
+                    <a:pt x="2742274" y="2973309"/>
+                  </a:lnTo>
+                  <a:lnTo>
+                    <a:pt x="2819518" y="3000185"/>
+                  </a:lnTo>
+                  <a:lnTo>
+                    <a:pt x="2896761" y="3025645"/>
+                  </a:lnTo>
+                  <a:lnTo>
+                    <a:pt x="2974005" y="3049765"/>
+                  </a:lnTo>
+                  <a:lnTo>
+                    <a:pt x="3051248" y="3072615"/>
+                  </a:lnTo>
+                  <a:lnTo>
+                    <a:pt x="3128492" y="3094261"/>
+                  </a:lnTo>
+                  <a:lnTo>
+                    <a:pt x="3205735" y="3114769"/>
+                  </a:lnTo>
+                  <a:lnTo>
+                    <a:pt x="3282979" y="3134196"/>
+                  </a:lnTo>
+                  <a:lnTo>
+                    <a:pt x="3360223" y="3152600"/>
+                  </a:lnTo>
+                  <a:lnTo>
+                    <a:pt x="3437466" y="3170036"/>
+                  </a:lnTo>
+                  <a:lnTo>
+                    <a:pt x="3514710" y="3186553"/>
+                  </a:lnTo>
+                  <a:lnTo>
+                    <a:pt x="3591953" y="3202201"/>
+                  </a:lnTo>
+                  <a:lnTo>
+                    <a:pt x="3669197" y="3217025"/>
+                  </a:lnTo>
+                  <a:lnTo>
+                    <a:pt x="3746440" y="3231068"/>
+                  </a:lnTo>
+                  <a:lnTo>
+                    <a:pt x="3823684" y="3244372"/>
+                  </a:lnTo>
+                  <a:lnTo>
+                    <a:pt x="3900928" y="3256975"/>
+                  </a:lnTo>
+                  <a:lnTo>
+                    <a:pt x="3978171" y="3268915"/>
+                  </a:lnTo>
+                  <a:lnTo>
+                    <a:pt x="4055415" y="3280227"/>
+                  </a:lnTo>
+                  <a:lnTo>
+                    <a:pt x="4132658" y="3290942"/>
+                  </a:lnTo>
+                  <a:lnTo>
+                    <a:pt x="4209902" y="3301094"/>
+                  </a:lnTo>
+                  <a:lnTo>
+                    <a:pt x="4287145" y="3310711"/>
+                  </a:lnTo>
+                  <a:lnTo>
+                    <a:pt x="4364389" y="3319821"/>
+                  </a:lnTo>
+                  <a:lnTo>
+                    <a:pt x="4441633" y="3328452"/>
+                  </a:lnTo>
+                  <a:lnTo>
+                    <a:pt x="4518876" y="3336629"/>
+                  </a:lnTo>
+                  <a:lnTo>
+                    <a:pt x="4596120" y="3344375"/>
+                  </a:lnTo>
+                  <a:lnTo>
+                    <a:pt x="4673363" y="3351713"/>
+                  </a:lnTo>
+                  <a:lnTo>
+                    <a:pt x="4750607" y="3358665"/>
+                  </a:lnTo>
+                  <a:lnTo>
+                    <a:pt x="4827850" y="3365250"/>
+                  </a:lnTo>
+                  <a:lnTo>
+                    <a:pt x="4905094" y="3371489"/>
+                  </a:lnTo>
+                  <a:lnTo>
+                    <a:pt x="4982338" y="3377400"/>
+                  </a:lnTo>
+                  <a:lnTo>
+                    <a:pt x="5059581" y="3382999"/>
+                  </a:lnTo>
+                  <a:lnTo>
+                    <a:pt x="5136825" y="3388304"/>
+                  </a:lnTo>
+                  <a:lnTo>
+                    <a:pt x="5214068" y="3393329"/>
+                  </a:lnTo>
+                  <a:lnTo>
+                    <a:pt x="5291312" y="3398090"/>
+                  </a:lnTo>
+                  <a:lnTo>
+                    <a:pt x="5368555" y="3402600"/>
+                  </a:lnTo>
+                  <a:lnTo>
+                    <a:pt x="5445799" y="3406872"/>
+                  </a:lnTo>
+                  <a:lnTo>
+                    <a:pt x="5523043" y="3410920"/>
+                  </a:lnTo>
+                  <a:lnTo>
+                    <a:pt x="5600286" y="3414754"/>
+                  </a:lnTo>
+                  <a:lnTo>
+                    <a:pt x="5677530" y="3418387"/>
+                  </a:lnTo>
+                  <a:lnTo>
+                    <a:pt x="5754773" y="3421828"/>
+                  </a:lnTo>
+                  <a:lnTo>
+                    <a:pt x="5832017" y="3425088"/>
+                  </a:lnTo>
+                  <a:lnTo>
+                    <a:pt x="5909260" y="3428177"/>
+                  </a:lnTo>
+                  <a:lnTo>
+                    <a:pt x="5986504" y="3431102"/>
+                  </a:lnTo>
+                  <a:lnTo>
+                    <a:pt x="6063748" y="3433874"/>
+                  </a:lnTo>
+                  <a:lnTo>
+                    <a:pt x="6140991" y="3436500"/>
                   </a:lnTo>
                 </a:path>
               </a:pathLst>
@@ -4356,7 +4356,7 @@
           </p:nvSpPr>
           <p:spPr>
             <a:xfrm>
-              <a:off x="817517" y="4679530"/>
+              <a:off x="817517" y="4727786"/>
               <a:ext cx="7799693" cy="0"/>
             </a:xfrm>
             <a:custGeom>
@@ -4399,15 +4399,15 @@
           </p:nvSpPr>
           <p:spPr>
             <a:xfrm>
-              <a:off x="4117484" y="1896563"/>
-              <a:ext cx="0" cy="3826579"/>
+              <a:off x="4117484" y="2073503"/>
+              <a:ext cx="0" cy="3649639"/>
             </a:xfrm>
             <a:custGeom>
               <a:avLst/>
               <a:pathLst>
-                <a:path w="0" h="3826579">
+                <a:path w="0" h="3649639">
                   <a:moveTo>
-                    <a:pt x="0" y="3826579"/>
+                    <a:pt x="0" y="3649639"/>
                   </a:moveTo>
                   <a:lnTo>
                     <a:pt x="0" y="0"/>
@@ -4442,7 +4442,7 @@
           </p:nvSpPr>
           <p:spPr>
             <a:xfrm>
-              <a:off x="692708" y="5509156"/>
+              <a:off x="692708" y="5517199"/>
               <a:ext cx="62179" cy="80101"/>
             </a:xfrm>
             <a:prstGeom prst="rect">
@@ -4488,7 +4488,7 @@
           </p:nvSpPr>
           <p:spPr>
             <a:xfrm>
-              <a:off x="692708" y="4639479"/>
+              <a:off x="692708" y="4687735"/>
               <a:ext cx="62179" cy="80101"/>
             </a:xfrm>
             <a:prstGeom prst="rect">
@@ -4534,7 +4534,7 @@
           </p:nvSpPr>
           <p:spPr>
             <a:xfrm>
-              <a:off x="692708" y="3769802"/>
+              <a:off x="692708" y="3858272"/>
               <a:ext cx="62179" cy="80101"/>
             </a:xfrm>
             <a:prstGeom prst="rect">
@@ -4580,7 +4580,7 @@
           </p:nvSpPr>
           <p:spPr>
             <a:xfrm>
-              <a:off x="692708" y="2900125"/>
+              <a:off x="692708" y="3028808"/>
               <a:ext cx="62179" cy="80101"/>
             </a:xfrm>
             <a:prstGeom prst="rect">
@@ -4626,7 +4626,7 @@
           </p:nvSpPr>
           <p:spPr>
             <a:xfrm>
-              <a:off x="692708" y="2030448"/>
+              <a:off x="692708" y="2199345"/>
               <a:ext cx="62179" cy="80101"/>
             </a:xfrm>
             <a:prstGeom prst="rect">
@@ -4902,7 +4902,7 @@
           </p:nvSpPr>
           <p:spPr>
             <a:xfrm rot="-5400000">
-              <a:off x="68446" y="3759743"/>
+              <a:off x="68446" y="3848213"/>
               <a:ext cx="1016904" cy="100218"/>
             </a:xfrm>
             <a:prstGeom prst="rect">
@@ -4943,6 +4943,52 @@
         <p:sp>
           <p:nvSpPr>
             <p:cNvPr id="38" name="tx38"/>
+            <p:cNvSpPr/>
+            <p:nvPr/>
+          </p:nvSpPr>
+          <p:spPr>
+            <a:xfrm>
+              <a:off x="817517" y="1896563"/>
+              <a:ext cx="5689762" cy="82021"/>
+            </a:xfrm>
+            <a:prstGeom prst="rect">
+              <a:avLst/>
+            </a:prstGeom>
+            <a:noFill/>
+          </p:spPr>
+          <p:txBody>
+            <a:bodyPr lIns="0" rIns="0" tIns="0" bIns="0" anchorCtr="1" anchor="ctr" wrap="none"/>
+            <a:lstStyle/>
+            <a:p>
+              <a:pPr algn="l" marL="0" marR="0" indent="0">
+                <a:lnSpc>
+                  <a:spcPts val="900"/>
+                </a:lnSpc>
+                <a:spcBef>
+                  <a:spcPts val="0"/>
+                </a:spcBef>
+                <a:spcAft>
+                  <a:spcPts val="0"/>
+                </a:spcAft>
+              </a:pPr>
+              <a:r>
+                <a:rPr sz="900">
+                  <a:solidFill>
+                    <a:srgbClr val="404040">
+                      <a:alpha val="100000"/>
+                    </a:srgbClr>
+                  </a:solidFill>
+                  <a:latin typeface="Helvetica"/>
+                  <a:cs typeface="Helvetica"/>
+                </a:rPr>
+                <a:t>subHR per 0.1 ratio decline: 1.86 (1.12-3.10)  |  per IQR decline (Δ = 0.30): 6.25 (1.39-28.21)  |  IQR: [0.84, 1.14]</a:t>
+              </a:r>
+            </a:p>
+          </p:txBody>
+        </p:sp>
+        <p:sp>
+          <p:nvSpPr>
+            <p:cNvPr id="39" name="tx39"/>
             <p:cNvSpPr/>
             <p:nvPr/>
           </p:nvSpPr>

--- a/docs/pptx/auc3/jx-auc3-linsubhr-ratio-hosp5.pptx
+++ b/docs/pptx/auc3/jx-auc3-linsubhr-ratio-hosp5.pptx
@@ -4949,7 +4949,7 @@
           <p:spPr>
             <a:xfrm>
               <a:off x="817517" y="1896563"/>
-              <a:ext cx="5689762" cy="82021"/>
+              <a:ext cx="6232916" cy="82021"/>
             </a:xfrm>
             <a:prstGeom prst="rect">
               <a:avLst/>
@@ -4981,7 +4981,7 @@
                   <a:latin typeface="Helvetica"/>
                   <a:cs typeface="Helvetica"/>
                 </a:rPr>
-                <a:t>subHR per 0.1 ratio decline: 1.86 (1.12-3.10)  |  per IQR decline (Δ = 0.30): 6.25 (1.39-28.21)  |  IQR: [0.84, 1.14]</a:t>
+                <a:t>subHR per 0.1 ratio decline: 1.86 (1.12-3.10), p = 0.017  |  per IQR decline (Δ = 0.30): 6.25 (1.39-28.21)  |  IQR: [0.84, 1.14]</a:t>
               </a:r>
             </a:p>
           </p:txBody>

--- a/docs/pptx/auc3/jx-auc3-linsubhr-ratio-hosp5.pptx
+++ b/docs/pptx/auc3/jx-auc3-linsubhr-ratio-hosp5.pptx
@@ -2443,7 +2443,7 @@
           </p:nvSpPr>
           <p:spPr>
             <a:xfrm>
-              <a:off x="1615213" y="2073503"/>
+              <a:off x="1531834" y="2073503"/>
               <a:ext cx="0" cy="3649639"/>
             </a:xfrm>
             <a:custGeom>
@@ -2486,7 +2486,7 @@
           </p:nvSpPr>
           <p:spPr>
             <a:xfrm>
-              <a:off x="3387871" y="2073503"/>
+              <a:off x="3586410" y="2073503"/>
               <a:ext cx="0" cy="3649639"/>
             </a:xfrm>
             <a:custGeom>
@@ -2529,7 +2529,7 @@
           </p:nvSpPr>
           <p:spPr>
             <a:xfrm>
-              <a:off x="5160528" y="2073503"/>
+              <a:off x="5640985" y="2073503"/>
               <a:ext cx="0" cy="3649639"/>
             </a:xfrm>
             <a:custGeom>
@@ -2572,7 +2572,7 @@
           </p:nvSpPr>
           <p:spPr>
             <a:xfrm>
-              <a:off x="6933186" y="2073503"/>
+              <a:off x="7695561" y="2073503"/>
               <a:ext cx="0" cy="3649639"/>
             </a:xfrm>
             <a:custGeom>
@@ -2830,7 +2830,7 @@
           </p:nvSpPr>
           <p:spPr>
             <a:xfrm>
-              <a:off x="2501542" y="2073503"/>
+              <a:off x="2559122" y="2073503"/>
               <a:ext cx="0" cy="3649639"/>
             </a:xfrm>
             <a:custGeom>
@@ -2873,7 +2873,7 @@
           </p:nvSpPr>
           <p:spPr>
             <a:xfrm>
-              <a:off x="4274200" y="2073503"/>
+              <a:off x="4613698" y="2073503"/>
               <a:ext cx="0" cy="3649639"/>
             </a:xfrm>
             <a:custGeom>
@@ -2916,7 +2916,7 @@
           </p:nvSpPr>
           <p:spPr>
             <a:xfrm>
-              <a:off x="6046857" y="2073503"/>
+              <a:off x="6668273" y="2073503"/>
               <a:ext cx="0" cy="3649639"/>
             </a:xfrm>
             <a:custGeom>
@@ -2953,559 +2953,528 @@
         </p:sp>
         <p:sp>
           <p:nvSpPr>
-            <p:cNvPr id="20" name="pl20"/>
+            <p:cNvPr id="20" name="pg20"/>
             <p:cNvSpPr/>
             <p:nvPr/>
           </p:nvSpPr>
           <p:spPr>
             <a:xfrm>
-              <a:off x="7819515" y="2073503"/>
-              <a:ext cx="0" cy="3649639"/>
+              <a:off x="1172049" y="2073503"/>
+              <a:ext cx="7090630" cy="3479262"/>
             </a:xfrm>
             <a:custGeom>
               <a:avLst/>
               <a:pathLst>
-                <a:path w="0" h="3649639">
+                <a:path w="7090630" h="3479262">
                   <a:moveTo>
-                    <a:pt x="0" y="3649639"/>
+                    <a:pt x="2254140" y="0"/>
                   </a:moveTo>
                   <a:lnTo>
+                    <a:pt x="2291920" y="180445"/>
+                  </a:lnTo>
+                  <a:lnTo>
+                    <a:pt x="2363543" y="490428"/>
+                  </a:lnTo>
+                  <a:lnTo>
+                    <a:pt x="2435165" y="771322"/>
+                  </a:lnTo>
+                  <a:lnTo>
+                    <a:pt x="2506788" y="1025857"/>
+                  </a:lnTo>
+                  <a:lnTo>
+                    <a:pt x="2578410" y="1256507"/>
+                  </a:lnTo>
+                  <a:lnTo>
+                    <a:pt x="2650033" y="1465512"/>
+                  </a:lnTo>
+                  <a:lnTo>
+                    <a:pt x="2721655" y="1654904"/>
+                  </a:lnTo>
+                  <a:lnTo>
+                    <a:pt x="2793278" y="1826523"/>
+                  </a:lnTo>
+                  <a:lnTo>
+                    <a:pt x="2864901" y="1982038"/>
+                  </a:lnTo>
+                  <a:lnTo>
+                    <a:pt x="2936523" y="2122959"/>
+                  </a:lnTo>
+                  <a:lnTo>
+                    <a:pt x="3008146" y="2250656"/>
+                  </a:lnTo>
+                  <a:lnTo>
+                    <a:pt x="3079768" y="2366369"/>
+                  </a:lnTo>
+                  <a:lnTo>
+                    <a:pt x="3151391" y="2471225"/>
+                  </a:lnTo>
+                  <a:lnTo>
+                    <a:pt x="3223013" y="2566240"/>
+                  </a:lnTo>
+                  <a:lnTo>
+                    <a:pt x="3294636" y="2652339"/>
+                  </a:lnTo>
+                  <a:lnTo>
+                    <a:pt x="3366258" y="2662050"/>
+                  </a:lnTo>
+                  <a:lnTo>
+                    <a:pt x="3437881" y="2669931"/>
+                  </a:lnTo>
+                  <a:lnTo>
+                    <a:pt x="3509503" y="2677736"/>
+                  </a:lnTo>
+                  <a:lnTo>
+                    <a:pt x="3581126" y="2685466"/>
+                  </a:lnTo>
+                  <a:lnTo>
+                    <a:pt x="3652748" y="2693122"/>
+                  </a:lnTo>
+                  <a:lnTo>
+                    <a:pt x="3724371" y="2700705"/>
+                  </a:lnTo>
+                  <a:lnTo>
+                    <a:pt x="3795993" y="2708215"/>
+                  </a:lnTo>
+                  <a:lnTo>
+                    <a:pt x="3867616" y="2715653"/>
+                  </a:lnTo>
+                  <a:lnTo>
+                    <a:pt x="3939238" y="2723020"/>
+                  </a:lnTo>
+                  <a:lnTo>
+                    <a:pt x="4010861" y="2730316"/>
+                  </a:lnTo>
+                  <a:lnTo>
+                    <a:pt x="4082483" y="2737542"/>
+                  </a:lnTo>
+                  <a:lnTo>
+                    <a:pt x="4154106" y="2744698"/>
+                  </a:lnTo>
+                  <a:lnTo>
+                    <a:pt x="4225729" y="2751786"/>
+                  </a:lnTo>
+                  <a:lnTo>
+                    <a:pt x="4297351" y="2758807"/>
+                  </a:lnTo>
+                  <a:lnTo>
+                    <a:pt x="4368974" y="2765759"/>
+                  </a:lnTo>
+                  <a:lnTo>
+                    <a:pt x="4440596" y="2772645"/>
+                  </a:lnTo>
+                  <a:lnTo>
+                    <a:pt x="4512219" y="2779465"/>
+                  </a:lnTo>
+                  <a:lnTo>
+                    <a:pt x="4583841" y="2786220"/>
+                  </a:lnTo>
+                  <a:lnTo>
+                    <a:pt x="4655464" y="2792910"/>
+                  </a:lnTo>
+                  <a:lnTo>
+                    <a:pt x="4727086" y="2799536"/>
+                  </a:lnTo>
+                  <a:lnTo>
+                    <a:pt x="4798709" y="2806098"/>
+                  </a:lnTo>
+                  <a:lnTo>
+                    <a:pt x="4870331" y="2812597"/>
+                  </a:lnTo>
+                  <a:lnTo>
+                    <a:pt x="4941954" y="2819034"/>
+                  </a:lnTo>
+                  <a:lnTo>
+                    <a:pt x="5013576" y="2825409"/>
+                  </a:lnTo>
+                  <a:lnTo>
+                    <a:pt x="5085199" y="2831723"/>
+                  </a:lnTo>
+                  <a:lnTo>
+                    <a:pt x="5156821" y="2837976"/>
+                  </a:lnTo>
+                  <a:lnTo>
+                    <a:pt x="5228444" y="2844170"/>
+                  </a:lnTo>
+                  <a:lnTo>
+                    <a:pt x="5300066" y="2850304"/>
+                  </a:lnTo>
+                  <a:lnTo>
+                    <a:pt x="5371689" y="2856379"/>
+                  </a:lnTo>
+                  <a:lnTo>
+                    <a:pt x="5443311" y="2862396"/>
+                  </a:lnTo>
+                  <a:lnTo>
+                    <a:pt x="5514934" y="2868355"/>
+                  </a:lnTo>
+                  <a:lnTo>
+                    <a:pt x="5586557" y="2874257"/>
+                  </a:lnTo>
+                  <a:lnTo>
+                    <a:pt x="5658179" y="2880103"/>
+                  </a:lnTo>
+                  <a:lnTo>
+                    <a:pt x="5729802" y="2885892"/>
+                  </a:lnTo>
+                  <a:lnTo>
+                    <a:pt x="5801424" y="2891626"/>
+                  </a:lnTo>
+                  <a:lnTo>
+                    <a:pt x="5873047" y="2897305"/>
+                  </a:lnTo>
+                  <a:lnTo>
+                    <a:pt x="5944669" y="2902930"/>
+                  </a:lnTo>
+                  <a:lnTo>
+                    <a:pt x="6016292" y="2908500"/>
+                  </a:lnTo>
+                  <a:lnTo>
+                    <a:pt x="6087914" y="2914017"/>
+                  </a:lnTo>
+                  <a:lnTo>
+                    <a:pt x="6159537" y="2919481"/>
+                  </a:lnTo>
+                  <a:lnTo>
+                    <a:pt x="6231159" y="2924893"/>
+                  </a:lnTo>
+                  <a:lnTo>
+                    <a:pt x="6302782" y="2930253"/>
+                  </a:lnTo>
+                  <a:lnTo>
+                    <a:pt x="6374404" y="2935561"/>
+                  </a:lnTo>
+                  <a:lnTo>
+                    <a:pt x="6446027" y="2940819"/>
+                  </a:lnTo>
+                  <a:lnTo>
+                    <a:pt x="6517649" y="2946026"/>
+                  </a:lnTo>
+                  <a:lnTo>
+                    <a:pt x="6589272" y="2951183"/>
+                  </a:lnTo>
+                  <a:lnTo>
+                    <a:pt x="6660894" y="2956291"/>
+                  </a:lnTo>
+                  <a:lnTo>
+                    <a:pt x="6732517" y="2961350"/>
+                  </a:lnTo>
+                  <a:lnTo>
+                    <a:pt x="6804139" y="2966360"/>
+                  </a:lnTo>
+                  <a:lnTo>
+                    <a:pt x="6875762" y="2971322"/>
+                  </a:lnTo>
+                  <a:lnTo>
+                    <a:pt x="6947385" y="2976237"/>
+                  </a:lnTo>
+                  <a:lnTo>
+                    <a:pt x="7019007" y="2981104"/>
+                  </a:lnTo>
+                  <a:lnTo>
+                    <a:pt x="7090630" y="2985925"/>
+                  </a:lnTo>
+                  <a:lnTo>
+                    <a:pt x="7090630" y="3479262"/>
+                  </a:lnTo>
+                  <a:lnTo>
+                    <a:pt x="7019007" y="3478798"/>
+                  </a:lnTo>
+                  <a:lnTo>
+                    <a:pt x="6947385" y="3478286"/>
+                  </a:lnTo>
+                  <a:lnTo>
+                    <a:pt x="6875762" y="3477720"/>
+                  </a:lnTo>
+                  <a:lnTo>
+                    <a:pt x="6804139" y="3477096"/>
+                  </a:lnTo>
+                  <a:lnTo>
+                    <a:pt x="6732517" y="3476407"/>
+                  </a:lnTo>
+                  <a:lnTo>
+                    <a:pt x="6660894" y="3475647"/>
+                  </a:lnTo>
+                  <a:lnTo>
+                    <a:pt x="6589272" y="3474809"/>
+                  </a:lnTo>
+                  <a:lnTo>
+                    <a:pt x="6517649" y="3473883"/>
+                  </a:lnTo>
+                  <a:lnTo>
+                    <a:pt x="6446027" y="3472862"/>
+                  </a:lnTo>
+                  <a:lnTo>
+                    <a:pt x="6374404" y="3471734"/>
+                  </a:lnTo>
+                  <a:lnTo>
+                    <a:pt x="6302782" y="3470490"/>
+                  </a:lnTo>
+                  <a:lnTo>
+                    <a:pt x="6231159" y="3469118"/>
+                  </a:lnTo>
+                  <a:lnTo>
+                    <a:pt x="6159537" y="3467603"/>
+                  </a:lnTo>
+                  <a:lnTo>
+                    <a:pt x="6087914" y="3465931"/>
+                  </a:lnTo>
+                  <a:lnTo>
+                    <a:pt x="6016292" y="3464086"/>
+                  </a:lnTo>
+                  <a:lnTo>
+                    <a:pt x="5944669" y="3462050"/>
+                  </a:lnTo>
+                  <a:lnTo>
+                    <a:pt x="5873047" y="3459803"/>
+                  </a:lnTo>
+                  <a:lnTo>
+                    <a:pt x="5801424" y="3457324"/>
+                  </a:lnTo>
+                  <a:lnTo>
+                    <a:pt x="5729802" y="3454587"/>
+                  </a:lnTo>
+                  <a:lnTo>
+                    <a:pt x="5658179" y="3451568"/>
+                  </a:lnTo>
+                  <a:lnTo>
+                    <a:pt x="5586557" y="3448235"/>
+                  </a:lnTo>
+                  <a:lnTo>
+                    <a:pt x="5514934" y="3444558"/>
+                  </a:lnTo>
+                  <a:lnTo>
+                    <a:pt x="5443311" y="3440500"/>
+                  </a:lnTo>
+                  <a:lnTo>
+                    <a:pt x="5371689" y="3436021"/>
+                  </a:lnTo>
+                  <a:lnTo>
+                    <a:pt x="5300066" y="3431079"/>
+                  </a:lnTo>
+                  <a:lnTo>
+                    <a:pt x="5228444" y="3425624"/>
+                  </a:lnTo>
+                  <a:lnTo>
+                    <a:pt x="5156821" y="3419605"/>
+                  </a:lnTo>
+                  <a:lnTo>
+                    <a:pt x="5085199" y="3412963"/>
+                  </a:lnTo>
+                  <a:lnTo>
+                    <a:pt x="5013576" y="3405633"/>
+                  </a:lnTo>
+                  <a:lnTo>
+                    <a:pt x="4941954" y="3397544"/>
+                  </a:lnTo>
+                  <a:lnTo>
+                    <a:pt x="4870331" y="3388617"/>
+                  </a:lnTo>
+                  <a:lnTo>
+                    <a:pt x="4798709" y="3378765"/>
+                  </a:lnTo>
+                  <a:lnTo>
+                    <a:pt x="4727086" y="3367893"/>
+                  </a:lnTo>
+                  <a:lnTo>
+                    <a:pt x="4655464" y="3355896"/>
+                  </a:lnTo>
+                  <a:lnTo>
+                    <a:pt x="4583841" y="3342656"/>
+                  </a:lnTo>
+                  <a:lnTo>
+                    <a:pt x="4512219" y="3328045"/>
+                  </a:lnTo>
+                  <a:lnTo>
+                    <a:pt x="4440596" y="3311920"/>
+                  </a:lnTo>
+                  <a:lnTo>
+                    <a:pt x="4368974" y="3294126"/>
+                  </a:lnTo>
+                  <a:lnTo>
+                    <a:pt x="4297351" y="3274490"/>
+                  </a:lnTo>
+                  <a:lnTo>
+                    <a:pt x="4225729" y="3252819"/>
+                  </a:lnTo>
+                  <a:lnTo>
+                    <a:pt x="4154106" y="3228905"/>
+                  </a:lnTo>
+                  <a:lnTo>
+                    <a:pt x="4082483" y="3202514"/>
+                  </a:lnTo>
+                  <a:lnTo>
+                    <a:pt x="4010861" y="3173390"/>
+                  </a:lnTo>
+                  <a:lnTo>
+                    <a:pt x="3939238" y="3141250"/>
+                  </a:lnTo>
+                  <a:lnTo>
+                    <a:pt x="3867616" y="3105782"/>
+                  </a:lnTo>
+                  <a:lnTo>
+                    <a:pt x="3795993" y="3066640"/>
+                  </a:lnTo>
+                  <a:lnTo>
+                    <a:pt x="3724371" y="3023445"/>
+                  </a:lnTo>
+                  <a:lnTo>
+                    <a:pt x="3652748" y="2975777"/>
+                  </a:lnTo>
+                  <a:lnTo>
+                    <a:pt x="3581126" y="2923173"/>
+                  </a:lnTo>
+                  <a:lnTo>
+                    <a:pt x="3509503" y="2865121"/>
+                  </a:lnTo>
+                  <a:lnTo>
+                    <a:pt x="3437881" y="2801057"/>
+                  </a:lnTo>
+                  <a:lnTo>
+                    <a:pt x="3366258" y="2730359"/>
+                  </a:lnTo>
+                  <a:lnTo>
+                    <a:pt x="3294636" y="2654093"/>
+                  </a:lnTo>
+                  <a:lnTo>
+                    <a:pt x="3223013" y="2646059"/>
+                  </a:lnTo>
+                  <a:lnTo>
+                    <a:pt x="3151391" y="2637947"/>
+                  </a:lnTo>
+                  <a:lnTo>
+                    <a:pt x="3079768" y="2629757"/>
+                  </a:lnTo>
+                  <a:lnTo>
+                    <a:pt x="3008146" y="2621487"/>
+                  </a:lnTo>
+                  <a:lnTo>
+                    <a:pt x="2936523" y="2613137"/>
+                  </a:lnTo>
+                  <a:lnTo>
+                    <a:pt x="2864901" y="2604706"/>
+                  </a:lnTo>
+                  <a:lnTo>
+                    <a:pt x="2793278" y="2596194"/>
+                  </a:lnTo>
+                  <a:lnTo>
+                    <a:pt x="2721655" y="2587599"/>
+                  </a:lnTo>
+                  <a:lnTo>
+                    <a:pt x="2650033" y="2578921"/>
+                  </a:lnTo>
+                  <a:lnTo>
+                    <a:pt x="2578410" y="2570159"/>
+                  </a:lnTo>
+                  <a:lnTo>
+                    <a:pt x="2506788" y="2561312"/>
+                  </a:lnTo>
+                  <a:lnTo>
+                    <a:pt x="2435165" y="2552380"/>
+                  </a:lnTo>
+                  <a:lnTo>
+                    <a:pt x="2363543" y="2543360"/>
+                  </a:lnTo>
+                  <a:lnTo>
+                    <a:pt x="2291920" y="2534254"/>
+                  </a:lnTo>
+                  <a:lnTo>
+                    <a:pt x="2220298" y="2525059"/>
+                  </a:lnTo>
+                  <a:lnTo>
+                    <a:pt x="2148675" y="2515776"/>
+                  </a:lnTo>
+                  <a:lnTo>
+                    <a:pt x="2077053" y="2506402"/>
+                  </a:lnTo>
+                  <a:lnTo>
+                    <a:pt x="2005430" y="2496938"/>
+                  </a:lnTo>
+                  <a:lnTo>
+                    <a:pt x="1933808" y="2487382"/>
+                  </a:lnTo>
+                  <a:lnTo>
+                    <a:pt x="1862185" y="2477734"/>
+                  </a:lnTo>
+                  <a:lnTo>
+                    <a:pt x="1790563" y="2467992"/>
+                  </a:lnTo>
+                  <a:lnTo>
+                    <a:pt x="1718940" y="2458155"/>
+                  </a:lnTo>
+                  <a:lnTo>
+                    <a:pt x="1647318" y="2448224"/>
+                  </a:lnTo>
+                  <a:lnTo>
+                    <a:pt x="1575695" y="2438196"/>
+                  </a:lnTo>
+                  <a:lnTo>
+                    <a:pt x="1504073" y="2428072"/>
+                  </a:lnTo>
+                  <a:lnTo>
+                    <a:pt x="1432450" y="2417849"/>
+                  </a:lnTo>
+                  <a:lnTo>
+                    <a:pt x="1360827" y="2407527"/>
+                  </a:lnTo>
+                  <a:lnTo>
+                    <a:pt x="1289205" y="2397105"/>
+                  </a:lnTo>
+                  <a:lnTo>
+                    <a:pt x="1217582" y="2386582"/>
+                  </a:lnTo>
+                  <a:lnTo>
+                    <a:pt x="1145960" y="2375958"/>
+                  </a:lnTo>
+                  <a:lnTo>
+                    <a:pt x="1074337" y="2365230"/>
+                  </a:lnTo>
+                  <a:lnTo>
+                    <a:pt x="1002715" y="2354399"/>
+                  </a:lnTo>
+                  <a:lnTo>
+                    <a:pt x="931092" y="2343463"/>
+                  </a:lnTo>
+                  <a:lnTo>
+                    <a:pt x="859470" y="2332421"/>
+                  </a:lnTo>
+                  <a:lnTo>
+                    <a:pt x="787847" y="2321272"/>
+                  </a:lnTo>
+                  <a:lnTo>
+                    <a:pt x="716225" y="2310014"/>
+                  </a:lnTo>
+                  <a:lnTo>
+                    <a:pt x="644602" y="2298648"/>
+                  </a:lnTo>
+                  <a:lnTo>
+                    <a:pt x="572980" y="2287172"/>
+                  </a:lnTo>
+                  <a:lnTo>
+                    <a:pt x="501357" y="2275585"/>
+                  </a:lnTo>
+                  <a:lnTo>
+                    <a:pt x="429735" y="2263886"/>
+                  </a:lnTo>
+                  <a:lnTo>
+                    <a:pt x="358112" y="2252073"/>
+                  </a:lnTo>
+                  <a:lnTo>
+                    <a:pt x="286490" y="2240146"/>
+                  </a:lnTo>
+                  <a:lnTo>
+                    <a:pt x="214867" y="2228103"/>
+                  </a:lnTo>
+                  <a:lnTo>
+                    <a:pt x="143245" y="2215944"/>
+                  </a:lnTo>
+                  <a:lnTo>
+                    <a:pt x="71622" y="2203667"/>
+                  </a:lnTo>
+                  <a:lnTo>
+                    <a:pt x="0" y="2191271"/>
+                  </a:lnTo>
+                  <a:lnTo>
                     <a:pt x="0" y="0"/>
-                  </a:lnTo>
-                  <a:lnTo>
-                    <a:pt x="0" y="0"/>
-                  </a:lnTo>
-                </a:path>
-              </a:pathLst>
-            </a:custGeom>
-            <a:ln w="13550" cap="flat">
-              <a:solidFill>
-                <a:srgbClr val="EBEBEB">
-                  <a:alpha val="100000"/>
-                </a:srgbClr>
-              </a:solidFill>
-              <a:prstDash val="solid"/>
-              <a:round/>
-            </a:ln>
-          </p:spPr>
-          <p:txBody>
-            <a:bodyPr/>
-            <a:lstStyle/>
-            <a:p/>
-          </p:txBody>
-        </p:sp>
-        <p:sp>
-          <p:nvSpPr>
-            <p:cNvPr id="21" name="pg21"/>
-            <p:cNvSpPr/>
-            <p:nvPr/>
-          </p:nvSpPr>
-          <p:spPr>
-            <a:xfrm>
-              <a:off x="817517" y="2073503"/>
-              <a:ext cx="7392041" cy="3479262"/>
-            </a:xfrm>
-            <a:custGeom>
-              <a:avLst/>
-              <a:pathLst>
-                <a:path w="7392041" h="3479262">
-                  <a:moveTo>
-                    <a:pt x="2175976" y="0"/>
-                  </a:moveTo>
-                  <a:lnTo>
-                    <a:pt x="2216721" y="180445"/>
-                  </a:lnTo>
-                  <a:lnTo>
-                    <a:pt x="2293965" y="490428"/>
-                  </a:lnTo>
-                  <a:lnTo>
-                    <a:pt x="2371209" y="771322"/>
-                  </a:lnTo>
-                  <a:lnTo>
-                    <a:pt x="2448452" y="1025857"/>
-                  </a:lnTo>
-                  <a:lnTo>
-                    <a:pt x="2525696" y="1256507"/>
-                  </a:lnTo>
-                  <a:lnTo>
-                    <a:pt x="2602939" y="1465512"/>
-                  </a:lnTo>
-                  <a:lnTo>
-                    <a:pt x="2680183" y="1654904"/>
-                  </a:lnTo>
-                  <a:lnTo>
-                    <a:pt x="2757426" y="1826523"/>
-                  </a:lnTo>
-                  <a:lnTo>
-                    <a:pt x="2834670" y="1982038"/>
-                  </a:lnTo>
-                  <a:lnTo>
-                    <a:pt x="2911914" y="2122959"/>
-                  </a:lnTo>
-                  <a:lnTo>
-                    <a:pt x="2989157" y="2250656"/>
-                  </a:lnTo>
-                  <a:lnTo>
-                    <a:pt x="3066401" y="2366369"/>
-                  </a:lnTo>
-                  <a:lnTo>
-                    <a:pt x="3143644" y="2471225"/>
-                  </a:lnTo>
-                  <a:lnTo>
-                    <a:pt x="3220888" y="2566240"/>
-                  </a:lnTo>
-                  <a:lnTo>
-                    <a:pt x="3298131" y="2652339"/>
-                  </a:lnTo>
-                  <a:lnTo>
-                    <a:pt x="3375375" y="2662050"/>
-                  </a:lnTo>
-                  <a:lnTo>
-                    <a:pt x="3452619" y="2669931"/>
-                  </a:lnTo>
-                  <a:lnTo>
-                    <a:pt x="3529862" y="2677736"/>
-                  </a:lnTo>
-                  <a:lnTo>
-                    <a:pt x="3607106" y="2685466"/>
-                  </a:lnTo>
-                  <a:lnTo>
-                    <a:pt x="3684349" y="2693122"/>
-                  </a:lnTo>
-                  <a:lnTo>
-                    <a:pt x="3761593" y="2700705"/>
-                  </a:lnTo>
-                  <a:lnTo>
-                    <a:pt x="3838836" y="2708215"/>
-                  </a:lnTo>
-                  <a:lnTo>
-                    <a:pt x="3916080" y="2715653"/>
-                  </a:lnTo>
-                  <a:lnTo>
-                    <a:pt x="3993324" y="2723020"/>
-                  </a:lnTo>
-                  <a:lnTo>
-                    <a:pt x="4070567" y="2730316"/>
-                  </a:lnTo>
-                  <a:lnTo>
-                    <a:pt x="4147811" y="2737542"/>
-                  </a:lnTo>
-                  <a:lnTo>
-                    <a:pt x="4225054" y="2744698"/>
-                  </a:lnTo>
-                  <a:lnTo>
-                    <a:pt x="4302298" y="2751786"/>
-                  </a:lnTo>
-                  <a:lnTo>
-                    <a:pt x="4379541" y="2758807"/>
-                  </a:lnTo>
-                  <a:lnTo>
-                    <a:pt x="4456785" y="2765759"/>
-                  </a:lnTo>
-                  <a:lnTo>
-                    <a:pt x="4534029" y="2772645"/>
-                  </a:lnTo>
-                  <a:lnTo>
-                    <a:pt x="4611272" y="2779465"/>
-                  </a:lnTo>
-                  <a:lnTo>
-                    <a:pt x="4688516" y="2786220"/>
-                  </a:lnTo>
-                  <a:lnTo>
-                    <a:pt x="4765759" y="2792910"/>
-                  </a:lnTo>
-                  <a:lnTo>
-                    <a:pt x="4843003" y="2799536"/>
-                  </a:lnTo>
-                  <a:lnTo>
-                    <a:pt x="4920246" y="2806098"/>
-                  </a:lnTo>
-                  <a:lnTo>
-                    <a:pt x="4997490" y="2812597"/>
-                  </a:lnTo>
-                  <a:lnTo>
-                    <a:pt x="5074734" y="2819034"/>
-                  </a:lnTo>
-                  <a:lnTo>
-                    <a:pt x="5151977" y="2825409"/>
-                  </a:lnTo>
-                  <a:lnTo>
-                    <a:pt x="5229221" y="2831723"/>
-                  </a:lnTo>
-                  <a:lnTo>
-                    <a:pt x="5306464" y="2837976"/>
-                  </a:lnTo>
-                  <a:lnTo>
-                    <a:pt x="5383708" y="2844170"/>
-                  </a:lnTo>
-                  <a:lnTo>
-                    <a:pt x="5460951" y="2850304"/>
-                  </a:lnTo>
-                  <a:lnTo>
-                    <a:pt x="5538195" y="2856379"/>
-                  </a:lnTo>
-                  <a:lnTo>
-                    <a:pt x="5615439" y="2862396"/>
-                  </a:lnTo>
-                  <a:lnTo>
-                    <a:pt x="5692682" y="2868355"/>
-                  </a:lnTo>
-                  <a:lnTo>
-                    <a:pt x="5769926" y="2874257"/>
-                  </a:lnTo>
-                  <a:lnTo>
-                    <a:pt x="5847169" y="2880103"/>
-                  </a:lnTo>
-                  <a:lnTo>
-                    <a:pt x="5924413" y="2885892"/>
-                  </a:lnTo>
-                  <a:lnTo>
-                    <a:pt x="6001656" y="2891626"/>
-                  </a:lnTo>
-                  <a:lnTo>
-                    <a:pt x="6078900" y="2897305"/>
-                  </a:lnTo>
-                  <a:lnTo>
-                    <a:pt x="6156144" y="2902930"/>
-                  </a:lnTo>
-                  <a:lnTo>
-                    <a:pt x="6233387" y="2908500"/>
-                  </a:lnTo>
-                  <a:lnTo>
-                    <a:pt x="6310631" y="2914017"/>
-                  </a:lnTo>
-                  <a:lnTo>
-                    <a:pt x="6387874" y="2919481"/>
-                  </a:lnTo>
-                  <a:lnTo>
-                    <a:pt x="6465118" y="2924893"/>
-                  </a:lnTo>
-                  <a:lnTo>
-                    <a:pt x="6542361" y="2930253"/>
-                  </a:lnTo>
-                  <a:lnTo>
-                    <a:pt x="6619605" y="2935561"/>
-                  </a:lnTo>
-                  <a:lnTo>
-                    <a:pt x="6696849" y="2940819"/>
-                  </a:lnTo>
-                  <a:lnTo>
-                    <a:pt x="6774092" y="2946026"/>
-                  </a:lnTo>
-                  <a:lnTo>
-                    <a:pt x="6851336" y="2951183"/>
-                  </a:lnTo>
-                  <a:lnTo>
-                    <a:pt x="6928579" y="2956291"/>
-                  </a:lnTo>
-                  <a:lnTo>
-                    <a:pt x="7005823" y="2961350"/>
-                  </a:lnTo>
-                  <a:lnTo>
-                    <a:pt x="7083066" y="2966360"/>
-                  </a:lnTo>
-                  <a:lnTo>
-                    <a:pt x="7160310" y="2971322"/>
-                  </a:lnTo>
-                  <a:lnTo>
-                    <a:pt x="7237554" y="2976237"/>
-                  </a:lnTo>
-                  <a:lnTo>
-                    <a:pt x="7314797" y="2981104"/>
-                  </a:lnTo>
-                  <a:lnTo>
-                    <a:pt x="7392041" y="2985925"/>
-                  </a:lnTo>
-                  <a:lnTo>
-                    <a:pt x="7392041" y="3479262"/>
-                  </a:lnTo>
-                  <a:lnTo>
-                    <a:pt x="7314797" y="3478798"/>
-                  </a:lnTo>
-                  <a:lnTo>
-                    <a:pt x="7237554" y="3478286"/>
-                  </a:lnTo>
-                  <a:lnTo>
-                    <a:pt x="7160310" y="3477720"/>
-                  </a:lnTo>
-                  <a:lnTo>
-                    <a:pt x="7083066" y="3477096"/>
-                  </a:lnTo>
-                  <a:lnTo>
-                    <a:pt x="7005823" y="3476407"/>
-                  </a:lnTo>
-                  <a:lnTo>
-                    <a:pt x="6928579" y="3475647"/>
-                  </a:lnTo>
-                  <a:lnTo>
-                    <a:pt x="6851336" y="3474809"/>
-                  </a:lnTo>
-                  <a:lnTo>
-                    <a:pt x="6774092" y="3473883"/>
-                  </a:lnTo>
-                  <a:lnTo>
-                    <a:pt x="6696849" y="3472862"/>
-                  </a:lnTo>
-                  <a:lnTo>
-                    <a:pt x="6619605" y="3471734"/>
-                  </a:lnTo>
-                  <a:lnTo>
-                    <a:pt x="6542361" y="3470490"/>
-                  </a:lnTo>
-                  <a:lnTo>
-                    <a:pt x="6465118" y="3469118"/>
-                  </a:lnTo>
-                  <a:lnTo>
-                    <a:pt x="6387874" y="3467603"/>
-                  </a:lnTo>
-                  <a:lnTo>
-                    <a:pt x="6310631" y="3465931"/>
-                  </a:lnTo>
-                  <a:lnTo>
-                    <a:pt x="6233387" y="3464086"/>
-                  </a:lnTo>
-                  <a:lnTo>
-                    <a:pt x="6156144" y="3462050"/>
-                  </a:lnTo>
-                  <a:lnTo>
-                    <a:pt x="6078900" y="3459803"/>
-                  </a:lnTo>
-                  <a:lnTo>
-                    <a:pt x="6001656" y="3457324"/>
-                  </a:lnTo>
-                  <a:lnTo>
-                    <a:pt x="5924413" y="3454587"/>
-                  </a:lnTo>
-                  <a:lnTo>
-                    <a:pt x="5847169" y="3451568"/>
-                  </a:lnTo>
-                  <a:lnTo>
-                    <a:pt x="5769926" y="3448235"/>
-                  </a:lnTo>
-                  <a:lnTo>
-                    <a:pt x="5692682" y="3444558"/>
-                  </a:lnTo>
-                  <a:lnTo>
-                    <a:pt x="5615439" y="3440500"/>
-                  </a:lnTo>
-                  <a:lnTo>
-                    <a:pt x="5538195" y="3436021"/>
-                  </a:lnTo>
-                  <a:lnTo>
-                    <a:pt x="5460951" y="3431079"/>
-                  </a:lnTo>
-                  <a:lnTo>
-                    <a:pt x="5383708" y="3425624"/>
-                  </a:lnTo>
-                  <a:lnTo>
-                    <a:pt x="5306464" y="3419605"/>
-                  </a:lnTo>
-                  <a:lnTo>
-                    <a:pt x="5229221" y="3412963"/>
-                  </a:lnTo>
-                  <a:lnTo>
-                    <a:pt x="5151977" y="3405633"/>
-                  </a:lnTo>
-                  <a:lnTo>
-                    <a:pt x="5074734" y="3397544"/>
-                  </a:lnTo>
-                  <a:lnTo>
-                    <a:pt x="4997490" y="3388617"/>
-                  </a:lnTo>
-                  <a:lnTo>
-                    <a:pt x="4920246" y="3378765"/>
-                  </a:lnTo>
-                  <a:lnTo>
-                    <a:pt x="4843003" y="3367893"/>
-                  </a:lnTo>
-                  <a:lnTo>
-                    <a:pt x="4765759" y="3355896"/>
-                  </a:lnTo>
-                  <a:lnTo>
-                    <a:pt x="4688516" y="3342656"/>
-                  </a:lnTo>
-                  <a:lnTo>
-                    <a:pt x="4611272" y="3328045"/>
-                  </a:lnTo>
-                  <a:lnTo>
-                    <a:pt x="4534029" y="3311920"/>
-                  </a:lnTo>
-                  <a:lnTo>
-                    <a:pt x="4456785" y="3294126"/>
-                  </a:lnTo>
-                  <a:lnTo>
-                    <a:pt x="4379541" y="3274490"/>
-                  </a:lnTo>
-                  <a:lnTo>
-                    <a:pt x="4302298" y="3252819"/>
-                  </a:lnTo>
-                  <a:lnTo>
-                    <a:pt x="4225054" y="3228905"/>
-                  </a:lnTo>
-                  <a:lnTo>
-                    <a:pt x="4147811" y="3202514"/>
-                  </a:lnTo>
-                  <a:lnTo>
-                    <a:pt x="4070567" y="3173390"/>
-                  </a:lnTo>
-                  <a:lnTo>
-                    <a:pt x="3993324" y="3141250"/>
-                  </a:lnTo>
-                  <a:lnTo>
-                    <a:pt x="3916080" y="3105782"/>
-                  </a:lnTo>
-                  <a:lnTo>
-                    <a:pt x="3838836" y="3066640"/>
-                  </a:lnTo>
-                  <a:lnTo>
-                    <a:pt x="3761593" y="3023445"/>
-                  </a:lnTo>
-                  <a:lnTo>
-                    <a:pt x="3684349" y="2975777"/>
-                  </a:lnTo>
-                  <a:lnTo>
-                    <a:pt x="3607106" y="2923173"/>
-                  </a:lnTo>
-                  <a:lnTo>
-                    <a:pt x="3529862" y="2865121"/>
-                  </a:lnTo>
-                  <a:lnTo>
-                    <a:pt x="3452619" y="2801057"/>
-                  </a:lnTo>
-                  <a:lnTo>
-                    <a:pt x="3375375" y="2730359"/>
-                  </a:lnTo>
-                  <a:lnTo>
-                    <a:pt x="3298131" y="2654093"/>
-                  </a:lnTo>
-                  <a:lnTo>
-                    <a:pt x="3220888" y="2646059"/>
-                  </a:lnTo>
-                  <a:lnTo>
-                    <a:pt x="3143644" y="2637947"/>
-                  </a:lnTo>
-                  <a:lnTo>
-                    <a:pt x="3066401" y="2629757"/>
-                  </a:lnTo>
-                  <a:lnTo>
-                    <a:pt x="2989157" y="2621487"/>
-                  </a:lnTo>
-                  <a:lnTo>
-                    <a:pt x="2911914" y="2613137"/>
-                  </a:lnTo>
-                  <a:lnTo>
-                    <a:pt x="2834670" y="2604706"/>
-                  </a:lnTo>
-                  <a:lnTo>
-                    <a:pt x="2757426" y="2596194"/>
-                  </a:lnTo>
-                  <a:lnTo>
-                    <a:pt x="2680183" y="2587599"/>
-                  </a:lnTo>
-                  <a:lnTo>
-                    <a:pt x="2602939" y="2578921"/>
-                  </a:lnTo>
-                  <a:lnTo>
-                    <a:pt x="2525696" y="2570159"/>
-                  </a:lnTo>
-                  <a:lnTo>
-                    <a:pt x="2448452" y="2561312"/>
-                  </a:lnTo>
-                  <a:lnTo>
-                    <a:pt x="2371209" y="2552380"/>
-                  </a:lnTo>
-                  <a:lnTo>
-                    <a:pt x="2293965" y="2543360"/>
-                  </a:lnTo>
-                  <a:lnTo>
-                    <a:pt x="2216721" y="2534254"/>
-                  </a:lnTo>
-                  <a:lnTo>
-                    <a:pt x="2139478" y="2525059"/>
-                  </a:lnTo>
-                  <a:lnTo>
-                    <a:pt x="2062234" y="2515776"/>
-                  </a:lnTo>
-                  <a:lnTo>
-                    <a:pt x="1984991" y="2506402"/>
-                  </a:lnTo>
-                  <a:lnTo>
-                    <a:pt x="1907747" y="2496938"/>
-                  </a:lnTo>
-                  <a:lnTo>
-                    <a:pt x="1830504" y="2487382"/>
-                  </a:lnTo>
-                  <a:lnTo>
-                    <a:pt x="1753260" y="2477734"/>
-                  </a:lnTo>
-                  <a:lnTo>
-                    <a:pt x="1676016" y="2467992"/>
-                  </a:lnTo>
-                  <a:lnTo>
-                    <a:pt x="1598773" y="2458155"/>
-                  </a:lnTo>
-                  <a:lnTo>
-                    <a:pt x="1521529" y="2448224"/>
-                  </a:lnTo>
-                  <a:lnTo>
-                    <a:pt x="1444286" y="2438196"/>
-                  </a:lnTo>
-                  <a:lnTo>
-                    <a:pt x="1367042" y="2428072"/>
-                  </a:lnTo>
-                  <a:lnTo>
-                    <a:pt x="1289799" y="2417849"/>
-                  </a:lnTo>
-                  <a:lnTo>
-                    <a:pt x="1212555" y="2407527"/>
-                  </a:lnTo>
-                  <a:lnTo>
-                    <a:pt x="1135311" y="2397105"/>
-                  </a:lnTo>
-                  <a:lnTo>
-                    <a:pt x="1058068" y="2386582"/>
-                  </a:lnTo>
-                  <a:lnTo>
-                    <a:pt x="980824" y="2375958"/>
-                  </a:lnTo>
-                  <a:lnTo>
-                    <a:pt x="903581" y="2365230"/>
-                  </a:lnTo>
-                  <a:lnTo>
-                    <a:pt x="826337" y="2354399"/>
-                  </a:lnTo>
-                  <a:lnTo>
-                    <a:pt x="749094" y="2343463"/>
-                  </a:lnTo>
-                  <a:lnTo>
-                    <a:pt x="671850" y="2332421"/>
-                  </a:lnTo>
-                  <a:lnTo>
-                    <a:pt x="594606" y="2321272"/>
-                  </a:lnTo>
-                  <a:lnTo>
-                    <a:pt x="517363" y="2310014"/>
-                  </a:lnTo>
-                  <a:lnTo>
-                    <a:pt x="440119" y="2298648"/>
-                  </a:lnTo>
-                  <a:lnTo>
-                    <a:pt x="362876" y="2287172"/>
-                  </a:lnTo>
-                  <a:lnTo>
-                    <a:pt x="285632" y="2275585"/>
-                  </a:lnTo>
-                  <a:lnTo>
-                    <a:pt x="208389" y="2263886"/>
-                  </a:lnTo>
-                  <a:lnTo>
-                    <a:pt x="131145" y="2252073"/>
-                  </a:lnTo>
-                  <a:lnTo>
-                    <a:pt x="53901" y="2240146"/>
-                  </a:lnTo>
-                  <a:lnTo>
-                    <a:pt x="0" y="2231742"/>
                   </a:lnTo>
                   <a:close/>
                 </a:path>
@@ -3525,225 +3494,550 @@
         </p:sp>
         <p:sp>
           <p:nvSpPr>
+            <p:cNvPr id="21" name="pl21"/>
+            <p:cNvSpPr/>
+            <p:nvPr/>
+          </p:nvSpPr>
+          <p:spPr>
+            <a:xfrm>
+              <a:off x="3426190" y="2073503"/>
+              <a:ext cx="4836489" cy="2985925"/>
+            </a:xfrm>
+            <a:custGeom>
+              <a:avLst/>
+              <a:pathLst>
+                <a:path w="4836489" h="2985925">
+                  <a:moveTo>
+                    <a:pt x="0" y="0"/>
+                  </a:moveTo>
+                  <a:lnTo>
+                    <a:pt x="37779" y="180445"/>
+                  </a:lnTo>
+                  <a:lnTo>
+                    <a:pt x="109402" y="490428"/>
+                  </a:lnTo>
+                  <a:lnTo>
+                    <a:pt x="181024" y="771322"/>
+                  </a:lnTo>
+                  <a:lnTo>
+                    <a:pt x="252647" y="1025857"/>
+                  </a:lnTo>
+                  <a:lnTo>
+                    <a:pt x="324270" y="1256507"/>
+                  </a:lnTo>
+                  <a:lnTo>
+                    <a:pt x="395892" y="1465512"/>
+                  </a:lnTo>
+                  <a:lnTo>
+                    <a:pt x="467515" y="1654904"/>
+                  </a:lnTo>
+                  <a:lnTo>
+                    <a:pt x="539137" y="1826523"/>
+                  </a:lnTo>
+                  <a:lnTo>
+                    <a:pt x="610760" y="1982038"/>
+                  </a:lnTo>
+                  <a:lnTo>
+                    <a:pt x="682382" y="2122959"/>
+                  </a:lnTo>
+                  <a:lnTo>
+                    <a:pt x="754005" y="2250656"/>
+                  </a:lnTo>
+                  <a:lnTo>
+                    <a:pt x="825627" y="2366369"/>
+                  </a:lnTo>
+                  <a:lnTo>
+                    <a:pt x="897250" y="2471225"/>
+                  </a:lnTo>
+                  <a:lnTo>
+                    <a:pt x="968872" y="2566240"/>
+                  </a:lnTo>
+                  <a:lnTo>
+                    <a:pt x="1040495" y="2652339"/>
+                  </a:lnTo>
+                  <a:lnTo>
+                    <a:pt x="1112117" y="2662050"/>
+                  </a:lnTo>
+                  <a:lnTo>
+                    <a:pt x="1183740" y="2669931"/>
+                  </a:lnTo>
+                  <a:lnTo>
+                    <a:pt x="1255362" y="2677736"/>
+                  </a:lnTo>
+                  <a:lnTo>
+                    <a:pt x="1326985" y="2685466"/>
+                  </a:lnTo>
+                  <a:lnTo>
+                    <a:pt x="1398607" y="2693122"/>
+                  </a:lnTo>
+                  <a:lnTo>
+                    <a:pt x="1470230" y="2700705"/>
+                  </a:lnTo>
+                  <a:lnTo>
+                    <a:pt x="1541852" y="2708215"/>
+                  </a:lnTo>
+                  <a:lnTo>
+                    <a:pt x="1613475" y="2715653"/>
+                  </a:lnTo>
+                  <a:lnTo>
+                    <a:pt x="1685098" y="2723020"/>
+                  </a:lnTo>
+                  <a:lnTo>
+                    <a:pt x="1756720" y="2730316"/>
+                  </a:lnTo>
+                  <a:lnTo>
+                    <a:pt x="1828343" y="2737542"/>
+                  </a:lnTo>
+                  <a:lnTo>
+                    <a:pt x="1899965" y="2744698"/>
+                  </a:lnTo>
+                  <a:lnTo>
+                    <a:pt x="1971588" y="2751786"/>
+                  </a:lnTo>
+                  <a:lnTo>
+                    <a:pt x="2043210" y="2758807"/>
+                  </a:lnTo>
+                  <a:lnTo>
+                    <a:pt x="2114833" y="2765759"/>
+                  </a:lnTo>
+                  <a:lnTo>
+                    <a:pt x="2186455" y="2772645"/>
+                  </a:lnTo>
+                  <a:lnTo>
+                    <a:pt x="2258078" y="2779465"/>
+                  </a:lnTo>
+                  <a:lnTo>
+                    <a:pt x="2329700" y="2786220"/>
+                  </a:lnTo>
+                  <a:lnTo>
+                    <a:pt x="2401323" y="2792910"/>
+                  </a:lnTo>
+                  <a:lnTo>
+                    <a:pt x="2472945" y="2799536"/>
+                  </a:lnTo>
+                  <a:lnTo>
+                    <a:pt x="2544568" y="2806098"/>
+                  </a:lnTo>
+                  <a:lnTo>
+                    <a:pt x="2616190" y="2812597"/>
+                  </a:lnTo>
+                  <a:lnTo>
+                    <a:pt x="2687813" y="2819034"/>
+                  </a:lnTo>
+                  <a:lnTo>
+                    <a:pt x="2759435" y="2825409"/>
+                  </a:lnTo>
+                  <a:lnTo>
+                    <a:pt x="2831058" y="2831723"/>
+                  </a:lnTo>
+                  <a:lnTo>
+                    <a:pt x="2902680" y="2837976"/>
+                  </a:lnTo>
+                  <a:lnTo>
+                    <a:pt x="2974303" y="2844170"/>
+                  </a:lnTo>
+                  <a:lnTo>
+                    <a:pt x="3045926" y="2850304"/>
+                  </a:lnTo>
+                  <a:lnTo>
+                    <a:pt x="3117548" y="2856379"/>
+                  </a:lnTo>
+                  <a:lnTo>
+                    <a:pt x="3189171" y="2862396"/>
+                  </a:lnTo>
+                  <a:lnTo>
+                    <a:pt x="3260793" y="2868355"/>
+                  </a:lnTo>
+                  <a:lnTo>
+                    <a:pt x="3332416" y="2874257"/>
+                  </a:lnTo>
+                  <a:lnTo>
+                    <a:pt x="3404038" y="2880103"/>
+                  </a:lnTo>
+                  <a:lnTo>
+                    <a:pt x="3475661" y="2885892"/>
+                  </a:lnTo>
+                  <a:lnTo>
+                    <a:pt x="3547283" y="2891626"/>
+                  </a:lnTo>
+                  <a:lnTo>
+                    <a:pt x="3618906" y="2897305"/>
+                  </a:lnTo>
+                  <a:lnTo>
+                    <a:pt x="3690528" y="2902930"/>
+                  </a:lnTo>
+                  <a:lnTo>
+                    <a:pt x="3762151" y="2908500"/>
+                  </a:lnTo>
+                  <a:lnTo>
+                    <a:pt x="3833773" y="2914017"/>
+                  </a:lnTo>
+                  <a:lnTo>
+                    <a:pt x="3905396" y="2919481"/>
+                  </a:lnTo>
+                  <a:lnTo>
+                    <a:pt x="3977018" y="2924893"/>
+                  </a:lnTo>
+                  <a:lnTo>
+                    <a:pt x="4048641" y="2930253"/>
+                  </a:lnTo>
+                  <a:lnTo>
+                    <a:pt x="4120263" y="2935561"/>
+                  </a:lnTo>
+                  <a:lnTo>
+                    <a:pt x="4191886" y="2940819"/>
+                  </a:lnTo>
+                  <a:lnTo>
+                    <a:pt x="4263508" y="2946026"/>
+                  </a:lnTo>
+                  <a:lnTo>
+                    <a:pt x="4335131" y="2951183"/>
+                  </a:lnTo>
+                  <a:lnTo>
+                    <a:pt x="4406754" y="2956291"/>
+                  </a:lnTo>
+                  <a:lnTo>
+                    <a:pt x="4478376" y="2961350"/>
+                  </a:lnTo>
+                  <a:lnTo>
+                    <a:pt x="4549999" y="2966360"/>
+                  </a:lnTo>
+                  <a:lnTo>
+                    <a:pt x="4621621" y="2971322"/>
+                  </a:lnTo>
+                  <a:lnTo>
+                    <a:pt x="4693244" y="2976237"/>
+                  </a:lnTo>
+                  <a:lnTo>
+                    <a:pt x="4764866" y="2981104"/>
+                  </a:lnTo>
+                  <a:lnTo>
+                    <a:pt x="4836489" y="2985925"/>
+                  </a:lnTo>
+                </a:path>
+              </a:pathLst>
+            </a:custGeom>
+          </p:spPr>
+          <p:txBody>
+            <a:bodyPr/>
+            <a:lstStyle/>
+            <a:p/>
+          </p:txBody>
+        </p:sp>
+        <p:sp>
+          <p:nvSpPr>
             <p:cNvPr id="22" name="pl22"/>
             <p:cNvSpPr/>
             <p:nvPr/>
           </p:nvSpPr>
           <p:spPr>
             <a:xfrm>
-              <a:off x="2993494" y="2073503"/>
-              <a:ext cx="5216064" cy="2985925"/>
+              <a:off x="1172049" y="4264774"/>
+              <a:ext cx="7090630" cy="1287991"/>
             </a:xfrm>
             <a:custGeom>
               <a:avLst/>
               <a:pathLst>
-                <a:path w="5216064" h="2985925">
+                <a:path w="7090630" h="1287991">
                   <a:moveTo>
+                    <a:pt x="7090630" y="1287991"/>
+                  </a:moveTo>
+                  <a:lnTo>
+                    <a:pt x="7019007" y="1287527"/>
+                  </a:lnTo>
+                  <a:lnTo>
+                    <a:pt x="6947385" y="1287014"/>
+                  </a:lnTo>
+                  <a:lnTo>
+                    <a:pt x="6875762" y="1286449"/>
+                  </a:lnTo>
+                  <a:lnTo>
+                    <a:pt x="6804139" y="1285825"/>
+                  </a:lnTo>
+                  <a:lnTo>
+                    <a:pt x="6732517" y="1285136"/>
+                  </a:lnTo>
+                  <a:lnTo>
+                    <a:pt x="6660894" y="1284376"/>
+                  </a:lnTo>
+                  <a:lnTo>
+                    <a:pt x="6589272" y="1283537"/>
+                  </a:lnTo>
+                  <a:lnTo>
+                    <a:pt x="6517649" y="1282612"/>
+                  </a:lnTo>
+                  <a:lnTo>
+                    <a:pt x="6446027" y="1281590"/>
+                  </a:lnTo>
+                  <a:lnTo>
+                    <a:pt x="6374404" y="1280463"/>
+                  </a:lnTo>
+                  <a:lnTo>
+                    <a:pt x="6302782" y="1279219"/>
+                  </a:lnTo>
+                  <a:lnTo>
+                    <a:pt x="6231159" y="1277846"/>
+                  </a:lnTo>
+                  <a:lnTo>
+                    <a:pt x="6159537" y="1276331"/>
+                  </a:lnTo>
+                  <a:lnTo>
+                    <a:pt x="6087914" y="1274660"/>
+                  </a:lnTo>
+                  <a:lnTo>
+                    <a:pt x="6016292" y="1272815"/>
+                  </a:lnTo>
+                  <a:lnTo>
+                    <a:pt x="5944669" y="1270779"/>
+                  </a:lnTo>
+                  <a:lnTo>
+                    <a:pt x="5873047" y="1268532"/>
+                  </a:lnTo>
+                  <a:lnTo>
+                    <a:pt x="5801424" y="1266052"/>
+                  </a:lnTo>
+                  <a:lnTo>
+                    <a:pt x="5729802" y="1263316"/>
+                  </a:lnTo>
+                  <a:lnTo>
+                    <a:pt x="5658179" y="1260296"/>
+                  </a:lnTo>
+                  <a:lnTo>
+                    <a:pt x="5586557" y="1256964"/>
+                  </a:lnTo>
+                  <a:lnTo>
+                    <a:pt x="5514934" y="1253286"/>
+                  </a:lnTo>
+                  <a:lnTo>
+                    <a:pt x="5443311" y="1249228"/>
+                  </a:lnTo>
+                  <a:lnTo>
+                    <a:pt x="5371689" y="1244750"/>
+                  </a:lnTo>
+                  <a:lnTo>
+                    <a:pt x="5300066" y="1239807"/>
+                  </a:lnTo>
+                  <a:lnTo>
+                    <a:pt x="5228444" y="1234353"/>
+                  </a:lnTo>
+                  <a:lnTo>
+                    <a:pt x="5156821" y="1228334"/>
+                  </a:lnTo>
+                  <a:lnTo>
+                    <a:pt x="5085199" y="1221692"/>
+                  </a:lnTo>
+                  <a:lnTo>
+                    <a:pt x="5013576" y="1214361"/>
+                  </a:lnTo>
+                  <a:lnTo>
+                    <a:pt x="4941954" y="1206272"/>
+                  </a:lnTo>
+                  <a:lnTo>
+                    <a:pt x="4870331" y="1197345"/>
+                  </a:lnTo>
+                  <a:lnTo>
+                    <a:pt x="4798709" y="1187494"/>
+                  </a:lnTo>
+                  <a:lnTo>
+                    <a:pt x="4727086" y="1176622"/>
+                  </a:lnTo>
+                  <a:lnTo>
+                    <a:pt x="4655464" y="1164624"/>
+                  </a:lnTo>
+                  <a:lnTo>
+                    <a:pt x="4583841" y="1151384"/>
+                  </a:lnTo>
+                  <a:lnTo>
+                    <a:pt x="4512219" y="1136773"/>
+                  </a:lnTo>
+                  <a:lnTo>
+                    <a:pt x="4440596" y="1120649"/>
+                  </a:lnTo>
+                  <a:lnTo>
+                    <a:pt x="4368974" y="1102855"/>
+                  </a:lnTo>
+                  <a:lnTo>
+                    <a:pt x="4297351" y="1083218"/>
+                  </a:lnTo>
+                  <a:lnTo>
+                    <a:pt x="4225729" y="1061548"/>
+                  </a:lnTo>
+                  <a:lnTo>
+                    <a:pt x="4154106" y="1037634"/>
+                  </a:lnTo>
+                  <a:lnTo>
+                    <a:pt x="4082483" y="1011243"/>
+                  </a:lnTo>
+                  <a:lnTo>
+                    <a:pt x="4010861" y="982119"/>
+                  </a:lnTo>
+                  <a:lnTo>
+                    <a:pt x="3939238" y="949979"/>
+                  </a:lnTo>
+                  <a:lnTo>
+                    <a:pt x="3867616" y="914510"/>
+                  </a:lnTo>
+                  <a:lnTo>
+                    <a:pt x="3795993" y="875369"/>
+                  </a:lnTo>
+                  <a:lnTo>
+                    <a:pt x="3724371" y="832174"/>
+                  </a:lnTo>
+                  <a:lnTo>
+                    <a:pt x="3652748" y="784506"/>
+                  </a:lnTo>
+                  <a:lnTo>
+                    <a:pt x="3581126" y="731902"/>
+                  </a:lnTo>
+                  <a:lnTo>
+                    <a:pt x="3509503" y="673849"/>
+                  </a:lnTo>
+                  <a:lnTo>
+                    <a:pt x="3437881" y="609786"/>
+                  </a:lnTo>
+                  <a:lnTo>
+                    <a:pt x="3366258" y="539087"/>
+                  </a:lnTo>
+                  <a:lnTo>
+                    <a:pt x="3294636" y="462822"/>
+                  </a:lnTo>
+                  <a:lnTo>
+                    <a:pt x="3223013" y="454787"/>
+                  </a:lnTo>
+                  <a:lnTo>
+                    <a:pt x="3151391" y="446676"/>
+                  </a:lnTo>
+                  <a:lnTo>
+                    <a:pt x="3079768" y="438485"/>
+                  </a:lnTo>
+                  <a:lnTo>
+                    <a:pt x="3008146" y="430215"/>
+                  </a:lnTo>
+                  <a:lnTo>
+                    <a:pt x="2936523" y="421865"/>
+                  </a:lnTo>
+                  <a:lnTo>
+                    <a:pt x="2864901" y="413435"/>
+                  </a:lnTo>
+                  <a:lnTo>
+                    <a:pt x="2793278" y="404922"/>
+                  </a:lnTo>
+                  <a:lnTo>
+                    <a:pt x="2721655" y="396328"/>
+                  </a:lnTo>
+                  <a:lnTo>
+                    <a:pt x="2650033" y="387650"/>
+                  </a:lnTo>
+                  <a:lnTo>
+                    <a:pt x="2578410" y="378888"/>
+                  </a:lnTo>
+                  <a:lnTo>
+                    <a:pt x="2506788" y="370041"/>
+                  </a:lnTo>
+                  <a:lnTo>
+                    <a:pt x="2435165" y="361108"/>
+                  </a:lnTo>
+                  <a:lnTo>
+                    <a:pt x="2363543" y="352089"/>
+                  </a:lnTo>
+                  <a:lnTo>
+                    <a:pt x="2291920" y="342983"/>
+                  </a:lnTo>
+                  <a:lnTo>
+                    <a:pt x="2220298" y="333788"/>
+                  </a:lnTo>
+                  <a:lnTo>
+                    <a:pt x="2148675" y="324504"/>
+                  </a:lnTo>
+                  <a:lnTo>
+                    <a:pt x="2077053" y="315131"/>
+                  </a:lnTo>
+                  <a:lnTo>
+                    <a:pt x="2005430" y="305667"/>
+                  </a:lnTo>
+                  <a:lnTo>
+                    <a:pt x="1933808" y="296111"/>
+                  </a:lnTo>
+                  <a:lnTo>
+                    <a:pt x="1862185" y="286462"/>
+                  </a:lnTo>
+                  <a:lnTo>
+                    <a:pt x="1790563" y="276720"/>
+                  </a:lnTo>
+                  <a:lnTo>
+                    <a:pt x="1718940" y="266884"/>
+                  </a:lnTo>
+                  <a:lnTo>
+                    <a:pt x="1647318" y="256953"/>
+                  </a:lnTo>
+                  <a:lnTo>
+                    <a:pt x="1575695" y="246925"/>
+                  </a:lnTo>
+                  <a:lnTo>
+                    <a:pt x="1504073" y="236800"/>
+                  </a:lnTo>
+                  <a:lnTo>
+                    <a:pt x="1432450" y="226577"/>
+                  </a:lnTo>
+                  <a:lnTo>
+                    <a:pt x="1360827" y="216255"/>
+                  </a:lnTo>
+                  <a:lnTo>
+                    <a:pt x="1289205" y="205834"/>
+                  </a:lnTo>
+                  <a:lnTo>
+                    <a:pt x="1217582" y="195311"/>
+                  </a:lnTo>
+                  <a:lnTo>
+                    <a:pt x="1145960" y="184686"/>
+                  </a:lnTo>
+                  <a:lnTo>
+                    <a:pt x="1074337" y="173959"/>
+                  </a:lnTo>
+                  <a:lnTo>
+                    <a:pt x="1002715" y="163128"/>
+                  </a:lnTo>
+                  <a:lnTo>
+                    <a:pt x="931092" y="152191"/>
+                  </a:lnTo>
+                  <a:lnTo>
+                    <a:pt x="859470" y="141149"/>
+                  </a:lnTo>
+                  <a:lnTo>
+                    <a:pt x="787847" y="130000"/>
+                  </a:lnTo>
+                  <a:lnTo>
+                    <a:pt x="716225" y="118743"/>
+                  </a:lnTo>
+                  <a:lnTo>
+                    <a:pt x="644602" y="107377"/>
+                  </a:lnTo>
+                  <a:lnTo>
+                    <a:pt x="572980" y="95901"/>
+                  </a:lnTo>
+                  <a:lnTo>
+                    <a:pt x="501357" y="84314"/>
+                  </a:lnTo>
+                  <a:lnTo>
+                    <a:pt x="429735" y="72614"/>
+                  </a:lnTo>
+                  <a:lnTo>
+                    <a:pt x="358112" y="60801"/>
+                  </a:lnTo>
+                  <a:lnTo>
+                    <a:pt x="286490" y="48874"/>
+                  </a:lnTo>
+                  <a:lnTo>
+                    <a:pt x="214867" y="36832"/>
+                  </a:lnTo>
+                  <a:lnTo>
+                    <a:pt x="143245" y="24672"/>
+                  </a:lnTo>
+                  <a:lnTo>
+                    <a:pt x="71622" y="12395"/>
+                  </a:lnTo>
+                  <a:lnTo>
                     <a:pt x="0" y="0"/>
-                  </a:moveTo>
-                  <a:lnTo>
-                    <a:pt x="40744" y="180445"/>
-                  </a:lnTo>
-                  <a:lnTo>
-                    <a:pt x="117988" y="490428"/>
-                  </a:lnTo>
-                  <a:lnTo>
-                    <a:pt x="195232" y="771322"/>
-                  </a:lnTo>
-                  <a:lnTo>
-                    <a:pt x="272475" y="1025857"/>
-                  </a:lnTo>
-                  <a:lnTo>
-                    <a:pt x="349719" y="1256507"/>
-                  </a:lnTo>
-                  <a:lnTo>
-                    <a:pt x="426962" y="1465512"/>
-                  </a:lnTo>
-                  <a:lnTo>
-                    <a:pt x="504206" y="1654904"/>
-                  </a:lnTo>
-                  <a:lnTo>
-                    <a:pt x="581449" y="1826523"/>
-                  </a:lnTo>
-                  <a:lnTo>
-                    <a:pt x="658693" y="1982038"/>
-                  </a:lnTo>
-                  <a:lnTo>
-                    <a:pt x="735937" y="2122959"/>
-                  </a:lnTo>
-                  <a:lnTo>
-                    <a:pt x="813180" y="2250656"/>
-                  </a:lnTo>
-                  <a:lnTo>
-                    <a:pt x="890424" y="2366369"/>
-                  </a:lnTo>
-                  <a:lnTo>
-                    <a:pt x="967667" y="2471225"/>
-                  </a:lnTo>
-                  <a:lnTo>
-                    <a:pt x="1044911" y="2566240"/>
-                  </a:lnTo>
-                  <a:lnTo>
-                    <a:pt x="1122154" y="2652339"/>
-                  </a:lnTo>
-                  <a:lnTo>
-                    <a:pt x="1199398" y="2662050"/>
-                  </a:lnTo>
-                  <a:lnTo>
-                    <a:pt x="1276642" y="2669931"/>
-                  </a:lnTo>
-                  <a:lnTo>
-                    <a:pt x="1353885" y="2677736"/>
-                  </a:lnTo>
-                  <a:lnTo>
-                    <a:pt x="1431129" y="2685466"/>
-                  </a:lnTo>
-                  <a:lnTo>
-                    <a:pt x="1508372" y="2693122"/>
-                  </a:lnTo>
-                  <a:lnTo>
-                    <a:pt x="1585616" y="2700705"/>
-                  </a:lnTo>
-                  <a:lnTo>
-                    <a:pt x="1662859" y="2708215"/>
-                  </a:lnTo>
-                  <a:lnTo>
-                    <a:pt x="1740103" y="2715653"/>
-                  </a:lnTo>
-                  <a:lnTo>
-                    <a:pt x="1817347" y="2723020"/>
-                  </a:lnTo>
-                  <a:lnTo>
-                    <a:pt x="1894590" y="2730316"/>
-                  </a:lnTo>
-                  <a:lnTo>
-                    <a:pt x="1971834" y="2737542"/>
-                  </a:lnTo>
-                  <a:lnTo>
-                    <a:pt x="2049077" y="2744698"/>
-                  </a:lnTo>
-                  <a:lnTo>
-                    <a:pt x="2126321" y="2751786"/>
-                  </a:lnTo>
-                  <a:lnTo>
-                    <a:pt x="2203564" y="2758807"/>
-                  </a:lnTo>
-                  <a:lnTo>
-                    <a:pt x="2280808" y="2765759"/>
-                  </a:lnTo>
-                  <a:lnTo>
-                    <a:pt x="2358052" y="2772645"/>
-                  </a:lnTo>
-                  <a:lnTo>
-                    <a:pt x="2435295" y="2779465"/>
-                  </a:lnTo>
-                  <a:lnTo>
-                    <a:pt x="2512539" y="2786220"/>
-                  </a:lnTo>
-                  <a:lnTo>
-                    <a:pt x="2589782" y="2792910"/>
-                  </a:lnTo>
-                  <a:lnTo>
-                    <a:pt x="2667026" y="2799536"/>
-                  </a:lnTo>
-                  <a:lnTo>
-                    <a:pt x="2744269" y="2806098"/>
-                  </a:lnTo>
-                  <a:lnTo>
-                    <a:pt x="2821513" y="2812597"/>
-                  </a:lnTo>
-                  <a:lnTo>
-                    <a:pt x="2898757" y="2819034"/>
-                  </a:lnTo>
-                  <a:lnTo>
-                    <a:pt x="2976000" y="2825409"/>
-                  </a:lnTo>
-                  <a:lnTo>
-                    <a:pt x="3053244" y="2831723"/>
-                  </a:lnTo>
-                  <a:lnTo>
-                    <a:pt x="3130487" y="2837976"/>
-                  </a:lnTo>
-                  <a:lnTo>
-                    <a:pt x="3207731" y="2844170"/>
-                  </a:lnTo>
-                  <a:lnTo>
-                    <a:pt x="3284974" y="2850304"/>
-                  </a:lnTo>
-                  <a:lnTo>
-                    <a:pt x="3362218" y="2856379"/>
-                  </a:lnTo>
-                  <a:lnTo>
-                    <a:pt x="3439462" y="2862396"/>
-                  </a:lnTo>
-                  <a:lnTo>
-                    <a:pt x="3516705" y="2868355"/>
-                  </a:lnTo>
-                  <a:lnTo>
-                    <a:pt x="3593949" y="2874257"/>
-                  </a:lnTo>
-                  <a:lnTo>
-                    <a:pt x="3671192" y="2880103"/>
-                  </a:lnTo>
-                  <a:lnTo>
-                    <a:pt x="3748436" y="2885892"/>
-                  </a:lnTo>
-                  <a:lnTo>
-                    <a:pt x="3825679" y="2891626"/>
-                  </a:lnTo>
-                  <a:lnTo>
-                    <a:pt x="3902923" y="2897305"/>
-                  </a:lnTo>
-                  <a:lnTo>
-                    <a:pt x="3980167" y="2902930"/>
-                  </a:lnTo>
-                  <a:lnTo>
-                    <a:pt x="4057410" y="2908500"/>
-                  </a:lnTo>
-                  <a:lnTo>
-                    <a:pt x="4134654" y="2914017"/>
-                  </a:lnTo>
-                  <a:lnTo>
-                    <a:pt x="4211897" y="2919481"/>
-                  </a:lnTo>
-                  <a:lnTo>
-                    <a:pt x="4289141" y="2924893"/>
-                  </a:lnTo>
-                  <a:lnTo>
-                    <a:pt x="4366385" y="2930253"/>
-                  </a:lnTo>
-                  <a:lnTo>
-                    <a:pt x="4443628" y="2935561"/>
-                  </a:lnTo>
-                  <a:lnTo>
-                    <a:pt x="4520872" y="2940819"/>
-                  </a:lnTo>
-                  <a:lnTo>
-                    <a:pt x="4598115" y="2946026"/>
-                  </a:lnTo>
-                  <a:lnTo>
-                    <a:pt x="4675359" y="2951183"/>
-                  </a:lnTo>
-                  <a:lnTo>
-                    <a:pt x="4752602" y="2956291"/>
-                  </a:lnTo>
-                  <a:lnTo>
-                    <a:pt x="4829846" y="2961350"/>
-                  </a:lnTo>
-                  <a:lnTo>
-                    <a:pt x="4907090" y="2966360"/>
-                  </a:lnTo>
-                  <a:lnTo>
-                    <a:pt x="4984333" y="2971322"/>
-                  </a:lnTo>
-                  <a:lnTo>
-                    <a:pt x="5061577" y="2976237"/>
-                  </a:lnTo>
-                  <a:lnTo>
-                    <a:pt x="5138820" y="2981104"/>
-                  </a:lnTo>
-                  <a:lnTo>
-                    <a:pt x="5216064" y="2985925"/>
                   </a:lnTo>
                 </a:path>
               </a:pathLst>
@@ -3763,571 +4057,255 @@
           </p:nvSpPr>
           <p:spPr>
             <a:xfrm>
-              <a:off x="817517" y="4305245"/>
-              <a:ext cx="7392041" cy="1247520"/>
+              <a:off x="2568570" y="2073503"/>
+              <a:ext cx="5694109" cy="3436500"/>
             </a:xfrm>
             <a:custGeom>
               <a:avLst/>
               <a:pathLst>
-                <a:path w="7392041" h="1247520">
-                  <a:moveTo>
-                    <a:pt x="7392041" y="1247520"/>
-                  </a:moveTo>
-                  <a:lnTo>
-                    <a:pt x="7314797" y="1247055"/>
-                  </a:lnTo>
-                  <a:lnTo>
-                    <a:pt x="7237554" y="1246543"/>
-                  </a:lnTo>
-                  <a:lnTo>
-                    <a:pt x="7160310" y="1245977"/>
-                  </a:lnTo>
-                  <a:lnTo>
-                    <a:pt x="7083066" y="1245353"/>
-                  </a:lnTo>
-                  <a:lnTo>
-                    <a:pt x="7005823" y="1244665"/>
-                  </a:lnTo>
-                  <a:lnTo>
-                    <a:pt x="6928579" y="1243905"/>
-                  </a:lnTo>
-                  <a:lnTo>
-                    <a:pt x="6851336" y="1243066"/>
-                  </a:lnTo>
-                  <a:lnTo>
-                    <a:pt x="6774092" y="1242140"/>
-                  </a:lnTo>
-                  <a:lnTo>
-                    <a:pt x="6696849" y="1241119"/>
-                  </a:lnTo>
-                  <a:lnTo>
-                    <a:pt x="6619605" y="1239992"/>
-                  </a:lnTo>
-                  <a:lnTo>
-                    <a:pt x="6542361" y="1238748"/>
-                  </a:lnTo>
-                  <a:lnTo>
-                    <a:pt x="6465118" y="1237375"/>
-                  </a:lnTo>
-                  <a:lnTo>
-                    <a:pt x="6387874" y="1235860"/>
-                  </a:lnTo>
-                  <a:lnTo>
-                    <a:pt x="6310631" y="1234188"/>
-                  </a:lnTo>
-                  <a:lnTo>
-                    <a:pt x="6233387" y="1232343"/>
-                  </a:lnTo>
-                  <a:lnTo>
-                    <a:pt x="6156144" y="1230307"/>
-                  </a:lnTo>
-                  <a:lnTo>
-                    <a:pt x="6078900" y="1228061"/>
-                  </a:lnTo>
-                  <a:lnTo>
-                    <a:pt x="6001656" y="1225581"/>
-                  </a:lnTo>
-                  <a:lnTo>
-                    <a:pt x="5924413" y="1222845"/>
-                  </a:lnTo>
-                  <a:lnTo>
-                    <a:pt x="5847169" y="1219825"/>
-                  </a:lnTo>
-                  <a:lnTo>
-                    <a:pt x="5769926" y="1216493"/>
-                  </a:lnTo>
-                  <a:lnTo>
-                    <a:pt x="5692682" y="1212815"/>
-                  </a:lnTo>
-                  <a:lnTo>
-                    <a:pt x="5615439" y="1208757"/>
-                  </a:lnTo>
-                  <a:lnTo>
-                    <a:pt x="5538195" y="1204278"/>
-                  </a:lnTo>
-                  <a:lnTo>
-                    <a:pt x="5460951" y="1199336"/>
-                  </a:lnTo>
-                  <a:lnTo>
-                    <a:pt x="5383708" y="1193882"/>
-                  </a:lnTo>
-                  <a:lnTo>
-                    <a:pt x="5306464" y="1187863"/>
-                  </a:lnTo>
-                  <a:lnTo>
-                    <a:pt x="5229221" y="1181220"/>
-                  </a:lnTo>
-                  <a:lnTo>
-                    <a:pt x="5151977" y="1173890"/>
-                  </a:lnTo>
-                  <a:lnTo>
-                    <a:pt x="5074734" y="1165801"/>
-                  </a:lnTo>
-                  <a:lnTo>
-                    <a:pt x="4997490" y="1156874"/>
-                  </a:lnTo>
-                  <a:lnTo>
-                    <a:pt x="4920246" y="1147022"/>
-                  </a:lnTo>
-                  <a:lnTo>
-                    <a:pt x="4843003" y="1136151"/>
-                  </a:lnTo>
-                  <a:lnTo>
-                    <a:pt x="4765759" y="1124153"/>
-                  </a:lnTo>
-                  <a:lnTo>
-                    <a:pt x="4688516" y="1110913"/>
-                  </a:lnTo>
-                  <a:lnTo>
-                    <a:pt x="4611272" y="1096302"/>
-                  </a:lnTo>
-                  <a:lnTo>
-                    <a:pt x="4534029" y="1080178"/>
-                  </a:lnTo>
-                  <a:lnTo>
-                    <a:pt x="4456785" y="1062384"/>
-                  </a:lnTo>
-                  <a:lnTo>
-                    <a:pt x="4379541" y="1042747"/>
-                  </a:lnTo>
-                  <a:lnTo>
-                    <a:pt x="4302298" y="1021077"/>
-                  </a:lnTo>
-                  <a:lnTo>
-                    <a:pt x="4225054" y="997162"/>
-                  </a:lnTo>
-                  <a:lnTo>
-                    <a:pt x="4147811" y="970771"/>
-                  </a:lnTo>
-                  <a:lnTo>
-                    <a:pt x="4070567" y="941647"/>
-                  </a:lnTo>
-                  <a:lnTo>
-                    <a:pt x="3993324" y="909507"/>
-                  </a:lnTo>
-                  <a:lnTo>
-                    <a:pt x="3916080" y="874039"/>
-                  </a:lnTo>
-                  <a:lnTo>
-                    <a:pt x="3838836" y="834898"/>
-                  </a:lnTo>
-                  <a:lnTo>
-                    <a:pt x="3761593" y="791703"/>
-                  </a:lnTo>
-                  <a:lnTo>
-                    <a:pt x="3684349" y="744035"/>
-                  </a:lnTo>
-                  <a:lnTo>
-                    <a:pt x="3607106" y="691430"/>
-                  </a:lnTo>
-                  <a:lnTo>
-                    <a:pt x="3529862" y="633378"/>
-                  </a:lnTo>
-                  <a:lnTo>
-                    <a:pt x="3452619" y="569314"/>
-                  </a:lnTo>
-                  <a:lnTo>
-                    <a:pt x="3375375" y="498616"/>
-                  </a:lnTo>
-                  <a:lnTo>
-                    <a:pt x="3298131" y="422350"/>
-                  </a:lnTo>
-                  <a:lnTo>
-                    <a:pt x="3220888" y="414316"/>
-                  </a:lnTo>
-                  <a:lnTo>
-                    <a:pt x="3143644" y="406204"/>
-                  </a:lnTo>
-                  <a:lnTo>
-                    <a:pt x="3066401" y="398014"/>
-                  </a:lnTo>
-                  <a:lnTo>
-                    <a:pt x="2989157" y="389744"/>
-                  </a:lnTo>
-                  <a:lnTo>
-                    <a:pt x="2911914" y="381394"/>
-                  </a:lnTo>
-                  <a:lnTo>
-                    <a:pt x="2834670" y="372964"/>
-                  </a:lnTo>
-                  <a:lnTo>
-                    <a:pt x="2757426" y="364451"/>
-                  </a:lnTo>
-                  <a:lnTo>
-                    <a:pt x="2680183" y="355856"/>
-                  </a:lnTo>
-                  <a:lnTo>
-                    <a:pt x="2602939" y="347178"/>
-                  </a:lnTo>
-                  <a:lnTo>
-                    <a:pt x="2525696" y="338416"/>
-                  </a:lnTo>
-                  <a:lnTo>
-                    <a:pt x="2448452" y="329569"/>
-                  </a:lnTo>
-                  <a:lnTo>
-                    <a:pt x="2371209" y="320637"/>
-                  </a:lnTo>
-                  <a:lnTo>
-                    <a:pt x="2293965" y="311618"/>
-                  </a:lnTo>
-                  <a:lnTo>
-                    <a:pt x="2216721" y="302511"/>
-                  </a:lnTo>
-                  <a:lnTo>
-                    <a:pt x="2139478" y="293317"/>
-                  </a:lnTo>
-                  <a:lnTo>
-                    <a:pt x="2062234" y="284033"/>
-                  </a:lnTo>
-                  <a:lnTo>
-                    <a:pt x="1984991" y="274660"/>
-                  </a:lnTo>
-                  <a:lnTo>
-                    <a:pt x="1907747" y="265195"/>
-                  </a:lnTo>
-                  <a:lnTo>
-                    <a:pt x="1830504" y="255639"/>
-                  </a:lnTo>
-                  <a:lnTo>
-                    <a:pt x="1753260" y="245991"/>
-                  </a:lnTo>
-                  <a:lnTo>
-                    <a:pt x="1676016" y="236249"/>
-                  </a:lnTo>
-                  <a:lnTo>
-                    <a:pt x="1598773" y="226413"/>
-                  </a:lnTo>
-                  <a:lnTo>
-                    <a:pt x="1521529" y="216481"/>
-                  </a:lnTo>
-                  <a:lnTo>
-                    <a:pt x="1444286" y="206454"/>
-                  </a:lnTo>
-                  <a:lnTo>
-                    <a:pt x="1367042" y="196329"/>
-                  </a:lnTo>
-                  <a:lnTo>
-                    <a:pt x="1289799" y="186106"/>
-                  </a:lnTo>
-                  <a:lnTo>
-                    <a:pt x="1212555" y="175784"/>
-                  </a:lnTo>
-                  <a:lnTo>
-                    <a:pt x="1135311" y="165362"/>
-                  </a:lnTo>
-                  <a:lnTo>
-                    <a:pt x="1058068" y="154840"/>
-                  </a:lnTo>
-                  <a:lnTo>
-                    <a:pt x="980824" y="144215"/>
-                  </a:lnTo>
-                  <a:lnTo>
-                    <a:pt x="903581" y="133488"/>
-                  </a:lnTo>
-                  <a:lnTo>
-                    <a:pt x="826337" y="122656"/>
-                  </a:lnTo>
-                  <a:lnTo>
-                    <a:pt x="749094" y="111720"/>
-                  </a:lnTo>
-                  <a:lnTo>
-                    <a:pt x="671850" y="100678"/>
-                  </a:lnTo>
-                  <a:lnTo>
-                    <a:pt x="594606" y="89529"/>
-                  </a:lnTo>
-                  <a:lnTo>
-                    <a:pt x="517363" y="78272"/>
-                  </a:lnTo>
-                  <a:lnTo>
-                    <a:pt x="440119" y="66906"/>
-                  </a:lnTo>
-                  <a:lnTo>
-                    <a:pt x="362876" y="55430"/>
-                  </a:lnTo>
-                  <a:lnTo>
-                    <a:pt x="285632" y="43842"/>
-                  </a:lnTo>
-                  <a:lnTo>
-                    <a:pt x="208389" y="32143"/>
-                  </a:lnTo>
-                  <a:lnTo>
-                    <a:pt x="131145" y="20330"/>
-                  </a:lnTo>
-                  <a:lnTo>
-                    <a:pt x="53901" y="8403"/>
-                  </a:lnTo>
-                  <a:lnTo>
-                    <a:pt x="0" y="0"/>
-                  </a:lnTo>
-                </a:path>
-              </a:pathLst>
-            </a:custGeom>
-          </p:spPr>
-          <p:txBody>
-            <a:bodyPr/>
-            <a:lstStyle/>
-            <a:p/>
-          </p:txBody>
-        </p:sp>
-        <p:sp>
-          <p:nvSpPr>
-            <p:cNvPr id="24" name="pl24"/>
-            <p:cNvSpPr/>
-            <p:nvPr/>
-          </p:nvSpPr>
-          <p:spPr>
-            <a:xfrm>
-              <a:off x="2068567" y="2073503"/>
-              <a:ext cx="6140991" cy="3436500"/>
-            </a:xfrm>
-            <a:custGeom>
-              <a:avLst/>
-              <a:pathLst>
-                <a:path w="6140991" h="3436500">
+                <a:path w="5694109" h="3436500">
                   <a:moveTo>
                     <a:pt x="0" y="0"/>
                   </a:moveTo>
                   <a:lnTo>
-                    <a:pt x="38749" y="94495"/>
-                  </a:lnTo>
-                  <a:lnTo>
-                    <a:pt x="115993" y="272945"/>
-                  </a:lnTo>
-                  <a:lnTo>
-                    <a:pt x="193236" y="441999"/>
-                  </a:lnTo>
-                  <a:lnTo>
-                    <a:pt x="270480" y="602152"/>
-                  </a:lnTo>
-                  <a:lnTo>
-                    <a:pt x="347723" y="753873"/>
-                  </a:lnTo>
-                  <a:lnTo>
-                    <a:pt x="424967" y="897606"/>
-                  </a:lnTo>
-                  <a:lnTo>
-                    <a:pt x="502210" y="1033770"/>
-                  </a:lnTo>
-                  <a:lnTo>
-                    <a:pt x="579454" y="1162766"/>
-                  </a:lnTo>
-                  <a:lnTo>
-                    <a:pt x="656698" y="1284969"/>
-                  </a:lnTo>
-                  <a:lnTo>
-                    <a:pt x="733941" y="1400739"/>
-                  </a:lnTo>
-                  <a:lnTo>
-                    <a:pt x="811185" y="1510413"/>
-                  </a:lnTo>
-                  <a:lnTo>
-                    <a:pt x="888428" y="1614312"/>
-                  </a:lnTo>
-                  <a:lnTo>
-                    <a:pt x="965672" y="1712741"/>
-                  </a:lnTo>
-                  <a:lnTo>
-                    <a:pt x="1042915" y="1805988"/>
-                  </a:lnTo>
-                  <a:lnTo>
-                    <a:pt x="1120159" y="1894324"/>
-                  </a:lnTo>
-                  <a:lnTo>
-                    <a:pt x="1197403" y="1978010"/>
-                  </a:lnTo>
-                  <a:lnTo>
-                    <a:pt x="1274646" y="2057290"/>
-                  </a:lnTo>
-                  <a:lnTo>
-                    <a:pt x="1351890" y="2132395"/>
-                  </a:lnTo>
-                  <a:lnTo>
-                    <a:pt x="1429133" y="2203546"/>
-                  </a:lnTo>
-                  <a:lnTo>
-                    <a:pt x="1506377" y="2270951"/>
-                  </a:lnTo>
-                  <a:lnTo>
-                    <a:pt x="1583620" y="2334807"/>
-                  </a:lnTo>
-                  <a:lnTo>
-                    <a:pt x="1660864" y="2395300"/>
-                  </a:lnTo>
-                  <a:lnTo>
-                    <a:pt x="1738108" y="2452609"/>
-                  </a:lnTo>
-                  <a:lnTo>
-                    <a:pt x="1815351" y="2506900"/>
-                  </a:lnTo>
-                  <a:lnTo>
-                    <a:pt x="1892595" y="2558333"/>
-                  </a:lnTo>
-                  <a:lnTo>
-                    <a:pt x="1969838" y="2607057"/>
-                  </a:lnTo>
-                  <a:lnTo>
-                    <a:pt x="2047082" y="2653217"/>
-                  </a:lnTo>
-                  <a:lnTo>
-                    <a:pt x="2124325" y="2696945"/>
-                  </a:lnTo>
-                  <a:lnTo>
-                    <a:pt x="2201569" y="2738372"/>
-                  </a:lnTo>
-                  <a:lnTo>
-                    <a:pt x="2278813" y="2777617"/>
-                  </a:lnTo>
-                  <a:lnTo>
-                    <a:pt x="2356056" y="2814796"/>
-                  </a:lnTo>
-                  <a:lnTo>
-                    <a:pt x="2433300" y="2850017"/>
-                  </a:lnTo>
-                  <a:lnTo>
-                    <a:pt x="2510543" y="2883384"/>
-                  </a:lnTo>
-                  <a:lnTo>
-                    <a:pt x="2587787" y="2914994"/>
-                  </a:lnTo>
-                  <a:lnTo>
-                    <a:pt x="2665030" y="2944940"/>
-                  </a:lnTo>
-                  <a:lnTo>
-                    <a:pt x="2742274" y="2973309"/>
-                  </a:lnTo>
-                  <a:lnTo>
-                    <a:pt x="2819518" y="3000185"/>
-                  </a:lnTo>
-                  <a:lnTo>
-                    <a:pt x="2896761" y="3025645"/>
-                  </a:lnTo>
-                  <a:lnTo>
-                    <a:pt x="2974005" y="3049765"/>
-                  </a:lnTo>
-                  <a:lnTo>
-                    <a:pt x="3051248" y="3072615"/>
-                  </a:lnTo>
-                  <a:lnTo>
-                    <a:pt x="3128492" y="3094261"/>
-                  </a:lnTo>
-                  <a:lnTo>
-                    <a:pt x="3205735" y="3114769"/>
-                  </a:lnTo>
-                  <a:lnTo>
-                    <a:pt x="3282979" y="3134196"/>
-                  </a:lnTo>
-                  <a:lnTo>
-                    <a:pt x="3360223" y="3152600"/>
-                  </a:lnTo>
-                  <a:lnTo>
-                    <a:pt x="3437466" y="3170036"/>
-                  </a:lnTo>
-                  <a:lnTo>
-                    <a:pt x="3514710" y="3186553"/>
-                  </a:lnTo>
-                  <a:lnTo>
-                    <a:pt x="3591953" y="3202201"/>
-                  </a:lnTo>
-                  <a:lnTo>
-                    <a:pt x="3669197" y="3217025"/>
-                  </a:lnTo>
-                  <a:lnTo>
-                    <a:pt x="3746440" y="3231068"/>
-                  </a:lnTo>
-                  <a:lnTo>
-                    <a:pt x="3823684" y="3244372"/>
-                  </a:lnTo>
-                  <a:lnTo>
-                    <a:pt x="3900928" y="3256975"/>
-                  </a:lnTo>
-                  <a:lnTo>
-                    <a:pt x="3978171" y="3268915"/>
-                  </a:lnTo>
-                  <a:lnTo>
-                    <a:pt x="4055415" y="3280227"/>
-                  </a:lnTo>
-                  <a:lnTo>
-                    <a:pt x="4132658" y="3290942"/>
-                  </a:lnTo>
-                  <a:lnTo>
-                    <a:pt x="4209902" y="3301094"/>
-                  </a:lnTo>
-                  <a:lnTo>
-                    <a:pt x="4287145" y="3310711"/>
-                  </a:lnTo>
-                  <a:lnTo>
-                    <a:pt x="4364389" y="3319821"/>
-                  </a:lnTo>
-                  <a:lnTo>
-                    <a:pt x="4441633" y="3328452"/>
-                  </a:lnTo>
-                  <a:lnTo>
-                    <a:pt x="4518876" y="3336629"/>
-                  </a:lnTo>
-                  <a:lnTo>
-                    <a:pt x="4596120" y="3344375"/>
-                  </a:lnTo>
-                  <a:lnTo>
-                    <a:pt x="4673363" y="3351713"/>
-                  </a:lnTo>
-                  <a:lnTo>
-                    <a:pt x="4750607" y="3358665"/>
-                  </a:lnTo>
-                  <a:lnTo>
-                    <a:pt x="4827850" y="3365250"/>
-                  </a:lnTo>
-                  <a:lnTo>
-                    <a:pt x="4905094" y="3371489"/>
-                  </a:lnTo>
-                  <a:lnTo>
-                    <a:pt x="4982338" y="3377400"/>
-                  </a:lnTo>
-                  <a:lnTo>
-                    <a:pt x="5059581" y="3382999"/>
-                  </a:lnTo>
-                  <a:lnTo>
-                    <a:pt x="5136825" y="3388304"/>
-                  </a:lnTo>
-                  <a:lnTo>
-                    <a:pt x="5214068" y="3393329"/>
-                  </a:lnTo>
-                  <a:lnTo>
-                    <a:pt x="5291312" y="3398090"/>
-                  </a:lnTo>
-                  <a:lnTo>
-                    <a:pt x="5368555" y="3402600"/>
-                  </a:lnTo>
-                  <a:lnTo>
-                    <a:pt x="5445799" y="3406872"/>
-                  </a:lnTo>
-                  <a:lnTo>
-                    <a:pt x="5523043" y="3410920"/>
-                  </a:lnTo>
-                  <a:lnTo>
-                    <a:pt x="5600286" y="3414754"/>
-                  </a:lnTo>
-                  <a:lnTo>
-                    <a:pt x="5677530" y="3418387"/>
-                  </a:lnTo>
-                  <a:lnTo>
-                    <a:pt x="5754773" y="3421828"/>
-                  </a:lnTo>
-                  <a:lnTo>
-                    <a:pt x="5832017" y="3425088"/>
-                  </a:lnTo>
-                  <a:lnTo>
-                    <a:pt x="5909260" y="3428177"/>
-                  </a:lnTo>
-                  <a:lnTo>
-                    <a:pt x="5986504" y="3431102"/>
-                  </a:lnTo>
-                  <a:lnTo>
-                    <a:pt x="6063748" y="3433874"/>
-                  </a:lnTo>
-                  <a:lnTo>
-                    <a:pt x="6140991" y="3436500"/>
+                    <a:pt x="35929" y="94495"/>
+                  </a:lnTo>
+                  <a:lnTo>
+                    <a:pt x="107552" y="272945"/>
+                  </a:lnTo>
+                  <a:lnTo>
+                    <a:pt x="179174" y="441999"/>
+                  </a:lnTo>
+                  <a:lnTo>
+                    <a:pt x="250797" y="602152"/>
+                  </a:lnTo>
+                  <a:lnTo>
+                    <a:pt x="322419" y="753873"/>
+                  </a:lnTo>
+                  <a:lnTo>
+                    <a:pt x="394042" y="897606"/>
+                  </a:lnTo>
+                  <a:lnTo>
+                    <a:pt x="465664" y="1033770"/>
+                  </a:lnTo>
+                  <a:lnTo>
+                    <a:pt x="537287" y="1162766"/>
+                  </a:lnTo>
+                  <a:lnTo>
+                    <a:pt x="608909" y="1284969"/>
+                  </a:lnTo>
+                  <a:lnTo>
+                    <a:pt x="680532" y="1400739"/>
+                  </a:lnTo>
+                  <a:lnTo>
+                    <a:pt x="752154" y="1510413"/>
+                  </a:lnTo>
+                  <a:lnTo>
+                    <a:pt x="823777" y="1614312"/>
+                  </a:lnTo>
+                  <a:lnTo>
+                    <a:pt x="895400" y="1712741"/>
+                  </a:lnTo>
+                  <a:lnTo>
+                    <a:pt x="967022" y="1805988"/>
+                  </a:lnTo>
+                  <a:lnTo>
+                    <a:pt x="1038645" y="1894324"/>
+                  </a:lnTo>
+                  <a:lnTo>
+                    <a:pt x="1110267" y="1978010"/>
+                  </a:lnTo>
+                  <a:lnTo>
+                    <a:pt x="1181890" y="2057290"/>
+                  </a:lnTo>
+                  <a:lnTo>
+                    <a:pt x="1253512" y="2132395"/>
+                  </a:lnTo>
+                  <a:lnTo>
+                    <a:pt x="1325135" y="2203546"/>
+                  </a:lnTo>
+                  <a:lnTo>
+                    <a:pt x="1396757" y="2270951"/>
+                  </a:lnTo>
+                  <a:lnTo>
+                    <a:pt x="1468380" y="2334807"/>
+                  </a:lnTo>
+                  <a:lnTo>
+                    <a:pt x="1540002" y="2395300"/>
+                  </a:lnTo>
+                  <a:lnTo>
+                    <a:pt x="1611625" y="2452609"/>
+                  </a:lnTo>
+                  <a:lnTo>
+                    <a:pt x="1683247" y="2506900"/>
+                  </a:lnTo>
+                  <a:lnTo>
+                    <a:pt x="1754870" y="2558333"/>
+                  </a:lnTo>
+                  <a:lnTo>
+                    <a:pt x="1826492" y="2607057"/>
+                  </a:lnTo>
+                  <a:lnTo>
+                    <a:pt x="1898115" y="2653217"/>
+                  </a:lnTo>
+                  <a:lnTo>
+                    <a:pt x="1969737" y="2696945"/>
+                  </a:lnTo>
+                  <a:lnTo>
+                    <a:pt x="2041360" y="2738372"/>
+                  </a:lnTo>
+                  <a:lnTo>
+                    <a:pt x="2112982" y="2777617"/>
+                  </a:lnTo>
+                  <a:lnTo>
+                    <a:pt x="2184605" y="2814796"/>
+                  </a:lnTo>
+                  <a:lnTo>
+                    <a:pt x="2256228" y="2850017"/>
+                  </a:lnTo>
+                  <a:lnTo>
+                    <a:pt x="2327850" y="2883384"/>
+                  </a:lnTo>
+                  <a:lnTo>
+                    <a:pt x="2399473" y="2914994"/>
+                  </a:lnTo>
+                  <a:lnTo>
+                    <a:pt x="2471095" y="2944940"/>
+                  </a:lnTo>
+                  <a:lnTo>
+                    <a:pt x="2542718" y="2973309"/>
+                  </a:lnTo>
+                  <a:lnTo>
+                    <a:pt x="2614340" y="3000185"/>
+                  </a:lnTo>
+                  <a:lnTo>
+                    <a:pt x="2685963" y="3025645"/>
+                  </a:lnTo>
+                  <a:lnTo>
+                    <a:pt x="2757585" y="3049765"/>
+                  </a:lnTo>
+                  <a:lnTo>
+                    <a:pt x="2829208" y="3072615"/>
+                  </a:lnTo>
+                  <a:lnTo>
+                    <a:pt x="2900830" y="3094261"/>
+                  </a:lnTo>
+                  <a:lnTo>
+                    <a:pt x="2972453" y="3114769"/>
+                  </a:lnTo>
+                  <a:lnTo>
+                    <a:pt x="3044075" y="3134196"/>
+                  </a:lnTo>
+                  <a:lnTo>
+                    <a:pt x="3115698" y="3152600"/>
+                  </a:lnTo>
+                  <a:lnTo>
+                    <a:pt x="3187320" y="3170036"/>
+                  </a:lnTo>
+                  <a:lnTo>
+                    <a:pt x="3258943" y="3186553"/>
+                  </a:lnTo>
+                  <a:lnTo>
+                    <a:pt x="3330565" y="3202201"/>
+                  </a:lnTo>
+                  <a:lnTo>
+                    <a:pt x="3402188" y="3217025"/>
+                  </a:lnTo>
+                  <a:lnTo>
+                    <a:pt x="3473810" y="3231068"/>
+                  </a:lnTo>
+                  <a:lnTo>
+                    <a:pt x="3545433" y="3244372"/>
+                  </a:lnTo>
+                  <a:lnTo>
+                    <a:pt x="3617056" y="3256975"/>
+                  </a:lnTo>
+                  <a:lnTo>
+                    <a:pt x="3688678" y="3268915"/>
+                  </a:lnTo>
+                  <a:lnTo>
+                    <a:pt x="3760301" y="3280227"/>
+                  </a:lnTo>
+                  <a:lnTo>
+                    <a:pt x="3831923" y="3290942"/>
+                  </a:lnTo>
+                  <a:lnTo>
+                    <a:pt x="3903546" y="3301094"/>
+                  </a:lnTo>
+                  <a:lnTo>
+                    <a:pt x="3975168" y="3310711"/>
+                  </a:lnTo>
+                  <a:lnTo>
+                    <a:pt x="4046791" y="3319821"/>
+                  </a:lnTo>
+                  <a:lnTo>
+                    <a:pt x="4118413" y="3328452"/>
+                  </a:lnTo>
+                  <a:lnTo>
+                    <a:pt x="4190036" y="3336629"/>
+                  </a:lnTo>
+                  <a:lnTo>
+                    <a:pt x="4261658" y="3344375"/>
+                  </a:lnTo>
+                  <a:lnTo>
+                    <a:pt x="4333281" y="3351713"/>
+                  </a:lnTo>
+                  <a:lnTo>
+                    <a:pt x="4404903" y="3358665"/>
+                  </a:lnTo>
+                  <a:lnTo>
+                    <a:pt x="4476526" y="3365250"/>
+                  </a:lnTo>
+                  <a:lnTo>
+                    <a:pt x="4548148" y="3371489"/>
+                  </a:lnTo>
+                  <a:lnTo>
+                    <a:pt x="4619771" y="3377400"/>
+                  </a:lnTo>
+                  <a:lnTo>
+                    <a:pt x="4691393" y="3382999"/>
+                  </a:lnTo>
+                  <a:lnTo>
+                    <a:pt x="4763016" y="3388304"/>
+                  </a:lnTo>
+                  <a:lnTo>
+                    <a:pt x="4834638" y="3393329"/>
+                  </a:lnTo>
+                  <a:lnTo>
+                    <a:pt x="4906261" y="3398090"/>
+                  </a:lnTo>
+                  <a:lnTo>
+                    <a:pt x="4977884" y="3402600"/>
+                  </a:lnTo>
+                  <a:lnTo>
+                    <a:pt x="5049506" y="3406872"/>
+                  </a:lnTo>
+                  <a:lnTo>
+                    <a:pt x="5121129" y="3410920"/>
+                  </a:lnTo>
+                  <a:lnTo>
+                    <a:pt x="5192751" y="3414754"/>
+                  </a:lnTo>
+                  <a:lnTo>
+                    <a:pt x="5264374" y="3418387"/>
+                  </a:lnTo>
+                  <a:lnTo>
+                    <a:pt x="5335996" y="3421828"/>
+                  </a:lnTo>
+                  <a:lnTo>
+                    <a:pt x="5407619" y="3425088"/>
+                  </a:lnTo>
+                  <a:lnTo>
+                    <a:pt x="5479241" y="3428177"/>
+                  </a:lnTo>
+                  <a:lnTo>
+                    <a:pt x="5550864" y="3431102"/>
+                  </a:lnTo>
+                  <a:lnTo>
+                    <a:pt x="5622486" y="3433874"/>
+                  </a:lnTo>
+                  <a:lnTo>
+                    <a:pt x="5694109" y="3436500"/>
                   </a:lnTo>
                 </a:path>
               </a:pathLst>
@@ -4350,7 +4328,7 @@
         </p:sp>
         <p:sp>
           <p:nvSpPr>
-            <p:cNvPr id="25" name="pl25"/>
+            <p:cNvPr id="24" name="pl24"/>
             <p:cNvSpPr/>
             <p:nvPr/>
           </p:nvSpPr>
@@ -4393,13 +4371,13 @@
         </p:sp>
         <p:sp>
           <p:nvSpPr>
-            <p:cNvPr id="26" name="pl26"/>
+            <p:cNvPr id="25" name="pl25"/>
             <p:cNvSpPr/>
             <p:nvPr/>
           </p:nvSpPr>
           <p:spPr>
             <a:xfrm>
-              <a:off x="4117484" y="2073503"/>
+              <a:off x="4468386" y="2073503"/>
               <a:ext cx="0" cy="3649639"/>
             </a:xfrm>
             <a:custGeom>
@@ -4436,7 +4414,7 @@
         </p:sp>
         <p:sp>
           <p:nvSpPr>
-            <p:cNvPr id="27" name="tx27"/>
+            <p:cNvPr id="26" name="tx26"/>
             <p:cNvSpPr/>
             <p:nvPr/>
           </p:nvSpPr>
@@ -4482,7 +4460,7 @@
         </p:sp>
         <p:sp>
           <p:nvSpPr>
-            <p:cNvPr id="28" name="tx28"/>
+            <p:cNvPr id="27" name="tx27"/>
             <p:cNvSpPr/>
             <p:nvPr/>
           </p:nvSpPr>
@@ -4528,7 +4506,7 @@
         </p:sp>
         <p:sp>
           <p:nvSpPr>
-            <p:cNvPr id="29" name="tx29"/>
+            <p:cNvPr id="28" name="tx28"/>
             <p:cNvSpPr/>
             <p:nvPr/>
           </p:nvSpPr>
@@ -4574,7 +4552,7 @@
         </p:sp>
         <p:sp>
           <p:nvSpPr>
-            <p:cNvPr id="30" name="tx30"/>
+            <p:cNvPr id="29" name="tx29"/>
             <p:cNvSpPr/>
             <p:nvPr/>
           </p:nvSpPr>
@@ -4620,7 +4598,7 @@
         </p:sp>
         <p:sp>
           <p:nvSpPr>
-            <p:cNvPr id="31" name="tx31"/>
+            <p:cNvPr id="30" name="tx30"/>
             <p:cNvSpPr/>
             <p:nvPr/>
           </p:nvSpPr>
@@ -4666,14 +4644,14 @@
         </p:sp>
         <p:sp>
           <p:nvSpPr>
-            <p:cNvPr id="32" name="tx32"/>
+            <p:cNvPr id="31" name="tx31"/>
             <p:cNvSpPr/>
             <p:nvPr/>
           </p:nvSpPr>
           <p:spPr>
             <a:xfrm>
-              <a:off x="2423864" y="5785772"/>
-              <a:ext cx="155356" cy="80101"/>
+              <a:off x="2478335" y="5785772"/>
+              <a:ext cx="161574" cy="80101"/>
             </a:xfrm>
             <a:prstGeom prst="rect">
               <a:avLst/>
@@ -4705,21 +4683,21 @@
                   <a:latin typeface="Helvetica"/>
                   <a:cs typeface="Helvetica"/>
                 </a:rPr>
-                <a:t>0.8</a:t>
+                <a:t>-25</a:t>
               </a:r>
             </a:p>
           </p:txBody>
         </p:sp>
         <p:sp>
           <p:nvSpPr>
-            <p:cNvPr id="33" name="tx33"/>
+            <p:cNvPr id="32" name="tx32"/>
             <p:cNvSpPr/>
             <p:nvPr/>
           </p:nvSpPr>
           <p:spPr>
             <a:xfrm>
-              <a:off x="4196521" y="5785772"/>
-              <a:ext cx="155356" cy="80101"/>
+              <a:off x="4582608" y="5785772"/>
+              <a:ext cx="62179" cy="80101"/>
             </a:xfrm>
             <a:prstGeom prst="rect">
               <a:avLst/>
@@ -4751,21 +4729,21 @@
                   <a:latin typeface="Helvetica"/>
                   <a:cs typeface="Helvetica"/>
                 </a:rPr>
-                <a:t>1.0</a:t>
+                <a:t>0</a:t>
               </a:r>
             </a:p>
           </p:txBody>
         </p:sp>
         <p:sp>
           <p:nvSpPr>
-            <p:cNvPr id="34" name="tx34"/>
+            <p:cNvPr id="33" name="tx33"/>
             <p:cNvSpPr/>
             <p:nvPr/>
           </p:nvSpPr>
           <p:spPr>
             <a:xfrm>
-              <a:off x="5969179" y="5785772"/>
-              <a:ext cx="155356" cy="80101"/>
+              <a:off x="6606094" y="5785772"/>
+              <a:ext cx="124358" cy="80101"/>
             </a:xfrm>
             <a:prstGeom prst="rect">
               <a:avLst/>
@@ -4797,67 +4775,21 @@
                   <a:latin typeface="Helvetica"/>
                   <a:cs typeface="Helvetica"/>
                 </a:rPr>
-                <a:t>1.2</a:t>
+                <a:t>25</a:t>
               </a:r>
             </a:p>
           </p:txBody>
         </p:sp>
         <p:sp>
           <p:nvSpPr>
-            <p:cNvPr id="35" name="tx35"/>
+            <p:cNvPr id="34" name="tx34"/>
             <p:cNvSpPr/>
             <p:nvPr/>
           </p:nvSpPr>
           <p:spPr>
             <a:xfrm>
-              <a:off x="7741836" y="5785772"/>
-              <a:ext cx="155356" cy="80101"/>
-            </a:xfrm>
-            <a:prstGeom prst="rect">
-              <a:avLst/>
-            </a:prstGeom>
-            <a:noFill/>
-          </p:spPr>
-          <p:txBody>
-            <a:bodyPr lIns="0" rIns="0" tIns="0" bIns="0" anchorCtr="1" anchor="ctr" wrap="none"/>
-            <a:lstStyle/>
-            <a:p>
-              <a:pPr algn="l" marL="0" marR="0" indent="0">
-                <a:lnSpc>
-                  <a:spcPts val="880"/>
-                </a:lnSpc>
-                <a:spcBef>
-                  <a:spcPts val="0"/>
-                </a:spcBef>
-                <a:spcAft>
-                  <a:spcPts val="0"/>
-                </a:spcAft>
-              </a:pPr>
-              <a:r>
-                <a:rPr sz="880">
-                  <a:solidFill>
-                    <a:srgbClr val="4D4D4D">
-                      <a:alpha val="100000"/>
-                    </a:srgbClr>
-                  </a:solidFill>
-                  <a:latin typeface="Helvetica"/>
-                  <a:cs typeface="Helvetica"/>
-                </a:rPr>
-                <a:t>1.4</a:t>
-              </a:r>
-            </a:p>
-          </p:txBody>
-        </p:sp>
-        <p:sp>
-          <p:nvSpPr>
-            <p:cNvPr id="36" name="tx36"/>
-            <p:cNvSpPr/>
-            <p:nvPr/>
-          </p:nvSpPr>
-          <p:spPr>
-            <a:xfrm>
-              <a:off x="3879271" y="5925448"/>
-              <a:ext cx="1676186" cy="100218"/>
+              <a:off x="2928340" y="5925448"/>
+              <a:ext cx="3578047" cy="100218"/>
             </a:xfrm>
             <a:prstGeom prst="rect">
               <a:avLst/>
@@ -4889,14 +4821,14 @@
                   <a:latin typeface="Helvetica"/>
                   <a:cs typeface="Helvetica"/>
                 </a:rPr>
-                <a:t>CKD-EPI Cr-Cys / CG ratio</a:t>
+                <a:t>eGFR difference (%): 100 × (CKD-EPI Cr-Cys − CG) / CG</a:t>
               </a:r>
             </a:p>
           </p:txBody>
         </p:sp>
         <p:sp>
           <p:nvSpPr>
-            <p:cNvPr id="37" name="tx37"/>
+            <p:cNvPr id="35" name="tx35"/>
             <p:cNvSpPr/>
             <p:nvPr/>
           </p:nvSpPr>
@@ -4942,14 +4874,14 @@
         </p:sp>
         <p:sp>
           <p:nvSpPr>
-            <p:cNvPr id="38" name="tx38"/>
+            <p:cNvPr id="36" name="tx36"/>
             <p:cNvSpPr/>
             <p:nvPr/>
           </p:nvSpPr>
           <p:spPr>
             <a:xfrm>
               <a:off x="817517" y="1896563"/>
-              <a:ext cx="6232916" cy="82021"/>
+              <a:ext cx="6385163" cy="82021"/>
             </a:xfrm>
             <a:prstGeom prst="rect">
               <a:avLst/>
@@ -4981,14 +4913,14 @@
                   <a:latin typeface="Helvetica"/>
                   <a:cs typeface="Helvetica"/>
                 </a:rPr>
-                <a:t>subHR per 0.1 ratio decline: 1.86 (1.12-3.10), p = 0.017  |  per IQR decline (Δ = 0.30): 6.25 (1.39-28.21)  |  IQR: [0.84, 1.14]</a:t>
+                <a:t>subHR per 10 % decline: 1.86 (1.12-3.10), p = 0.017  |  per IQR decline (Δ = 29.5 %): 6.25 (1.39-28.21)  |  IQR: [-15.6, 13.9] %</a:t>
               </a:r>
             </a:p>
           </p:txBody>
         </p:sp>
         <p:sp>
           <p:nvSpPr>
-            <p:cNvPr id="39" name="tx39"/>
+            <p:cNvPr id="37" name="tx37"/>
             <p:cNvSpPr/>
             <p:nvPr/>
           </p:nvSpPr>

--- a/docs/pptx/auc3/jx-auc3-linsubhr-ratio-hosp5.pptx
+++ b/docs/pptx/auc3/jx-auc3-linsubhr-ratio-hosp5.pptx
@@ -2265,34 +2265,26 @@
         </p:sp>
         <p:sp>
           <p:nvSpPr>
-            <p:cNvPr id="4" name="pl4"/>
+            <p:cNvPr id="4" name="rc4"/>
             <p:cNvSpPr/>
             <p:nvPr/>
           </p:nvSpPr>
           <p:spPr>
             <a:xfrm>
-              <a:off x="817517" y="5142518"/>
-              <a:ext cx="7799693" cy="0"/>
+              <a:off x="457200" y="1600200"/>
+              <a:ext cx="8229600" cy="4525962"/>
             </a:xfrm>
-            <a:custGeom>
+            <a:prstGeom prst="rect">
               <a:avLst/>
-              <a:pathLst>
-                <a:path w="7799693" h="0">
-                  <a:moveTo>
-                    <a:pt x="0" y="0"/>
-                  </a:moveTo>
-                  <a:lnTo>
-                    <a:pt x="7799693" y="0"/>
-                  </a:lnTo>
-                  <a:lnTo>
-                    <a:pt x="7799693" y="0"/>
-                  </a:lnTo>
-                </a:path>
-              </a:pathLst>
-            </a:custGeom>
-            <a:ln w="6775" cap="flat">
+            </a:prstGeom>
+            <a:solidFill>
+              <a:srgbClr val="FFFFFF">
+                <a:alpha val="100000"/>
+              </a:srgbClr>
+            </a:solidFill>
+            <a:ln w="13550" cap="rnd">
               <a:solidFill>
-                <a:srgbClr val="EBEBEB">
+                <a:srgbClr val="FFFFFF">
                   <a:alpha val="100000"/>
                 </a:srgbClr>
               </a:solidFill>
@@ -2314,21 +2306,21 @@
           </p:nvSpPr>
           <p:spPr>
             <a:xfrm>
-              <a:off x="817517" y="4313054"/>
-              <a:ext cx="7799693" cy="0"/>
+              <a:off x="887106" y="3250627"/>
+              <a:ext cx="7660515" cy="0"/>
             </a:xfrm>
             <a:custGeom>
               <a:avLst/>
               <a:pathLst>
-                <a:path w="7799693" h="0">
+                <a:path w="7660515" h="0">
                   <a:moveTo>
                     <a:pt x="0" y="0"/>
                   </a:moveTo>
                   <a:lnTo>
-                    <a:pt x="7799693" y="0"/>
-                  </a:lnTo>
-                  <a:lnTo>
-                    <a:pt x="7799693" y="0"/>
+                    <a:pt x="7660515" y="0"/>
+                  </a:lnTo>
+                  <a:lnTo>
+                    <a:pt x="7660515" y="0"/>
                   </a:lnTo>
                 </a:path>
               </a:pathLst>
@@ -2357,21 +2349,21 @@
           </p:nvSpPr>
           <p:spPr>
             <a:xfrm>
-              <a:off x="817517" y="3483591"/>
-              <a:ext cx="7799693" cy="0"/>
+              <a:off x="887106" y="2951293"/>
+              <a:ext cx="7660515" cy="0"/>
             </a:xfrm>
             <a:custGeom>
               <a:avLst/>
               <a:pathLst>
-                <a:path w="7799693" h="0">
+                <a:path w="7660515" h="0">
                   <a:moveTo>
                     <a:pt x="0" y="0"/>
                   </a:moveTo>
                   <a:lnTo>
-                    <a:pt x="7799693" y="0"/>
-                  </a:lnTo>
-                  <a:lnTo>
-                    <a:pt x="7799693" y="0"/>
+                    <a:pt x="7660515" y="0"/>
+                  </a:lnTo>
+                  <a:lnTo>
+                    <a:pt x="7660515" y="0"/>
                   </a:lnTo>
                 </a:path>
               </a:pathLst>
@@ -2400,21 +2392,21 @@
           </p:nvSpPr>
           <p:spPr>
             <a:xfrm>
-              <a:off x="817517" y="2654127"/>
-              <a:ext cx="7799693" cy="0"/>
+              <a:off x="887106" y="2651959"/>
+              <a:ext cx="7660515" cy="0"/>
             </a:xfrm>
             <a:custGeom>
               <a:avLst/>
               <a:pathLst>
-                <a:path w="7799693" h="0">
+                <a:path w="7660515" h="0">
                   <a:moveTo>
                     <a:pt x="0" y="0"/>
                   </a:moveTo>
                   <a:lnTo>
-                    <a:pt x="7799693" y="0"/>
-                  </a:lnTo>
-                  <a:lnTo>
-                    <a:pt x="7799693" y="0"/>
+                    <a:pt x="7660515" y="0"/>
+                  </a:lnTo>
+                  <a:lnTo>
+                    <a:pt x="7660515" y="0"/>
                   </a:lnTo>
                 </a:path>
               </a:pathLst>
@@ -2443,21 +2435,21 @@
           </p:nvSpPr>
           <p:spPr>
             <a:xfrm>
-              <a:off x="1531834" y="2073503"/>
-              <a:ext cx="0" cy="3649639"/>
+              <a:off x="887106" y="2352625"/>
+              <a:ext cx="7660515" cy="0"/>
             </a:xfrm>
             <a:custGeom>
               <a:avLst/>
               <a:pathLst>
-                <a:path w="0" h="3649639">
+                <a:path w="7660515" h="0">
                   <a:moveTo>
-                    <a:pt x="0" y="3649639"/>
+                    <a:pt x="0" y="0"/>
                   </a:moveTo>
                   <a:lnTo>
-                    <a:pt x="0" y="0"/>
-                  </a:lnTo>
-                  <a:lnTo>
-                    <a:pt x="0" y="0"/>
+                    <a:pt x="7660515" y="0"/>
+                  </a:lnTo>
+                  <a:lnTo>
+                    <a:pt x="7660515" y="0"/>
                   </a:lnTo>
                 </a:path>
               </a:pathLst>
@@ -2486,15 +2478,15 @@
           </p:nvSpPr>
           <p:spPr>
             <a:xfrm>
-              <a:off x="3586410" y="2073503"/>
-              <a:ext cx="0" cy="3649639"/>
+              <a:off x="1588677" y="2143092"/>
+              <a:ext cx="0" cy="1317069"/>
             </a:xfrm>
             <a:custGeom>
               <a:avLst/>
               <a:pathLst>
-                <a:path w="0" h="3649639">
+                <a:path w="0" h="1317069">
                   <a:moveTo>
-                    <a:pt x="0" y="3649639"/>
+                    <a:pt x="0" y="1317069"/>
                   </a:moveTo>
                   <a:lnTo>
                     <a:pt x="0" y="0"/>
@@ -2529,15 +2521,15 @@
           </p:nvSpPr>
           <p:spPr>
             <a:xfrm>
-              <a:off x="5640985" y="2073503"/>
-              <a:ext cx="0" cy="3649639"/>
+              <a:off x="3606590" y="2143092"/>
+              <a:ext cx="0" cy="1317069"/>
             </a:xfrm>
             <a:custGeom>
               <a:avLst/>
               <a:pathLst>
-                <a:path w="0" h="3649639">
+                <a:path w="0" h="1317069">
                   <a:moveTo>
-                    <a:pt x="0" y="3649639"/>
+                    <a:pt x="0" y="1317069"/>
                   </a:moveTo>
                   <a:lnTo>
                     <a:pt x="0" y="0"/>
@@ -2572,15 +2564,15 @@
           </p:nvSpPr>
           <p:spPr>
             <a:xfrm>
-              <a:off x="7695561" y="2073503"/>
-              <a:ext cx="0" cy="3649639"/>
+              <a:off x="5624504" y="2143092"/>
+              <a:ext cx="0" cy="1317069"/>
             </a:xfrm>
             <a:custGeom>
               <a:avLst/>
               <a:pathLst>
-                <a:path w="0" h="3649639">
+                <a:path w="0" h="1317069">
                   <a:moveTo>
-                    <a:pt x="0" y="3649639"/>
+                    <a:pt x="0" y="1317069"/>
                   </a:moveTo>
                   <a:lnTo>
                     <a:pt x="0" y="0"/>
@@ -2615,26 +2607,26 @@
           </p:nvSpPr>
           <p:spPr>
             <a:xfrm>
-              <a:off x="817517" y="5557249"/>
-              <a:ext cx="7799693" cy="0"/>
+              <a:off x="7642418" y="2143092"/>
+              <a:ext cx="0" cy="1317069"/>
             </a:xfrm>
             <a:custGeom>
               <a:avLst/>
               <a:pathLst>
-                <a:path w="7799693" h="0">
+                <a:path w="0" h="1317069">
                   <a:moveTo>
+                    <a:pt x="0" y="1317069"/>
+                  </a:moveTo>
+                  <a:lnTo>
                     <a:pt x="0" y="0"/>
-                  </a:moveTo>
-                  <a:lnTo>
-                    <a:pt x="7799693" y="0"/>
-                  </a:lnTo>
-                  <a:lnTo>
-                    <a:pt x="7799693" y="0"/>
+                  </a:lnTo>
+                  <a:lnTo>
+                    <a:pt x="0" y="0"/>
                   </a:lnTo>
                 </a:path>
               </a:pathLst>
             </a:custGeom>
-            <a:ln w="13550" cap="flat">
+            <a:ln w="6775" cap="flat">
               <a:solidFill>
                 <a:srgbClr val="EBEBEB">
                   <a:alpha val="100000"/>
@@ -2658,21 +2650,21 @@
           </p:nvSpPr>
           <p:spPr>
             <a:xfrm>
-              <a:off x="817517" y="4727786"/>
-              <a:ext cx="7799693" cy="0"/>
+              <a:off x="887106" y="3400294"/>
+              <a:ext cx="7660515" cy="0"/>
             </a:xfrm>
             <a:custGeom>
               <a:avLst/>
               <a:pathLst>
-                <a:path w="7799693" h="0">
+                <a:path w="7660515" h="0">
                   <a:moveTo>
                     <a:pt x="0" y="0"/>
                   </a:moveTo>
                   <a:lnTo>
-                    <a:pt x="7799693" y="0"/>
-                  </a:lnTo>
-                  <a:lnTo>
-                    <a:pt x="7799693" y="0"/>
+                    <a:pt x="7660515" y="0"/>
+                  </a:lnTo>
+                  <a:lnTo>
+                    <a:pt x="7660515" y="0"/>
                   </a:lnTo>
                 </a:path>
               </a:pathLst>
@@ -2701,21 +2693,21 @@
           </p:nvSpPr>
           <p:spPr>
             <a:xfrm>
-              <a:off x="817517" y="3898322"/>
-              <a:ext cx="7799693" cy="0"/>
+              <a:off x="887106" y="3100960"/>
+              <a:ext cx="7660515" cy="0"/>
             </a:xfrm>
             <a:custGeom>
               <a:avLst/>
               <a:pathLst>
-                <a:path w="7799693" h="0">
+                <a:path w="7660515" h="0">
                   <a:moveTo>
                     <a:pt x="0" y="0"/>
                   </a:moveTo>
                   <a:lnTo>
-                    <a:pt x="7799693" y="0"/>
-                  </a:lnTo>
-                  <a:lnTo>
-                    <a:pt x="7799693" y="0"/>
+                    <a:pt x="7660515" y="0"/>
+                  </a:lnTo>
+                  <a:lnTo>
+                    <a:pt x="7660515" y="0"/>
                   </a:lnTo>
                 </a:path>
               </a:pathLst>
@@ -2744,21 +2736,21 @@
           </p:nvSpPr>
           <p:spPr>
             <a:xfrm>
-              <a:off x="817517" y="3068859"/>
-              <a:ext cx="7799693" cy="0"/>
+              <a:off x="887106" y="2801626"/>
+              <a:ext cx="7660515" cy="0"/>
             </a:xfrm>
             <a:custGeom>
               <a:avLst/>
               <a:pathLst>
-                <a:path w="7799693" h="0">
+                <a:path w="7660515" h="0">
                   <a:moveTo>
                     <a:pt x="0" y="0"/>
                   </a:moveTo>
                   <a:lnTo>
-                    <a:pt x="7799693" y="0"/>
-                  </a:lnTo>
-                  <a:lnTo>
-                    <a:pt x="7799693" y="0"/>
+                    <a:pt x="7660515" y="0"/>
+                  </a:lnTo>
+                  <a:lnTo>
+                    <a:pt x="7660515" y="0"/>
                   </a:lnTo>
                 </a:path>
               </a:pathLst>
@@ -2787,21 +2779,21 @@
           </p:nvSpPr>
           <p:spPr>
             <a:xfrm>
-              <a:off x="817517" y="2239395"/>
-              <a:ext cx="7799693" cy="0"/>
+              <a:off x="887106" y="2502292"/>
+              <a:ext cx="7660515" cy="0"/>
             </a:xfrm>
             <a:custGeom>
               <a:avLst/>
               <a:pathLst>
-                <a:path w="7799693" h="0">
+                <a:path w="7660515" h="0">
                   <a:moveTo>
                     <a:pt x="0" y="0"/>
                   </a:moveTo>
                   <a:lnTo>
-                    <a:pt x="7799693" y="0"/>
-                  </a:lnTo>
-                  <a:lnTo>
-                    <a:pt x="7799693" y="0"/>
+                    <a:pt x="7660515" y="0"/>
+                  </a:lnTo>
+                  <a:lnTo>
+                    <a:pt x="7660515" y="0"/>
                   </a:lnTo>
                 </a:path>
               </a:pathLst>
@@ -2830,21 +2822,21 @@
           </p:nvSpPr>
           <p:spPr>
             <a:xfrm>
-              <a:off x="2559122" y="2073503"/>
-              <a:ext cx="0" cy="3649639"/>
+              <a:off x="887106" y="2202958"/>
+              <a:ext cx="7660515" cy="0"/>
             </a:xfrm>
             <a:custGeom>
               <a:avLst/>
               <a:pathLst>
-                <a:path w="0" h="3649639">
+                <a:path w="7660515" h="0">
                   <a:moveTo>
-                    <a:pt x="0" y="3649639"/>
+                    <a:pt x="0" y="0"/>
                   </a:moveTo>
                   <a:lnTo>
-                    <a:pt x="0" y="0"/>
-                  </a:lnTo>
-                  <a:lnTo>
-                    <a:pt x="0" y="0"/>
+                    <a:pt x="7660515" y="0"/>
+                  </a:lnTo>
+                  <a:lnTo>
+                    <a:pt x="7660515" y="0"/>
                   </a:lnTo>
                 </a:path>
               </a:pathLst>
@@ -2873,15 +2865,15 @@
           </p:nvSpPr>
           <p:spPr>
             <a:xfrm>
-              <a:off x="4613698" y="2073503"/>
-              <a:ext cx="0" cy="3649639"/>
+              <a:off x="2597634" y="2143092"/>
+              <a:ext cx="0" cy="1317069"/>
             </a:xfrm>
             <a:custGeom>
               <a:avLst/>
               <a:pathLst>
-                <a:path w="0" h="3649639">
+                <a:path w="0" h="1317069">
                   <a:moveTo>
-                    <a:pt x="0" y="3649639"/>
+                    <a:pt x="0" y="1317069"/>
                   </a:moveTo>
                   <a:lnTo>
                     <a:pt x="0" y="0"/>
@@ -2916,15 +2908,15 @@
           </p:nvSpPr>
           <p:spPr>
             <a:xfrm>
-              <a:off x="6668273" y="2073503"/>
-              <a:ext cx="0" cy="3649639"/>
+              <a:off x="4615547" y="2143092"/>
+              <a:ext cx="0" cy="1317069"/>
             </a:xfrm>
             <a:custGeom>
               <a:avLst/>
               <a:pathLst>
-                <a:path w="0" h="3649639">
+                <a:path w="0" h="1317069">
                   <a:moveTo>
-                    <a:pt x="0" y="3649639"/>
+                    <a:pt x="0" y="1317069"/>
                   </a:moveTo>
                   <a:lnTo>
                     <a:pt x="0" y="0"/>
@@ -2953,528 +2945,568 @@
         </p:sp>
         <p:sp>
           <p:nvSpPr>
-            <p:cNvPr id="20" name="pg20"/>
+            <p:cNvPr id="20" name="pl20"/>
             <p:cNvSpPr/>
             <p:nvPr/>
           </p:nvSpPr>
           <p:spPr>
             <a:xfrm>
-              <a:off x="1172049" y="2073503"/>
-              <a:ext cx="7090630" cy="3479262"/>
+              <a:off x="6633461" y="2143092"/>
+              <a:ext cx="0" cy="1317069"/>
             </a:xfrm>
             <a:custGeom>
               <a:avLst/>
               <a:pathLst>
-                <a:path w="7090630" h="3479262">
+                <a:path w="0" h="1317069">
                   <a:moveTo>
-                    <a:pt x="2254140" y="0"/>
+                    <a:pt x="0" y="1317069"/>
                   </a:moveTo>
                   <a:lnTo>
-                    <a:pt x="2291920" y="180445"/>
-                  </a:lnTo>
-                  <a:lnTo>
-                    <a:pt x="2363543" y="490428"/>
-                  </a:lnTo>
-                  <a:lnTo>
-                    <a:pt x="2435165" y="771322"/>
-                  </a:lnTo>
-                  <a:lnTo>
-                    <a:pt x="2506788" y="1025857"/>
-                  </a:lnTo>
-                  <a:lnTo>
-                    <a:pt x="2578410" y="1256507"/>
-                  </a:lnTo>
-                  <a:lnTo>
-                    <a:pt x="2650033" y="1465512"/>
-                  </a:lnTo>
-                  <a:lnTo>
-                    <a:pt x="2721655" y="1654904"/>
-                  </a:lnTo>
-                  <a:lnTo>
-                    <a:pt x="2793278" y="1826523"/>
-                  </a:lnTo>
-                  <a:lnTo>
-                    <a:pt x="2864901" y="1982038"/>
-                  </a:lnTo>
-                  <a:lnTo>
-                    <a:pt x="2936523" y="2122959"/>
-                  </a:lnTo>
-                  <a:lnTo>
-                    <a:pt x="3008146" y="2250656"/>
-                  </a:lnTo>
-                  <a:lnTo>
-                    <a:pt x="3079768" y="2366369"/>
-                  </a:lnTo>
-                  <a:lnTo>
-                    <a:pt x="3151391" y="2471225"/>
-                  </a:lnTo>
-                  <a:lnTo>
-                    <a:pt x="3223013" y="2566240"/>
-                  </a:lnTo>
-                  <a:lnTo>
-                    <a:pt x="3294636" y="2652339"/>
-                  </a:lnTo>
-                  <a:lnTo>
-                    <a:pt x="3366258" y="2662050"/>
-                  </a:lnTo>
-                  <a:lnTo>
-                    <a:pt x="3437881" y="2669931"/>
-                  </a:lnTo>
-                  <a:lnTo>
-                    <a:pt x="3509503" y="2677736"/>
-                  </a:lnTo>
-                  <a:lnTo>
-                    <a:pt x="3581126" y="2685466"/>
-                  </a:lnTo>
-                  <a:lnTo>
-                    <a:pt x="3652748" y="2693122"/>
-                  </a:lnTo>
-                  <a:lnTo>
-                    <a:pt x="3724371" y="2700705"/>
-                  </a:lnTo>
-                  <a:lnTo>
-                    <a:pt x="3795993" y="2708215"/>
-                  </a:lnTo>
-                  <a:lnTo>
-                    <a:pt x="3867616" y="2715653"/>
-                  </a:lnTo>
-                  <a:lnTo>
-                    <a:pt x="3939238" y="2723020"/>
-                  </a:lnTo>
-                  <a:lnTo>
-                    <a:pt x="4010861" y="2730316"/>
-                  </a:lnTo>
-                  <a:lnTo>
-                    <a:pt x="4082483" y="2737542"/>
-                  </a:lnTo>
-                  <a:lnTo>
-                    <a:pt x="4154106" y="2744698"/>
-                  </a:lnTo>
-                  <a:lnTo>
-                    <a:pt x="4225729" y="2751786"/>
-                  </a:lnTo>
-                  <a:lnTo>
-                    <a:pt x="4297351" y="2758807"/>
-                  </a:lnTo>
-                  <a:lnTo>
-                    <a:pt x="4368974" y="2765759"/>
-                  </a:lnTo>
-                  <a:lnTo>
-                    <a:pt x="4440596" y="2772645"/>
-                  </a:lnTo>
-                  <a:lnTo>
-                    <a:pt x="4512219" y="2779465"/>
-                  </a:lnTo>
-                  <a:lnTo>
-                    <a:pt x="4583841" y="2786220"/>
-                  </a:lnTo>
-                  <a:lnTo>
-                    <a:pt x="4655464" y="2792910"/>
-                  </a:lnTo>
-                  <a:lnTo>
-                    <a:pt x="4727086" y="2799536"/>
-                  </a:lnTo>
-                  <a:lnTo>
-                    <a:pt x="4798709" y="2806098"/>
-                  </a:lnTo>
-                  <a:lnTo>
-                    <a:pt x="4870331" y="2812597"/>
-                  </a:lnTo>
-                  <a:lnTo>
-                    <a:pt x="4941954" y="2819034"/>
-                  </a:lnTo>
-                  <a:lnTo>
-                    <a:pt x="5013576" y="2825409"/>
-                  </a:lnTo>
-                  <a:lnTo>
-                    <a:pt x="5085199" y="2831723"/>
-                  </a:lnTo>
-                  <a:lnTo>
-                    <a:pt x="5156821" y="2837976"/>
-                  </a:lnTo>
-                  <a:lnTo>
-                    <a:pt x="5228444" y="2844170"/>
-                  </a:lnTo>
-                  <a:lnTo>
-                    <a:pt x="5300066" y="2850304"/>
-                  </a:lnTo>
-                  <a:lnTo>
-                    <a:pt x="5371689" y="2856379"/>
-                  </a:lnTo>
-                  <a:lnTo>
-                    <a:pt x="5443311" y="2862396"/>
-                  </a:lnTo>
-                  <a:lnTo>
-                    <a:pt x="5514934" y="2868355"/>
-                  </a:lnTo>
-                  <a:lnTo>
-                    <a:pt x="5586557" y="2874257"/>
-                  </a:lnTo>
-                  <a:lnTo>
-                    <a:pt x="5658179" y="2880103"/>
-                  </a:lnTo>
-                  <a:lnTo>
-                    <a:pt x="5729802" y="2885892"/>
-                  </a:lnTo>
-                  <a:lnTo>
-                    <a:pt x="5801424" y="2891626"/>
-                  </a:lnTo>
-                  <a:lnTo>
-                    <a:pt x="5873047" y="2897305"/>
-                  </a:lnTo>
-                  <a:lnTo>
-                    <a:pt x="5944669" y="2902930"/>
-                  </a:lnTo>
-                  <a:lnTo>
-                    <a:pt x="6016292" y="2908500"/>
-                  </a:lnTo>
-                  <a:lnTo>
-                    <a:pt x="6087914" y="2914017"/>
-                  </a:lnTo>
-                  <a:lnTo>
-                    <a:pt x="6159537" y="2919481"/>
-                  </a:lnTo>
-                  <a:lnTo>
-                    <a:pt x="6231159" y="2924893"/>
-                  </a:lnTo>
-                  <a:lnTo>
-                    <a:pt x="6302782" y="2930253"/>
-                  </a:lnTo>
-                  <a:lnTo>
-                    <a:pt x="6374404" y="2935561"/>
-                  </a:lnTo>
-                  <a:lnTo>
-                    <a:pt x="6446027" y="2940819"/>
-                  </a:lnTo>
-                  <a:lnTo>
-                    <a:pt x="6517649" y="2946026"/>
-                  </a:lnTo>
-                  <a:lnTo>
-                    <a:pt x="6589272" y="2951183"/>
-                  </a:lnTo>
-                  <a:lnTo>
-                    <a:pt x="6660894" y="2956291"/>
-                  </a:lnTo>
-                  <a:lnTo>
-                    <a:pt x="6732517" y="2961350"/>
-                  </a:lnTo>
-                  <a:lnTo>
-                    <a:pt x="6804139" y="2966360"/>
-                  </a:lnTo>
-                  <a:lnTo>
-                    <a:pt x="6875762" y="2971322"/>
-                  </a:lnTo>
-                  <a:lnTo>
-                    <a:pt x="6947385" y="2976237"/>
-                  </a:lnTo>
-                  <a:lnTo>
-                    <a:pt x="7019007" y="2981104"/>
-                  </a:lnTo>
-                  <a:lnTo>
-                    <a:pt x="7090630" y="2985925"/>
-                  </a:lnTo>
-                  <a:lnTo>
-                    <a:pt x="7090630" y="3479262"/>
-                  </a:lnTo>
-                  <a:lnTo>
-                    <a:pt x="7019007" y="3478798"/>
-                  </a:lnTo>
-                  <a:lnTo>
-                    <a:pt x="6947385" y="3478286"/>
-                  </a:lnTo>
-                  <a:lnTo>
-                    <a:pt x="6875762" y="3477720"/>
-                  </a:lnTo>
-                  <a:lnTo>
-                    <a:pt x="6804139" y="3477096"/>
-                  </a:lnTo>
-                  <a:lnTo>
-                    <a:pt x="6732517" y="3476407"/>
-                  </a:lnTo>
-                  <a:lnTo>
-                    <a:pt x="6660894" y="3475647"/>
-                  </a:lnTo>
-                  <a:lnTo>
-                    <a:pt x="6589272" y="3474809"/>
-                  </a:lnTo>
-                  <a:lnTo>
-                    <a:pt x="6517649" y="3473883"/>
-                  </a:lnTo>
-                  <a:lnTo>
-                    <a:pt x="6446027" y="3472862"/>
-                  </a:lnTo>
-                  <a:lnTo>
-                    <a:pt x="6374404" y="3471734"/>
-                  </a:lnTo>
-                  <a:lnTo>
-                    <a:pt x="6302782" y="3470490"/>
-                  </a:lnTo>
-                  <a:lnTo>
-                    <a:pt x="6231159" y="3469118"/>
-                  </a:lnTo>
-                  <a:lnTo>
-                    <a:pt x="6159537" y="3467603"/>
-                  </a:lnTo>
-                  <a:lnTo>
-                    <a:pt x="6087914" y="3465931"/>
-                  </a:lnTo>
-                  <a:lnTo>
-                    <a:pt x="6016292" y="3464086"/>
-                  </a:lnTo>
-                  <a:lnTo>
-                    <a:pt x="5944669" y="3462050"/>
-                  </a:lnTo>
-                  <a:lnTo>
-                    <a:pt x="5873047" y="3459803"/>
-                  </a:lnTo>
-                  <a:lnTo>
-                    <a:pt x="5801424" y="3457324"/>
-                  </a:lnTo>
-                  <a:lnTo>
-                    <a:pt x="5729802" y="3454587"/>
-                  </a:lnTo>
-                  <a:lnTo>
-                    <a:pt x="5658179" y="3451568"/>
-                  </a:lnTo>
-                  <a:lnTo>
-                    <a:pt x="5586557" y="3448235"/>
-                  </a:lnTo>
-                  <a:lnTo>
-                    <a:pt x="5514934" y="3444558"/>
-                  </a:lnTo>
-                  <a:lnTo>
-                    <a:pt x="5443311" y="3440500"/>
-                  </a:lnTo>
-                  <a:lnTo>
-                    <a:pt x="5371689" y="3436021"/>
-                  </a:lnTo>
-                  <a:lnTo>
-                    <a:pt x="5300066" y="3431079"/>
-                  </a:lnTo>
-                  <a:lnTo>
-                    <a:pt x="5228444" y="3425624"/>
-                  </a:lnTo>
-                  <a:lnTo>
-                    <a:pt x="5156821" y="3419605"/>
-                  </a:lnTo>
-                  <a:lnTo>
-                    <a:pt x="5085199" y="3412963"/>
-                  </a:lnTo>
-                  <a:lnTo>
-                    <a:pt x="5013576" y="3405633"/>
-                  </a:lnTo>
-                  <a:lnTo>
-                    <a:pt x="4941954" y="3397544"/>
-                  </a:lnTo>
-                  <a:lnTo>
-                    <a:pt x="4870331" y="3388617"/>
-                  </a:lnTo>
-                  <a:lnTo>
-                    <a:pt x="4798709" y="3378765"/>
-                  </a:lnTo>
-                  <a:lnTo>
-                    <a:pt x="4727086" y="3367893"/>
-                  </a:lnTo>
-                  <a:lnTo>
-                    <a:pt x="4655464" y="3355896"/>
-                  </a:lnTo>
-                  <a:lnTo>
-                    <a:pt x="4583841" y="3342656"/>
-                  </a:lnTo>
-                  <a:lnTo>
-                    <a:pt x="4512219" y="3328045"/>
-                  </a:lnTo>
-                  <a:lnTo>
-                    <a:pt x="4440596" y="3311920"/>
-                  </a:lnTo>
-                  <a:lnTo>
-                    <a:pt x="4368974" y="3294126"/>
-                  </a:lnTo>
-                  <a:lnTo>
-                    <a:pt x="4297351" y="3274490"/>
-                  </a:lnTo>
-                  <a:lnTo>
-                    <a:pt x="4225729" y="3252819"/>
-                  </a:lnTo>
-                  <a:lnTo>
-                    <a:pt x="4154106" y="3228905"/>
-                  </a:lnTo>
-                  <a:lnTo>
-                    <a:pt x="4082483" y="3202514"/>
-                  </a:lnTo>
-                  <a:lnTo>
-                    <a:pt x="4010861" y="3173390"/>
-                  </a:lnTo>
-                  <a:lnTo>
-                    <a:pt x="3939238" y="3141250"/>
-                  </a:lnTo>
-                  <a:lnTo>
-                    <a:pt x="3867616" y="3105782"/>
-                  </a:lnTo>
-                  <a:lnTo>
-                    <a:pt x="3795993" y="3066640"/>
-                  </a:lnTo>
-                  <a:lnTo>
-                    <a:pt x="3724371" y="3023445"/>
-                  </a:lnTo>
-                  <a:lnTo>
-                    <a:pt x="3652748" y="2975777"/>
-                  </a:lnTo>
-                  <a:lnTo>
-                    <a:pt x="3581126" y="2923173"/>
-                  </a:lnTo>
-                  <a:lnTo>
-                    <a:pt x="3509503" y="2865121"/>
-                  </a:lnTo>
-                  <a:lnTo>
-                    <a:pt x="3437881" y="2801057"/>
-                  </a:lnTo>
-                  <a:lnTo>
-                    <a:pt x="3366258" y="2730359"/>
-                  </a:lnTo>
-                  <a:lnTo>
-                    <a:pt x="3294636" y="2654093"/>
-                  </a:lnTo>
-                  <a:lnTo>
-                    <a:pt x="3223013" y="2646059"/>
-                  </a:lnTo>
-                  <a:lnTo>
-                    <a:pt x="3151391" y="2637947"/>
-                  </a:lnTo>
-                  <a:lnTo>
-                    <a:pt x="3079768" y="2629757"/>
-                  </a:lnTo>
-                  <a:lnTo>
-                    <a:pt x="3008146" y="2621487"/>
-                  </a:lnTo>
-                  <a:lnTo>
-                    <a:pt x="2936523" y="2613137"/>
-                  </a:lnTo>
-                  <a:lnTo>
-                    <a:pt x="2864901" y="2604706"/>
-                  </a:lnTo>
-                  <a:lnTo>
-                    <a:pt x="2793278" y="2596194"/>
-                  </a:lnTo>
-                  <a:lnTo>
-                    <a:pt x="2721655" y="2587599"/>
-                  </a:lnTo>
-                  <a:lnTo>
-                    <a:pt x="2650033" y="2578921"/>
-                  </a:lnTo>
-                  <a:lnTo>
-                    <a:pt x="2578410" y="2570159"/>
-                  </a:lnTo>
-                  <a:lnTo>
-                    <a:pt x="2506788" y="2561312"/>
-                  </a:lnTo>
-                  <a:lnTo>
-                    <a:pt x="2435165" y="2552380"/>
-                  </a:lnTo>
-                  <a:lnTo>
-                    <a:pt x="2363543" y="2543360"/>
-                  </a:lnTo>
-                  <a:lnTo>
-                    <a:pt x="2291920" y="2534254"/>
-                  </a:lnTo>
-                  <a:lnTo>
-                    <a:pt x="2220298" y="2525059"/>
-                  </a:lnTo>
-                  <a:lnTo>
-                    <a:pt x="2148675" y="2515776"/>
-                  </a:lnTo>
-                  <a:lnTo>
-                    <a:pt x="2077053" y="2506402"/>
-                  </a:lnTo>
-                  <a:lnTo>
-                    <a:pt x="2005430" y="2496938"/>
-                  </a:lnTo>
-                  <a:lnTo>
-                    <a:pt x="1933808" y="2487382"/>
-                  </a:lnTo>
-                  <a:lnTo>
-                    <a:pt x="1862185" y="2477734"/>
-                  </a:lnTo>
-                  <a:lnTo>
-                    <a:pt x="1790563" y="2467992"/>
-                  </a:lnTo>
-                  <a:lnTo>
-                    <a:pt x="1718940" y="2458155"/>
-                  </a:lnTo>
-                  <a:lnTo>
-                    <a:pt x="1647318" y="2448224"/>
-                  </a:lnTo>
-                  <a:lnTo>
-                    <a:pt x="1575695" y="2438196"/>
-                  </a:lnTo>
-                  <a:lnTo>
-                    <a:pt x="1504073" y="2428072"/>
-                  </a:lnTo>
-                  <a:lnTo>
-                    <a:pt x="1432450" y="2417849"/>
-                  </a:lnTo>
-                  <a:lnTo>
-                    <a:pt x="1360827" y="2407527"/>
-                  </a:lnTo>
-                  <a:lnTo>
-                    <a:pt x="1289205" y="2397105"/>
-                  </a:lnTo>
-                  <a:lnTo>
-                    <a:pt x="1217582" y="2386582"/>
-                  </a:lnTo>
-                  <a:lnTo>
-                    <a:pt x="1145960" y="2375958"/>
-                  </a:lnTo>
-                  <a:lnTo>
-                    <a:pt x="1074337" y="2365230"/>
-                  </a:lnTo>
-                  <a:lnTo>
-                    <a:pt x="1002715" y="2354399"/>
-                  </a:lnTo>
-                  <a:lnTo>
-                    <a:pt x="931092" y="2343463"/>
-                  </a:lnTo>
-                  <a:lnTo>
-                    <a:pt x="859470" y="2332421"/>
-                  </a:lnTo>
-                  <a:lnTo>
-                    <a:pt x="787847" y="2321272"/>
-                  </a:lnTo>
-                  <a:lnTo>
-                    <a:pt x="716225" y="2310014"/>
-                  </a:lnTo>
-                  <a:lnTo>
-                    <a:pt x="644602" y="2298648"/>
-                  </a:lnTo>
-                  <a:lnTo>
-                    <a:pt x="572980" y="2287172"/>
-                  </a:lnTo>
-                  <a:lnTo>
-                    <a:pt x="501357" y="2275585"/>
-                  </a:lnTo>
-                  <a:lnTo>
-                    <a:pt x="429735" y="2263886"/>
-                  </a:lnTo>
-                  <a:lnTo>
-                    <a:pt x="358112" y="2252073"/>
-                  </a:lnTo>
-                  <a:lnTo>
-                    <a:pt x="286490" y="2240146"/>
-                  </a:lnTo>
-                  <a:lnTo>
-                    <a:pt x="214867" y="2228103"/>
-                  </a:lnTo>
-                  <a:lnTo>
-                    <a:pt x="143245" y="2215944"/>
-                  </a:lnTo>
-                  <a:lnTo>
-                    <a:pt x="71622" y="2203667"/>
-                  </a:lnTo>
-                  <a:lnTo>
-                    <a:pt x="0" y="2191271"/>
-                  </a:lnTo>
-                  <a:lnTo>
                     <a:pt x="0" y="0"/>
+                  </a:lnTo>
+                  <a:lnTo>
+                    <a:pt x="0" y="0"/>
+                  </a:lnTo>
+                </a:path>
+              </a:pathLst>
+            </a:custGeom>
+            <a:ln w="13550" cap="flat">
+              <a:solidFill>
+                <a:srgbClr val="EBEBEB">
+                  <a:alpha val="100000"/>
+                </a:srgbClr>
+              </a:solidFill>
+              <a:prstDash val="solid"/>
+              <a:round/>
+            </a:ln>
+          </p:spPr>
+          <p:txBody>
+            <a:bodyPr/>
+            <a:lstStyle/>
+            <a:p/>
+          </p:txBody>
+        </p:sp>
+        <p:sp>
+          <p:nvSpPr>
+            <p:cNvPr id="21" name="pg21"/>
+            <p:cNvSpPr/>
+            <p:nvPr/>
+          </p:nvSpPr>
+          <p:spPr>
+            <a:xfrm>
+              <a:off x="1235312" y="2143092"/>
+              <a:ext cx="6964104" cy="1255584"/>
+            </a:xfrm>
+            <a:custGeom>
+              <a:avLst/>
+              <a:pathLst>
+                <a:path w="6964104" h="1255584">
+                  <a:moveTo>
+                    <a:pt x="2213917" y="0"/>
+                  </a:moveTo>
+                  <a:lnTo>
+                    <a:pt x="2251023" y="65118"/>
+                  </a:lnTo>
+                  <a:lnTo>
+                    <a:pt x="2321368" y="176984"/>
+                  </a:lnTo>
+                  <a:lnTo>
+                    <a:pt x="2391712" y="278352"/>
+                  </a:lnTo>
+                  <a:lnTo>
+                    <a:pt x="2462057" y="370207"/>
+                  </a:lnTo>
+                  <a:lnTo>
+                    <a:pt x="2532401" y="453443"/>
+                  </a:lnTo>
+                  <a:lnTo>
+                    <a:pt x="2602746" y="528868"/>
+                  </a:lnTo>
+                  <a:lnTo>
+                    <a:pt x="2673090" y="597216"/>
+                  </a:lnTo>
+                  <a:lnTo>
+                    <a:pt x="2743435" y="659149"/>
+                  </a:lnTo>
+                  <a:lnTo>
+                    <a:pt x="2813779" y="715270"/>
+                  </a:lnTo>
+                  <a:lnTo>
+                    <a:pt x="2884124" y="766126"/>
+                  </a:lnTo>
+                  <a:lnTo>
+                    <a:pt x="2954468" y="812208"/>
+                  </a:lnTo>
+                  <a:lnTo>
+                    <a:pt x="3024813" y="853967"/>
+                  </a:lnTo>
+                  <a:lnTo>
+                    <a:pt x="3095157" y="891806"/>
+                  </a:lnTo>
+                  <a:lnTo>
+                    <a:pt x="3165502" y="926095"/>
+                  </a:lnTo>
+                  <a:lnTo>
+                    <a:pt x="3235846" y="957166"/>
+                  </a:lnTo>
+                  <a:lnTo>
+                    <a:pt x="3306191" y="960671"/>
+                  </a:lnTo>
+                  <a:lnTo>
+                    <a:pt x="3376535" y="963515"/>
+                  </a:lnTo>
+                  <a:lnTo>
+                    <a:pt x="3446880" y="966332"/>
+                  </a:lnTo>
+                  <a:lnTo>
+                    <a:pt x="3517224" y="969121"/>
+                  </a:lnTo>
+                  <a:lnTo>
+                    <a:pt x="3587569" y="971884"/>
+                  </a:lnTo>
+                  <a:lnTo>
+                    <a:pt x="3657913" y="974621"/>
+                  </a:lnTo>
+                  <a:lnTo>
+                    <a:pt x="3728257" y="977331"/>
+                  </a:lnTo>
+                  <a:lnTo>
+                    <a:pt x="3798602" y="980015"/>
+                  </a:lnTo>
+                  <a:lnTo>
+                    <a:pt x="3868946" y="982673"/>
+                  </a:lnTo>
+                  <a:lnTo>
+                    <a:pt x="3939291" y="985306"/>
+                  </a:lnTo>
+                  <a:lnTo>
+                    <a:pt x="4009635" y="987914"/>
+                  </a:lnTo>
+                  <a:lnTo>
+                    <a:pt x="4079980" y="990497"/>
+                  </a:lnTo>
+                  <a:lnTo>
+                    <a:pt x="4150324" y="993055"/>
+                  </a:lnTo>
+                  <a:lnTo>
+                    <a:pt x="4220669" y="995588"/>
+                  </a:lnTo>
+                  <a:lnTo>
+                    <a:pt x="4291013" y="998097"/>
+                  </a:lnTo>
+                  <a:lnTo>
+                    <a:pt x="4361358" y="1000582"/>
+                  </a:lnTo>
+                  <a:lnTo>
+                    <a:pt x="4431702" y="1003043"/>
+                  </a:lnTo>
+                  <a:lnTo>
+                    <a:pt x="4502047" y="1005481"/>
+                  </a:lnTo>
+                  <a:lnTo>
+                    <a:pt x="4572391" y="1007895"/>
+                  </a:lnTo>
+                  <a:lnTo>
+                    <a:pt x="4642736" y="1010286"/>
+                  </a:lnTo>
+                  <a:lnTo>
+                    <a:pt x="4713080" y="1012654"/>
+                  </a:lnTo>
+                  <a:lnTo>
+                    <a:pt x="4783425" y="1015000"/>
+                  </a:lnTo>
+                  <a:lnTo>
+                    <a:pt x="4853769" y="1017323"/>
+                  </a:lnTo>
+                  <a:lnTo>
+                    <a:pt x="4924114" y="1019623"/>
+                  </a:lnTo>
+                  <a:lnTo>
+                    <a:pt x="4994458" y="1021902"/>
+                  </a:lnTo>
+                  <a:lnTo>
+                    <a:pt x="5064803" y="1024159"/>
+                  </a:lnTo>
+                  <a:lnTo>
+                    <a:pt x="5135147" y="1026394"/>
+                  </a:lnTo>
+                  <a:lnTo>
+                    <a:pt x="5205492" y="1028607"/>
+                  </a:lnTo>
+                  <a:lnTo>
+                    <a:pt x="5275836" y="1030800"/>
+                  </a:lnTo>
+                  <a:lnTo>
+                    <a:pt x="5346181" y="1032971"/>
+                  </a:lnTo>
+                  <a:lnTo>
+                    <a:pt x="5416525" y="1035122"/>
+                  </a:lnTo>
+                  <a:lnTo>
+                    <a:pt x="5486870" y="1037252"/>
+                  </a:lnTo>
+                  <a:lnTo>
+                    <a:pt x="5557214" y="1039361"/>
+                  </a:lnTo>
+                  <a:lnTo>
+                    <a:pt x="5627559" y="1041450"/>
+                  </a:lnTo>
+                  <a:lnTo>
+                    <a:pt x="5697903" y="1043520"/>
+                  </a:lnTo>
+                  <a:lnTo>
+                    <a:pt x="5768248" y="1045569"/>
+                  </a:lnTo>
+                  <a:lnTo>
+                    <a:pt x="5838592" y="1047599"/>
+                  </a:lnTo>
+                  <a:lnTo>
+                    <a:pt x="5908937" y="1049609"/>
+                  </a:lnTo>
+                  <a:lnTo>
+                    <a:pt x="5979281" y="1051600"/>
+                  </a:lnTo>
+                  <a:lnTo>
+                    <a:pt x="6049626" y="1053572"/>
+                  </a:lnTo>
+                  <a:lnTo>
+                    <a:pt x="6119970" y="1055525"/>
+                  </a:lnTo>
+                  <a:lnTo>
+                    <a:pt x="6190315" y="1057459"/>
+                  </a:lnTo>
+                  <a:lnTo>
+                    <a:pt x="6260659" y="1059375"/>
+                  </a:lnTo>
+                  <a:lnTo>
+                    <a:pt x="6331004" y="1061272"/>
+                  </a:lnTo>
+                  <a:lnTo>
+                    <a:pt x="6401348" y="1063151"/>
+                  </a:lnTo>
+                  <a:lnTo>
+                    <a:pt x="6471693" y="1065012"/>
+                  </a:lnTo>
+                  <a:lnTo>
+                    <a:pt x="6542037" y="1066856"/>
+                  </a:lnTo>
+                  <a:lnTo>
+                    <a:pt x="6612382" y="1068681"/>
+                  </a:lnTo>
+                  <a:lnTo>
+                    <a:pt x="6682726" y="1070489"/>
+                  </a:lnTo>
+                  <a:lnTo>
+                    <a:pt x="6753071" y="1072280"/>
+                  </a:lnTo>
+                  <a:lnTo>
+                    <a:pt x="6823415" y="1074053"/>
+                  </a:lnTo>
+                  <a:lnTo>
+                    <a:pt x="6893760" y="1075810"/>
+                  </a:lnTo>
+                  <a:lnTo>
+                    <a:pt x="6964104" y="1077550"/>
+                  </a:lnTo>
+                  <a:lnTo>
+                    <a:pt x="6964104" y="1255584"/>
+                  </a:lnTo>
+                  <a:lnTo>
+                    <a:pt x="6893760" y="1255416"/>
+                  </a:lnTo>
+                  <a:lnTo>
+                    <a:pt x="6823415" y="1255231"/>
+                  </a:lnTo>
+                  <a:lnTo>
+                    <a:pt x="6753071" y="1255027"/>
+                  </a:lnTo>
+                  <a:lnTo>
+                    <a:pt x="6682726" y="1254802"/>
+                  </a:lnTo>
+                  <a:lnTo>
+                    <a:pt x="6612382" y="1254553"/>
+                  </a:lnTo>
+                  <a:lnTo>
+                    <a:pt x="6542037" y="1254279"/>
+                  </a:lnTo>
+                  <a:lnTo>
+                    <a:pt x="6471693" y="1253976"/>
+                  </a:lnTo>
+                  <a:lnTo>
+                    <a:pt x="6401348" y="1253642"/>
+                  </a:lnTo>
+                  <a:lnTo>
+                    <a:pt x="6331004" y="1253274"/>
+                  </a:lnTo>
+                  <a:lnTo>
+                    <a:pt x="6260659" y="1252867"/>
+                  </a:lnTo>
+                  <a:lnTo>
+                    <a:pt x="6190315" y="1252418"/>
+                  </a:lnTo>
+                  <a:lnTo>
+                    <a:pt x="6119970" y="1251923"/>
+                  </a:lnTo>
+                  <a:lnTo>
+                    <a:pt x="6049626" y="1251376"/>
+                  </a:lnTo>
+                  <a:lnTo>
+                    <a:pt x="5979281" y="1250773"/>
+                  </a:lnTo>
+                  <a:lnTo>
+                    <a:pt x="5908937" y="1250107"/>
+                  </a:lnTo>
+                  <a:lnTo>
+                    <a:pt x="5838592" y="1249372"/>
+                  </a:lnTo>
+                  <a:lnTo>
+                    <a:pt x="5768248" y="1248561"/>
+                  </a:lnTo>
+                  <a:lnTo>
+                    <a:pt x="5697903" y="1247666"/>
+                  </a:lnTo>
+                  <a:lnTo>
+                    <a:pt x="5627559" y="1246679"/>
+                  </a:lnTo>
+                  <a:lnTo>
+                    <a:pt x="5557214" y="1245589"/>
+                  </a:lnTo>
+                  <a:lnTo>
+                    <a:pt x="5486870" y="1244387"/>
+                  </a:lnTo>
+                  <a:lnTo>
+                    <a:pt x="5416525" y="1243060"/>
+                  </a:lnTo>
+                  <a:lnTo>
+                    <a:pt x="5346181" y="1241595"/>
+                  </a:lnTo>
+                  <a:lnTo>
+                    <a:pt x="5275836" y="1239979"/>
+                  </a:lnTo>
+                  <a:lnTo>
+                    <a:pt x="5205492" y="1238195"/>
+                  </a:lnTo>
+                  <a:lnTo>
+                    <a:pt x="5135147" y="1236227"/>
+                  </a:lnTo>
+                  <a:lnTo>
+                    <a:pt x="5064803" y="1234055"/>
+                  </a:lnTo>
+                  <a:lnTo>
+                    <a:pt x="4994458" y="1231658"/>
+                  </a:lnTo>
+                  <a:lnTo>
+                    <a:pt x="4924114" y="1229012"/>
+                  </a:lnTo>
+                  <a:lnTo>
+                    <a:pt x="4853769" y="1226093"/>
+                  </a:lnTo>
+                  <a:lnTo>
+                    <a:pt x="4783425" y="1222872"/>
+                  </a:lnTo>
+                  <a:lnTo>
+                    <a:pt x="4713080" y="1219317"/>
+                  </a:lnTo>
+                  <a:lnTo>
+                    <a:pt x="4642736" y="1215393"/>
+                  </a:lnTo>
+                  <a:lnTo>
+                    <a:pt x="4572391" y="1211064"/>
+                  </a:lnTo>
+                  <a:lnTo>
+                    <a:pt x="4502047" y="1206286"/>
+                  </a:lnTo>
+                  <a:lnTo>
+                    <a:pt x="4431702" y="1201013"/>
+                  </a:lnTo>
+                  <a:lnTo>
+                    <a:pt x="4361358" y="1195194"/>
+                  </a:lnTo>
+                  <a:lnTo>
+                    <a:pt x="4291013" y="1188772"/>
+                  </a:lnTo>
+                  <a:lnTo>
+                    <a:pt x="4220669" y="1181686"/>
+                  </a:lnTo>
+                  <a:lnTo>
+                    <a:pt x="4150324" y="1173866"/>
+                  </a:lnTo>
+                  <a:lnTo>
+                    <a:pt x="4079980" y="1165236"/>
+                  </a:lnTo>
+                  <a:lnTo>
+                    <a:pt x="4009635" y="1155712"/>
+                  </a:lnTo>
+                  <a:lnTo>
+                    <a:pt x="3939291" y="1145202"/>
+                  </a:lnTo>
+                  <a:lnTo>
+                    <a:pt x="3868946" y="1133603"/>
+                  </a:lnTo>
+                  <a:lnTo>
+                    <a:pt x="3798602" y="1120803"/>
+                  </a:lnTo>
+                  <a:lnTo>
+                    <a:pt x="3728257" y="1106678"/>
+                  </a:lnTo>
+                  <a:lnTo>
+                    <a:pt x="3657913" y="1091090"/>
+                  </a:lnTo>
+                  <a:lnTo>
+                    <a:pt x="3587569" y="1073888"/>
+                  </a:lnTo>
+                  <a:lnTo>
+                    <a:pt x="3517224" y="1054904"/>
+                  </a:lnTo>
+                  <a:lnTo>
+                    <a:pt x="3446880" y="1033954"/>
+                  </a:lnTo>
+                  <a:lnTo>
+                    <a:pt x="3376535" y="1010835"/>
+                  </a:lnTo>
+                  <a:lnTo>
+                    <a:pt x="3306191" y="985322"/>
+                  </a:lnTo>
+                  <a:lnTo>
+                    <a:pt x="3235846" y="957799"/>
+                  </a:lnTo>
+                  <a:lnTo>
+                    <a:pt x="3165502" y="954900"/>
+                  </a:lnTo>
+                  <a:lnTo>
+                    <a:pt x="3095157" y="951973"/>
+                  </a:lnTo>
+                  <a:lnTo>
+                    <a:pt x="3024813" y="949017"/>
+                  </a:lnTo>
+                  <a:lnTo>
+                    <a:pt x="2954468" y="946033"/>
+                  </a:lnTo>
+                  <a:lnTo>
+                    <a:pt x="2884124" y="943019"/>
+                  </a:lnTo>
+                  <a:lnTo>
+                    <a:pt x="2813779" y="939977"/>
+                  </a:lnTo>
+                  <a:lnTo>
+                    <a:pt x="2743435" y="936905"/>
+                  </a:lnTo>
+                  <a:lnTo>
+                    <a:pt x="2673090" y="933803"/>
+                  </a:lnTo>
+                  <a:lnTo>
+                    <a:pt x="2602746" y="930672"/>
+                  </a:lnTo>
+                  <a:lnTo>
+                    <a:pt x="2532401" y="927510"/>
+                  </a:lnTo>
+                  <a:lnTo>
+                    <a:pt x="2462057" y="924317"/>
+                  </a:lnTo>
+                  <a:lnTo>
+                    <a:pt x="2391712" y="921093"/>
+                  </a:lnTo>
+                  <a:lnTo>
+                    <a:pt x="2321368" y="917839"/>
+                  </a:lnTo>
+                  <a:lnTo>
+                    <a:pt x="2251023" y="914552"/>
+                  </a:lnTo>
+                  <a:lnTo>
+                    <a:pt x="2180679" y="911234"/>
+                  </a:lnTo>
+                  <a:lnTo>
+                    <a:pt x="2110334" y="907884"/>
+                  </a:lnTo>
+                  <a:lnTo>
+                    <a:pt x="2039990" y="904501"/>
+                  </a:lnTo>
+                  <a:lnTo>
+                    <a:pt x="1969645" y="901086"/>
+                  </a:lnTo>
+                  <a:lnTo>
+                    <a:pt x="1899301" y="897637"/>
+                  </a:lnTo>
+                  <a:lnTo>
+                    <a:pt x="1828956" y="894155"/>
+                  </a:lnTo>
+                  <a:lnTo>
+                    <a:pt x="1758612" y="890640"/>
+                  </a:lnTo>
+                  <a:lnTo>
+                    <a:pt x="1688267" y="887090"/>
+                  </a:lnTo>
+                  <a:lnTo>
+                    <a:pt x="1617923" y="883506"/>
+                  </a:lnTo>
+                  <a:lnTo>
+                    <a:pt x="1547578" y="879887"/>
+                  </a:lnTo>
+                  <a:lnTo>
+                    <a:pt x="1477234" y="876234"/>
+                  </a:lnTo>
+                  <a:lnTo>
+                    <a:pt x="1406889" y="872544"/>
+                  </a:lnTo>
+                  <a:lnTo>
+                    <a:pt x="1336545" y="868819"/>
+                  </a:lnTo>
+                  <a:lnTo>
+                    <a:pt x="1266200" y="865059"/>
+                  </a:lnTo>
+                  <a:lnTo>
+                    <a:pt x="1195856" y="861261"/>
+                  </a:lnTo>
+                  <a:lnTo>
+                    <a:pt x="1125511" y="857427"/>
+                  </a:lnTo>
+                  <a:lnTo>
+                    <a:pt x="1055167" y="853556"/>
+                  </a:lnTo>
+                  <a:lnTo>
+                    <a:pt x="984822" y="849647"/>
+                  </a:lnTo>
+                  <a:lnTo>
+                    <a:pt x="914478" y="845700"/>
+                  </a:lnTo>
+                  <a:lnTo>
+                    <a:pt x="844133" y="841715"/>
+                  </a:lnTo>
+                  <a:lnTo>
+                    <a:pt x="773789" y="837692"/>
+                  </a:lnTo>
+                  <a:lnTo>
+                    <a:pt x="703444" y="833630"/>
+                  </a:lnTo>
+                  <a:lnTo>
+                    <a:pt x="633100" y="829528"/>
+                  </a:lnTo>
+                  <a:lnTo>
+                    <a:pt x="562755" y="825386"/>
+                  </a:lnTo>
+                  <a:lnTo>
+                    <a:pt x="492411" y="821205"/>
+                  </a:lnTo>
+                  <a:lnTo>
+                    <a:pt x="422066" y="816983"/>
+                  </a:lnTo>
+                  <a:lnTo>
+                    <a:pt x="351722" y="812720"/>
+                  </a:lnTo>
+                  <a:lnTo>
+                    <a:pt x="281377" y="808416"/>
+                  </a:lnTo>
+                  <a:lnTo>
+                    <a:pt x="211033" y="804070"/>
+                  </a:lnTo>
+                  <a:lnTo>
+                    <a:pt x="140688" y="799682"/>
+                  </a:lnTo>
+                  <a:lnTo>
+                    <a:pt x="70344" y="795251"/>
+                  </a:lnTo>
+                  <a:lnTo>
+                    <a:pt x="0" y="790778"/>
                   </a:lnTo>
                   <a:close/>
                 </a:path>
@@ -3494,550 +3526,225 @@
         </p:sp>
         <p:sp>
           <p:nvSpPr>
-            <p:cNvPr id="21" name="pl21"/>
-            <p:cNvSpPr/>
-            <p:nvPr/>
-          </p:nvSpPr>
-          <p:spPr>
-            <a:xfrm>
-              <a:off x="3426190" y="2073503"/>
-              <a:ext cx="4836489" cy="2985925"/>
-            </a:xfrm>
-            <a:custGeom>
-              <a:avLst/>
-              <a:pathLst>
-                <a:path w="4836489" h="2985925">
-                  <a:moveTo>
-                    <a:pt x="0" y="0"/>
-                  </a:moveTo>
-                  <a:lnTo>
-                    <a:pt x="37779" y="180445"/>
-                  </a:lnTo>
-                  <a:lnTo>
-                    <a:pt x="109402" y="490428"/>
-                  </a:lnTo>
-                  <a:lnTo>
-                    <a:pt x="181024" y="771322"/>
-                  </a:lnTo>
-                  <a:lnTo>
-                    <a:pt x="252647" y="1025857"/>
-                  </a:lnTo>
-                  <a:lnTo>
-                    <a:pt x="324270" y="1256507"/>
-                  </a:lnTo>
-                  <a:lnTo>
-                    <a:pt x="395892" y="1465512"/>
-                  </a:lnTo>
-                  <a:lnTo>
-                    <a:pt x="467515" y="1654904"/>
-                  </a:lnTo>
-                  <a:lnTo>
-                    <a:pt x="539137" y="1826523"/>
-                  </a:lnTo>
-                  <a:lnTo>
-                    <a:pt x="610760" y="1982038"/>
-                  </a:lnTo>
-                  <a:lnTo>
-                    <a:pt x="682382" y="2122959"/>
-                  </a:lnTo>
-                  <a:lnTo>
-                    <a:pt x="754005" y="2250656"/>
-                  </a:lnTo>
-                  <a:lnTo>
-                    <a:pt x="825627" y="2366369"/>
-                  </a:lnTo>
-                  <a:lnTo>
-                    <a:pt x="897250" y="2471225"/>
-                  </a:lnTo>
-                  <a:lnTo>
-                    <a:pt x="968872" y="2566240"/>
-                  </a:lnTo>
-                  <a:lnTo>
-                    <a:pt x="1040495" y="2652339"/>
-                  </a:lnTo>
-                  <a:lnTo>
-                    <a:pt x="1112117" y="2662050"/>
-                  </a:lnTo>
-                  <a:lnTo>
-                    <a:pt x="1183740" y="2669931"/>
-                  </a:lnTo>
-                  <a:lnTo>
-                    <a:pt x="1255362" y="2677736"/>
-                  </a:lnTo>
-                  <a:lnTo>
-                    <a:pt x="1326985" y="2685466"/>
-                  </a:lnTo>
-                  <a:lnTo>
-                    <a:pt x="1398607" y="2693122"/>
-                  </a:lnTo>
-                  <a:lnTo>
-                    <a:pt x="1470230" y="2700705"/>
-                  </a:lnTo>
-                  <a:lnTo>
-                    <a:pt x="1541852" y="2708215"/>
-                  </a:lnTo>
-                  <a:lnTo>
-                    <a:pt x="1613475" y="2715653"/>
-                  </a:lnTo>
-                  <a:lnTo>
-                    <a:pt x="1685098" y="2723020"/>
-                  </a:lnTo>
-                  <a:lnTo>
-                    <a:pt x="1756720" y="2730316"/>
-                  </a:lnTo>
-                  <a:lnTo>
-                    <a:pt x="1828343" y="2737542"/>
-                  </a:lnTo>
-                  <a:lnTo>
-                    <a:pt x="1899965" y="2744698"/>
-                  </a:lnTo>
-                  <a:lnTo>
-                    <a:pt x="1971588" y="2751786"/>
-                  </a:lnTo>
-                  <a:lnTo>
-                    <a:pt x="2043210" y="2758807"/>
-                  </a:lnTo>
-                  <a:lnTo>
-                    <a:pt x="2114833" y="2765759"/>
-                  </a:lnTo>
-                  <a:lnTo>
-                    <a:pt x="2186455" y="2772645"/>
-                  </a:lnTo>
-                  <a:lnTo>
-                    <a:pt x="2258078" y="2779465"/>
-                  </a:lnTo>
-                  <a:lnTo>
-                    <a:pt x="2329700" y="2786220"/>
-                  </a:lnTo>
-                  <a:lnTo>
-                    <a:pt x="2401323" y="2792910"/>
-                  </a:lnTo>
-                  <a:lnTo>
-                    <a:pt x="2472945" y="2799536"/>
-                  </a:lnTo>
-                  <a:lnTo>
-                    <a:pt x="2544568" y="2806098"/>
-                  </a:lnTo>
-                  <a:lnTo>
-                    <a:pt x="2616190" y="2812597"/>
-                  </a:lnTo>
-                  <a:lnTo>
-                    <a:pt x="2687813" y="2819034"/>
-                  </a:lnTo>
-                  <a:lnTo>
-                    <a:pt x="2759435" y="2825409"/>
-                  </a:lnTo>
-                  <a:lnTo>
-                    <a:pt x="2831058" y="2831723"/>
-                  </a:lnTo>
-                  <a:lnTo>
-                    <a:pt x="2902680" y="2837976"/>
-                  </a:lnTo>
-                  <a:lnTo>
-                    <a:pt x="2974303" y="2844170"/>
-                  </a:lnTo>
-                  <a:lnTo>
-                    <a:pt x="3045926" y="2850304"/>
-                  </a:lnTo>
-                  <a:lnTo>
-                    <a:pt x="3117548" y="2856379"/>
-                  </a:lnTo>
-                  <a:lnTo>
-                    <a:pt x="3189171" y="2862396"/>
-                  </a:lnTo>
-                  <a:lnTo>
-                    <a:pt x="3260793" y="2868355"/>
-                  </a:lnTo>
-                  <a:lnTo>
-                    <a:pt x="3332416" y="2874257"/>
-                  </a:lnTo>
-                  <a:lnTo>
-                    <a:pt x="3404038" y="2880103"/>
-                  </a:lnTo>
-                  <a:lnTo>
-                    <a:pt x="3475661" y="2885892"/>
-                  </a:lnTo>
-                  <a:lnTo>
-                    <a:pt x="3547283" y="2891626"/>
-                  </a:lnTo>
-                  <a:lnTo>
-                    <a:pt x="3618906" y="2897305"/>
-                  </a:lnTo>
-                  <a:lnTo>
-                    <a:pt x="3690528" y="2902930"/>
-                  </a:lnTo>
-                  <a:lnTo>
-                    <a:pt x="3762151" y="2908500"/>
-                  </a:lnTo>
-                  <a:lnTo>
-                    <a:pt x="3833773" y="2914017"/>
-                  </a:lnTo>
-                  <a:lnTo>
-                    <a:pt x="3905396" y="2919481"/>
-                  </a:lnTo>
-                  <a:lnTo>
-                    <a:pt x="3977018" y="2924893"/>
-                  </a:lnTo>
-                  <a:lnTo>
-                    <a:pt x="4048641" y="2930253"/>
-                  </a:lnTo>
-                  <a:lnTo>
-                    <a:pt x="4120263" y="2935561"/>
-                  </a:lnTo>
-                  <a:lnTo>
-                    <a:pt x="4191886" y="2940819"/>
-                  </a:lnTo>
-                  <a:lnTo>
-                    <a:pt x="4263508" y="2946026"/>
-                  </a:lnTo>
-                  <a:lnTo>
-                    <a:pt x="4335131" y="2951183"/>
-                  </a:lnTo>
-                  <a:lnTo>
-                    <a:pt x="4406754" y="2956291"/>
-                  </a:lnTo>
-                  <a:lnTo>
-                    <a:pt x="4478376" y="2961350"/>
-                  </a:lnTo>
-                  <a:lnTo>
-                    <a:pt x="4549999" y="2966360"/>
-                  </a:lnTo>
-                  <a:lnTo>
-                    <a:pt x="4621621" y="2971322"/>
-                  </a:lnTo>
-                  <a:lnTo>
-                    <a:pt x="4693244" y="2976237"/>
-                  </a:lnTo>
-                  <a:lnTo>
-                    <a:pt x="4764866" y="2981104"/>
-                  </a:lnTo>
-                  <a:lnTo>
-                    <a:pt x="4836489" y="2985925"/>
-                  </a:lnTo>
-                </a:path>
-              </a:pathLst>
-            </a:custGeom>
-          </p:spPr>
-          <p:txBody>
-            <a:bodyPr/>
-            <a:lstStyle/>
-            <a:p/>
-          </p:txBody>
-        </p:sp>
-        <p:sp>
-          <p:nvSpPr>
             <p:cNvPr id="22" name="pl22"/>
             <p:cNvSpPr/>
             <p:nvPr/>
           </p:nvSpPr>
           <p:spPr>
             <a:xfrm>
-              <a:off x="1172049" y="4264774"/>
-              <a:ext cx="7090630" cy="1287991"/>
+              <a:off x="3449230" y="2143092"/>
+              <a:ext cx="4750186" cy="1077550"/>
             </a:xfrm>
             <a:custGeom>
               <a:avLst/>
               <a:pathLst>
-                <a:path w="7090630" h="1287991">
+                <a:path w="4750186" h="1077550">
                   <a:moveTo>
-                    <a:pt x="7090630" y="1287991"/>
+                    <a:pt x="0" y="0"/>
                   </a:moveTo>
                   <a:lnTo>
-                    <a:pt x="7019007" y="1287527"/>
-                  </a:lnTo>
-                  <a:lnTo>
-                    <a:pt x="6947385" y="1287014"/>
-                  </a:lnTo>
-                  <a:lnTo>
-                    <a:pt x="6875762" y="1286449"/>
-                  </a:lnTo>
-                  <a:lnTo>
-                    <a:pt x="6804139" y="1285825"/>
-                  </a:lnTo>
-                  <a:lnTo>
-                    <a:pt x="6732517" y="1285136"/>
-                  </a:lnTo>
-                  <a:lnTo>
-                    <a:pt x="6660894" y="1284376"/>
-                  </a:lnTo>
-                  <a:lnTo>
-                    <a:pt x="6589272" y="1283537"/>
-                  </a:lnTo>
-                  <a:lnTo>
-                    <a:pt x="6517649" y="1282612"/>
-                  </a:lnTo>
-                  <a:lnTo>
-                    <a:pt x="6446027" y="1281590"/>
-                  </a:lnTo>
-                  <a:lnTo>
-                    <a:pt x="6374404" y="1280463"/>
-                  </a:lnTo>
-                  <a:lnTo>
-                    <a:pt x="6302782" y="1279219"/>
-                  </a:lnTo>
-                  <a:lnTo>
-                    <a:pt x="6231159" y="1277846"/>
-                  </a:lnTo>
-                  <a:lnTo>
-                    <a:pt x="6159537" y="1276331"/>
-                  </a:lnTo>
-                  <a:lnTo>
-                    <a:pt x="6087914" y="1274660"/>
-                  </a:lnTo>
-                  <a:lnTo>
-                    <a:pt x="6016292" y="1272815"/>
-                  </a:lnTo>
-                  <a:lnTo>
-                    <a:pt x="5944669" y="1270779"/>
-                  </a:lnTo>
-                  <a:lnTo>
-                    <a:pt x="5873047" y="1268532"/>
-                  </a:lnTo>
-                  <a:lnTo>
-                    <a:pt x="5801424" y="1266052"/>
-                  </a:lnTo>
-                  <a:lnTo>
-                    <a:pt x="5729802" y="1263316"/>
-                  </a:lnTo>
-                  <a:lnTo>
-                    <a:pt x="5658179" y="1260296"/>
-                  </a:lnTo>
-                  <a:lnTo>
-                    <a:pt x="5586557" y="1256964"/>
-                  </a:lnTo>
-                  <a:lnTo>
-                    <a:pt x="5514934" y="1253286"/>
-                  </a:lnTo>
-                  <a:lnTo>
-                    <a:pt x="5443311" y="1249228"/>
-                  </a:lnTo>
-                  <a:lnTo>
-                    <a:pt x="5371689" y="1244750"/>
-                  </a:lnTo>
-                  <a:lnTo>
-                    <a:pt x="5300066" y="1239807"/>
-                  </a:lnTo>
-                  <a:lnTo>
-                    <a:pt x="5228444" y="1234353"/>
-                  </a:lnTo>
-                  <a:lnTo>
-                    <a:pt x="5156821" y="1228334"/>
-                  </a:lnTo>
-                  <a:lnTo>
-                    <a:pt x="5085199" y="1221692"/>
-                  </a:lnTo>
-                  <a:lnTo>
-                    <a:pt x="5013576" y="1214361"/>
-                  </a:lnTo>
-                  <a:lnTo>
-                    <a:pt x="4941954" y="1206272"/>
-                  </a:lnTo>
-                  <a:lnTo>
-                    <a:pt x="4870331" y="1197345"/>
-                  </a:lnTo>
-                  <a:lnTo>
-                    <a:pt x="4798709" y="1187494"/>
-                  </a:lnTo>
-                  <a:lnTo>
-                    <a:pt x="4727086" y="1176622"/>
-                  </a:lnTo>
-                  <a:lnTo>
-                    <a:pt x="4655464" y="1164624"/>
-                  </a:lnTo>
-                  <a:lnTo>
-                    <a:pt x="4583841" y="1151384"/>
-                  </a:lnTo>
-                  <a:lnTo>
-                    <a:pt x="4512219" y="1136773"/>
-                  </a:lnTo>
-                  <a:lnTo>
-                    <a:pt x="4440596" y="1120649"/>
-                  </a:lnTo>
-                  <a:lnTo>
-                    <a:pt x="4368974" y="1102855"/>
-                  </a:lnTo>
-                  <a:lnTo>
-                    <a:pt x="4297351" y="1083218"/>
-                  </a:lnTo>
-                  <a:lnTo>
-                    <a:pt x="4225729" y="1061548"/>
-                  </a:lnTo>
-                  <a:lnTo>
-                    <a:pt x="4154106" y="1037634"/>
-                  </a:lnTo>
-                  <a:lnTo>
-                    <a:pt x="4082483" y="1011243"/>
-                  </a:lnTo>
-                  <a:lnTo>
-                    <a:pt x="4010861" y="982119"/>
-                  </a:lnTo>
-                  <a:lnTo>
-                    <a:pt x="3939238" y="949979"/>
-                  </a:lnTo>
-                  <a:lnTo>
-                    <a:pt x="3867616" y="914510"/>
-                  </a:lnTo>
-                  <a:lnTo>
-                    <a:pt x="3795993" y="875369"/>
-                  </a:lnTo>
-                  <a:lnTo>
-                    <a:pt x="3724371" y="832174"/>
-                  </a:lnTo>
-                  <a:lnTo>
-                    <a:pt x="3652748" y="784506"/>
-                  </a:lnTo>
-                  <a:lnTo>
-                    <a:pt x="3581126" y="731902"/>
-                  </a:lnTo>
-                  <a:lnTo>
-                    <a:pt x="3509503" y="673849"/>
-                  </a:lnTo>
-                  <a:lnTo>
-                    <a:pt x="3437881" y="609786"/>
-                  </a:lnTo>
-                  <a:lnTo>
-                    <a:pt x="3366258" y="539087"/>
-                  </a:lnTo>
-                  <a:lnTo>
-                    <a:pt x="3294636" y="462822"/>
-                  </a:lnTo>
-                  <a:lnTo>
-                    <a:pt x="3223013" y="454787"/>
-                  </a:lnTo>
-                  <a:lnTo>
-                    <a:pt x="3151391" y="446676"/>
-                  </a:lnTo>
-                  <a:lnTo>
-                    <a:pt x="3079768" y="438485"/>
-                  </a:lnTo>
-                  <a:lnTo>
-                    <a:pt x="3008146" y="430215"/>
-                  </a:lnTo>
-                  <a:lnTo>
-                    <a:pt x="2936523" y="421865"/>
-                  </a:lnTo>
-                  <a:lnTo>
-                    <a:pt x="2864901" y="413435"/>
-                  </a:lnTo>
-                  <a:lnTo>
-                    <a:pt x="2793278" y="404922"/>
-                  </a:lnTo>
-                  <a:lnTo>
-                    <a:pt x="2721655" y="396328"/>
-                  </a:lnTo>
-                  <a:lnTo>
-                    <a:pt x="2650033" y="387650"/>
-                  </a:lnTo>
-                  <a:lnTo>
-                    <a:pt x="2578410" y="378888"/>
-                  </a:lnTo>
-                  <a:lnTo>
-                    <a:pt x="2506788" y="370041"/>
-                  </a:lnTo>
-                  <a:lnTo>
-                    <a:pt x="2435165" y="361108"/>
-                  </a:lnTo>
-                  <a:lnTo>
-                    <a:pt x="2363543" y="352089"/>
-                  </a:lnTo>
-                  <a:lnTo>
-                    <a:pt x="2291920" y="342983"/>
-                  </a:lnTo>
-                  <a:lnTo>
-                    <a:pt x="2220298" y="333788"/>
-                  </a:lnTo>
-                  <a:lnTo>
-                    <a:pt x="2148675" y="324504"/>
-                  </a:lnTo>
-                  <a:lnTo>
-                    <a:pt x="2077053" y="315131"/>
-                  </a:lnTo>
-                  <a:lnTo>
-                    <a:pt x="2005430" y="305667"/>
-                  </a:lnTo>
-                  <a:lnTo>
-                    <a:pt x="1933808" y="296111"/>
-                  </a:lnTo>
-                  <a:lnTo>
-                    <a:pt x="1862185" y="286462"/>
-                  </a:lnTo>
-                  <a:lnTo>
-                    <a:pt x="1790563" y="276720"/>
-                  </a:lnTo>
-                  <a:lnTo>
-                    <a:pt x="1718940" y="266884"/>
-                  </a:lnTo>
-                  <a:lnTo>
-                    <a:pt x="1647318" y="256953"/>
-                  </a:lnTo>
-                  <a:lnTo>
-                    <a:pt x="1575695" y="246925"/>
-                  </a:lnTo>
-                  <a:lnTo>
-                    <a:pt x="1504073" y="236800"/>
-                  </a:lnTo>
-                  <a:lnTo>
-                    <a:pt x="1432450" y="226577"/>
-                  </a:lnTo>
-                  <a:lnTo>
-                    <a:pt x="1360827" y="216255"/>
-                  </a:lnTo>
-                  <a:lnTo>
-                    <a:pt x="1289205" y="205834"/>
-                  </a:lnTo>
-                  <a:lnTo>
-                    <a:pt x="1217582" y="195311"/>
-                  </a:lnTo>
-                  <a:lnTo>
-                    <a:pt x="1145960" y="184686"/>
-                  </a:lnTo>
-                  <a:lnTo>
-                    <a:pt x="1074337" y="173959"/>
-                  </a:lnTo>
-                  <a:lnTo>
-                    <a:pt x="1002715" y="163128"/>
-                  </a:lnTo>
-                  <a:lnTo>
-                    <a:pt x="931092" y="152191"/>
-                  </a:lnTo>
-                  <a:lnTo>
-                    <a:pt x="859470" y="141149"/>
-                  </a:lnTo>
-                  <a:lnTo>
-                    <a:pt x="787847" y="130000"/>
-                  </a:lnTo>
-                  <a:lnTo>
-                    <a:pt x="716225" y="118743"/>
-                  </a:lnTo>
-                  <a:lnTo>
-                    <a:pt x="644602" y="107377"/>
-                  </a:lnTo>
-                  <a:lnTo>
-                    <a:pt x="572980" y="95901"/>
-                  </a:lnTo>
-                  <a:lnTo>
-                    <a:pt x="501357" y="84314"/>
-                  </a:lnTo>
-                  <a:lnTo>
-                    <a:pt x="429735" y="72614"/>
-                  </a:lnTo>
-                  <a:lnTo>
-                    <a:pt x="358112" y="60801"/>
-                  </a:lnTo>
-                  <a:lnTo>
-                    <a:pt x="286490" y="48874"/>
-                  </a:lnTo>
-                  <a:lnTo>
-                    <a:pt x="214867" y="36832"/>
-                  </a:lnTo>
-                  <a:lnTo>
-                    <a:pt x="143245" y="24672"/>
-                  </a:lnTo>
-                  <a:lnTo>
-                    <a:pt x="71622" y="12395"/>
-                  </a:lnTo>
-                  <a:lnTo>
-                    <a:pt x="0" y="0"/>
+                    <a:pt x="37105" y="65118"/>
+                  </a:lnTo>
+                  <a:lnTo>
+                    <a:pt x="107450" y="176984"/>
+                  </a:lnTo>
+                  <a:lnTo>
+                    <a:pt x="177794" y="278352"/>
+                  </a:lnTo>
+                  <a:lnTo>
+                    <a:pt x="248139" y="370207"/>
+                  </a:lnTo>
+                  <a:lnTo>
+                    <a:pt x="318483" y="453443"/>
+                  </a:lnTo>
+                  <a:lnTo>
+                    <a:pt x="388828" y="528868"/>
+                  </a:lnTo>
+                  <a:lnTo>
+                    <a:pt x="459172" y="597216"/>
+                  </a:lnTo>
+                  <a:lnTo>
+                    <a:pt x="529517" y="659149"/>
+                  </a:lnTo>
+                  <a:lnTo>
+                    <a:pt x="599861" y="715270"/>
+                  </a:lnTo>
+                  <a:lnTo>
+                    <a:pt x="670206" y="766126"/>
+                  </a:lnTo>
+                  <a:lnTo>
+                    <a:pt x="740550" y="812208"/>
+                  </a:lnTo>
+                  <a:lnTo>
+                    <a:pt x="810895" y="853967"/>
+                  </a:lnTo>
+                  <a:lnTo>
+                    <a:pt x="881239" y="891806"/>
+                  </a:lnTo>
+                  <a:lnTo>
+                    <a:pt x="951584" y="926095"/>
+                  </a:lnTo>
+                  <a:lnTo>
+                    <a:pt x="1021928" y="957166"/>
+                  </a:lnTo>
+                  <a:lnTo>
+                    <a:pt x="1092273" y="960671"/>
+                  </a:lnTo>
+                  <a:lnTo>
+                    <a:pt x="1162617" y="963515"/>
+                  </a:lnTo>
+                  <a:lnTo>
+                    <a:pt x="1232962" y="966332"/>
+                  </a:lnTo>
+                  <a:lnTo>
+                    <a:pt x="1303306" y="969121"/>
+                  </a:lnTo>
+                  <a:lnTo>
+                    <a:pt x="1373651" y="971884"/>
+                  </a:lnTo>
+                  <a:lnTo>
+                    <a:pt x="1443995" y="974621"/>
+                  </a:lnTo>
+                  <a:lnTo>
+                    <a:pt x="1514340" y="977331"/>
+                  </a:lnTo>
+                  <a:lnTo>
+                    <a:pt x="1584684" y="980015"/>
+                  </a:lnTo>
+                  <a:lnTo>
+                    <a:pt x="1655029" y="982673"/>
+                  </a:lnTo>
+                  <a:lnTo>
+                    <a:pt x="1725373" y="985306"/>
+                  </a:lnTo>
+                  <a:lnTo>
+                    <a:pt x="1795718" y="987914"/>
+                  </a:lnTo>
+                  <a:lnTo>
+                    <a:pt x="1866062" y="990497"/>
+                  </a:lnTo>
+                  <a:lnTo>
+                    <a:pt x="1936407" y="993055"/>
+                  </a:lnTo>
+                  <a:lnTo>
+                    <a:pt x="2006751" y="995588"/>
+                  </a:lnTo>
+                  <a:lnTo>
+                    <a:pt x="2077096" y="998097"/>
+                  </a:lnTo>
+                  <a:lnTo>
+                    <a:pt x="2147440" y="1000582"/>
+                  </a:lnTo>
+                  <a:lnTo>
+                    <a:pt x="2217785" y="1003043"/>
+                  </a:lnTo>
+                  <a:lnTo>
+                    <a:pt x="2288129" y="1005481"/>
+                  </a:lnTo>
+                  <a:lnTo>
+                    <a:pt x="2358473" y="1007895"/>
+                  </a:lnTo>
+                  <a:lnTo>
+                    <a:pt x="2428818" y="1010286"/>
+                  </a:lnTo>
+                  <a:lnTo>
+                    <a:pt x="2499162" y="1012654"/>
+                  </a:lnTo>
+                  <a:lnTo>
+                    <a:pt x="2569507" y="1015000"/>
+                  </a:lnTo>
+                  <a:lnTo>
+                    <a:pt x="2639851" y="1017323"/>
+                  </a:lnTo>
+                  <a:lnTo>
+                    <a:pt x="2710196" y="1019623"/>
+                  </a:lnTo>
+                  <a:lnTo>
+                    <a:pt x="2780540" y="1021902"/>
+                  </a:lnTo>
+                  <a:lnTo>
+                    <a:pt x="2850885" y="1024159"/>
+                  </a:lnTo>
+                  <a:lnTo>
+                    <a:pt x="2921229" y="1026394"/>
+                  </a:lnTo>
+                  <a:lnTo>
+                    <a:pt x="2991574" y="1028607"/>
+                  </a:lnTo>
+                  <a:lnTo>
+                    <a:pt x="3061918" y="1030800"/>
+                  </a:lnTo>
+                  <a:lnTo>
+                    <a:pt x="3132263" y="1032971"/>
+                  </a:lnTo>
+                  <a:lnTo>
+                    <a:pt x="3202607" y="1035122"/>
+                  </a:lnTo>
+                  <a:lnTo>
+                    <a:pt x="3272952" y="1037252"/>
+                  </a:lnTo>
+                  <a:lnTo>
+                    <a:pt x="3343296" y="1039361"/>
+                  </a:lnTo>
+                  <a:lnTo>
+                    <a:pt x="3413641" y="1041450"/>
+                  </a:lnTo>
+                  <a:lnTo>
+                    <a:pt x="3483985" y="1043520"/>
+                  </a:lnTo>
+                  <a:lnTo>
+                    <a:pt x="3554330" y="1045569"/>
+                  </a:lnTo>
+                  <a:lnTo>
+                    <a:pt x="3624674" y="1047599"/>
+                  </a:lnTo>
+                  <a:lnTo>
+                    <a:pt x="3695019" y="1049609"/>
+                  </a:lnTo>
+                  <a:lnTo>
+                    <a:pt x="3765363" y="1051600"/>
+                  </a:lnTo>
+                  <a:lnTo>
+                    <a:pt x="3835708" y="1053572"/>
+                  </a:lnTo>
+                  <a:lnTo>
+                    <a:pt x="3906052" y="1055525"/>
+                  </a:lnTo>
+                  <a:lnTo>
+                    <a:pt x="3976397" y="1057459"/>
+                  </a:lnTo>
+                  <a:lnTo>
+                    <a:pt x="4046741" y="1059375"/>
+                  </a:lnTo>
+                  <a:lnTo>
+                    <a:pt x="4117086" y="1061272"/>
+                  </a:lnTo>
+                  <a:lnTo>
+                    <a:pt x="4187430" y="1063151"/>
+                  </a:lnTo>
+                  <a:lnTo>
+                    <a:pt x="4257775" y="1065012"/>
+                  </a:lnTo>
+                  <a:lnTo>
+                    <a:pt x="4328119" y="1066856"/>
+                  </a:lnTo>
+                  <a:lnTo>
+                    <a:pt x="4398464" y="1068681"/>
+                  </a:lnTo>
+                  <a:lnTo>
+                    <a:pt x="4468808" y="1070489"/>
+                  </a:lnTo>
+                  <a:lnTo>
+                    <a:pt x="4539153" y="1072280"/>
+                  </a:lnTo>
+                  <a:lnTo>
+                    <a:pt x="4609497" y="1074053"/>
+                  </a:lnTo>
+                  <a:lnTo>
+                    <a:pt x="4679842" y="1075810"/>
+                  </a:lnTo>
+                  <a:lnTo>
+                    <a:pt x="4750186" y="1077550"/>
                   </a:lnTo>
                 </a:path>
               </a:pathLst>
@@ -4057,255 +3764,580 @@
           </p:nvSpPr>
           <p:spPr>
             <a:xfrm>
-              <a:off x="2568570" y="2073503"/>
-              <a:ext cx="5694109" cy="3436500"/>
+              <a:off x="1235312" y="2933870"/>
+              <a:ext cx="6964104" cy="464805"/>
             </a:xfrm>
             <a:custGeom>
               <a:avLst/>
               <a:pathLst>
-                <a:path w="5694109" h="3436500">
+                <a:path w="6964104" h="464805">
+                  <a:moveTo>
+                    <a:pt x="6964104" y="464805"/>
+                  </a:moveTo>
+                  <a:lnTo>
+                    <a:pt x="6893760" y="464638"/>
+                  </a:lnTo>
+                  <a:lnTo>
+                    <a:pt x="6823415" y="464453"/>
+                  </a:lnTo>
+                  <a:lnTo>
+                    <a:pt x="6753071" y="464249"/>
+                  </a:lnTo>
+                  <a:lnTo>
+                    <a:pt x="6682726" y="464024"/>
+                  </a:lnTo>
+                  <a:lnTo>
+                    <a:pt x="6612382" y="463775"/>
+                  </a:lnTo>
+                  <a:lnTo>
+                    <a:pt x="6542037" y="463501"/>
+                  </a:lnTo>
+                  <a:lnTo>
+                    <a:pt x="6471693" y="463198"/>
+                  </a:lnTo>
+                  <a:lnTo>
+                    <a:pt x="6401348" y="462864"/>
+                  </a:lnTo>
+                  <a:lnTo>
+                    <a:pt x="6331004" y="462495"/>
+                  </a:lnTo>
+                  <a:lnTo>
+                    <a:pt x="6260659" y="462089"/>
+                  </a:lnTo>
+                  <a:lnTo>
+                    <a:pt x="6190315" y="461640"/>
+                  </a:lnTo>
+                  <a:lnTo>
+                    <a:pt x="6119970" y="461144"/>
+                  </a:lnTo>
+                  <a:lnTo>
+                    <a:pt x="6049626" y="460598"/>
+                  </a:lnTo>
+                  <a:lnTo>
+                    <a:pt x="5979281" y="459994"/>
+                  </a:lnTo>
+                  <a:lnTo>
+                    <a:pt x="5908937" y="459329"/>
+                  </a:lnTo>
+                  <a:lnTo>
+                    <a:pt x="5838592" y="458594"/>
+                  </a:lnTo>
+                  <a:lnTo>
+                    <a:pt x="5768248" y="457783"/>
+                  </a:lnTo>
+                  <a:lnTo>
+                    <a:pt x="5697903" y="456888"/>
+                  </a:lnTo>
+                  <a:lnTo>
+                    <a:pt x="5627559" y="455901"/>
+                  </a:lnTo>
+                  <a:lnTo>
+                    <a:pt x="5557214" y="454811"/>
+                  </a:lnTo>
+                  <a:lnTo>
+                    <a:pt x="5486870" y="453608"/>
+                  </a:lnTo>
+                  <a:lnTo>
+                    <a:pt x="5416525" y="452281"/>
+                  </a:lnTo>
+                  <a:lnTo>
+                    <a:pt x="5346181" y="450817"/>
+                  </a:lnTo>
+                  <a:lnTo>
+                    <a:pt x="5275836" y="449201"/>
+                  </a:lnTo>
+                  <a:lnTo>
+                    <a:pt x="5205492" y="447417"/>
+                  </a:lnTo>
+                  <a:lnTo>
+                    <a:pt x="5135147" y="445449"/>
+                  </a:lnTo>
+                  <a:lnTo>
+                    <a:pt x="5064803" y="443277"/>
+                  </a:lnTo>
+                  <a:lnTo>
+                    <a:pt x="4994458" y="440879"/>
+                  </a:lnTo>
+                  <a:lnTo>
+                    <a:pt x="4924114" y="438234"/>
+                  </a:lnTo>
+                  <a:lnTo>
+                    <a:pt x="4853769" y="435315"/>
+                  </a:lnTo>
+                  <a:lnTo>
+                    <a:pt x="4783425" y="432093"/>
+                  </a:lnTo>
+                  <a:lnTo>
+                    <a:pt x="4713080" y="428538"/>
+                  </a:lnTo>
+                  <a:lnTo>
+                    <a:pt x="4642736" y="424615"/>
+                  </a:lnTo>
+                  <a:lnTo>
+                    <a:pt x="4572391" y="420285"/>
+                  </a:lnTo>
+                  <a:lnTo>
+                    <a:pt x="4502047" y="415507"/>
+                  </a:lnTo>
+                  <a:lnTo>
+                    <a:pt x="4431702" y="410234"/>
+                  </a:lnTo>
+                  <a:lnTo>
+                    <a:pt x="4361358" y="404416"/>
+                  </a:lnTo>
+                  <a:lnTo>
+                    <a:pt x="4291013" y="397994"/>
+                  </a:lnTo>
+                  <a:lnTo>
+                    <a:pt x="4220669" y="390908"/>
+                  </a:lnTo>
+                  <a:lnTo>
+                    <a:pt x="4150324" y="383087"/>
+                  </a:lnTo>
+                  <a:lnTo>
+                    <a:pt x="4079980" y="374457"/>
+                  </a:lnTo>
+                  <a:lnTo>
+                    <a:pt x="4009635" y="364933"/>
+                  </a:lnTo>
+                  <a:lnTo>
+                    <a:pt x="3939291" y="354423"/>
+                  </a:lnTo>
+                  <a:lnTo>
+                    <a:pt x="3868946" y="342825"/>
+                  </a:lnTo>
+                  <a:lnTo>
+                    <a:pt x="3798602" y="330025"/>
+                  </a:lnTo>
+                  <a:lnTo>
+                    <a:pt x="3728257" y="315900"/>
+                  </a:lnTo>
+                  <a:lnTo>
+                    <a:pt x="3657913" y="300312"/>
+                  </a:lnTo>
+                  <a:lnTo>
+                    <a:pt x="3587569" y="283109"/>
+                  </a:lnTo>
+                  <a:lnTo>
+                    <a:pt x="3517224" y="264126"/>
+                  </a:lnTo>
+                  <a:lnTo>
+                    <a:pt x="3446880" y="243176"/>
+                  </a:lnTo>
+                  <a:lnTo>
+                    <a:pt x="3376535" y="220057"/>
+                  </a:lnTo>
+                  <a:lnTo>
+                    <a:pt x="3306191" y="194544"/>
+                  </a:lnTo>
+                  <a:lnTo>
+                    <a:pt x="3235846" y="167021"/>
+                  </a:lnTo>
+                  <a:lnTo>
+                    <a:pt x="3165502" y="164122"/>
+                  </a:lnTo>
+                  <a:lnTo>
+                    <a:pt x="3095157" y="161194"/>
+                  </a:lnTo>
+                  <a:lnTo>
+                    <a:pt x="3024813" y="158239"/>
+                  </a:lnTo>
+                  <a:lnTo>
+                    <a:pt x="2954468" y="155254"/>
+                  </a:lnTo>
+                  <a:lnTo>
+                    <a:pt x="2884124" y="152241"/>
+                  </a:lnTo>
+                  <a:lnTo>
+                    <a:pt x="2813779" y="149199"/>
+                  </a:lnTo>
+                  <a:lnTo>
+                    <a:pt x="2743435" y="146127"/>
+                  </a:lnTo>
+                  <a:lnTo>
+                    <a:pt x="2673090" y="143025"/>
+                  </a:lnTo>
+                  <a:lnTo>
+                    <a:pt x="2602746" y="139893"/>
+                  </a:lnTo>
+                  <a:lnTo>
+                    <a:pt x="2532401" y="136731"/>
+                  </a:lnTo>
+                  <a:lnTo>
+                    <a:pt x="2462057" y="133539"/>
+                  </a:lnTo>
+                  <a:lnTo>
+                    <a:pt x="2391712" y="130315"/>
+                  </a:lnTo>
+                  <a:lnTo>
+                    <a:pt x="2321368" y="127060"/>
+                  </a:lnTo>
+                  <a:lnTo>
+                    <a:pt x="2251023" y="123774"/>
+                  </a:lnTo>
+                  <a:lnTo>
+                    <a:pt x="2180679" y="120456"/>
+                  </a:lnTo>
+                  <a:lnTo>
+                    <a:pt x="2110334" y="117106"/>
+                  </a:lnTo>
+                  <a:lnTo>
+                    <a:pt x="2039990" y="113723"/>
+                  </a:lnTo>
+                  <a:lnTo>
+                    <a:pt x="1969645" y="110308"/>
+                  </a:lnTo>
+                  <a:lnTo>
+                    <a:pt x="1899301" y="106859"/>
+                  </a:lnTo>
+                  <a:lnTo>
+                    <a:pt x="1828956" y="103377"/>
+                  </a:lnTo>
+                  <a:lnTo>
+                    <a:pt x="1758612" y="99862"/>
+                  </a:lnTo>
+                  <a:lnTo>
+                    <a:pt x="1688267" y="96312"/>
+                  </a:lnTo>
+                  <a:lnTo>
+                    <a:pt x="1617923" y="92728"/>
+                  </a:lnTo>
+                  <a:lnTo>
+                    <a:pt x="1547578" y="89109"/>
+                  </a:lnTo>
+                  <a:lnTo>
+                    <a:pt x="1477234" y="85455"/>
+                  </a:lnTo>
+                  <a:lnTo>
+                    <a:pt x="1406889" y="81766"/>
+                  </a:lnTo>
+                  <a:lnTo>
+                    <a:pt x="1336545" y="78041"/>
+                  </a:lnTo>
+                  <a:lnTo>
+                    <a:pt x="1266200" y="74280"/>
+                  </a:lnTo>
+                  <a:lnTo>
+                    <a:pt x="1195856" y="70483"/>
+                  </a:lnTo>
+                  <a:lnTo>
+                    <a:pt x="1125511" y="66649"/>
+                  </a:lnTo>
+                  <a:lnTo>
+                    <a:pt x="1055167" y="62777"/>
+                  </a:lnTo>
+                  <a:lnTo>
+                    <a:pt x="984822" y="58869"/>
+                  </a:lnTo>
+                  <a:lnTo>
+                    <a:pt x="914478" y="54922"/>
+                  </a:lnTo>
+                  <a:lnTo>
+                    <a:pt x="844133" y="50937"/>
+                  </a:lnTo>
+                  <a:lnTo>
+                    <a:pt x="773789" y="46914"/>
+                  </a:lnTo>
+                  <a:lnTo>
+                    <a:pt x="703444" y="42851"/>
+                  </a:lnTo>
+                  <a:lnTo>
+                    <a:pt x="633100" y="38750"/>
+                  </a:lnTo>
+                  <a:lnTo>
+                    <a:pt x="562755" y="34608"/>
+                  </a:lnTo>
+                  <a:lnTo>
+                    <a:pt x="492411" y="30426"/>
+                  </a:lnTo>
+                  <a:lnTo>
+                    <a:pt x="422066" y="26204"/>
+                  </a:lnTo>
+                  <a:lnTo>
+                    <a:pt x="351722" y="21941"/>
+                  </a:lnTo>
+                  <a:lnTo>
+                    <a:pt x="281377" y="17637"/>
+                  </a:lnTo>
+                  <a:lnTo>
+                    <a:pt x="211033" y="13291"/>
+                  </a:lnTo>
+                  <a:lnTo>
+                    <a:pt x="140688" y="8903"/>
+                  </a:lnTo>
+                  <a:lnTo>
+                    <a:pt x="70344" y="4473"/>
+                  </a:lnTo>
+                  <a:lnTo>
+                    <a:pt x="0" y="0"/>
+                  </a:lnTo>
+                </a:path>
+              </a:pathLst>
+            </a:custGeom>
+          </p:spPr>
+          <p:txBody>
+            <a:bodyPr/>
+            <a:lstStyle/>
+            <a:p/>
+          </p:txBody>
+        </p:sp>
+        <p:sp>
+          <p:nvSpPr>
+            <p:cNvPr id="24" name="pl24"/>
+            <p:cNvSpPr/>
+            <p:nvPr/>
+          </p:nvSpPr>
+          <p:spPr>
+            <a:xfrm>
+              <a:off x="2606913" y="2143092"/>
+              <a:ext cx="5592503" cy="1240152"/>
+            </a:xfrm>
+            <a:custGeom>
+              <a:avLst/>
+              <a:pathLst>
+                <a:path w="5592503" h="1240152">
                   <a:moveTo>
                     <a:pt x="0" y="0"/>
                   </a:moveTo>
                   <a:lnTo>
-                    <a:pt x="35929" y="94495"/>
-                  </a:lnTo>
-                  <a:lnTo>
-                    <a:pt x="107552" y="272945"/>
-                  </a:lnTo>
-                  <a:lnTo>
-                    <a:pt x="179174" y="441999"/>
-                  </a:lnTo>
-                  <a:lnTo>
-                    <a:pt x="250797" y="602152"/>
-                  </a:lnTo>
-                  <a:lnTo>
-                    <a:pt x="322419" y="753873"/>
-                  </a:lnTo>
-                  <a:lnTo>
-                    <a:pt x="394042" y="897606"/>
-                  </a:lnTo>
-                  <a:lnTo>
-                    <a:pt x="465664" y="1033770"/>
-                  </a:lnTo>
-                  <a:lnTo>
-                    <a:pt x="537287" y="1162766"/>
-                  </a:lnTo>
-                  <a:lnTo>
-                    <a:pt x="608909" y="1284969"/>
-                  </a:lnTo>
-                  <a:lnTo>
-                    <a:pt x="680532" y="1400739"/>
-                  </a:lnTo>
-                  <a:lnTo>
-                    <a:pt x="752154" y="1510413"/>
-                  </a:lnTo>
-                  <a:lnTo>
-                    <a:pt x="823777" y="1614312"/>
-                  </a:lnTo>
-                  <a:lnTo>
-                    <a:pt x="895400" y="1712741"/>
-                  </a:lnTo>
-                  <a:lnTo>
-                    <a:pt x="967022" y="1805988"/>
-                  </a:lnTo>
-                  <a:lnTo>
-                    <a:pt x="1038645" y="1894324"/>
-                  </a:lnTo>
-                  <a:lnTo>
-                    <a:pt x="1110267" y="1978010"/>
-                  </a:lnTo>
-                  <a:lnTo>
-                    <a:pt x="1181890" y="2057290"/>
-                  </a:lnTo>
-                  <a:lnTo>
-                    <a:pt x="1253512" y="2132395"/>
-                  </a:lnTo>
-                  <a:lnTo>
-                    <a:pt x="1325135" y="2203546"/>
-                  </a:lnTo>
-                  <a:lnTo>
-                    <a:pt x="1396757" y="2270951"/>
-                  </a:lnTo>
-                  <a:lnTo>
-                    <a:pt x="1468380" y="2334807"/>
-                  </a:lnTo>
-                  <a:lnTo>
-                    <a:pt x="1540002" y="2395300"/>
-                  </a:lnTo>
-                  <a:lnTo>
-                    <a:pt x="1611625" y="2452609"/>
-                  </a:lnTo>
-                  <a:lnTo>
-                    <a:pt x="1683247" y="2506900"/>
-                  </a:lnTo>
-                  <a:lnTo>
-                    <a:pt x="1754870" y="2558333"/>
-                  </a:lnTo>
-                  <a:lnTo>
-                    <a:pt x="1826492" y="2607057"/>
-                  </a:lnTo>
-                  <a:lnTo>
-                    <a:pt x="1898115" y="2653217"/>
-                  </a:lnTo>
-                  <a:lnTo>
-                    <a:pt x="1969737" y="2696945"/>
-                  </a:lnTo>
-                  <a:lnTo>
-                    <a:pt x="2041360" y="2738372"/>
-                  </a:lnTo>
-                  <a:lnTo>
-                    <a:pt x="2112982" y="2777617"/>
-                  </a:lnTo>
-                  <a:lnTo>
-                    <a:pt x="2184605" y="2814796"/>
-                  </a:lnTo>
-                  <a:lnTo>
-                    <a:pt x="2256228" y="2850017"/>
-                  </a:lnTo>
-                  <a:lnTo>
-                    <a:pt x="2327850" y="2883384"/>
-                  </a:lnTo>
-                  <a:lnTo>
-                    <a:pt x="2399473" y="2914994"/>
-                  </a:lnTo>
-                  <a:lnTo>
-                    <a:pt x="2471095" y="2944940"/>
-                  </a:lnTo>
-                  <a:lnTo>
-                    <a:pt x="2542718" y="2973309"/>
-                  </a:lnTo>
-                  <a:lnTo>
-                    <a:pt x="2614340" y="3000185"/>
-                  </a:lnTo>
-                  <a:lnTo>
-                    <a:pt x="2685963" y="3025645"/>
-                  </a:lnTo>
-                  <a:lnTo>
-                    <a:pt x="2757585" y="3049765"/>
-                  </a:lnTo>
-                  <a:lnTo>
-                    <a:pt x="2829208" y="3072615"/>
-                  </a:lnTo>
-                  <a:lnTo>
-                    <a:pt x="2900830" y="3094261"/>
-                  </a:lnTo>
-                  <a:lnTo>
-                    <a:pt x="2972453" y="3114769"/>
-                  </a:lnTo>
-                  <a:lnTo>
-                    <a:pt x="3044075" y="3134196"/>
-                  </a:lnTo>
-                  <a:lnTo>
-                    <a:pt x="3115698" y="3152600"/>
-                  </a:lnTo>
-                  <a:lnTo>
-                    <a:pt x="3187320" y="3170036"/>
-                  </a:lnTo>
-                  <a:lnTo>
-                    <a:pt x="3258943" y="3186553"/>
-                  </a:lnTo>
-                  <a:lnTo>
-                    <a:pt x="3330565" y="3202201"/>
-                  </a:lnTo>
-                  <a:lnTo>
-                    <a:pt x="3402188" y="3217025"/>
-                  </a:lnTo>
-                  <a:lnTo>
-                    <a:pt x="3473810" y="3231068"/>
-                  </a:lnTo>
-                  <a:lnTo>
-                    <a:pt x="3545433" y="3244372"/>
-                  </a:lnTo>
-                  <a:lnTo>
-                    <a:pt x="3617056" y="3256975"/>
-                  </a:lnTo>
-                  <a:lnTo>
-                    <a:pt x="3688678" y="3268915"/>
-                  </a:lnTo>
-                  <a:lnTo>
-                    <a:pt x="3760301" y="3280227"/>
-                  </a:lnTo>
-                  <a:lnTo>
-                    <a:pt x="3831923" y="3290942"/>
-                  </a:lnTo>
-                  <a:lnTo>
-                    <a:pt x="3903546" y="3301094"/>
-                  </a:lnTo>
-                  <a:lnTo>
-                    <a:pt x="3975168" y="3310711"/>
-                  </a:lnTo>
-                  <a:lnTo>
-                    <a:pt x="4046791" y="3319821"/>
-                  </a:lnTo>
-                  <a:lnTo>
-                    <a:pt x="4118413" y="3328452"/>
-                  </a:lnTo>
-                  <a:lnTo>
-                    <a:pt x="4190036" y="3336629"/>
-                  </a:lnTo>
-                  <a:lnTo>
-                    <a:pt x="4261658" y="3344375"/>
-                  </a:lnTo>
-                  <a:lnTo>
-                    <a:pt x="4333281" y="3351713"/>
-                  </a:lnTo>
-                  <a:lnTo>
-                    <a:pt x="4404903" y="3358665"/>
-                  </a:lnTo>
-                  <a:lnTo>
-                    <a:pt x="4476526" y="3365250"/>
-                  </a:lnTo>
-                  <a:lnTo>
-                    <a:pt x="4548148" y="3371489"/>
-                  </a:lnTo>
-                  <a:lnTo>
-                    <a:pt x="4619771" y="3377400"/>
-                  </a:lnTo>
-                  <a:lnTo>
-                    <a:pt x="4691393" y="3382999"/>
-                  </a:lnTo>
-                  <a:lnTo>
-                    <a:pt x="4763016" y="3388304"/>
-                  </a:lnTo>
-                  <a:lnTo>
-                    <a:pt x="4834638" y="3393329"/>
-                  </a:lnTo>
-                  <a:lnTo>
-                    <a:pt x="4906261" y="3398090"/>
-                  </a:lnTo>
-                  <a:lnTo>
-                    <a:pt x="4977884" y="3402600"/>
-                  </a:lnTo>
-                  <a:lnTo>
-                    <a:pt x="5049506" y="3406872"/>
-                  </a:lnTo>
-                  <a:lnTo>
-                    <a:pt x="5121129" y="3410920"/>
-                  </a:lnTo>
-                  <a:lnTo>
-                    <a:pt x="5192751" y="3414754"/>
-                  </a:lnTo>
-                  <a:lnTo>
-                    <a:pt x="5264374" y="3418387"/>
-                  </a:lnTo>
-                  <a:lnTo>
-                    <a:pt x="5335996" y="3421828"/>
-                  </a:lnTo>
-                  <a:lnTo>
-                    <a:pt x="5407619" y="3425088"/>
-                  </a:lnTo>
-                  <a:lnTo>
-                    <a:pt x="5479241" y="3428177"/>
-                  </a:lnTo>
-                  <a:lnTo>
-                    <a:pt x="5550864" y="3431102"/>
-                  </a:lnTo>
-                  <a:lnTo>
-                    <a:pt x="5622486" y="3433874"/>
-                  </a:lnTo>
-                  <a:lnTo>
-                    <a:pt x="5694109" y="3436500"/>
+                    <a:pt x="35288" y="34101"/>
+                  </a:lnTo>
+                  <a:lnTo>
+                    <a:pt x="105633" y="98499"/>
+                  </a:lnTo>
+                  <a:lnTo>
+                    <a:pt x="175977" y="159507"/>
+                  </a:lnTo>
+                  <a:lnTo>
+                    <a:pt x="246322" y="217302"/>
+                  </a:lnTo>
+                  <a:lnTo>
+                    <a:pt x="316666" y="272055"/>
+                  </a:lnTo>
+                  <a:lnTo>
+                    <a:pt x="387011" y="323924"/>
+                  </a:lnTo>
+                  <a:lnTo>
+                    <a:pt x="457355" y="373063"/>
+                  </a:lnTo>
+                  <a:lnTo>
+                    <a:pt x="527699" y="419615"/>
+                  </a:lnTo>
+                  <a:lnTo>
+                    <a:pt x="598044" y="463715"/>
+                  </a:lnTo>
+                  <a:lnTo>
+                    <a:pt x="668388" y="505493"/>
+                  </a:lnTo>
+                  <a:lnTo>
+                    <a:pt x="738733" y="545072"/>
+                  </a:lnTo>
+                  <a:lnTo>
+                    <a:pt x="809077" y="582567"/>
+                  </a:lnTo>
+                  <a:lnTo>
+                    <a:pt x="879422" y="618088"/>
+                  </a:lnTo>
+                  <a:lnTo>
+                    <a:pt x="949766" y="651738"/>
+                  </a:lnTo>
+                  <a:lnTo>
+                    <a:pt x="1020111" y="683617"/>
+                  </a:lnTo>
+                  <a:lnTo>
+                    <a:pt x="1090455" y="713817"/>
+                  </a:lnTo>
+                  <a:lnTo>
+                    <a:pt x="1160800" y="742427"/>
+                  </a:lnTo>
+                  <a:lnTo>
+                    <a:pt x="1231144" y="769531"/>
+                  </a:lnTo>
+                  <a:lnTo>
+                    <a:pt x="1301489" y="795208"/>
+                  </a:lnTo>
+                  <a:lnTo>
+                    <a:pt x="1371833" y="819532"/>
+                  </a:lnTo>
+                  <a:lnTo>
+                    <a:pt x="1442178" y="842577"/>
+                  </a:lnTo>
+                  <a:lnTo>
+                    <a:pt x="1512522" y="864407"/>
+                  </a:lnTo>
+                  <a:lnTo>
+                    <a:pt x="1582867" y="885089"/>
+                  </a:lnTo>
+                  <a:lnTo>
+                    <a:pt x="1653211" y="904681"/>
+                  </a:lnTo>
+                  <a:lnTo>
+                    <a:pt x="1723556" y="923242"/>
+                  </a:lnTo>
+                  <a:lnTo>
+                    <a:pt x="1793900" y="940825"/>
+                  </a:lnTo>
+                  <a:lnTo>
+                    <a:pt x="1864245" y="957483"/>
+                  </a:lnTo>
+                  <a:lnTo>
+                    <a:pt x="1934589" y="973264"/>
+                  </a:lnTo>
+                  <a:lnTo>
+                    <a:pt x="2004934" y="988214"/>
+                  </a:lnTo>
+                  <a:lnTo>
+                    <a:pt x="2075278" y="1002376"/>
+                  </a:lnTo>
+                  <a:lnTo>
+                    <a:pt x="2145623" y="1015793"/>
+                  </a:lnTo>
+                  <a:lnTo>
+                    <a:pt x="2215967" y="1028504"/>
+                  </a:lnTo>
+                  <a:lnTo>
+                    <a:pt x="2286312" y="1040545"/>
+                  </a:lnTo>
+                  <a:lnTo>
+                    <a:pt x="2356656" y="1051953"/>
+                  </a:lnTo>
+                  <a:lnTo>
+                    <a:pt x="2427001" y="1062759"/>
+                  </a:lnTo>
+                  <a:lnTo>
+                    <a:pt x="2497345" y="1072997"/>
+                  </a:lnTo>
+                  <a:lnTo>
+                    <a:pt x="2567690" y="1082696"/>
+                  </a:lnTo>
+                  <a:lnTo>
+                    <a:pt x="2638034" y="1091884"/>
+                  </a:lnTo>
+                  <a:lnTo>
+                    <a:pt x="2708379" y="1100588"/>
+                  </a:lnTo>
+                  <a:lnTo>
+                    <a:pt x="2778723" y="1108834"/>
+                  </a:lnTo>
+                  <a:lnTo>
+                    <a:pt x="2849068" y="1116646"/>
+                  </a:lnTo>
+                  <a:lnTo>
+                    <a:pt x="2919412" y="1124046"/>
+                  </a:lnTo>
+                  <a:lnTo>
+                    <a:pt x="2989757" y="1131057"/>
+                  </a:lnTo>
+                  <a:lnTo>
+                    <a:pt x="3060101" y="1137699"/>
+                  </a:lnTo>
+                  <a:lnTo>
+                    <a:pt x="3130446" y="1143991"/>
+                  </a:lnTo>
+                  <a:lnTo>
+                    <a:pt x="3200790" y="1149952"/>
+                  </a:lnTo>
+                  <a:lnTo>
+                    <a:pt x="3271135" y="1155599"/>
+                  </a:lnTo>
+                  <a:lnTo>
+                    <a:pt x="3341479" y="1160948"/>
+                  </a:lnTo>
+                  <a:lnTo>
+                    <a:pt x="3411824" y="1166016"/>
+                  </a:lnTo>
+                  <a:lnTo>
+                    <a:pt x="3482168" y="1170817"/>
+                  </a:lnTo>
+                  <a:lnTo>
+                    <a:pt x="3552513" y="1175366"/>
+                  </a:lnTo>
+                  <a:lnTo>
+                    <a:pt x="3622857" y="1179674"/>
+                  </a:lnTo>
+                  <a:lnTo>
+                    <a:pt x="3693202" y="1183756"/>
+                  </a:lnTo>
+                  <a:lnTo>
+                    <a:pt x="3763546" y="1187623"/>
+                  </a:lnTo>
+                  <a:lnTo>
+                    <a:pt x="3833891" y="1191287"/>
+                  </a:lnTo>
+                  <a:lnTo>
+                    <a:pt x="3904235" y="1194757"/>
+                  </a:lnTo>
+                  <a:lnTo>
+                    <a:pt x="3974580" y="1198045"/>
+                  </a:lnTo>
+                  <a:lnTo>
+                    <a:pt x="4044924" y="1201160"/>
+                  </a:lnTo>
+                  <a:lnTo>
+                    <a:pt x="4115269" y="1204111"/>
+                  </a:lnTo>
+                  <a:lnTo>
+                    <a:pt x="4185613" y="1206906"/>
+                  </a:lnTo>
+                  <a:lnTo>
+                    <a:pt x="4255957" y="1209554"/>
+                  </a:lnTo>
+                  <a:lnTo>
+                    <a:pt x="4326302" y="1212063"/>
+                  </a:lnTo>
+                  <a:lnTo>
+                    <a:pt x="4396646" y="1214439"/>
+                  </a:lnTo>
+                  <a:lnTo>
+                    <a:pt x="4466991" y="1216691"/>
+                  </a:lnTo>
+                  <a:lnTo>
+                    <a:pt x="4537335" y="1218824"/>
+                  </a:lnTo>
+                  <a:lnTo>
+                    <a:pt x="4607680" y="1220845"/>
+                  </a:lnTo>
+                  <a:lnTo>
+                    <a:pt x="4678024" y="1222759"/>
+                  </a:lnTo>
+                  <a:lnTo>
+                    <a:pt x="4748369" y="1224572"/>
+                  </a:lnTo>
+                  <a:lnTo>
+                    <a:pt x="4818713" y="1226290"/>
+                  </a:lnTo>
+                  <a:lnTo>
+                    <a:pt x="4889058" y="1227918"/>
+                  </a:lnTo>
+                  <a:lnTo>
+                    <a:pt x="4959402" y="1229460"/>
+                  </a:lnTo>
+                  <a:lnTo>
+                    <a:pt x="5029747" y="1230920"/>
+                  </a:lnTo>
+                  <a:lnTo>
+                    <a:pt x="5100091" y="1232304"/>
+                  </a:lnTo>
+                  <a:lnTo>
+                    <a:pt x="5170436" y="1233615"/>
+                  </a:lnTo>
+                  <a:lnTo>
+                    <a:pt x="5240780" y="1234857"/>
+                  </a:lnTo>
+                  <a:lnTo>
+                    <a:pt x="5311125" y="1236033"/>
+                  </a:lnTo>
+                  <a:lnTo>
+                    <a:pt x="5381469" y="1237148"/>
+                  </a:lnTo>
+                  <a:lnTo>
+                    <a:pt x="5451814" y="1238204"/>
+                  </a:lnTo>
+                  <a:lnTo>
+                    <a:pt x="5522158" y="1239204"/>
+                  </a:lnTo>
+                  <a:lnTo>
+                    <a:pt x="5592503" y="1240152"/>
                   </a:lnTo>
                 </a:path>
               </a:pathLst>
@@ -4328,27 +4360,27 @@
         </p:sp>
         <p:sp>
           <p:nvSpPr>
-            <p:cNvPr id="24" name="pl24"/>
+            <p:cNvPr id="25" name="pl25"/>
             <p:cNvSpPr/>
             <p:nvPr/>
           </p:nvSpPr>
           <p:spPr>
             <a:xfrm>
-              <a:off x="817517" y="4727786"/>
-              <a:ext cx="7799693" cy="0"/>
+              <a:off x="887106" y="3100960"/>
+              <a:ext cx="7660515" cy="0"/>
             </a:xfrm>
             <a:custGeom>
               <a:avLst/>
               <a:pathLst>
-                <a:path w="7799693" h="0">
+                <a:path w="7660515" h="0">
                   <a:moveTo>
                     <a:pt x="0" y="0"/>
                   </a:moveTo>
                   <a:lnTo>
-                    <a:pt x="7799693" y="0"/>
-                  </a:lnTo>
-                  <a:lnTo>
-                    <a:pt x="7799693" y="0"/>
+                    <a:pt x="7660515" y="0"/>
+                  </a:lnTo>
+                  <a:lnTo>
+                    <a:pt x="7660515" y="0"/>
                   </a:lnTo>
                 </a:path>
               </a:pathLst>
@@ -4371,21 +4403,21 @@
         </p:sp>
         <p:sp>
           <p:nvSpPr>
-            <p:cNvPr id="25" name="pl25"/>
+            <p:cNvPr id="26" name="pl26"/>
             <p:cNvSpPr/>
             <p:nvPr/>
           </p:nvSpPr>
           <p:spPr>
             <a:xfrm>
-              <a:off x="4468386" y="2073503"/>
-              <a:ext cx="0" cy="3649639"/>
+              <a:off x="4472829" y="2143092"/>
+              <a:ext cx="0" cy="1317069"/>
             </a:xfrm>
             <a:custGeom>
               <a:avLst/>
               <a:pathLst>
-                <a:path w="0" h="3649639">
+                <a:path w="0" h="1317069">
                   <a:moveTo>
-                    <a:pt x="0" y="3649639"/>
+                    <a:pt x="0" y="1317069"/>
                   </a:moveTo>
                   <a:lnTo>
                     <a:pt x="0" y="0"/>
@@ -4414,13 +4446,13 @@
         </p:sp>
         <p:sp>
           <p:nvSpPr>
-            <p:cNvPr id="26" name="tx26"/>
+            <p:cNvPr id="27" name="tx27"/>
             <p:cNvSpPr/>
             <p:nvPr/>
           </p:nvSpPr>
           <p:spPr>
             <a:xfrm>
-              <a:off x="692708" y="5517199"/>
+              <a:off x="762297" y="3360243"/>
               <a:ext cx="62179" cy="80101"/>
             </a:xfrm>
             <a:prstGeom prst="rect">
@@ -4460,13 +4492,13 @@
         </p:sp>
         <p:sp>
           <p:nvSpPr>
-            <p:cNvPr id="27" name="tx27"/>
+            <p:cNvPr id="28" name="tx28"/>
             <p:cNvSpPr/>
             <p:nvPr/>
           </p:nvSpPr>
           <p:spPr>
             <a:xfrm>
-              <a:off x="692708" y="4687735"/>
+              <a:off x="762297" y="3060909"/>
               <a:ext cx="62179" cy="80101"/>
             </a:xfrm>
             <a:prstGeom prst="rect">
@@ -4506,13 +4538,13 @@
         </p:sp>
         <p:sp>
           <p:nvSpPr>
-            <p:cNvPr id="28" name="tx28"/>
+            <p:cNvPr id="29" name="tx29"/>
             <p:cNvSpPr/>
             <p:nvPr/>
           </p:nvSpPr>
           <p:spPr>
             <a:xfrm>
-              <a:off x="692708" y="3858272"/>
+              <a:off x="762297" y="2761575"/>
               <a:ext cx="62179" cy="80101"/>
             </a:xfrm>
             <a:prstGeom prst="rect">
@@ -4552,13 +4584,13 @@
         </p:sp>
         <p:sp>
           <p:nvSpPr>
-            <p:cNvPr id="29" name="tx29"/>
+            <p:cNvPr id="30" name="tx30"/>
             <p:cNvSpPr/>
             <p:nvPr/>
           </p:nvSpPr>
           <p:spPr>
             <a:xfrm>
-              <a:off x="692708" y="3028808"/>
+              <a:off x="762297" y="2462242"/>
               <a:ext cx="62179" cy="80101"/>
             </a:xfrm>
             <a:prstGeom prst="rect">
@@ -4598,13 +4630,13 @@
         </p:sp>
         <p:sp>
           <p:nvSpPr>
-            <p:cNvPr id="30" name="tx30"/>
+            <p:cNvPr id="31" name="tx31"/>
             <p:cNvSpPr/>
             <p:nvPr/>
           </p:nvSpPr>
           <p:spPr>
             <a:xfrm>
-              <a:off x="692708" y="2199345"/>
+              <a:off x="762297" y="2162908"/>
               <a:ext cx="62179" cy="80101"/>
             </a:xfrm>
             <a:prstGeom prst="rect">
@@ -4644,13 +4676,13 @@
         </p:sp>
         <p:sp>
           <p:nvSpPr>
-            <p:cNvPr id="31" name="tx31"/>
+            <p:cNvPr id="32" name="tx32"/>
             <p:cNvSpPr/>
             <p:nvPr/>
           </p:nvSpPr>
           <p:spPr>
             <a:xfrm>
-              <a:off x="2478335" y="5785772"/>
+              <a:off x="2516846" y="3522791"/>
               <a:ext cx="161574" cy="80101"/>
             </a:xfrm>
             <a:prstGeom prst="rect">
@@ -4690,13 +4722,13 @@
         </p:sp>
         <p:sp>
           <p:nvSpPr>
-            <p:cNvPr id="32" name="tx32"/>
+            <p:cNvPr id="33" name="tx33"/>
             <p:cNvSpPr/>
             <p:nvPr/>
           </p:nvSpPr>
           <p:spPr>
             <a:xfrm>
-              <a:off x="4582608" y="5785772"/>
+              <a:off x="4584458" y="3522791"/>
               <a:ext cx="62179" cy="80101"/>
             </a:xfrm>
             <a:prstGeom prst="rect">
@@ -4736,13 +4768,13 @@
         </p:sp>
         <p:sp>
           <p:nvSpPr>
-            <p:cNvPr id="33" name="tx33"/>
+            <p:cNvPr id="34" name="tx34"/>
             <p:cNvSpPr/>
             <p:nvPr/>
           </p:nvSpPr>
           <p:spPr>
             <a:xfrm>
-              <a:off x="6606094" y="5785772"/>
+              <a:off x="6571282" y="3522791"/>
               <a:ext cx="124358" cy="80101"/>
             </a:xfrm>
             <a:prstGeom prst="rect">
@@ -4782,13 +4814,13 @@
         </p:sp>
         <p:sp>
           <p:nvSpPr>
-            <p:cNvPr id="34" name="tx34"/>
+            <p:cNvPr id="35" name="tx35"/>
             <p:cNvSpPr/>
             <p:nvPr/>
           </p:nvSpPr>
           <p:spPr>
             <a:xfrm>
-              <a:off x="2928340" y="5925448"/>
+              <a:off x="2928340" y="3662467"/>
               <a:ext cx="3578047" cy="100218"/>
             </a:xfrm>
             <a:prstGeom prst="rect">
@@ -4828,13 +4860,13 @@
         </p:sp>
         <p:sp>
           <p:nvSpPr>
-            <p:cNvPr id="35" name="tx35"/>
+            <p:cNvPr id="36" name="tx36"/>
             <p:cNvSpPr/>
             <p:nvPr/>
           </p:nvSpPr>
           <p:spPr>
             <a:xfrm rot="-5400000">
-              <a:off x="68446" y="3848213"/>
+              <a:off x="138035" y="2751517"/>
               <a:ext cx="1016904" cy="100218"/>
             </a:xfrm>
             <a:prstGeom prst="rect">
@@ -4874,13 +4906,13 @@
         </p:sp>
         <p:sp>
           <p:nvSpPr>
-            <p:cNvPr id="36" name="tx36"/>
+            <p:cNvPr id="37" name="tx37"/>
             <p:cNvSpPr/>
             <p:nvPr/>
           </p:nvSpPr>
           <p:spPr>
             <a:xfrm>
-              <a:off x="817517" y="1896563"/>
+              <a:off x="887106" y="1966152"/>
               <a:ext cx="6385163" cy="82021"/>
             </a:xfrm>
             <a:prstGeom prst="rect">
@@ -4920,13 +4952,3503 @@
         </p:sp>
         <p:sp>
           <p:nvSpPr>
-            <p:cNvPr id="37" name="tx37"/>
+            <p:cNvPr id="38" name="tx38"/>
             <p:cNvSpPr/>
             <p:nvPr/>
           </p:nvSpPr>
           <p:spPr>
             <a:xfrm>
-              <a:off x="817517" y="1669789"/>
+              <a:off x="887106" y="1739378"/>
+              <a:ext cx="2447665" cy="120152"/>
+            </a:xfrm>
+            <a:prstGeom prst="rect">
+              <a:avLst/>
+            </a:prstGeom>
+            <a:noFill/>
+          </p:spPr>
+          <p:txBody>
+            <a:bodyPr lIns="0" rIns="0" tIns="0" bIns="0" anchorCtr="1" anchor="ctr" wrap="none"/>
+            <a:lstStyle/>
+            <a:p>
+              <a:pPr algn="l" marL="0" marR="0" indent="0">
+                <a:lnSpc>
+                  <a:spcPts val="1320"/>
+                </a:lnSpc>
+                <a:spcBef>
+                  <a:spcPts val="0"/>
+                </a:spcBef>
+                <a:spcAft>
+                  <a:spcPts val="0"/>
+                </a:spcAft>
+              </a:pPr>
+              <a:r>
+                <a:rPr sz="1320">
+                  <a:solidFill>
+                    <a:srgbClr val="000000">
+                      <a:alpha val="100000"/>
+                    </a:srgbClr>
+                  </a:solidFill>
+                  <a:latin typeface="Helvetica"/>
+                  <a:cs typeface="Helvetica"/>
+                </a:rPr>
+                <a:t>Cytopenia (Carboplatin AUC ≥ 3)</a:t>
+              </a:r>
+            </a:p>
+          </p:txBody>
+        </p:sp>
+        <p:sp>
+          <p:nvSpPr>
+            <p:cNvPr id="39" name="pl39"/>
+            <p:cNvSpPr/>
+            <p:nvPr/>
+          </p:nvSpPr>
+          <p:spPr>
+            <a:xfrm>
+              <a:off x="887106" y="5444019"/>
+              <a:ext cx="7660515" cy="0"/>
+            </a:xfrm>
+            <a:custGeom>
+              <a:avLst/>
+              <a:pathLst>
+                <a:path w="7660515" h="0">
+                  <a:moveTo>
+                    <a:pt x="0" y="0"/>
+                  </a:moveTo>
+                  <a:lnTo>
+                    <a:pt x="7660515" y="0"/>
+                  </a:lnTo>
+                  <a:lnTo>
+                    <a:pt x="7660515" y="0"/>
+                  </a:lnTo>
+                </a:path>
+              </a:pathLst>
+            </a:custGeom>
+            <a:ln w="6775" cap="flat">
+              <a:solidFill>
+                <a:srgbClr val="EBEBEB">
+                  <a:alpha val="100000"/>
+                </a:srgbClr>
+              </a:solidFill>
+              <a:prstDash val="solid"/>
+              <a:round/>
+            </a:ln>
+          </p:spPr>
+          <p:txBody>
+            <a:bodyPr/>
+            <a:lstStyle/>
+            <a:p/>
+          </p:txBody>
+        </p:sp>
+        <p:sp>
+          <p:nvSpPr>
+            <p:cNvPr id="40" name="pl40"/>
+            <p:cNvSpPr/>
+            <p:nvPr/>
+          </p:nvSpPr>
+          <p:spPr>
+            <a:xfrm>
+              <a:off x="887106" y="5144686"/>
+              <a:ext cx="7660515" cy="0"/>
+            </a:xfrm>
+            <a:custGeom>
+              <a:avLst/>
+              <a:pathLst>
+                <a:path w="7660515" h="0">
+                  <a:moveTo>
+                    <a:pt x="0" y="0"/>
+                  </a:moveTo>
+                  <a:lnTo>
+                    <a:pt x="7660515" y="0"/>
+                  </a:lnTo>
+                  <a:lnTo>
+                    <a:pt x="7660515" y="0"/>
+                  </a:lnTo>
+                </a:path>
+              </a:pathLst>
+            </a:custGeom>
+            <a:ln w="6775" cap="flat">
+              <a:solidFill>
+                <a:srgbClr val="EBEBEB">
+                  <a:alpha val="100000"/>
+                </a:srgbClr>
+              </a:solidFill>
+              <a:prstDash val="solid"/>
+              <a:round/>
+            </a:ln>
+          </p:spPr>
+          <p:txBody>
+            <a:bodyPr/>
+            <a:lstStyle/>
+            <a:p/>
+          </p:txBody>
+        </p:sp>
+        <p:sp>
+          <p:nvSpPr>
+            <p:cNvPr id="41" name="pl41"/>
+            <p:cNvSpPr/>
+            <p:nvPr/>
+          </p:nvSpPr>
+          <p:spPr>
+            <a:xfrm>
+              <a:off x="887106" y="4845352"/>
+              <a:ext cx="7660515" cy="0"/>
+            </a:xfrm>
+            <a:custGeom>
+              <a:avLst/>
+              <a:pathLst>
+                <a:path w="7660515" h="0">
+                  <a:moveTo>
+                    <a:pt x="0" y="0"/>
+                  </a:moveTo>
+                  <a:lnTo>
+                    <a:pt x="7660515" y="0"/>
+                  </a:lnTo>
+                  <a:lnTo>
+                    <a:pt x="7660515" y="0"/>
+                  </a:lnTo>
+                </a:path>
+              </a:pathLst>
+            </a:custGeom>
+            <a:ln w="6775" cap="flat">
+              <a:solidFill>
+                <a:srgbClr val="EBEBEB">
+                  <a:alpha val="100000"/>
+                </a:srgbClr>
+              </a:solidFill>
+              <a:prstDash val="solid"/>
+              <a:round/>
+            </a:ln>
+          </p:spPr>
+          <p:txBody>
+            <a:bodyPr/>
+            <a:lstStyle/>
+            <a:p/>
+          </p:txBody>
+        </p:sp>
+        <p:sp>
+          <p:nvSpPr>
+            <p:cNvPr id="42" name="pl42"/>
+            <p:cNvSpPr/>
+            <p:nvPr/>
+          </p:nvSpPr>
+          <p:spPr>
+            <a:xfrm>
+              <a:off x="887106" y="4546018"/>
+              <a:ext cx="7660515" cy="0"/>
+            </a:xfrm>
+            <a:custGeom>
+              <a:avLst/>
+              <a:pathLst>
+                <a:path w="7660515" h="0">
+                  <a:moveTo>
+                    <a:pt x="0" y="0"/>
+                  </a:moveTo>
+                  <a:lnTo>
+                    <a:pt x="7660515" y="0"/>
+                  </a:lnTo>
+                  <a:lnTo>
+                    <a:pt x="7660515" y="0"/>
+                  </a:lnTo>
+                </a:path>
+              </a:pathLst>
+            </a:custGeom>
+            <a:ln w="6775" cap="flat">
+              <a:solidFill>
+                <a:srgbClr val="EBEBEB">
+                  <a:alpha val="100000"/>
+                </a:srgbClr>
+              </a:solidFill>
+              <a:prstDash val="solid"/>
+              <a:round/>
+            </a:ln>
+          </p:spPr>
+          <p:txBody>
+            <a:bodyPr/>
+            <a:lstStyle/>
+            <a:p/>
+          </p:txBody>
+        </p:sp>
+        <p:sp>
+          <p:nvSpPr>
+            <p:cNvPr id="43" name="pl43"/>
+            <p:cNvSpPr/>
+            <p:nvPr/>
+          </p:nvSpPr>
+          <p:spPr>
+            <a:xfrm>
+              <a:off x="983303" y="4336484"/>
+              <a:ext cx="0" cy="1317069"/>
+            </a:xfrm>
+            <a:custGeom>
+              <a:avLst/>
+              <a:pathLst>
+                <a:path w="0" h="1317069">
+                  <a:moveTo>
+                    <a:pt x="0" y="1317069"/>
+                  </a:moveTo>
+                  <a:lnTo>
+                    <a:pt x="0" y="0"/>
+                  </a:lnTo>
+                  <a:lnTo>
+                    <a:pt x="0" y="0"/>
+                  </a:lnTo>
+                </a:path>
+              </a:pathLst>
+            </a:custGeom>
+            <a:ln w="6775" cap="flat">
+              <a:solidFill>
+                <a:srgbClr val="EBEBEB">
+                  <a:alpha val="100000"/>
+                </a:srgbClr>
+              </a:solidFill>
+              <a:prstDash val="solid"/>
+              <a:round/>
+            </a:ln>
+          </p:spPr>
+          <p:txBody>
+            <a:bodyPr/>
+            <a:lstStyle/>
+            <a:p/>
+          </p:txBody>
+        </p:sp>
+        <p:sp>
+          <p:nvSpPr>
+            <p:cNvPr id="44" name="pl44"/>
+            <p:cNvSpPr/>
+            <p:nvPr/>
+          </p:nvSpPr>
+          <p:spPr>
+            <a:xfrm>
+              <a:off x="1790468" y="4336484"/>
+              <a:ext cx="0" cy="1317069"/>
+            </a:xfrm>
+            <a:custGeom>
+              <a:avLst/>
+              <a:pathLst>
+                <a:path w="0" h="1317069">
+                  <a:moveTo>
+                    <a:pt x="0" y="1317069"/>
+                  </a:moveTo>
+                  <a:lnTo>
+                    <a:pt x="0" y="0"/>
+                  </a:lnTo>
+                  <a:lnTo>
+                    <a:pt x="0" y="0"/>
+                  </a:lnTo>
+                </a:path>
+              </a:pathLst>
+            </a:custGeom>
+            <a:ln w="6775" cap="flat">
+              <a:solidFill>
+                <a:srgbClr val="EBEBEB">
+                  <a:alpha val="100000"/>
+                </a:srgbClr>
+              </a:solidFill>
+              <a:prstDash val="solid"/>
+              <a:round/>
+            </a:ln>
+          </p:spPr>
+          <p:txBody>
+            <a:bodyPr/>
+            <a:lstStyle/>
+            <a:p/>
+          </p:txBody>
+        </p:sp>
+        <p:sp>
+          <p:nvSpPr>
+            <p:cNvPr id="45" name="pl45"/>
+            <p:cNvSpPr/>
+            <p:nvPr/>
+          </p:nvSpPr>
+          <p:spPr>
+            <a:xfrm>
+              <a:off x="2597634" y="4336484"/>
+              <a:ext cx="0" cy="1317069"/>
+            </a:xfrm>
+            <a:custGeom>
+              <a:avLst/>
+              <a:pathLst>
+                <a:path w="0" h="1317069">
+                  <a:moveTo>
+                    <a:pt x="0" y="1317069"/>
+                  </a:moveTo>
+                  <a:lnTo>
+                    <a:pt x="0" y="0"/>
+                  </a:lnTo>
+                  <a:lnTo>
+                    <a:pt x="0" y="0"/>
+                  </a:lnTo>
+                </a:path>
+              </a:pathLst>
+            </a:custGeom>
+            <a:ln w="6775" cap="flat">
+              <a:solidFill>
+                <a:srgbClr val="EBEBEB">
+                  <a:alpha val="100000"/>
+                </a:srgbClr>
+              </a:solidFill>
+              <a:prstDash val="solid"/>
+              <a:round/>
+            </a:ln>
+          </p:spPr>
+          <p:txBody>
+            <a:bodyPr/>
+            <a:lstStyle/>
+            <a:p/>
+          </p:txBody>
+        </p:sp>
+        <p:sp>
+          <p:nvSpPr>
+            <p:cNvPr id="46" name="pl46"/>
+            <p:cNvSpPr/>
+            <p:nvPr/>
+          </p:nvSpPr>
+          <p:spPr>
+            <a:xfrm>
+              <a:off x="3404799" y="4336484"/>
+              <a:ext cx="0" cy="1317069"/>
+            </a:xfrm>
+            <a:custGeom>
+              <a:avLst/>
+              <a:pathLst>
+                <a:path w="0" h="1317069">
+                  <a:moveTo>
+                    <a:pt x="0" y="1317069"/>
+                  </a:moveTo>
+                  <a:lnTo>
+                    <a:pt x="0" y="0"/>
+                  </a:lnTo>
+                  <a:lnTo>
+                    <a:pt x="0" y="0"/>
+                  </a:lnTo>
+                </a:path>
+              </a:pathLst>
+            </a:custGeom>
+            <a:ln w="6775" cap="flat">
+              <a:solidFill>
+                <a:srgbClr val="EBEBEB">
+                  <a:alpha val="100000"/>
+                </a:srgbClr>
+              </a:solidFill>
+              <a:prstDash val="solid"/>
+              <a:round/>
+            </a:ln>
+          </p:spPr>
+          <p:txBody>
+            <a:bodyPr/>
+            <a:lstStyle/>
+            <a:p/>
+          </p:txBody>
+        </p:sp>
+        <p:sp>
+          <p:nvSpPr>
+            <p:cNvPr id="47" name="pl47"/>
+            <p:cNvSpPr/>
+            <p:nvPr/>
+          </p:nvSpPr>
+          <p:spPr>
+            <a:xfrm>
+              <a:off x="4211965" y="4336484"/>
+              <a:ext cx="0" cy="1317069"/>
+            </a:xfrm>
+            <a:custGeom>
+              <a:avLst/>
+              <a:pathLst>
+                <a:path w="0" h="1317069">
+                  <a:moveTo>
+                    <a:pt x="0" y="1317069"/>
+                  </a:moveTo>
+                  <a:lnTo>
+                    <a:pt x="0" y="0"/>
+                  </a:lnTo>
+                  <a:lnTo>
+                    <a:pt x="0" y="0"/>
+                  </a:lnTo>
+                </a:path>
+              </a:pathLst>
+            </a:custGeom>
+            <a:ln w="6775" cap="flat">
+              <a:solidFill>
+                <a:srgbClr val="EBEBEB">
+                  <a:alpha val="100000"/>
+                </a:srgbClr>
+              </a:solidFill>
+              <a:prstDash val="solid"/>
+              <a:round/>
+            </a:ln>
+          </p:spPr>
+          <p:txBody>
+            <a:bodyPr/>
+            <a:lstStyle/>
+            <a:p/>
+          </p:txBody>
+        </p:sp>
+        <p:sp>
+          <p:nvSpPr>
+            <p:cNvPr id="48" name="pl48"/>
+            <p:cNvSpPr/>
+            <p:nvPr/>
+          </p:nvSpPr>
+          <p:spPr>
+            <a:xfrm>
+              <a:off x="5019130" y="4336484"/>
+              <a:ext cx="0" cy="1317069"/>
+            </a:xfrm>
+            <a:custGeom>
+              <a:avLst/>
+              <a:pathLst>
+                <a:path w="0" h="1317069">
+                  <a:moveTo>
+                    <a:pt x="0" y="1317069"/>
+                  </a:moveTo>
+                  <a:lnTo>
+                    <a:pt x="0" y="0"/>
+                  </a:lnTo>
+                  <a:lnTo>
+                    <a:pt x="0" y="0"/>
+                  </a:lnTo>
+                </a:path>
+              </a:pathLst>
+            </a:custGeom>
+            <a:ln w="6775" cap="flat">
+              <a:solidFill>
+                <a:srgbClr val="EBEBEB">
+                  <a:alpha val="100000"/>
+                </a:srgbClr>
+              </a:solidFill>
+              <a:prstDash val="solid"/>
+              <a:round/>
+            </a:ln>
+          </p:spPr>
+          <p:txBody>
+            <a:bodyPr/>
+            <a:lstStyle/>
+            <a:p/>
+          </p:txBody>
+        </p:sp>
+        <p:sp>
+          <p:nvSpPr>
+            <p:cNvPr id="49" name="pl49"/>
+            <p:cNvSpPr/>
+            <p:nvPr/>
+          </p:nvSpPr>
+          <p:spPr>
+            <a:xfrm>
+              <a:off x="5826296" y="4336484"/>
+              <a:ext cx="0" cy="1317069"/>
+            </a:xfrm>
+            <a:custGeom>
+              <a:avLst/>
+              <a:pathLst>
+                <a:path w="0" h="1317069">
+                  <a:moveTo>
+                    <a:pt x="0" y="1317069"/>
+                  </a:moveTo>
+                  <a:lnTo>
+                    <a:pt x="0" y="0"/>
+                  </a:lnTo>
+                  <a:lnTo>
+                    <a:pt x="0" y="0"/>
+                  </a:lnTo>
+                </a:path>
+              </a:pathLst>
+            </a:custGeom>
+            <a:ln w="6775" cap="flat">
+              <a:solidFill>
+                <a:srgbClr val="EBEBEB">
+                  <a:alpha val="100000"/>
+                </a:srgbClr>
+              </a:solidFill>
+              <a:prstDash val="solid"/>
+              <a:round/>
+            </a:ln>
+          </p:spPr>
+          <p:txBody>
+            <a:bodyPr/>
+            <a:lstStyle/>
+            <a:p/>
+          </p:txBody>
+        </p:sp>
+        <p:sp>
+          <p:nvSpPr>
+            <p:cNvPr id="50" name="pl50"/>
+            <p:cNvSpPr/>
+            <p:nvPr/>
+          </p:nvSpPr>
+          <p:spPr>
+            <a:xfrm>
+              <a:off x="6633461" y="4336484"/>
+              <a:ext cx="0" cy="1317069"/>
+            </a:xfrm>
+            <a:custGeom>
+              <a:avLst/>
+              <a:pathLst>
+                <a:path w="0" h="1317069">
+                  <a:moveTo>
+                    <a:pt x="0" y="1317069"/>
+                  </a:moveTo>
+                  <a:lnTo>
+                    <a:pt x="0" y="0"/>
+                  </a:lnTo>
+                  <a:lnTo>
+                    <a:pt x="0" y="0"/>
+                  </a:lnTo>
+                </a:path>
+              </a:pathLst>
+            </a:custGeom>
+            <a:ln w="6775" cap="flat">
+              <a:solidFill>
+                <a:srgbClr val="EBEBEB">
+                  <a:alpha val="100000"/>
+                </a:srgbClr>
+              </a:solidFill>
+              <a:prstDash val="solid"/>
+              <a:round/>
+            </a:ln>
+          </p:spPr>
+          <p:txBody>
+            <a:bodyPr/>
+            <a:lstStyle/>
+            <a:p/>
+          </p:txBody>
+        </p:sp>
+        <p:sp>
+          <p:nvSpPr>
+            <p:cNvPr id="51" name="pl51"/>
+            <p:cNvSpPr/>
+            <p:nvPr/>
+          </p:nvSpPr>
+          <p:spPr>
+            <a:xfrm>
+              <a:off x="7440627" y="4336484"/>
+              <a:ext cx="0" cy="1317069"/>
+            </a:xfrm>
+            <a:custGeom>
+              <a:avLst/>
+              <a:pathLst>
+                <a:path w="0" h="1317069">
+                  <a:moveTo>
+                    <a:pt x="0" y="1317069"/>
+                  </a:moveTo>
+                  <a:lnTo>
+                    <a:pt x="0" y="0"/>
+                  </a:lnTo>
+                  <a:lnTo>
+                    <a:pt x="0" y="0"/>
+                  </a:lnTo>
+                </a:path>
+              </a:pathLst>
+            </a:custGeom>
+            <a:ln w="6775" cap="flat">
+              <a:solidFill>
+                <a:srgbClr val="EBEBEB">
+                  <a:alpha val="100000"/>
+                </a:srgbClr>
+              </a:solidFill>
+              <a:prstDash val="solid"/>
+              <a:round/>
+            </a:ln>
+          </p:spPr>
+          <p:txBody>
+            <a:bodyPr/>
+            <a:lstStyle/>
+            <a:p/>
+          </p:txBody>
+        </p:sp>
+        <p:sp>
+          <p:nvSpPr>
+            <p:cNvPr id="52" name="pl52"/>
+            <p:cNvSpPr/>
+            <p:nvPr/>
+          </p:nvSpPr>
+          <p:spPr>
+            <a:xfrm>
+              <a:off x="8247792" y="4336484"/>
+              <a:ext cx="0" cy="1317069"/>
+            </a:xfrm>
+            <a:custGeom>
+              <a:avLst/>
+              <a:pathLst>
+                <a:path w="0" h="1317069">
+                  <a:moveTo>
+                    <a:pt x="0" y="1317069"/>
+                  </a:moveTo>
+                  <a:lnTo>
+                    <a:pt x="0" y="0"/>
+                  </a:lnTo>
+                  <a:lnTo>
+                    <a:pt x="0" y="0"/>
+                  </a:lnTo>
+                </a:path>
+              </a:pathLst>
+            </a:custGeom>
+            <a:ln w="6775" cap="flat">
+              <a:solidFill>
+                <a:srgbClr val="EBEBEB">
+                  <a:alpha val="100000"/>
+                </a:srgbClr>
+              </a:solidFill>
+              <a:prstDash val="solid"/>
+              <a:round/>
+            </a:ln>
+          </p:spPr>
+          <p:txBody>
+            <a:bodyPr/>
+            <a:lstStyle/>
+            <a:p/>
+          </p:txBody>
+        </p:sp>
+        <p:sp>
+          <p:nvSpPr>
+            <p:cNvPr id="53" name="pl53"/>
+            <p:cNvSpPr/>
+            <p:nvPr/>
+          </p:nvSpPr>
+          <p:spPr>
+            <a:xfrm>
+              <a:off x="887106" y="5593686"/>
+              <a:ext cx="7660515" cy="0"/>
+            </a:xfrm>
+            <a:custGeom>
+              <a:avLst/>
+              <a:pathLst>
+                <a:path w="7660515" h="0">
+                  <a:moveTo>
+                    <a:pt x="0" y="0"/>
+                  </a:moveTo>
+                  <a:lnTo>
+                    <a:pt x="7660515" y="0"/>
+                  </a:lnTo>
+                  <a:lnTo>
+                    <a:pt x="7660515" y="0"/>
+                  </a:lnTo>
+                </a:path>
+              </a:pathLst>
+            </a:custGeom>
+            <a:ln w="13550" cap="flat">
+              <a:solidFill>
+                <a:srgbClr val="EBEBEB">
+                  <a:alpha val="100000"/>
+                </a:srgbClr>
+              </a:solidFill>
+              <a:prstDash val="solid"/>
+              <a:round/>
+            </a:ln>
+          </p:spPr>
+          <p:txBody>
+            <a:bodyPr/>
+            <a:lstStyle/>
+            <a:p/>
+          </p:txBody>
+        </p:sp>
+        <p:sp>
+          <p:nvSpPr>
+            <p:cNvPr id="54" name="pl54"/>
+            <p:cNvSpPr/>
+            <p:nvPr/>
+          </p:nvSpPr>
+          <p:spPr>
+            <a:xfrm>
+              <a:off x="887106" y="5294352"/>
+              <a:ext cx="7660515" cy="0"/>
+            </a:xfrm>
+            <a:custGeom>
+              <a:avLst/>
+              <a:pathLst>
+                <a:path w="7660515" h="0">
+                  <a:moveTo>
+                    <a:pt x="0" y="0"/>
+                  </a:moveTo>
+                  <a:lnTo>
+                    <a:pt x="7660515" y="0"/>
+                  </a:lnTo>
+                  <a:lnTo>
+                    <a:pt x="7660515" y="0"/>
+                  </a:lnTo>
+                </a:path>
+              </a:pathLst>
+            </a:custGeom>
+            <a:ln w="13550" cap="flat">
+              <a:solidFill>
+                <a:srgbClr val="EBEBEB">
+                  <a:alpha val="100000"/>
+                </a:srgbClr>
+              </a:solidFill>
+              <a:prstDash val="solid"/>
+              <a:round/>
+            </a:ln>
+          </p:spPr>
+          <p:txBody>
+            <a:bodyPr/>
+            <a:lstStyle/>
+            <a:p/>
+          </p:txBody>
+        </p:sp>
+        <p:sp>
+          <p:nvSpPr>
+            <p:cNvPr id="55" name="pl55"/>
+            <p:cNvSpPr/>
+            <p:nvPr/>
+          </p:nvSpPr>
+          <p:spPr>
+            <a:xfrm>
+              <a:off x="887106" y="4995019"/>
+              <a:ext cx="7660515" cy="0"/>
+            </a:xfrm>
+            <a:custGeom>
+              <a:avLst/>
+              <a:pathLst>
+                <a:path w="7660515" h="0">
+                  <a:moveTo>
+                    <a:pt x="0" y="0"/>
+                  </a:moveTo>
+                  <a:lnTo>
+                    <a:pt x="7660515" y="0"/>
+                  </a:lnTo>
+                  <a:lnTo>
+                    <a:pt x="7660515" y="0"/>
+                  </a:lnTo>
+                </a:path>
+              </a:pathLst>
+            </a:custGeom>
+            <a:ln w="13550" cap="flat">
+              <a:solidFill>
+                <a:srgbClr val="EBEBEB">
+                  <a:alpha val="100000"/>
+                </a:srgbClr>
+              </a:solidFill>
+              <a:prstDash val="solid"/>
+              <a:round/>
+            </a:ln>
+          </p:spPr>
+          <p:txBody>
+            <a:bodyPr/>
+            <a:lstStyle/>
+            <a:p/>
+          </p:txBody>
+        </p:sp>
+        <p:sp>
+          <p:nvSpPr>
+            <p:cNvPr id="56" name="pl56"/>
+            <p:cNvSpPr/>
+            <p:nvPr/>
+          </p:nvSpPr>
+          <p:spPr>
+            <a:xfrm>
+              <a:off x="887106" y="4695685"/>
+              <a:ext cx="7660515" cy="0"/>
+            </a:xfrm>
+            <a:custGeom>
+              <a:avLst/>
+              <a:pathLst>
+                <a:path w="7660515" h="0">
+                  <a:moveTo>
+                    <a:pt x="0" y="0"/>
+                  </a:moveTo>
+                  <a:lnTo>
+                    <a:pt x="7660515" y="0"/>
+                  </a:lnTo>
+                  <a:lnTo>
+                    <a:pt x="7660515" y="0"/>
+                  </a:lnTo>
+                </a:path>
+              </a:pathLst>
+            </a:custGeom>
+            <a:ln w="13550" cap="flat">
+              <a:solidFill>
+                <a:srgbClr val="EBEBEB">
+                  <a:alpha val="100000"/>
+                </a:srgbClr>
+              </a:solidFill>
+              <a:prstDash val="solid"/>
+              <a:round/>
+            </a:ln>
+          </p:spPr>
+          <p:txBody>
+            <a:bodyPr/>
+            <a:lstStyle/>
+            <a:p/>
+          </p:txBody>
+        </p:sp>
+        <p:sp>
+          <p:nvSpPr>
+            <p:cNvPr id="57" name="pl57"/>
+            <p:cNvSpPr/>
+            <p:nvPr/>
+          </p:nvSpPr>
+          <p:spPr>
+            <a:xfrm>
+              <a:off x="887106" y="4396351"/>
+              <a:ext cx="7660515" cy="0"/>
+            </a:xfrm>
+            <a:custGeom>
+              <a:avLst/>
+              <a:pathLst>
+                <a:path w="7660515" h="0">
+                  <a:moveTo>
+                    <a:pt x="0" y="0"/>
+                  </a:moveTo>
+                  <a:lnTo>
+                    <a:pt x="7660515" y="0"/>
+                  </a:lnTo>
+                  <a:lnTo>
+                    <a:pt x="7660515" y="0"/>
+                  </a:lnTo>
+                </a:path>
+              </a:pathLst>
+            </a:custGeom>
+            <a:ln w="13550" cap="flat">
+              <a:solidFill>
+                <a:srgbClr val="EBEBEB">
+                  <a:alpha val="100000"/>
+                </a:srgbClr>
+              </a:solidFill>
+              <a:prstDash val="solid"/>
+              <a:round/>
+            </a:ln>
+          </p:spPr>
+          <p:txBody>
+            <a:bodyPr/>
+            <a:lstStyle/>
+            <a:p/>
+          </p:txBody>
+        </p:sp>
+        <p:sp>
+          <p:nvSpPr>
+            <p:cNvPr id="58" name="pl58"/>
+            <p:cNvSpPr/>
+            <p:nvPr/>
+          </p:nvSpPr>
+          <p:spPr>
+            <a:xfrm>
+              <a:off x="1386885" y="4336484"/>
+              <a:ext cx="0" cy="1317069"/>
+            </a:xfrm>
+            <a:custGeom>
+              <a:avLst/>
+              <a:pathLst>
+                <a:path w="0" h="1317069">
+                  <a:moveTo>
+                    <a:pt x="0" y="1317069"/>
+                  </a:moveTo>
+                  <a:lnTo>
+                    <a:pt x="0" y="0"/>
+                  </a:lnTo>
+                  <a:lnTo>
+                    <a:pt x="0" y="0"/>
+                  </a:lnTo>
+                </a:path>
+              </a:pathLst>
+            </a:custGeom>
+            <a:ln w="13550" cap="flat">
+              <a:solidFill>
+                <a:srgbClr val="EBEBEB">
+                  <a:alpha val="100000"/>
+                </a:srgbClr>
+              </a:solidFill>
+              <a:prstDash val="solid"/>
+              <a:round/>
+            </a:ln>
+          </p:spPr>
+          <p:txBody>
+            <a:bodyPr/>
+            <a:lstStyle/>
+            <a:p/>
+          </p:txBody>
+        </p:sp>
+        <p:sp>
+          <p:nvSpPr>
+            <p:cNvPr id="59" name="pl59"/>
+            <p:cNvSpPr/>
+            <p:nvPr/>
+          </p:nvSpPr>
+          <p:spPr>
+            <a:xfrm>
+              <a:off x="2194051" y="4336484"/>
+              <a:ext cx="0" cy="1317069"/>
+            </a:xfrm>
+            <a:custGeom>
+              <a:avLst/>
+              <a:pathLst>
+                <a:path w="0" h="1317069">
+                  <a:moveTo>
+                    <a:pt x="0" y="1317069"/>
+                  </a:moveTo>
+                  <a:lnTo>
+                    <a:pt x="0" y="0"/>
+                  </a:lnTo>
+                  <a:lnTo>
+                    <a:pt x="0" y="0"/>
+                  </a:lnTo>
+                </a:path>
+              </a:pathLst>
+            </a:custGeom>
+            <a:ln w="13550" cap="flat">
+              <a:solidFill>
+                <a:srgbClr val="EBEBEB">
+                  <a:alpha val="100000"/>
+                </a:srgbClr>
+              </a:solidFill>
+              <a:prstDash val="solid"/>
+              <a:round/>
+            </a:ln>
+          </p:spPr>
+          <p:txBody>
+            <a:bodyPr/>
+            <a:lstStyle/>
+            <a:p/>
+          </p:txBody>
+        </p:sp>
+        <p:sp>
+          <p:nvSpPr>
+            <p:cNvPr id="60" name="pl60"/>
+            <p:cNvSpPr/>
+            <p:nvPr/>
+          </p:nvSpPr>
+          <p:spPr>
+            <a:xfrm>
+              <a:off x="3001216" y="4336484"/>
+              <a:ext cx="0" cy="1317069"/>
+            </a:xfrm>
+            <a:custGeom>
+              <a:avLst/>
+              <a:pathLst>
+                <a:path w="0" h="1317069">
+                  <a:moveTo>
+                    <a:pt x="0" y="1317069"/>
+                  </a:moveTo>
+                  <a:lnTo>
+                    <a:pt x="0" y="0"/>
+                  </a:lnTo>
+                  <a:lnTo>
+                    <a:pt x="0" y="0"/>
+                  </a:lnTo>
+                </a:path>
+              </a:pathLst>
+            </a:custGeom>
+            <a:ln w="13550" cap="flat">
+              <a:solidFill>
+                <a:srgbClr val="EBEBEB">
+                  <a:alpha val="100000"/>
+                </a:srgbClr>
+              </a:solidFill>
+              <a:prstDash val="solid"/>
+              <a:round/>
+            </a:ln>
+          </p:spPr>
+          <p:txBody>
+            <a:bodyPr/>
+            <a:lstStyle/>
+            <a:p/>
+          </p:txBody>
+        </p:sp>
+        <p:sp>
+          <p:nvSpPr>
+            <p:cNvPr id="61" name="pl61"/>
+            <p:cNvSpPr/>
+            <p:nvPr/>
+          </p:nvSpPr>
+          <p:spPr>
+            <a:xfrm>
+              <a:off x="3808382" y="4336484"/>
+              <a:ext cx="0" cy="1317069"/>
+            </a:xfrm>
+            <a:custGeom>
+              <a:avLst/>
+              <a:pathLst>
+                <a:path w="0" h="1317069">
+                  <a:moveTo>
+                    <a:pt x="0" y="1317069"/>
+                  </a:moveTo>
+                  <a:lnTo>
+                    <a:pt x="0" y="0"/>
+                  </a:lnTo>
+                  <a:lnTo>
+                    <a:pt x="0" y="0"/>
+                  </a:lnTo>
+                </a:path>
+              </a:pathLst>
+            </a:custGeom>
+            <a:ln w="13550" cap="flat">
+              <a:solidFill>
+                <a:srgbClr val="EBEBEB">
+                  <a:alpha val="100000"/>
+                </a:srgbClr>
+              </a:solidFill>
+              <a:prstDash val="solid"/>
+              <a:round/>
+            </a:ln>
+          </p:spPr>
+          <p:txBody>
+            <a:bodyPr/>
+            <a:lstStyle/>
+            <a:p/>
+          </p:txBody>
+        </p:sp>
+        <p:sp>
+          <p:nvSpPr>
+            <p:cNvPr id="62" name="pl62"/>
+            <p:cNvSpPr/>
+            <p:nvPr/>
+          </p:nvSpPr>
+          <p:spPr>
+            <a:xfrm>
+              <a:off x="4615547" y="4336484"/>
+              <a:ext cx="0" cy="1317069"/>
+            </a:xfrm>
+            <a:custGeom>
+              <a:avLst/>
+              <a:pathLst>
+                <a:path w="0" h="1317069">
+                  <a:moveTo>
+                    <a:pt x="0" y="1317069"/>
+                  </a:moveTo>
+                  <a:lnTo>
+                    <a:pt x="0" y="0"/>
+                  </a:lnTo>
+                  <a:lnTo>
+                    <a:pt x="0" y="0"/>
+                  </a:lnTo>
+                </a:path>
+              </a:pathLst>
+            </a:custGeom>
+            <a:ln w="13550" cap="flat">
+              <a:solidFill>
+                <a:srgbClr val="EBEBEB">
+                  <a:alpha val="100000"/>
+                </a:srgbClr>
+              </a:solidFill>
+              <a:prstDash val="solid"/>
+              <a:round/>
+            </a:ln>
+          </p:spPr>
+          <p:txBody>
+            <a:bodyPr/>
+            <a:lstStyle/>
+            <a:p/>
+          </p:txBody>
+        </p:sp>
+        <p:sp>
+          <p:nvSpPr>
+            <p:cNvPr id="63" name="pl63"/>
+            <p:cNvSpPr/>
+            <p:nvPr/>
+          </p:nvSpPr>
+          <p:spPr>
+            <a:xfrm>
+              <a:off x="5422713" y="4336484"/>
+              <a:ext cx="0" cy="1317069"/>
+            </a:xfrm>
+            <a:custGeom>
+              <a:avLst/>
+              <a:pathLst>
+                <a:path w="0" h="1317069">
+                  <a:moveTo>
+                    <a:pt x="0" y="1317069"/>
+                  </a:moveTo>
+                  <a:lnTo>
+                    <a:pt x="0" y="0"/>
+                  </a:lnTo>
+                  <a:lnTo>
+                    <a:pt x="0" y="0"/>
+                  </a:lnTo>
+                </a:path>
+              </a:pathLst>
+            </a:custGeom>
+            <a:ln w="13550" cap="flat">
+              <a:solidFill>
+                <a:srgbClr val="EBEBEB">
+                  <a:alpha val="100000"/>
+                </a:srgbClr>
+              </a:solidFill>
+              <a:prstDash val="solid"/>
+              <a:round/>
+            </a:ln>
+          </p:spPr>
+          <p:txBody>
+            <a:bodyPr/>
+            <a:lstStyle/>
+            <a:p/>
+          </p:txBody>
+        </p:sp>
+        <p:sp>
+          <p:nvSpPr>
+            <p:cNvPr id="64" name="pl64"/>
+            <p:cNvSpPr/>
+            <p:nvPr/>
+          </p:nvSpPr>
+          <p:spPr>
+            <a:xfrm>
+              <a:off x="6229878" y="4336484"/>
+              <a:ext cx="0" cy="1317069"/>
+            </a:xfrm>
+            <a:custGeom>
+              <a:avLst/>
+              <a:pathLst>
+                <a:path w="0" h="1317069">
+                  <a:moveTo>
+                    <a:pt x="0" y="1317069"/>
+                  </a:moveTo>
+                  <a:lnTo>
+                    <a:pt x="0" y="0"/>
+                  </a:lnTo>
+                  <a:lnTo>
+                    <a:pt x="0" y="0"/>
+                  </a:lnTo>
+                </a:path>
+              </a:pathLst>
+            </a:custGeom>
+            <a:ln w="13550" cap="flat">
+              <a:solidFill>
+                <a:srgbClr val="EBEBEB">
+                  <a:alpha val="100000"/>
+                </a:srgbClr>
+              </a:solidFill>
+              <a:prstDash val="solid"/>
+              <a:round/>
+            </a:ln>
+          </p:spPr>
+          <p:txBody>
+            <a:bodyPr/>
+            <a:lstStyle/>
+            <a:p/>
+          </p:txBody>
+        </p:sp>
+        <p:sp>
+          <p:nvSpPr>
+            <p:cNvPr id="65" name="pl65"/>
+            <p:cNvSpPr/>
+            <p:nvPr/>
+          </p:nvSpPr>
+          <p:spPr>
+            <a:xfrm>
+              <a:off x="7037044" y="4336484"/>
+              <a:ext cx="0" cy="1317069"/>
+            </a:xfrm>
+            <a:custGeom>
+              <a:avLst/>
+              <a:pathLst>
+                <a:path w="0" h="1317069">
+                  <a:moveTo>
+                    <a:pt x="0" y="1317069"/>
+                  </a:moveTo>
+                  <a:lnTo>
+                    <a:pt x="0" y="0"/>
+                  </a:lnTo>
+                  <a:lnTo>
+                    <a:pt x="0" y="0"/>
+                  </a:lnTo>
+                </a:path>
+              </a:pathLst>
+            </a:custGeom>
+            <a:ln w="13550" cap="flat">
+              <a:solidFill>
+                <a:srgbClr val="EBEBEB">
+                  <a:alpha val="100000"/>
+                </a:srgbClr>
+              </a:solidFill>
+              <a:prstDash val="solid"/>
+              <a:round/>
+            </a:ln>
+          </p:spPr>
+          <p:txBody>
+            <a:bodyPr/>
+            <a:lstStyle/>
+            <a:p/>
+          </p:txBody>
+        </p:sp>
+        <p:sp>
+          <p:nvSpPr>
+            <p:cNvPr id="66" name="pl66"/>
+            <p:cNvSpPr/>
+            <p:nvPr/>
+          </p:nvSpPr>
+          <p:spPr>
+            <a:xfrm>
+              <a:off x="7844209" y="4336484"/>
+              <a:ext cx="0" cy="1317069"/>
+            </a:xfrm>
+            <a:custGeom>
+              <a:avLst/>
+              <a:pathLst>
+                <a:path w="0" h="1317069">
+                  <a:moveTo>
+                    <a:pt x="0" y="1317069"/>
+                  </a:moveTo>
+                  <a:lnTo>
+                    <a:pt x="0" y="0"/>
+                  </a:lnTo>
+                  <a:lnTo>
+                    <a:pt x="0" y="0"/>
+                  </a:lnTo>
+                </a:path>
+              </a:pathLst>
+            </a:custGeom>
+            <a:ln w="13550" cap="flat">
+              <a:solidFill>
+                <a:srgbClr val="EBEBEB">
+                  <a:alpha val="100000"/>
+                </a:srgbClr>
+              </a:solidFill>
+              <a:prstDash val="solid"/>
+              <a:round/>
+            </a:ln>
+          </p:spPr>
+          <p:txBody>
+            <a:bodyPr/>
+            <a:lstStyle/>
+            <a:p/>
+          </p:txBody>
+        </p:sp>
+        <p:sp>
+          <p:nvSpPr>
+            <p:cNvPr id="67" name="pg67"/>
+            <p:cNvSpPr/>
+            <p:nvPr/>
+          </p:nvSpPr>
+          <p:spPr>
+            <a:xfrm>
+              <a:off x="1235312" y="4336484"/>
+              <a:ext cx="6964104" cy="1255584"/>
+            </a:xfrm>
+            <a:custGeom>
+              <a:avLst/>
+              <a:pathLst>
+                <a:path w="6964104" h="1255584">
+                  <a:moveTo>
+                    <a:pt x="2213917" y="0"/>
+                  </a:moveTo>
+                  <a:lnTo>
+                    <a:pt x="2251023" y="65118"/>
+                  </a:lnTo>
+                  <a:lnTo>
+                    <a:pt x="2321368" y="176984"/>
+                  </a:lnTo>
+                  <a:lnTo>
+                    <a:pt x="2391712" y="278352"/>
+                  </a:lnTo>
+                  <a:lnTo>
+                    <a:pt x="2462057" y="370207"/>
+                  </a:lnTo>
+                  <a:lnTo>
+                    <a:pt x="2532401" y="453443"/>
+                  </a:lnTo>
+                  <a:lnTo>
+                    <a:pt x="2602746" y="528868"/>
+                  </a:lnTo>
+                  <a:lnTo>
+                    <a:pt x="2673090" y="597216"/>
+                  </a:lnTo>
+                  <a:lnTo>
+                    <a:pt x="2743435" y="659149"/>
+                  </a:lnTo>
+                  <a:lnTo>
+                    <a:pt x="2813779" y="715270"/>
+                  </a:lnTo>
+                  <a:lnTo>
+                    <a:pt x="2884124" y="766126"/>
+                  </a:lnTo>
+                  <a:lnTo>
+                    <a:pt x="2954468" y="812208"/>
+                  </a:lnTo>
+                  <a:lnTo>
+                    <a:pt x="3024813" y="853967"/>
+                  </a:lnTo>
+                  <a:lnTo>
+                    <a:pt x="3095157" y="891806"/>
+                  </a:lnTo>
+                  <a:lnTo>
+                    <a:pt x="3165502" y="926095"/>
+                  </a:lnTo>
+                  <a:lnTo>
+                    <a:pt x="3235846" y="957166"/>
+                  </a:lnTo>
+                  <a:lnTo>
+                    <a:pt x="3306191" y="960671"/>
+                  </a:lnTo>
+                  <a:lnTo>
+                    <a:pt x="3376535" y="963515"/>
+                  </a:lnTo>
+                  <a:lnTo>
+                    <a:pt x="3446880" y="966332"/>
+                  </a:lnTo>
+                  <a:lnTo>
+                    <a:pt x="3517224" y="969121"/>
+                  </a:lnTo>
+                  <a:lnTo>
+                    <a:pt x="3587569" y="971884"/>
+                  </a:lnTo>
+                  <a:lnTo>
+                    <a:pt x="3657913" y="974621"/>
+                  </a:lnTo>
+                  <a:lnTo>
+                    <a:pt x="3728257" y="977331"/>
+                  </a:lnTo>
+                  <a:lnTo>
+                    <a:pt x="3798602" y="980015"/>
+                  </a:lnTo>
+                  <a:lnTo>
+                    <a:pt x="3868946" y="982673"/>
+                  </a:lnTo>
+                  <a:lnTo>
+                    <a:pt x="3939291" y="985306"/>
+                  </a:lnTo>
+                  <a:lnTo>
+                    <a:pt x="4009635" y="987914"/>
+                  </a:lnTo>
+                  <a:lnTo>
+                    <a:pt x="4079980" y="990497"/>
+                  </a:lnTo>
+                  <a:lnTo>
+                    <a:pt x="4150324" y="993055"/>
+                  </a:lnTo>
+                  <a:lnTo>
+                    <a:pt x="4220669" y="995588"/>
+                  </a:lnTo>
+                  <a:lnTo>
+                    <a:pt x="4291013" y="998097"/>
+                  </a:lnTo>
+                  <a:lnTo>
+                    <a:pt x="4361358" y="1000582"/>
+                  </a:lnTo>
+                  <a:lnTo>
+                    <a:pt x="4431702" y="1003043"/>
+                  </a:lnTo>
+                  <a:lnTo>
+                    <a:pt x="4502047" y="1005481"/>
+                  </a:lnTo>
+                  <a:lnTo>
+                    <a:pt x="4572391" y="1007895"/>
+                  </a:lnTo>
+                  <a:lnTo>
+                    <a:pt x="4642736" y="1010286"/>
+                  </a:lnTo>
+                  <a:lnTo>
+                    <a:pt x="4713080" y="1012654"/>
+                  </a:lnTo>
+                  <a:lnTo>
+                    <a:pt x="4783425" y="1015000"/>
+                  </a:lnTo>
+                  <a:lnTo>
+                    <a:pt x="4853769" y="1017323"/>
+                  </a:lnTo>
+                  <a:lnTo>
+                    <a:pt x="4924114" y="1019623"/>
+                  </a:lnTo>
+                  <a:lnTo>
+                    <a:pt x="4994458" y="1021902"/>
+                  </a:lnTo>
+                  <a:lnTo>
+                    <a:pt x="5064803" y="1024159"/>
+                  </a:lnTo>
+                  <a:lnTo>
+                    <a:pt x="5135147" y="1026394"/>
+                  </a:lnTo>
+                  <a:lnTo>
+                    <a:pt x="5205492" y="1028607"/>
+                  </a:lnTo>
+                  <a:lnTo>
+                    <a:pt x="5275836" y="1030800"/>
+                  </a:lnTo>
+                  <a:lnTo>
+                    <a:pt x="5346181" y="1032971"/>
+                  </a:lnTo>
+                  <a:lnTo>
+                    <a:pt x="5416525" y="1035122"/>
+                  </a:lnTo>
+                  <a:lnTo>
+                    <a:pt x="5486870" y="1037252"/>
+                  </a:lnTo>
+                  <a:lnTo>
+                    <a:pt x="5557214" y="1039361"/>
+                  </a:lnTo>
+                  <a:lnTo>
+                    <a:pt x="5627559" y="1041450"/>
+                  </a:lnTo>
+                  <a:lnTo>
+                    <a:pt x="5697903" y="1043520"/>
+                  </a:lnTo>
+                  <a:lnTo>
+                    <a:pt x="5768248" y="1045569"/>
+                  </a:lnTo>
+                  <a:lnTo>
+                    <a:pt x="5838592" y="1047599"/>
+                  </a:lnTo>
+                  <a:lnTo>
+                    <a:pt x="5908937" y="1049609"/>
+                  </a:lnTo>
+                  <a:lnTo>
+                    <a:pt x="5979281" y="1051600"/>
+                  </a:lnTo>
+                  <a:lnTo>
+                    <a:pt x="6049626" y="1053572"/>
+                  </a:lnTo>
+                  <a:lnTo>
+                    <a:pt x="6119970" y="1055525"/>
+                  </a:lnTo>
+                  <a:lnTo>
+                    <a:pt x="6190315" y="1057459"/>
+                  </a:lnTo>
+                  <a:lnTo>
+                    <a:pt x="6260659" y="1059375"/>
+                  </a:lnTo>
+                  <a:lnTo>
+                    <a:pt x="6331004" y="1061272"/>
+                  </a:lnTo>
+                  <a:lnTo>
+                    <a:pt x="6401348" y="1063151"/>
+                  </a:lnTo>
+                  <a:lnTo>
+                    <a:pt x="6471693" y="1065012"/>
+                  </a:lnTo>
+                  <a:lnTo>
+                    <a:pt x="6542037" y="1066856"/>
+                  </a:lnTo>
+                  <a:lnTo>
+                    <a:pt x="6612382" y="1068681"/>
+                  </a:lnTo>
+                  <a:lnTo>
+                    <a:pt x="6682726" y="1070489"/>
+                  </a:lnTo>
+                  <a:lnTo>
+                    <a:pt x="6753071" y="1072280"/>
+                  </a:lnTo>
+                  <a:lnTo>
+                    <a:pt x="6823415" y="1074053"/>
+                  </a:lnTo>
+                  <a:lnTo>
+                    <a:pt x="6893760" y="1075810"/>
+                  </a:lnTo>
+                  <a:lnTo>
+                    <a:pt x="6964104" y="1077550"/>
+                  </a:lnTo>
+                  <a:lnTo>
+                    <a:pt x="6964104" y="1255584"/>
+                  </a:lnTo>
+                  <a:lnTo>
+                    <a:pt x="6893760" y="1255416"/>
+                  </a:lnTo>
+                  <a:lnTo>
+                    <a:pt x="6823415" y="1255231"/>
+                  </a:lnTo>
+                  <a:lnTo>
+                    <a:pt x="6753071" y="1255027"/>
+                  </a:lnTo>
+                  <a:lnTo>
+                    <a:pt x="6682726" y="1254802"/>
+                  </a:lnTo>
+                  <a:lnTo>
+                    <a:pt x="6612382" y="1254553"/>
+                  </a:lnTo>
+                  <a:lnTo>
+                    <a:pt x="6542037" y="1254279"/>
+                  </a:lnTo>
+                  <a:lnTo>
+                    <a:pt x="6471693" y="1253976"/>
+                  </a:lnTo>
+                  <a:lnTo>
+                    <a:pt x="6401348" y="1253642"/>
+                  </a:lnTo>
+                  <a:lnTo>
+                    <a:pt x="6331004" y="1253274"/>
+                  </a:lnTo>
+                  <a:lnTo>
+                    <a:pt x="6260659" y="1252867"/>
+                  </a:lnTo>
+                  <a:lnTo>
+                    <a:pt x="6190315" y="1252418"/>
+                  </a:lnTo>
+                  <a:lnTo>
+                    <a:pt x="6119970" y="1251923"/>
+                  </a:lnTo>
+                  <a:lnTo>
+                    <a:pt x="6049626" y="1251376"/>
+                  </a:lnTo>
+                  <a:lnTo>
+                    <a:pt x="5979281" y="1250773"/>
+                  </a:lnTo>
+                  <a:lnTo>
+                    <a:pt x="5908937" y="1250107"/>
+                  </a:lnTo>
+                  <a:lnTo>
+                    <a:pt x="5838592" y="1249372"/>
+                  </a:lnTo>
+                  <a:lnTo>
+                    <a:pt x="5768248" y="1248561"/>
+                  </a:lnTo>
+                  <a:lnTo>
+                    <a:pt x="5697903" y="1247666"/>
+                  </a:lnTo>
+                  <a:lnTo>
+                    <a:pt x="5627559" y="1246679"/>
+                  </a:lnTo>
+                  <a:lnTo>
+                    <a:pt x="5557214" y="1245589"/>
+                  </a:lnTo>
+                  <a:lnTo>
+                    <a:pt x="5486870" y="1244387"/>
+                  </a:lnTo>
+                  <a:lnTo>
+                    <a:pt x="5416525" y="1243060"/>
+                  </a:lnTo>
+                  <a:lnTo>
+                    <a:pt x="5346181" y="1241595"/>
+                  </a:lnTo>
+                  <a:lnTo>
+                    <a:pt x="5275836" y="1239979"/>
+                  </a:lnTo>
+                  <a:lnTo>
+                    <a:pt x="5205492" y="1238195"/>
+                  </a:lnTo>
+                  <a:lnTo>
+                    <a:pt x="5135147" y="1236227"/>
+                  </a:lnTo>
+                  <a:lnTo>
+                    <a:pt x="5064803" y="1234055"/>
+                  </a:lnTo>
+                  <a:lnTo>
+                    <a:pt x="4994458" y="1231658"/>
+                  </a:lnTo>
+                  <a:lnTo>
+                    <a:pt x="4924114" y="1229012"/>
+                  </a:lnTo>
+                  <a:lnTo>
+                    <a:pt x="4853769" y="1226093"/>
+                  </a:lnTo>
+                  <a:lnTo>
+                    <a:pt x="4783425" y="1222872"/>
+                  </a:lnTo>
+                  <a:lnTo>
+                    <a:pt x="4713080" y="1219317"/>
+                  </a:lnTo>
+                  <a:lnTo>
+                    <a:pt x="4642736" y="1215393"/>
+                  </a:lnTo>
+                  <a:lnTo>
+                    <a:pt x="4572391" y="1211064"/>
+                  </a:lnTo>
+                  <a:lnTo>
+                    <a:pt x="4502047" y="1206286"/>
+                  </a:lnTo>
+                  <a:lnTo>
+                    <a:pt x="4431702" y="1201013"/>
+                  </a:lnTo>
+                  <a:lnTo>
+                    <a:pt x="4361358" y="1195194"/>
+                  </a:lnTo>
+                  <a:lnTo>
+                    <a:pt x="4291013" y="1188772"/>
+                  </a:lnTo>
+                  <a:lnTo>
+                    <a:pt x="4220669" y="1181686"/>
+                  </a:lnTo>
+                  <a:lnTo>
+                    <a:pt x="4150324" y="1173866"/>
+                  </a:lnTo>
+                  <a:lnTo>
+                    <a:pt x="4079980" y="1165236"/>
+                  </a:lnTo>
+                  <a:lnTo>
+                    <a:pt x="4009635" y="1155712"/>
+                  </a:lnTo>
+                  <a:lnTo>
+                    <a:pt x="3939291" y="1145202"/>
+                  </a:lnTo>
+                  <a:lnTo>
+                    <a:pt x="3868946" y="1133603"/>
+                  </a:lnTo>
+                  <a:lnTo>
+                    <a:pt x="3798602" y="1120803"/>
+                  </a:lnTo>
+                  <a:lnTo>
+                    <a:pt x="3728257" y="1106678"/>
+                  </a:lnTo>
+                  <a:lnTo>
+                    <a:pt x="3657913" y="1091090"/>
+                  </a:lnTo>
+                  <a:lnTo>
+                    <a:pt x="3587569" y="1073888"/>
+                  </a:lnTo>
+                  <a:lnTo>
+                    <a:pt x="3517224" y="1054904"/>
+                  </a:lnTo>
+                  <a:lnTo>
+                    <a:pt x="3446880" y="1033954"/>
+                  </a:lnTo>
+                  <a:lnTo>
+                    <a:pt x="3376535" y="1010835"/>
+                  </a:lnTo>
+                  <a:lnTo>
+                    <a:pt x="3306191" y="985322"/>
+                  </a:lnTo>
+                  <a:lnTo>
+                    <a:pt x="3235846" y="957799"/>
+                  </a:lnTo>
+                  <a:lnTo>
+                    <a:pt x="3165502" y="954900"/>
+                  </a:lnTo>
+                  <a:lnTo>
+                    <a:pt x="3095157" y="951973"/>
+                  </a:lnTo>
+                  <a:lnTo>
+                    <a:pt x="3024813" y="949017"/>
+                  </a:lnTo>
+                  <a:lnTo>
+                    <a:pt x="2954468" y="946033"/>
+                  </a:lnTo>
+                  <a:lnTo>
+                    <a:pt x="2884124" y="943019"/>
+                  </a:lnTo>
+                  <a:lnTo>
+                    <a:pt x="2813779" y="939977"/>
+                  </a:lnTo>
+                  <a:lnTo>
+                    <a:pt x="2743435" y="936905"/>
+                  </a:lnTo>
+                  <a:lnTo>
+                    <a:pt x="2673090" y="933803"/>
+                  </a:lnTo>
+                  <a:lnTo>
+                    <a:pt x="2602746" y="930672"/>
+                  </a:lnTo>
+                  <a:lnTo>
+                    <a:pt x="2532401" y="927510"/>
+                  </a:lnTo>
+                  <a:lnTo>
+                    <a:pt x="2462057" y="924317"/>
+                  </a:lnTo>
+                  <a:lnTo>
+                    <a:pt x="2391712" y="921093"/>
+                  </a:lnTo>
+                  <a:lnTo>
+                    <a:pt x="2321368" y="917839"/>
+                  </a:lnTo>
+                  <a:lnTo>
+                    <a:pt x="2251023" y="914552"/>
+                  </a:lnTo>
+                  <a:lnTo>
+                    <a:pt x="2180679" y="911234"/>
+                  </a:lnTo>
+                  <a:lnTo>
+                    <a:pt x="2110334" y="907884"/>
+                  </a:lnTo>
+                  <a:lnTo>
+                    <a:pt x="2039990" y="904501"/>
+                  </a:lnTo>
+                  <a:lnTo>
+                    <a:pt x="1969645" y="901086"/>
+                  </a:lnTo>
+                  <a:lnTo>
+                    <a:pt x="1899301" y="897637"/>
+                  </a:lnTo>
+                  <a:lnTo>
+                    <a:pt x="1828956" y="894155"/>
+                  </a:lnTo>
+                  <a:lnTo>
+                    <a:pt x="1758612" y="890640"/>
+                  </a:lnTo>
+                  <a:lnTo>
+                    <a:pt x="1688267" y="887090"/>
+                  </a:lnTo>
+                  <a:lnTo>
+                    <a:pt x="1617923" y="883506"/>
+                  </a:lnTo>
+                  <a:lnTo>
+                    <a:pt x="1547578" y="879887"/>
+                  </a:lnTo>
+                  <a:lnTo>
+                    <a:pt x="1477234" y="876234"/>
+                  </a:lnTo>
+                  <a:lnTo>
+                    <a:pt x="1406889" y="872544"/>
+                  </a:lnTo>
+                  <a:lnTo>
+                    <a:pt x="1336545" y="868819"/>
+                  </a:lnTo>
+                  <a:lnTo>
+                    <a:pt x="1266200" y="865059"/>
+                  </a:lnTo>
+                  <a:lnTo>
+                    <a:pt x="1195856" y="861261"/>
+                  </a:lnTo>
+                  <a:lnTo>
+                    <a:pt x="1125511" y="857427"/>
+                  </a:lnTo>
+                  <a:lnTo>
+                    <a:pt x="1055167" y="853556"/>
+                  </a:lnTo>
+                  <a:lnTo>
+                    <a:pt x="984822" y="849647"/>
+                  </a:lnTo>
+                  <a:lnTo>
+                    <a:pt x="914478" y="845700"/>
+                  </a:lnTo>
+                  <a:lnTo>
+                    <a:pt x="844133" y="841715"/>
+                  </a:lnTo>
+                  <a:lnTo>
+                    <a:pt x="773789" y="837692"/>
+                  </a:lnTo>
+                  <a:lnTo>
+                    <a:pt x="703444" y="833630"/>
+                  </a:lnTo>
+                  <a:lnTo>
+                    <a:pt x="633100" y="829528"/>
+                  </a:lnTo>
+                  <a:lnTo>
+                    <a:pt x="562755" y="825386"/>
+                  </a:lnTo>
+                  <a:lnTo>
+                    <a:pt x="492411" y="821205"/>
+                  </a:lnTo>
+                  <a:lnTo>
+                    <a:pt x="422066" y="816983"/>
+                  </a:lnTo>
+                  <a:lnTo>
+                    <a:pt x="351722" y="812720"/>
+                  </a:lnTo>
+                  <a:lnTo>
+                    <a:pt x="281377" y="808416"/>
+                  </a:lnTo>
+                  <a:lnTo>
+                    <a:pt x="211033" y="804070"/>
+                  </a:lnTo>
+                  <a:lnTo>
+                    <a:pt x="140688" y="799682"/>
+                  </a:lnTo>
+                  <a:lnTo>
+                    <a:pt x="70344" y="795251"/>
+                  </a:lnTo>
+                  <a:lnTo>
+                    <a:pt x="0" y="790778"/>
+                  </a:lnTo>
+                  <a:close/>
+                </a:path>
+              </a:pathLst>
+            </a:custGeom>
+            <a:solidFill>
+              <a:srgbClr val="FF8C00">
+                <a:alpha val="20000"/>
+              </a:srgbClr>
+            </a:solidFill>
+          </p:spPr>
+          <p:txBody>
+            <a:bodyPr/>
+            <a:lstStyle/>
+            <a:p/>
+          </p:txBody>
+        </p:sp>
+        <p:sp>
+          <p:nvSpPr>
+            <p:cNvPr id="68" name="pl68"/>
+            <p:cNvSpPr/>
+            <p:nvPr/>
+          </p:nvSpPr>
+          <p:spPr>
+            <a:xfrm>
+              <a:off x="3449230" y="4336484"/>
+              <a:ext cx="4750186" cy="1077550"/>
+            </a:xfrm>
+            <a:custGeom>
+              <a:avLst/>
+              <a:pathLst>
+                <a:path w="4750186" h="1077550">
+                  <a:moveTo>
+                    <a:pt x="0" y="0"/>
+                  </a:moveTo>
+                  <a:lnTo>
+                    <a:pt x="37105" y="65118"/>
+                  </a:lnTo>
+                  <a:lnTo>
+                    <a:pt x="107450" y="176984"/>
+                  </a:lnTo>
+                  <a:lnTo>
+                    <a:pt x="177794" y="278352"/>
+                  </a:lnTo>
+                  <a:lnTo>
+                    <a:pt x="248139" y="370207"/>
+                  </a:lnTo>
+                  <a:lnTo>
+                    <a:pt x="318483" y="453443"/>
+                  </a:lnTo>
+                  <a:lnTo>
+                    <a:pt x="388828" y="528868"/>
+                  </a:lnTo>
+                  <a:lnTo>
+                    <a:pt x="459172" y="597216"/>
+                  </a:lnTo>
+                  <a:lnTo>
+                    <a:pt x="529517" y="659149"/>
+                  </a:lnTo>
+                  <a:lnTo>
+                    <a:pt x="599861" y="715270"/>
+                  </a:lnTo>
+                  <a:lnTo>
+                    <a:pt x="670206" y="766126"/>
+                  </a:lnTo>
+                  <a:lnTo>
+                    <a:pt x="740550" y="812208"/>
+                  </a:lnTo>
+                  <a:lnTo>
+                    <a:pt x="810895" y="853967"/>
+                  </a:lnTo>
+                  <a:lnTo>
+                    <a:pt x="881239" y="891806"/>
+                  </a:lnTo>
+                  <a:lnTo>
+                    <a:pt x="951584" y="926095"/>
+                  </a:lnTo>
+                  <a:lnTo>
+                    <a:pt x="1021928" y="957166"/>
+                  </a:lnTo>
+                  <a:lnTo>
+                    <a:pt x="1092273" y="960671"/>
+                  </a:lnTo>
+                  <a:lnTo>
+                    <a:pt x="1162617" y="963515"/>
+                  </a:lnTo>
+                  <a:lnTo>
+                    <a:pt x="1232962" y="966332"/>
+                  </a:lnTo>
+                  <a:lnTo>
+                    <a:pt x="1303306" y="969121"/>
+                  </a:lnTo>
+                  <a:lnTo>
+                    <a:pt x="1373651" y="971884"/>
+                  </a:lnTo>
+                  <a:lnTo>
+                    <a:pt x="1443995" y="974621"/>
+                  </a:lnTo>
+                  <a:lnTo>
+                    <a:pt x="1514340" y="977331"/>
+                  </a:lnTo>
+                  <a:lnTo>
+                    <a:pt x="1584684" y="980015"/>
+                  </a:lnTo>
+                  <a:lnTo>
+                    <a:pt x="1655029" y="982673"/>
+                  </a:lnTo>
+                  <a:lnTo>
+                    <a:pt x="1725373" y="985306"/>
+                  </a:lnTo>
+                  <a:lnTo>
+                    <a:pt x="1795718" y="987914"/>
+                  </a:lnTo>
+                  <a:lnTo>
+                    <a:pt x="1866062" y="990497"/>
+                  </a:lnTo>
+                  <a:lnTo>
+                    <a:pt x="1936407" y="993055"/>
+                  </a:lnTo>
+                  <a:lnTo>
+                    <a:pt x="2006751" y="995588"/>
+                  </a:lnTo>
+                  <a:lnTo>
+                    <a:pt x="2077096" y="998097"/>
+                  </a:lnTo>
+                  <a:lnTo>
+                    <a:pt x="2147440" y="1000582"/>
+                  </a:lnTo>
+                  <a:lnTo>
+                    <a:pt x="2217785" y="1003043"/>
+                  </a:lnTo>
+                  <a:lnTo>
+                    <a:pt x="2288129" y="1005481"/>
+                  </a:lnTo>
+                  <a:lnTo>
+                    <a:pt x="2358473" y="1007895"/>
+                  </a:lnTo>
+                  <a:lnTo>
+                    <a:pt x="2428818" y="1010286"/>
+                  </a:lnTo>
+                  <a:lnTo>
+                    <a:pt x="2499162" y="1012654"/>
+                  </a:lnTo>
+                  <a:lnTo>
+                    <a:pt x="2569507" y="1015000"/>
+                  </a:lnTo>
+                  <a:lnTo>
+                    <a:pt x="2639851" y="1017323"/>
+                  </a:lnTo>
+                  <a:lnTo>
+                    <a:pt x="2710196" y="1019623"/>
+                  </a:lnTo>
+                  <a:lnTo>
+                    <a:pt x="2780540" y="1021902"/>
+                  </a:lnTo>
+                  <a:lnTo>
+                    <a:pt x="2850885" y="1024159"/>
+                  </a:lnTo>
+                  <a:lnTo>
+                    <a:pt x="2921229" y="1026394"/>
+                  </a:lnTo>
+                  <a:lnTo>
+                    <a:pt x="2991574" y="1028607"/>
+                  </a:lnTo>
+                  <a:lnTo>
+                    <a:pt x="3061918" y="1030800"/>
+                  </a:lnTo>
+                  <a:lnTo>
+                    <a:pt x="3132263" y="1032971"/>
+                  </a:lnTo>
+                  <a:lnTo>
+                    <a:pt x="3202607" y="1035122"/>
+                  </a:lnTo>
+                  <a:lnTo>
+                    <a:pt x="3272952" y="1037252"/>
+                  </a:lnTo>
+                  <a:lnTo>
+                    <a:pt x="3343296" y="1039361"/>
+                  </a:lnTo>
+                  <a:lnTo>
+                    <a:pt x="3413641" y="1041450"/>
+                  </a:lnTo>
+                  <a:lnTo>
+                    <a:pt x="3483985" y="1043520"/>
+                  </a:lnTo>
+                  <a:lnTo>
+                    <a:pt x="3554330" y="1045569"/>
+                  </a:lnTo>
+                  <a:lnTo>
+                    <a:pt x="3624674" y="1047599"/>
+                  </a:lnTo>
+                  <a:lnTo>
+                    <a:pt x="3695019" y="1049609"/>
+                  </a:lnTo>
+                  <a:lnTo>
+                    <a:pt x="3765363" y="1051600"/>
+                  </a:lnTo>
+                  <a:lnTo>
+                    <a:pt x="3835708" y="1053572"/>
+                  </a:lnTo>
+                  <a:lnTo>
+                    <a:pt x="3906052" y="1055525"/>
+                  </a:lnTo>
+                  <a:lnTo>
+                    <a:pt x="3976397" y="1057459"/>
+                  </a:lnTo>
+                  <a:lnTo>
+                    <a:pt x="4046741" y="1059375"/>
+                  </a:lnTo>
+                  <a:lnTo>
+                    <a:pt x="4117086" y="1061272"/>
+                  </a:lnTo>
+                  <a:lnTo>
+                    <a:pt x="4187430" y="1063151"/>
+                  </a:lnTo>
+                  <a:lnTo>
+                    <a:pt x="4257775" y="1065012"/>
+                  </a:lnTo>
+                  <a:lnTo>
+                    <a:pt x="4328119" y="1066856"/>
+                  </a:lnTo>
+                  <a:lnTo>
+                    <a:pt x="4398464" y="1068681"/>
+                  </a:lnTo>
+                  <a:lnTo>
+                    <a:pt x="4468808" y="1070489"/>
+                  </a:lnTo>
+                  <a:lnTo>
+                    <a:pt x="4539153" y="1072280"/>
+                  </a:lnTo>
+                  <a:lnTo>
+                    <a:pt x="4609497" y="1074053"/>
+                  </a:lnTo>
+                  <a:lnTo>
+                    <a:pt x="4679842" y="1075810"/>
+                  </a:lnTo>
+                  <a:lnTo>
+                    <a:pt x="4750186" y="1077550"/>
+                  </a:lnTo>
+                </a:path>
+              </a:pathLst>
+            </a:custGeom>
+          </p:spPr>
+          <p:txBody>
+            <a:bodyPr/>
+            <a:lstStyle/>
+            <a:p/>
+          </p:txBody>
+        </p:sp>
+        <p:sp>
+          <p:nvSpPr>
+            <p:cNvPr id="69" name="pl69"/>
+            <p:cNvSpPr/>
+            <p:nvPr/>
+          </p:nvSpPr>
+          <p:spPr>
+            <a:xfrm>
+              <a:off x="1235312" y="5127262"/>
+              <a:ext cx="6964104" cy="464805"/>
+            </a:xfrm>
+            <a:custGeom>
+              <a:avLst/>
+              <a:pathLst>
+                <a:path w="6964104" h="464805">
+                  <a:moveTo>
+                    <a:pt x="6964104" y="464805"/>
+                  </a:moveTo>
+                  <a:lnTo>
+                    <a:pt x="6893760" y="464638"/>
+                  </a:lnTo>
+                  <a:lnTo>
+                    <a:pt x="6823415" y="464453"/>
+                  </a:lnTo>
+                  <a:lnTo>
+                    <a:pt x="6753071" y="464249"/>
+                  </a:lnTo>
+                  <a:lnTo>
+                    <a:pt x="6682726" y="464024"/>
+                  </a:lnTo>
+                  <a:lnTo>
+                    <a:pt x="6612382" y="463775"/>
+                  </a:lnTo>
+                  <a:lnTo>
+                    <a:pt x="6542037" y="463501"/>
+                  </a:lnTo>
+                  <a:lnTo>
+                    <a:pt x="6471693" y="463198"/>
+                  </a:lnTo>
+                  <a:lnTo>
+                    <a:pt x="6401348" y="462864"/>
+                  </a:lnTo>
+                  <a:lnTo>
+                    <a:pt x="6331004" y="462495"/>
+                  </a:lnTo>
+                  <a:lnTo>
+                    <a:pt x="6260659" y="462089"/>
+                  </a:lnTo>
+                  <a:lnTo>
+                    <a:pt x="6190315" y="461640"/>
+                  </a:lnTo>
+                  <a:lnTo>
+                    <a:pt x="6119970" y="461144"/>
+                  </a:lnTo>
+                  <a:lnTo>
+                    <a:pt x="6049626" y="460598"/>
+                  </a:lnTo>
+                  <a:lnTo>
+                    <a:pt x="5979281" y="459994"/>
+                  </a:lnTo>
+                  <a:lnTo>
+                    <a:pt x="5908937" y="459329"/>
+                  </a:lnTo>
+                  <a:lnTo>
+                    <a:pt x="5838592" y="458594"/>
+                  </a:lnTo>
+                  <a:lnTo>
+                    <a:pt x="5768248" y="457783"/>
+                  </a:lnTo>
+                  <a:lnTo>
+                    <a:pt x="5697903" y="456888"/>
+                  </a:lnTo>
+                  <a:lnTo>
+                    <a:pt x="5627559" y="455901"/>
+                  </a:lnTo>
+                  <a:lnTo>
+                    <a:pt x="5557214" y="454811"/>
+                  </a:lnTo>
+                  <a:lnTo>
+                    <a:pt x="5486870" y="453608"/>
+                  </a:lnTo>
+                  <a:lnTo>
+                    <a:pt x="5416525" y="452281"/>
+                  </a:lnTo>
+                  <a:lnTo>
+                    <a:pt x="5346181" y="450817"/>
+                  </a:lnTo>
+                  <a:lnTo>
+                    <a:pt x="5275836" y="449201"/>
+                  </a:lnTo>
+                  <a:lnTo>
+                    <a:pt x="5205492" y="447417"/>
+                  </a:lnTo>
+                  <a:lnTo>
+                    <a:pt x="5135147" y="445449"/>
+                  </a:lnTo>
+                  <a:lnTo>
+                    <a:pt x="5064803" y="443277"/>
+                  </a:lnTo>
+                  <a:lnTo>
+                    <a:pt x="4994458" y="440879"/>
+                  </a:lnTo>
+                  <a:lnTo>
+                    <a:pt x="4924114" y="438234"/>
+                  </a:lnTo>
+                  <a:lnTo>
+                    <a:pt x="4853769" y="435315"/>
+                  </a:lnTo>
+                  <a:lnTo>
+                    <a:pt x="4783425" y="432093"/>
+                  </a:lnTo>
+                  <a:lnTo>
+                    <a:pt x="4713080" y="428538"/>
+                  </a:lnTo>
+                  <a:lnTo>
+                    <a:pt x="4642736" y="424615"/>
+                  </a:lnTo>
+                  <a:lnTo>
+                    <a:pt x="4572391" y="420285"/>
+                  </a:lnTo>
+                  <a:lnTo>
+                    <a:pt x="4502047" y="415507"/>
+                  </a:lnTo>
+                  <a:lnTo>
+                    <a:pt x="4431702" y="410234"/>
+                  </a:lnTo>
+                  <a:lnTo>
+                    <a:pt x="4361358" y="404416"/>
+                  </a:lnTo>
+                  <a:lnTo>
+                    <a:pt x="4291013" y="397994"/>
+                  </a:lnTo>
+                  <a:lnTo>
+                    <a:pt x="4220669" y="390908"/>
+                  </a:lnTo>
+                  <a:lnTo>
+                    <a:pt x="4150324" y="383087"/>
+                  </a:lnTo>
+                  <a:lnTo>
+                    <a:pt x="4079980" y="374457"/>
+                  </a:lnTo>
+                  <a:lnTo>
+                    <a:pt x="4009635" y="364933"/>
+                  </a:lnTo>
+                  <a:lnTo>
+                    <a:pt x="3939291" y="354423"/>
+                  </a:lnTo>
+                  <a:lnTo>
+                    <a:pt x="3868946" y="342825"/>
+                  </a:lnTo>
+                  <a:lnTo>
+                    <a:pt x="3798602" y="330025"/>
+                  </a:lnTo>
+                  <a:lnTo>
+                    <a:pt x="3728257" y="315900"/>
+                  </a:lnTo>
+                  <a:lnTo>
+                    <a:pt x="3657913" y="300312"/>
+                  </a:lnTo>
+                  <a:lnTo>
+                    <a:pt x="3587569" y="283109"/>
+                  </a:lnTo>
+                  <a:lnTo>
+                    <a:pt x="3517224" y="264126"/>
+                  </a:lnTo>
+                  <a:lnTo>
+                    <a:pt x="3446880" y="243176"/>
+                  </a:lnTo>
+                  <a:lnTo>
+                    <a:pt x="3376535" y="220057"/>
+                  </a:lnTo>
+                  <a:lnTo>
+                    <a:pt x="3306191" y="194544"/>
+                  </a:lnTo>
+                  <a:lnTo>
+                    <a:pt x="3235846" y="167021"/>
+                  </a:lnTo>
+                  <a:lnTo>
+                    <a:pt x="3165502" y="164122"/>
+                  </a:lnTo>
+                  <a:lnTo>
+                    <a:pt x="3095157" y="161194"/>
+                  </a:lnTo>
+                  <a:lnTo>
+                    <a:pt x="3024813" y="158239"/>
+                  </a:lnTo>
+                  <a:lnTo>
+                    <a:pt x="2954468" y="155254"/>
+                  </a:lnTo>
+                  <a:lnTo>
+                    <a:pt x="2884124" y="152241"/>
+                  </a:lnTo>
+                  <a:lnTo>
+                    <a:pt x="2813779" y="149199"/>
+                  </a:lnTo>
+                  <a:lnTo>
+                    <a:pt x="2743435" y="146127"/>
+                  </a:lnTo>
+                  <a:lnTo>
+                    <a:pt x="2673090" y="143025"/>
+                  </a:lnTo>
+                  <a:lnTo>
+                    <a:pt x="2602746" y="139893"/>
+                  </a:lnTo>
+                  <a:lnTo>
+                    <a:pt x="2532401" y="136731"/>
+                  </a:lnTo>
+                  <a:lnTo>
+                    <a:pt x="2462057" y="133539"/>
+                  </a:lnTo>
+                  <a:lnTo>
+                    <a:pt x="2391712" y="130315"/>
+                  </a:lnTo>
+                  <a:lnTo>
+                    <a:pt x="2321368" y="127060"/>
+                  </a:lnTo>
+                  <a:lnTo>
+                    <a:pt x="2251023" y="123774"/>
+                  </a:lnTo>
+                  <a:lnTo>
+                    <a:pt x="2180679" y="120456"/>
+                  </a:lnTo>
+                  <a:lnTo>
+                    <a:pt x="2110334" y="117106"/>
+                  </a:lnTo>
+                  <a:lnTo>
+                    <a:pt x="2039990" y="113723"/>
+                  </a:lnTo>
+                  <a:lnTo>
+                    <a:pt x="1969645" y="110308"/>
+                  </a:lnTo>
+                  <a:lnTo>
+                    <a:pt x="1899301" y="106859"/>
+                  </a:lnTo>
+                  <a:lnTo>
+                    <a:pt x="1828956" y="103377"/>
+                  </a:lnTo>
+                  <a:lnTo>
+                    <a:pt x="1758612" y="99862"/>
+                  </a:lnTo>
+                  <a:lnTo>
+                    <a:pt x="1688267" y="96312"/>
+                  </a:lnTo>
+                  <a:lnTo>
+                    <a:pt x="1617923" y="92728"/>
+                  </a:lnTo>
+                  <a:lnTo>
+                    <a:pt x="1547578" y="89109"/>
+                  </a:lnTo>
+                  <a:lnTo>
+                    <a:pt x="1477234" y="85455"/>
+                  </a:lnTo>
+                  <a:lnTo>
+                    <a:pt x="1406889" y="81766"/>
+                  </a:lnTo>
+                  <a:lnTo>
+                    <a:pt x="1336545" y="78041"/>
+                  </a:lnTo>
+                  <a:lnTo>
+                    <a:pt x="1266200" y="74280"/>
+                  </a:lnTo>
+                  <a:lnTo>
+                    <a:pt x="1195856" y="70483"/>
+                  </a:lnTo>
+                  <a:lnTo>
+                    <a:pt x="1125511" y="66649"/>
+                  </a:lnTo>
+                  <a:lnTo>
+                    <a:pt x="1055167" y="62777"/>
+                  </a:lnTo>
+                  <a:lnTo>
+                    <a:pt x="984822" y="58869"/>
+                  </a:lnTo>
+                  <a:lnTo>
+                    <a:pt x="914478" y="54922"/>
+                  </a:lnTo>
+                  <a:lnTo>
+                    <a:pt x="844133" y="50937"/>
+                  </a:lnTo>
+                  <a:lnTo>
+                    <a:pt x="773789" y="46914"/>
+                  </a:lnTo>
+                  <a:lnTo>
+                    <a:pt x="703444" y="42851"/>
+                  </a:lnTo>
+                  <a:lnTo>
+                    <a:pt x="633100" y="38750"/>
+                  </a:lnTo>
+                  <a:lnTo>
+                    <a:pt x="562755" y="34608"/>
+                  </a:lnTo>
+                  <a:lnTo>
+                    <a:pt x="492411" y="30426"/>
+                  </a:lnTo>
+                  <a:lnTo>
+                    <a:pt x="422066" y="26204"/>
+                  </a:lnTo>
+                  <a:lnTo>
+                    <a:pt x="351722" y="21941"/>
+                  </a:lnTo>
+                  <a:lnTo>
+                    <a:pt x="281377" y="17637"/>
+                  </a:lnTo>
+                  <a:lnTo>
+                    <a:pt x="211033" y="13291"/>
+                  </a:lnTo>
+                  <a:lnTo>
+                    <a:pt x="140688" y="8903"/>
+                  </a:lnTo>
+                  <a:lnTo>
+                    <a:pt x="70344" y="4473"/>
+                  </a:lnTo>
+                  <a:lnTo>
+                    <a:pt x="0" y="0"/>
+                  </a:lnTo>
+                </a:path>
+              </a:pathLst>
+            </a:custGeom>
+          </p:spPr>
+          <p:txBody>
+            <a:bodyPr/>
+            <a:lstStyle/>
+            <a:p/>
+          </p:txBody>
+        </p:sp>
+        <p:sp>
+          <p:nvSpPr>
+            <p:cNvPr id="70" name="pl70"/>
+            <p:cNvSpPr/>
+            <p:nvPr/>
+          </p:nvSpPr>
+          <p:spPr>
+            <a:xfrm>
+              <a:off x="2606913" y="4336484"/>
+              <a:ext cx="5592503" cy="1240152"/>
+            </a:xfrm>
+            <a:custGeom>
+              <a:avLst/>
+              <a:pathLst>
+                <a:path w="5592503" h="1240152">
+                  <a:moveTo>
+                    <a:pt x="0" y="0"/>
+                  </a:moveTo>
+                  <a:lnTo>
+                    <a:pt x="35288" y="34101"/>
+                  </a:lnTo>
+                  <a:lnTo>
+                    <a:pt x="105633" y="98499"/>
+                  </a:lnTo>
+                  <a:lnTo>
+                    <a:pt x="175977" y="159507"/>
+                  </a:lnTo>
+                  <a:lnTo>
+                    <a:pt x="246322" y="217302"/>
+                  </a:lnTo>
+                  <a:lnTo>
+                    <a:pt x="316666" y="272055"/>
+                  </a:lnTo>
+                  <a:lnTo>
+                    <a:pt x="387011" y="323924"/>
+                  </a:lnTo>
+                  <a:lnTo>
+                    <a:pt x="457355" y="373063"/>
+                  </a:lnTo>
+                  <a:lnTo>
+                    <a:pt x="527699" y="419615"/>
+                  </a:lnTo>
+                  <a:lnTo>
+                    <a:pt x="598044" y="463715"/>
+                  </a:lnTo>
+                  <a:lnTo>
+                    <a:pt x="668388" y="505493"/>
+                  </a:lnTo>
+                  <a:lnTo>
+                    <a:pt x="738733" y="545072"/>
+                  </a:lnTo>
+                  <a:lnTo>
+                    <a:pt x="809077" y="582567"/>
+                  </a:lnTo>
+                  <a:lnTo>
+                    <a:pt x="879422" y="618088"/>
+                  </a:lnTo>
+                  <a:lnTo>
+                    <a:pt x="949766" y="651738"/>
+                  </a:lnTo>
+                  <a:lnTo>
+                    <a:pt x="1020111" y="683617"/>
+                  </a:lnTo>
+                  <a:lnTo>
+                    <a:pt x="1090455" y="713817"/>
+                  </a:lnTo>
+                  <a:lnTo>
+                    <a:pt x="1160800" y="742427"/>
+                  </a:lnTo>
+                  <a:lnTo>
+                    <a:pt x="1231144" y="769531"/>
+                  </a:lnTo>
+                  <a:lnTo>
+                    <a:pt x="1301489" y="795208"/>
+                  </a:lnTo>
+                  <a:lnTo>
+                    <a:pt x="1371833" y="819532"/>
+                  </a:lnTo>
+                  <a:lnTo>
+                    <a:pt x="1442178" y="842577"/>
+                  </a:lnTo>
+                  <a:lnTo>
+                    <a:pt x="1512522" y="864407"/>
+                  </a:lnTo>
+                  <a:lnTo>
+                    <a:pt x="1582867" y="885089"/>
+                  </a:lnTo>
+                  <a:lnTo>
+                    <a:pt x="1653211" y="904681"/>
+                  </a:lnTo>
+                  <a:lnTo>
+                    <a:pt x="1723556" y="923242"/>
+                  </a:lnTo>
+                  <a:lnTo>
+                    <a:pt x="1793900" y="940825"/>
+                  </a:lnTo>
+                  <a:lnTo>
+                    <a:pt x="1864245" y="957483"/>
+                  </a:lnTo>
+                  <a:lnTo>
+                    <a:pt x="1934589" y="973264"/>
+                  </a:lnTo>
+                  <a:lnTo>
+                    <a:pt x="2004934" y="988214"/>
+                  </a:lnTo>
+                  <a:lnTo>
+                    <a:pt x="2075278" y="1002376"/>
+                  </a:lnTo>
+                  <a:lnTo>
+                    <a:pt x="2145623" y="1015793"/>
+                  </a:lnTo>
+                  <a:lnTo>
+                    <a:pt x="2215967" y="1028504"/>
+                  </a:lnTo>
+                  <a:lnTo>
+                    <a:pt x="2286312" y="1040545"/>
+                  </a:lnTo>
+                  <a:lnTo>
+                    <a:pt x="2356656" y="1051953"/>
+                  </a:lnTo>
+                  <a:lnTo>
+                    <a:pt x="2427001" y="1062759"/>
+                  </a:lnTo>
+                  <a:lnTo>
+                    <a:pt x="2497345" y="1072997"/>
+                  </a:lnTo>
+                  <a:lnTo>
+                    <a:pt x="2567690" y="1082696"/>
+                  </a:lnTo>
+                  <a:lnTo>
+                    <a:pt x="2638034" y="1091884"/>
+                  </a:lnTo>
+                  <a:lnTo>
+                    <a:pt x="2708379" y="1100588"/>
+                  </a:lnTo>
+                  <a:lnTo>
+                    <a:pt x="2778723" y="1108834"/>
+                  </a:lnTo>
+                  <a:lnTo>
+                    <a:pt x="2849068" y="1116646"/>
+                  </a:lnTo>
+                  <a:lnTo>
+                    <a:pt x="2919412" y="1124046"/>
+                  </a:lnTo>
+                  <a:lnTo>
+                    <a:pt x="2989757" y="1131057"/>
+                  </a:lnTo>
+                  <a:lnTo>
+                    <a:pt x="3060101" y="1137699"/>
+                  </a:lnTo>
+                  <a:lnTo>
+                    <a:pt x="3130446" y="1143991"/>
+                  </a:lnTo>
+                  <a:lnTo>
+                    <a:pt x="3200790" y="1149952"/>
+                  </a:lnTo>
+                  <a:lnTo>
+                    <a:pt x="3271135" y="1155599"/>
+                  </a:lnTo>
+                  <a:lnTo>
+                    <a:pt x="3341479" y="1160948"/>
+                  </a:lnTo>
+                  <a:lnTo>
+                    <a:pt x="3411824" y="1166016"/>
+                  </a:lnTo>
+                  <a:lnTo>
+                    <a:pt x="3482168" y="1170817"/>
+                  </a:lnTo>
+                  <a:lnTo>
+                    <a:pt x="3552513" y="1175366"/>
+                  </a:lnTo>
+                  <a:lnTo>
+                    <a:pt x="3622857" y="1179674"/>
+                  </a:lnTo>
+                  <a:lnTo>
+                    <a:pt x="3693202" y="1183756"/>
+                  </a:lnTo>
+                  <a:lnTo>
+                    <a:pt x="3763546" y="1187623"/>
+                  </a:lnTo>
+                  <a:lnTo>
+                    <a:pt x="3833891" y="1191287"/>
+                  </a:lnTo>
+                  <a:lnTo>
+                    <a:pt x="3904235" y="1194757"/>
+                  </a:lnTo>
+                  <a:lnTo>
+                    <a:pt x="3974580" y="1198045"/>
+                  </a:lnTo>
+                  <a:lnTo>
+                    <a:pt x="4044924" y="1201160"/>
+                  </a:lnTo>
+                  <a:lnTo>
+                    <a:pt x="4115269" y="1204111"/>
+                  </a:lnTo>
+                  <a:lnTo>
+                    <a:pt x="4185613" y="1206906"/>
+                  </a:lnTo>
+                  <a:lnTo>
+                    <a:pt x="4255957" y="1209554"/>
+                  </a:lnTo>
+                  <a:lnTo>
+                    <a:pt x="4326302" y="1212063"/>
+                  </a:lnTo>
+                  <a:lnTo>
+                    <a:pt x="4396646" y="1214439"/>
+                  </a:lnTo>
+                  <a:lnTo>
+                    <a:pt x="4466991" y="1216691"/>
+                  </a:lnTo>
+                  <a:lnTo>
+                    <a:pt x="4537335" y="1218824"/>
+                  </a:lnTo>
+                  <a:lnTo>
+                    <a:pt x="4607680" y="1220845"/>
+                  </a:lnTo>
+                  <a:lnTo>
+                    <a:pt x="4678024" y="1222759"/>
+                  </a:lnTo>
+                  <a:lnTo>
+                    <a:pt x="4748369" y="1224572"/>
+                  </a:lnTo>
+                  <a:lnTo>
+                    <a:pt x="4818713" y="1226290"/>
+                  </a:lnTo>
+                  <a:lnTo>
+                    <a:pt x="4889058" y="1227918"/>
+                  </a:lnTo>
+                  <a:lnTo>
+                    <a:pt x="4959402" y="1229460"/>
+                  </a:lnTo>
+                  <a:lnTo>
+                    <a:pt x="5029747" y="1230920"/>
+                  </a:lnTo>
+                  <a:lnTo>
+                    <a:pt x="5100091" y="1232304"/>
+                  </a:lnTo>
+                  <a:lnTo>
+                    <a:pt x="5170436" y="1233615"/>
+                  </a:lnTo>
+                  <a:lnTo>
+                    <a:pt x="5240780" y="1234857"/>
+                  </a:lnTo>
+                  <a:lnTo>
+                    <a:pt x="5311125" y="1236033"/>
+                  </a:lnTo>
+                  <a:lnTo>
+                    <a:pt x="5381469" y="1237148"/>
+                  </a:lnTo>
+                  <a:lnTo>
+                    <a:pt x="5451814" y="1238204"/>
+                  </a:lnTo>
+                  <a:lnTo>
+                    <a:pt x="5522158" y="1239204"/>
+                  </a:lnTo>
+                  <a:lnTo>
+                    <a:pt x="5592503" y="1240152"/>
+                  </a:lnTo>
+                </a:path>
+              </a:pathLst>
+            </a:custGeom>
+            <a:ln w="27101" cap="flat">
+              <a:solidFill>
+                <a:srgbClr val="FF8C00">
+                  <a:alpha val="100000"/>
+                </a:srgbClr>
+              </a:solidFill>
+              <a:prstDash val="solid"/>
+              <a:round/>
+            </a:ln>
+          </p:spPr>
+          <p:txBody>
+            <a:bodyPr/>
+            <a:lstStyle/>
+            <a:p/>
+          </p:txBody>
+        </p:sp>
+        <p:sp>
+          <p:nvSpPr>
+            <p:cNvPr id="71" name="pl71"/>
+            <p:cNvSpPr/>
+            <p:nvPr/>
+          </p:nvSpPr>
+          <p:spPr>
+            <a:xfrm>
+              <a:off x="887106" y="5294352"/>
+              <a:ext cx="7660515" cy="0"/>
+            </a:xfrm>
+            <a:custGeom>
+              <a:avLst/>
+              <a:pathLst>
+                <a:path w="7660515" h="0">
+                  <a:moveTo>
+                    <a:pt x="0" y="0"/>
+                  </a:moveTo>
+                  <a:lnTo>
+                    <a:pt x="7660515" y="0"/>
+                  </a:lnTo>
+                  <a:lnTo>
+                    <a:pt x="7660515" y="0"/>
+                  </a:lnTo>
+                </a:path>
+              </a:pathLst>
+            </a:custGeom>
+            <a:ln w="13550" cap="flat">
+              <a:solidFill>
+                <a:srgbClr val="7F7F7F">
+                  <a:alpha val="100000"/>
+                </a:srgbClr>
+              </a:solidFill>
+              <a:prstDash val="dash"/>
+              <a:round/>
+            </a:ln>
+          </p:spPr>
+          <p:txBody>
+            <a:bodyPr/>
+            <a:lstStyle/>
+            <a:p/>
+          </p:txBody>
+        </p:sp>
+        <p:sp>
+          <p:nvSpPr>
+            <p:cNvPr id="72" name="pl72"/>
+            <p:cNvSpPr/>
+            <p:nvPr/>
+          </p:nvSpPr>
+          <p:spPr>
+            <a:xfrm>
+              <a:off x="4472829" y="4336484"/>
+              <a:ext cx="0" cy="1317069"/>
+            </a:xfrm>
+            <a:custGeom>
+              <a:avLst/>
+              <a:pathLst>
+                <a:path w="0" h="1317069">
+                  <a:moveTo>
+                    <a:pt x="0" y="1317069"/>
+                  </a:moveTo>
+                  <a:lnTo>
+                    <a:pt x="0" y="0"/>
+                  </a:lnTo>
+                  <a:lnTo>
+                    <a:pt x="0" y="0"/>
+                  </a:lnTo>
+                </a:path>
+              </a:pathLst>
+            </a:custGeom>
+            <a:ln w="13550" cap="flat">
+              <a:solidFill>
+                <a:srgbClr val="666666">
+                  <a:alpha val="100000"/>
+                </a:srgbClr>
+              </a:solidFill>
+              <a:prstDash val="dot"/>
+              <a:round/>
+            </a:ln>
+          </p:spPr>
+          <p:txBody>
+            <a:bodyPr/>
+            <a:lstStyle/>
+            <a:p/>
+          </p:txBody>
+        </p:sp>
+        <p:sp>
+          <p:nvSpPr>
+            <p:cNvPr id="73" name="tx73"/>
+            <p:cNvSpPr/>
+            <p:nvPr/>
+          </p:nvSpPr>
+          <p:spPr>
+            <a:xfrm>
+              <a:off x="762297" y="5553636"/>
+              <a:ext cx="62179" cy="80101"/>
+            </a:xfrm>
+            <a:prstGeom prst="rect">
+              <a:avLst/>
+            </a:prstGeom>
+            <a:noFill/>
+          </p:spPr>
+          <p:txBody>
+            <a:bodyPr lIns="0" rIns="0" tIns="0" bIns="0" anchorCtr="1" anchor="ctr" wrap="none"/>
+            <a:lstStyle/>
+            <a:p>
+              <a:pPr algn="l" marL="0" marR="0" indent="0">
+                <a:lnSpc>
+                  <a:spcPts val="880"/>
+                </a:lnSpc>
+                <a:spcBef>
+                  <a:spcPts val="0"/>
+                </a:spcBef>
+                <a:spcAft>
+                  <a:spcPts val="0"/>
+                </a:spcAft>
+              </a:pPr>
+              <a:r>
+                <a:rPr sz="880">
+                  <a:solidFill>
+                    <a:srgbClr val="4D4D4D">
+                      <a:alpha val="100000"/>
+                    </a:srgbClr>
+                  </a:solidFill>
+                  <a:latin typeface="Helvetica"/>
+                  <a:cs typeface="Helvetica"/>
+                </a:rPr>
+                <a:t>0</a:t>
+              </a:r>
+            </a:p>
+          </p:txBody>
+        </p:sp>
+        <p:sp>
+          <p:nvSpPr>
+            <p:cNvPr id="74" name="tx74"/>
+            <p:cNvSpPr/>
+            <p:nvPr/>
+          </p:nvSpPr>
+          <p:spPr>
+            <a:xfrm>
+              <a:off x="762297" y="5254302"/>
+              <a:ext cx="62179" cy="80101"/>
+            </a:xfrm>
+            <a:prstGeom prst="rect">
+              <a:avLst/>
+            </a:prstGeom>
+            <a:noFill/>
+          </p:spPr>
+          <p:txBody>
+            <a:bodyPr lIns="0" rIns="0" tIns="0" bIns="0" anchorCtr="1" anchor="ctr" wrap="none"/>
+            <a:lstStyle/>
+            <a:p>
+              <a:pPr algn="l" marL="0" marR="0" indent="0">
+                <a:lnSpc>
+                  <a:spcPts val="880"/>
+                </a:lnSpc>
+                <a:spcBef>
+                  <a:spcPts val="0"/>
+                </a:spcBef>
+                <a:spcAft>
+                  <a:spcPts val="0"/>
+                </a:spcAft>
+              </a:pPr>
+              <a:r>
+                <a:rPr sz="880">
+                  <a:solidFill>
+                    <a:srgbClr val="4D4D4D">
+                      <a:alpha val="100000"/>
+                    </a:srgbClr>
+                  </a:solidFill>
+                  <a:latin typeface="Helvetica"/>
+                  <a:cs typeface="Helvetica"/>
+                </a:rPr>
+                <a:t>1</a:t>
+              </a:r>
+            </a:p>
+          </p:txBody>
+        </p:sp>
+        <p:sp>
+          <p:nvSpPr>
+            <p:cNvPr id="75" name="tx75"/>
+            <p:cNvSpPr/>
+            <p:nvPr/>
+          </p:nvSpPr>
+          <p:spPr>
+            <a:xfrm>
+              <a:off x="762297" y="4954968"/>
+              <a:ext cx="62179" cy="80101"/>
+            </a:xfrm>
+            <a:prstGeom prst="rect">
+              <a:avLst/>
+            </a:prstGeom>
+            <a:noFill/>
+          </p:spPr>
+          <p:txBody>
+            <a:bodyPr lIns="0" rIns="0" tIns="0" bIns="0" anchorCtr="1" anchor="ctr" wrap="none"/>
+            <a:lstStyle/>
+            <a:p>
+              <a:pPr algn="l" marL="0" marR="0" indent="0">
+                <a:lnSpc>
+                  <a:spcPts val="880"/>
+                </a:lnSpc>
+                <a:spcBef>
+                  <a:spcPts val="0"/>
+                </a:spcBef>
+                <a:spcAft>
+                  <a:spcPts val="0"/>
+                </a:spcAft>
+              </a:pPr>
+              <a:r>
+                <a:rPr sz="880">
+                  <a:solidFill>
+                    <a:srgbClr val="4D4D4D">
+                      <a:alpha val="100000"/>
+                    </a:srgbClr>
+                  </a:solidFill>
+                  <a:latin typeface="Helvetica"/>
+                  <a:cs typeface="Helvetica"/>
+                </a:rPr>
+                <a:t>2</a:t>
+              </a:r>
+            </a:p>
+          </p:txBody>
+        </p:sp>
+        <p:sp>
+          <p:nvSpPr>
+            <p:cNvPr id="76" name="tx76"/>
+            <p:cNvSpPr/>
+            <p:nvPr/>
+          </p:nvSpPr>
+          <p:spPr>
+            <a:xfrm>
+              <a:off x="762297" y="4655634"/>
+              <a:ext cx="62179" cy="80101"/>
+            </a:xfrm>
+            <a:prstGeom prst="rect">
+              <a:avLst/>
+            </a:prstGeom>
+            <a:noFill/>
+          </p:spPr>
+          <p:txBody>
+            <a:bodyPr lIns="0" rIns="0" tIns="0" bIns="0" anchorCtr="1" anchor="ctr" wrap="none"/>
+            <a:lstStyle/>
+            <a:p>
+              <a:pPr algn="l" marL="0" marR="0" indent="0">
+                <a:lnSpc>
+                  <a:spcPts val="880"/>
+                </a:lnSpc>
+                <a:spcBef>
+                  <a:spcPts val="0"/>
+                </a:spcBef>
+                <a:spcAft>
+                  <a:spcPts val="0"/>
+                </a:spcAft>
+              </a:pPr>
+              <a:r>
+                <a:rPr sz="880">
+                  <a:solidFill>
+                    <a:srgbClr val="4D4D4D">
+                      <a:alpha val="100000"/>
+                    </a:srgbClr>
+                  </a:solidFill>
+                  <a:latin typeface="Helvetica"/>
+                  <a:cs typeface="Helvetica"/>
+                </a:rPr>
+                <a:t>3</a:t>
+              </a:r>
+            </a:p>
+          </p:txBody>
+        </p:sp>
+        <p:sp>
+          <p:nvSpPr>
+            <p:cNvPr id="77" name="tx77"/>
+            <p:cNvSpPr/>
+            <p:nvPr/>
+          </p:nvSpPr>
+          <p:spPr>
+            <a:xfrm>
+              <a:off x="762297" y="4356300"/>
+              <a:ext cx="62179" cy="80101"/>
+            </a:xfrm>
+            <a:prstGeom prst="rect">
+              <a:avLst/>
+            </a:prstGeom>
+            <a:noFill/>
+          </p:spPr>
+          <p:txBody>
+            <a:bodyPr lIns="0" rIns="0" tIns="0" bIns="0" anchorCtr="1" anchor="ctr" wrap="none"/>
+            <a:lstStyle/>
+            <a:p>
+              <a:pPr algn="l" marL="0" marR="0" indent="0">
+                <a:lnSpc>
+                  <a:spcPts val="880"/>
+                </a:lnSpc>
+                <a:spcBef>
+                  <a:spcPts val="0"/>
+                </a:spcBef>
+                <a:spcAft>
+                  <a:spcPts val="0"/>
+                </a:spcAft>
+              </a:pPr>
+              <a:r>
+                <a:rPr sz="880">
+                  <a:solidFill>
+                    <a:srgbClr val="4D4D4D">
+                      <a:alpha val="100000"/>
+                    </a:srgbClr>
+                  </a:solidFill>
+                  <a:latin typeface="Helvetica"/>
+                  <a:cs typeface="Helvetica"/>
+                </a:rPr>
+                <a:t>4</a:t>
+              </a:r>
+            </a:p>
+          </p:txBody>
+        </p:sp>
+        <p:sp>
+          <p:nvSpPr>
+            <p:cNvPr id="78" name="tx78"/>
+            <p:cNvSpPr/>
+            <p:nvPr/>
+          </p:nvSpPr>
+          <p:spPr>
+            <a:xfrm>
+              <a:off x="1306098" y="5716183"/>
+              <a:ext cx="161574" cy="80101"/>
+            </a:xfrm>
+            <a:prstGeom prst="rect">
+              <a:avLst/>
+            </a:prstGeom>
+            <a:noFill/>
+          </p:spPr>
+          <p:txBody>
+            <a:bodyPr lIns="0" rIns="0" tIns="0" bIns="0" anchorCtr="1" anchor="ctr" wrap="none"/>
+            <a:lstStyle/>
+            <a:p>
+              <a:pPr algn="l" marL="0" marR="0" indent="0">
+                <a:lnSpc>
+                  <a:spcPts val="880"/>
+                </a:lnSpc>
+                <a:spcBef>
+                  <a:spcPts val="0"/>
+                </a:spcBef>
+                <a:spcAft>
+                  <a:spcPts val="0"/>
+                </a:spcAft>
+              </a:pPr>
+              <a:r>
+                <a:rPr sz="880">
+                  <a:solidFill>
+                    <a:srgbClr val="4D4D4D">
+                      <a:alpha val="100000"/>
+                    </a:srgbClr>
+                  </a:solidFill>
+                  <a:latin typeface="Helvetica"/>
+                  <a:cs typeface="Helvetica"/>
+                </a:rPr>
+                <a:t>-40</a:t>
+              </a:r>
+            </a:p>
+          </p:txBody>
+        </p:sp>
+        <p:sp>
+          <p:nvSpPr>
+            <p:cNvPr id="79" name="tx79"/>
+            <p:cNvSpPr/>
+            <p:nvPr/>
+          </p:nvSpPr>
+          <p:spPr>
+            <a:xfrm>
+              <a:off x="2113264" y="5716183"/>
+              <a:ext cx="161574" cy="80101"/>
+            </a:xfrm>
+            <a:prstGeom prst="rect">
+              <a:avLst/>
+            </a:prstGeom>
+            <a:noFill/>
+          </p:spPr>
+          <p:txBody>
+            <a:bodyPr lIns="0" rIns="0" tIns="0" bIns="0" anchorCtr="1" anchor="ctr" wrap="none"/>
+            <a:lstStyle/>
+            <a:p>
+              <a:pPr algn="l" marL="0" marR="0" indent="0">
+                <a:lnSpc>
+                  <a:spcPts val="880"/>
+                </a:lnSpc>
+                <a:spcBef>
+                  <a:spcPts val="0"/>
+                </a:spcBef>
+                <a:spcAft>
+                  <a:spcPts val="0"/>
+                </a:spcAft>
+              </a:pPr>
+              <a:r>
+                <a:rPr sz="880">
+                  <a:solidFill>
+                    <a:srgbClr val="4D4D4D">
+                      <a:alpha val="100000"/>
+                    </a:srgbClr>
+                  </a:solidFill>
+                  <a:latin typeface="Helvetica"/>
+                  <a:cs typeface="Helvetica"/>
+                </a:rPr>
+                <a:t>-30</a:t>
+              </a:r>
+            </a:p>
+          </p:txBody>
+        </p:sp>
+        <p:sp>
+          <p:nvSpPr>
+            <p:cNvPr id="80" name="tx80"/>
+            <p:cNvSpPr/>
+            <p:nvPr/>
+          </p:nvSpPr>
+          <p:spPr>
+            <a:xfrm>
+              <a:off x="2920429" y="5716183"/>
+              <a:ext cx="161574" cy="80101"/>
+            </a:xfrm>
+            <a:prstGeom prst="rect">
+              <a:avLst/>
+            </a:prstGeom>
+            <a:noFill/>
+          </p:spPr>
+          <p:txBody>
+            <a:bodyPr lIns="0" rIns="0" tIns="0" bIns="0" anchorCtr="1" anchor="ctr" wrap="none"/>
+            <a:lstStyle/>
+            <a:p>
+              <a:pPr algn="l" marL="0" marR="0" indent="0">
+                <a:lnSpc>
+                  <a:spcPts val="880"/>
+                </a:lnSpc>
+                <a:spcBef>
+                  <a:spcPts val="0"/>
+                </a:spcBef>
+                <a:spcAft>
+                  <a:spcPts val="0"/>
+                </a:spcAft>
+              </a:pPr>
+              <a:r>
+                <a:rPr sz="880">
+                  <a:solidFill>
+                    <a:srgbClr val="4D4D4D">
+                      <a:alpha val="100000"/>
+                    </a:srgbClr>
+                  </a:solidFill>
+                  <a:latin typeface="Helvetica"/>
+                  <a:cs typeface="Helvetica"/>
+                </a:rPr>
+                <a:t>-20</a:t>
+              </a:r>
+            </a:p>
+          </p:txBody>
+        </p:sp>
+        <p:sp>
+          <p:nvSpPr>
+            <p:cNvPr id="81" name="tx81"/>
+            <p:cNvSpPr/>
+            <p:nvPr/>
+          </p:nvSpPr>
+          <p:spPr>
+            <a:xfrm>
+              <a:off x="3727595" y="5716183"/>
+              <a:ext cx="161574" cy="80101"/>
+            </a:xfrm>
+            <a:prstGeom prst="rect">
+              <a:avLst/>
+            </a:prstGeom>
+            <a:noFill/>
+          </p:spPr>
+          <p:txBody>
+            <a:bodyPr lIns="0" rIns="0" tIns="0" bIns="0" anchorCtr="1" anchor="ctr" wrap="none"/>
+            <a:lstStyle/>
+            <a:p>
+              <a:pPr algn="l" marL="0" marR="0" indent="0">
+                <a:lnSpc>
+                  <a:spcPts val="880"/>
+                </a:lnSpc>
+                <a:spcBef>
+                  <a:spcPts val="0"/>
+                </a:spcBef>
+                <a:spcAft>
+                  <a:spcPts val="0"/>
+                </a:spcAft>
+              </a:pPr>
+              <a:r>
+                <a:rPr sz="880">
+                  <a:solidFill>
+                    <a:srgbClr val="4D4D4D">
+                      <a:alpha val="100000"/>
+                    </a:srgbClr>
+                  </a:solidFill>
+                  <a:latin typeface="Helvetica"/>
+                  <a:cs typeface="Helvetica"/>
+                </a:rPr>
+                <a:t>-10</a:t>
+              </a:r>
+            </a:p>
+          </p:txBody>
+        </p:sp>
+        <p:sp>
+          <p:nvSpPr>
+            <p:cNvPr id="82" name="tx82"/>
+            <p:cNvSpPr/>
+            <p:nvPr/>
+          </p:nvSpPr>
+          <p:spPr>
+            <a:xfrm>
+              <a:off x="4584458" y="5716183"/>
+              <a:ext cx="62179" cy="80101"/>
+            </a:xfrm>
+            <a:prstGeom prst="rect">
+              <a:avLst/>
+            </a:prstGeom>
+            <a:noFill/>
+          </p:spPr>
+          <p:txBody>
+            <a:bodyPr lIns="0" rIns="0" tIns="0" bIns="0" anchorCtr="1" anchor="ctr" wrap="none"/>
+            <a:lstStyle/>
+            <a:p>
+              <a:pPr algn="l" marL="0" marR="0" indent="0">
+                <a:lnSpc>
+                  <a:spcPts val="880"/>
+                </a:lnSpc>
+                <a:spcBef>
+                  <a:spcPts val="0"/>
+                </a:spcBef>
+                <a:spcAft>
+                  <a:spcPts val="0"/>
+                </a:spcAft>
+              </a:pPr>
+              <a:r>
+                <a:rPr sz="880">
+                  <a:solidFill>
+                    <a:srgbClr val="4D4D4D">
+                      <a:alpha val="100000"/>
+                    </a:srgbClr>
+                  </a:solidFill>
+                  <a:latin typeface="Helvetica"/>
+                  <a:cs typeface="Helvetica"/>
+                </a:rPr>
+                <a:t>0</a:t>
+              </a:r>
+            </a:p>
+          </p:txBody>
+        </p:sp>
+        <p:sp>
+          <p:nvSpPr>
+            <p:cNvPr id="83" name="tx83"/>
+            <p:cNvSpPr/>
+            <p:nvPr/>
+          </p:nvSpPr>
+          <p:spPr>
+            <a:xfrm>
+              <a:off x="5360534" y="5716183"/>
+              <a:ext cx="124358" cy="80101"/>
+            </a:xfrm>
+            <a:prstGeom prst="rect">
+              <a:avLst/>
+            </a:prstGeom>
+            <a:noFill/>
+          </p:spPr>
+          <p:txBody>
+            <a:bodyPr lIns="0" rIns="0" tIns="0" bIns="0" anchorCtr="1" anchor="ctr" wrap="none"/>
+            <a:lstStyle/>
+            <a:p>
+              <a:pPr algn="l" marL="0" marR="0" indent="0">
+                <a:lnSpc>
+                  <a:spcPts val="880"/>
+                </a:lnSpc>
+                <a:spcBef>
+                  <a:spcPts val="0"/>
+                </a:spcBef>
+                <a:spcAft>
+                  <a:spcPts val="0"/>
+                </a:spcAft>
+              </a:pPr>
+              <a:r>
+                <a:rPr sz="880">
+                  <a:solidFill>
+                    <a:srgbClr val="4D4D4D">
+                      <a:alpha val="100000"/>
+                    </a:srgbClr>
+                  </a:solidFill>
+                  <a:latin typeface="Helvetica"/>
+                  <a:cs typeface="Helvetica"/>
+                </a:rPr>
+                <a:t>10</a:t>
+              </a:r>
+            </a:p>
+          </p:txBody>
+        </p:sp>
+        <p:sp>
+          <p:nvSpPr>
+            <p:cNvPr id="84" name="tx84"/>
+            <p:cNvSpPr/>
+            <p:nvPr/>
+          </p:nvSpPr>
+          <p:spPr>
+            <a:xfrm>
+              <a:off x="6167699" y="5716183"/>
+              <a:ext cx="124358" cy="80101"/>
+            </a:xfrm>
+            <a:prstGeom prst="rect">
+              <a:avLst/>
+            </a:prstGeom>
+            <a:noFill/>
+          </p:spPr>
+          <p:txBody>
+            <a:bodyPr lIns="0" rIns="0" tIns="0" bIns="0" anchorCtr="1" anchor="ctr" wrap="none"/>
+            <a:lstStyle/>
+            <a:p>
+              <a:pPr algn="l" marL="0" marR="0" indent="0">
+                <a:lnSpc>
+                  <a:spcPts val="880"/>
+                </a:lnSpc>
+                <a:spcBef>
+                  <a:spcPts val="0"/>
+                </a:spcBef>
+                <a:spcAft>
+                  <a:spcPts val="0"/>
+                </a:spcAft>
+              </a:pPr>
+              <a:r>
+                <a:rPr sz="880">
+                  <a:solidFill>
+                    <a:srgbClr val="4D4D4D">
+                      <a:alpha val="100000"/>
+                    </a:srgbClr>
+                  </a:solidFill>
+                  <a:latin typeface="Helvetica"/>
+                  <a:cs typeface="Helvetica"/>
+                </a:rPr>
+                <a:t>20</a:t>
+              </a:r>
+            </a:p>
+          </p:txBody>
+        </p:sp>
+        <p:sp>
+          <p:nvSpPr>
+            <p:cNvPr id="85" name="tx85"/>
+            <p:cNvSpPr/>
+            <p:nvPr/>
+          </p:nvSpPr>
+          <p:spPr>
+            <a:xfrm>
+              <a:off x="6974865" y="5716183"/>
+              <a:ext cx="124358" cy="80101"/>
+            </a:xfrm>
+            <a:prstGeom prst="rect">
+              <a:avLst/>
+            </a:prstGeom>
+            <a:noFill/>
+          </p:spPr>
+          <p:txBody>
+            <a:bodyPr lIns="0" rIns="0" tIns="0" bIns="0" anchorCtr="1" anchor="ctr" wrap="none"/>
+            <a:lstStyle/>
+            <a:p>
+              <a:pPr algn="l" marL="0" marR="0" indent="0">
+                <a:lnSpc>
+                  <a:spcPts val="880"/>
+                </a:lnSpc>
+                <a:spcBef>
+                  <a:spcPts val="0"/>
+                </a:spcBef>
+                <a:spcAft>
+                  <a:spcPts val="0"/>
+                </a:spcAft>
+              </a:pPr>
+              <a:r>
+                <a:rPr sz="880">
+                  <a:solidFill>
+                    <a:srgbClr val="4D4D4D">
+                      <a:alpha val="100000"/>
+                    </a:srgbClr>
+                  </a:solidFill>
+                  <a:latin typeface="Helvetica"/>
+                  <a:cs typeface="Helvetica"/>
+                </a:rPr>
+                <a:t>30</a:t>
+              </a:r>
+            </a:p>
+          </p:txBody>
+        </p:sp>
+        <p:sp>
+          <p:nvSpPr>
+            <p:cNvPr id="86" name="tx86"/>
+            <p:cNvSpPr/>
+            <p:nvPr/>
+          </p:nvSpPr>
+          <p:spPr>
+            <a:xfrm>
+              <a:off x="7782030" y="5716183"/>
+              <a:ext cx="124358" cy="80101"/>
+            </a:xfrm>
+            <a:prstGeom prst="rect">
+              <a:avLst/>
+            </a:prstGeom>
+            <a:noFill/>
+          </p:spPr>
+          <p:txBody>
+            <a:bodyPr lIns="0" rIns="0" tIns="0" bIns="0" anchorCtr="1" anchor="ctr" wrap="none"/>
+            <a:lstStyle/>
+            <a:p>
+              <a:pPr algn="l" marL="0" marR="0" indent="0">
+                <a:lnSpc>
+                  <a:spcPts val="880"/>
+                </a:lnSpc>
+                <a:spcBef>
+                  <a:spcPts val="0"/>
+                </a:spcBef>
+                <a:spcAft>
+                  <a:spcPts val="0"/>
+                </a:spcAft>
+              </a:pPr>
+              <a:r>
+                <a:rPr sz="880">
+                  <a:solidFill>
+                    <a:srgbClr val="4D4D4D">
+                      <a:alpha val="100000"/>
+                    </a:srgbClr>
+                  </a:solidFill>
+                  <a:latin typeface="Helvetica"/>
+                  <a:cs typeface="Helvetica"/>
+                </a:rPr>
+                <a:t>40</a:t>
+              </a:r>
+            </a:p>
+          </p:txBody>
+        </p:sp>
+        <p:sp>
+          <p:nvSpPr>
+            <p:cNvPr id="87" name="tx87"/>
+            <p:cNvSpPr/>
+            <p:nvPr/>
+          </p:nvSpPr>
+          <p:spPr>
+            <a:xfrm>
+              <a:off x="2928340" y="5855859"/>
+              <a:ext cx="3578047" cy="100218"/>
+            </a:xfrm>
+            <a:prstGeom prst="rect">
+              <a:avLst/>
+            </a:prstGeom>
+            <a:noFill/>
+          </p:spPr>
+          <p:txBody>
+            <a:bodyPr lIns="0" rIns="0" tIns="0" bIns="0" anchorCtr="1" anchor="ctr" wrap="none"/>
+            <a:lstStyle/>
+            <a:p>
+              <a:pPr algn="l" marL="0" marR="0" indent="0">
+                <a:lnSpc>
+                  <a:spcPts val="1100"/>
+                </a:lnSpc>
+                <a:spcBef>
+                  <a:spcPts val="0"/>
+                </a:spcBef>
+                <a:spcAft>
+                  <a:spcPts val="0"/>
+                </a:spcAft>
+              </a:pPr>
+              <a:r>
+                <a:rPr sz="1100">
+                  <a:solidFill>
+                    <a:srgbClr val="000000">
+                      <a:alpha val="100000"/>
+                    </a:srgbClr>
+                  </a:solidFill>
+                  <a:latin typeface="Helvetica"/>
+                  <a:cs typeface="Helvetica"/>
+                </a:rPr>
+                <a:t>eGFR difference (%): 100 × (CKD-EPI Cr-Cys − CG) / CG</a:t>
+              </a:r>
+            </a:p>
+          </p:txBody>
+        </p:sp>
+        <p:sp>
+          <p:nvSpPr>
+            <p:cNvPr id="88" name="tx88"/>
+            <p:cNvSpPr/>
+            <p:nvPr/>
+          </p:nvSpPr>
+          <p:spPr>
+            <a:xfrm rot="-5400000">
+              <a:off x="138035" y="4944909"/>
+              <a:ext cx="1016904" cy="100218"/>
+            </a:xfrm>
+            <a:prstGeom prst="rect">
+              <a:avLst/>
+            </a:prstGeom>
+            <a:noFill/>
+          </p:spPr>
+          <p:txBody>
+            <a:bodyPr lIns="0" rIns="0" tIns="0" bIns="0" anchorCtr="1" anchor="ctr" wrap="none"/>
+            <a:lstStyle/>
+            <a:p>
+              <a:pPr algn="l" marL="0" marR="0" indent="0">
+                <a:lnSpc>
+                  <a:spcPts val="1100"/>
+                </a:lnSpc>
+                <a:spcBef>
+                  <a:spcPts val="0"/>
+                </a:spcBef>
+                <a:spcAft>
+                  <a:spcPts val="0"/>
+                </a:spcAft>
+              </a:pPr>
+              <a:r>
+                <a:rPr sz="1100">
+                  <a:solidFill>
+                    <a:srgbClr val="000000">
+                      <a:alpha val="100000"/>
+                    </a:srgbClr>
+                  </a:solidFill>
+                  <a:latin typeface="Helvetica"/>
+                  <a:cs typeface="Helvetica"/>
+                </a:rPr>
+                <a:t>subHR (95% CI)</a:t>
+              </a:r>
+            </a:p>
+          </p:txBody>
+        </p:sp>
+        <p:sp>
+          <p:nvSpPr>
+            <p:cNvPr id="89" name="tx89"/>
+            <p:cNvSpPr/>
+            <p:nvPr/>
+          </p:nvSpPr>
+          <p:spPr>
+            <a:xfrm>
+              <a:off x="887106" y="4159544"/>
+              <a:ext cx="6385163" cy="82021"/>
+            </a:xfrm>
+            <a:prstGeom prst="rect">
+              <a:avLst/>
+            </a:prstGeom>
+            <a:noFill/>
+          </p:spPr>
+          <p:txBody>
+            <a:bodyPr lIns="0" rIns="0" tIns="0" bIns="0" anchorCtr="1" anchor="ctr" wrap="none"/>
+            <a:lstStyle/>
+            <a:p>
+              <a:pPr algn="l" marL="0" marR="0" indent="0">
+                <a:lnSpc>
+                  <a:spcPts val="900"/>
+                </a:lnSpc>
+                <a:spcBef>
+                  <a:spcPts val="0"/>
+                </a:spcBef>
+                <a:spcAft>
+                  <a:spcPts val="0"/>
+                </a:spcAft>
+              </a:pPr>
+              <a:r>
+                <a:rPr sz="900">
+                  <a:solidFill>
+                    <a:srgbClr val="404040">
+                      <a:alpha val="100000"/>
+                    </a:srgbClr>
+                  </a:solidFill>
+                  <a:latin typeface="Helvetica"/>
+                  <a:cs typeface="Helvetica"/>
+                </a:rPr>
+                <a:t>subHR per 10 % decline: 1.86 (1.12-3.10), p = 0.017  |  per IQR decline (Δ = 29.5 %): 6.25 (1.39-28.21)  |  IQR: [-15.6, 13.9] %</a:t>
+              </a:r>
+            </a:p>
+          </p:txBody>
+        </p:sp>
+        <p:sp>
+          <p:nvSpPr>
+            <p:cNvPr id="90" name="tx90"/>
+            <p:cNvSpPr/>
+            <p:nvPr/>
+          </p:nvSpPr>
+          <p:spPr>
+            <a:xfrm>
+              <a:off x="887106" y="3932770"/>
               <a:ext cx="2447665" cy="120152"/>
             </a:xfrm>
             <a:prstGeom prst="rect">
